--- a/houmon-nyuyoku-slides.pptx
+++ b/houmon-nyuyoku-slides.pptx
@@ -18,9 +18,11 @@
     <p:sldId id="266" r:id="rId12"/>
     <p:sldId id="267" r:id="rId13"/>
     <p:sldId id="268" r:id="rId14"/>
+    <p:sldId id="269" r:id="rId15"/>
+    <p:sldId id="270" r:id="rId16"/>
   </p:sldIdLst>
   <p:notesMasterIdLst>
-    <p:notesMasterId r:id="rId15"/>
+    <p:notesMasterId r:id="rId17"/>
   </p:notesMasterIdLst>
   <p:sldSz cx="12192000" cy="6858000"/>
   <p:notesSz cx="6858000" cy="12192000"/>
@@ -602,7 +604,7 @@
           <a:p>
             <a:r>
               <a:rPr lang="en-US" dirty="0"/>
-              <a:t>単位数が高いという指摘は当然あります。何が含まれているかを分解して説明できるようにしておきます。</a:t>
+              <a:t>本日いちばんお願いしたい点です。特に訪問看護ステーションの方に向けて、同日訪問と事前相談をお願いしてください。</a:t>
             </a:r>
             <a:endParaRPr lang="en-US" dirty="0"/>
           </a:p>
@@ -690,7 +692,7 @@
           <a:p>
             <a:r>
               <a:rPr lang="en-US" dirty="0"/>
-              <a:t>数字では伝わらない部分です。ご家族の負担軽減という側面も強調してください。</a:t>
+              <a:t>デイサービスの方に特にお伝えしたい点です。奪い合いではなく、通所が難しくなった段階での受け皿としてお考えください。</a:t>
             </a:r>
             <a:endParaRPr lang="en-US" dirty="0"/>
           </a:p>
@@ -778,7 +780,7 @@
           <a:p>
             <a:r>
               <a:rPr lang="en-US" dirty="0"/>
-              <a:t>4点に整理しました。最後のメッセージ——迷った段階でご相談いただきたい、を強調して締めます。</a:t>
+              <a:t>単位数が高いという指摘は当然あります。何が含まれているかを分解して説明できるようにしておきます。</a:t>
             </a:r>
             <a:endParaRPr lang="en-US" dirty="0"/>
           </a:p>
@@ -866,7 +868,7 @@
           <a:p>
             <a:r>
               <a:rPr lang="en-US" dirty="0"/>
-              <a:t>ご相談は電話が最も早いです。初回アセスメントは無料である点をお伝えください。</a:t>
+              <a:t>数字では伝わらない部分です。ご家族の負担軽減という側面も強調してください。</a:t>
             </a:r>
             <a:endParaRPr lang="en-US" dirty="0"/>
           </a:p>
@@ -890,6 +892,182 @@
             <a:fld id="{F7021451-1387-4CA6-816F-3879F97B5CBC}" type="slidenum">
               <a:rPr lang="en-US"/>
               <a:t>13</a:t>
+            </a:fld>
+            <a:endParaRPr lang="en-US"/>
+          </a:p>
+        </p:txBody>
+      </p:sp>
+    </p:spTree>
+    <p:extLst>
+      <p:ext uri="{BB962C8B-B14F-4D97-AF65-F5344CB8AC3E}">
+        <p14:creationId xmlns:p14="http://schemas.microsoft.com/office/powerpoint/2010/main" val="1024086991"/>
+      </p:ext>
+    </p:extLst>
+  </p:cSld>
+  <p:clrMapOvr>
+    <a:masterClrMapping/>
+  </p:clrMapOvr>
+</p:notes>
+</file>
+
+<file path=ppt/notesSlides/notesSlide14.xml><?xml version="1.0" encoding="utf-8"?>
+<p:notes xmlns:a="http://schemas.openxmlformats.org/drawingml/2006/main" xmlns:r="http://schemas.openxmlformats.org/officeDocument/2006/relationships" xmlns:p="http://schemas.openxmlformats.org/presentationml/2006/main">
+  <p:cSld>
+    <p:spTree>
+      <p:nvGrpSpPr>
+        <p:cNvPr id="1" name=""/>
+        <p:cNvGrpSpPr/>
+        <p:nvPr/>
+      </p:nvGrpSpPr>
+      <p:grpSpPr>
+        <a:xfrm>
+          <a:off x="0" y="0"/>
+          <a:ext cx="0" cy="0"/>
+          <a:chOff x="0" y="0"/>
+          <a:chExt cx="0" cy="0"/>
+        </a:xfrm>
+      </p:grpSpPr>
+      <p:sp>
+        <p:nvSpPr>
+          <p:cNvPr id="2" name="Slide Image Placeholder 1"/>
+          <p:cNvSpPr>
+            <a:spLocks noGrp="1" noRot="1" noChangeAspect="1"/>
+          </p:cNvSpPr>
+          <p:nvPr>
+            <p:ph type="sldImg"/>
+          </p:nvPr>
+        </p:nvSpPr>
+        <p:spPr/>
+      </p:sp>
+      <p:sp>
+        <p:nvSpPr>
+          <p:cNvPr id="3" name="Notes Placeholder 2"/>
+          <p:cNvSpPr>
+            <a:spLocks noGrp="1"/>
+          </p:cNvSpPr>
+          <p:nvPr>
+            <p:ph type="body" idx="1"/>
+          </p:nvPr>
+        </p:nvSpPr>
+        <p:spPr/>
+        <p:txBody>
+          <a:bodyPr/>
+          <a:lstStyle/>
+          <a:p>
+            <a:r>
+              <a:rPr lang="en-US" dirty="0"/>
+              <a:t>4点に整理しました。最後のメッセージ——迷った段階でご相談いただきたい、を強調して締めます。</a:t>
+            </a:r>
+            <a:endParaRPr lang="en-US" dirty="0"/>
+          </a:p>
+        </p:txBody>
+      </p:sp>
+      <p:sp>
+        <p:nvSpPr>
+          <p:cNvPr id="4" name="Slide Number Placeholder 3"/>
+          <p:cNvSpPr>
+            <a:spLocks noGrp="1"/>
+          </p:cNvSpPr>
+          <p:nvPr>
+            <p:ph type="sldNum" sz="quarter" idx="10"/>
+          </p:nvPr>
+        </p:nvSpPr>
+        <p:spPr/>
+        <p:txBody>
+          <a:bodyPr/>
+          <a:lstStyle/>
+          <a:p>
+            <a:fld id="{F7021451-1387-4CA6-816F-3879F97B5CBC}" type="slidenum">
+              <a:rPr lang="en-US"/>
+              <a:t>14</a:t>
+            </a:fld>
+            <a:endParaRPr lang="en-US"/>
+          </a:p>
+        </p:txBody>
+      </p:sp>
+    </p:spTree>
+    <p:extLst>
+      <p:ext uri="{BB962C8B-B14F-4D97-AF65-F5344CB8AC3E}">
+        <p14:creationId xmlns:p14="http://schemas.microsoft.com/office/powerpoint/2010/main" val="1024086991"/>
+      </p:ext>
+    </p:extLst>
+  </p:cSld>
+  <p:clrMapOvr>
+    <a:masterClrMapping/>
+  </p:clrMapOvr>
+</p:notes>
+</file>
+
+<file path=ppt/notesSlides/notesSlide15.xml><?xml version="1.0" encoding="utf-8"?>
+<p:notes xmlns:a="http://schemas.openxmlformats.org/drawingml/2006/main" xmlns:r="http://schemas.openxmlformats.org/officeDocument/2006/relationships" xmlns:p="http://schemas.openxmlformats.org/presentationml/2006/main">
+  <p:cSld>
+    <p:spTree>
+      <p:nvGrpSpPr>
+        <p:cNvPr id="1" name=""/>
+        <p:cNvGrpSpPr/>
+        <p:nvPr/>
+      </p:nvGrpSpPr>
+      <p:grpSpPr>
+        <a:xfrm>
+          <a:off x="0" y="0"/>
+          <a:ext cx="0" cy="0"/>
+          <a:chOff x="0" y="0"/>
+          <a:chExt cx="0" cy="0"/>
+        </a:xfrm>
+      </p:grpSpPr>
+      <p:sp>
+        <p:nvSpPr>
+          <p:cNvPr id="2" name="Slide Image Placeholder 1"/>
+          <p:cNvSpPr>
+            <a:spLocks noGrp="1" noRot="1" noChangeAspect="1"/>
+          </p:cNvSpPr>
+          <p:nvPr>
+            <p:ph type="sldImg"/>
+          </p:nvPr>
+        </p:nvSpPr>
+        <p:spPr/>
+      </p:sp>
+      <p:sp>
+        <p:nvSpPr>
+          <p:cNvPr id="3" name="Notes Placeholder 2"/>
+          <p:cNvSpPr>
+            <a:spLocks noGrp="1"/>
+          </p:cNvSpPr>
+          <p:nvPr>
+            <p:ph type="body" idx="1"/>
+          </p:nvPr>
+        </p:nvSpPr>
+        <p:spPr/>
+        <p:txBody>
+          <a:bodyPr/>
+          <a:lstStyle/>
+          <a:p>
+            <a:r>
+              <a:rPr lang="en-US" dirty="0"/>
+              <a:t>ご相談は電話が最も早いです。初回アセスメントは無料である点をお伝えください。</a:t>
+            </a:r>
+            <a:endParaRPr lang="en-US" dirty="0"/>
+          </a:p>
+        </p:txBody>
+      </p:sp>
+      <p:sp>
+        <p:nvSpPr>
+          <p:cNvPr id="4" name="Slide Number Placeholder 3"/>
+          <p:cNvSpPr>
+            <a:spLocks noGrp="1"/>
+          </p:cNvSpPr>
+          <p:nvPr>
+            <p:ph type="sldNum" sz="quarter" idx="10"/>
+          </p:nvPr>
+        </p:nvSpPr>
+        <p:spPr/>
+        <p:txBody>
+          <a:bodyPr/>
+          <a:lstStyle/>
+          <a:p>
+            <a:fld id="{F7021451-1387-4CA6-816F-3879F97B5CBC}" type="slidenum">
+              <a:rPr lang="en-US"/>
+              <a:t>15</a:t>
             </a:fld>
             <a:endParaRPr lang="en-US"/>
           </a:p>
@@ -1570,7 +1748,7 @@
           <a:p>
             <a:r>
               <a:rPr lang="en-US" dirty="0"/>
-              <a:t>デイサービスの方に特にお伝えしたい点です。奪い合いではなく、通所が難しくなった段階での受け皿としてお考えください。</a:t>
+              <a:t>訪問入浴は介護保険サービスなので医療行為はできません。だから訪問看護との連携が前提になります。この線引きを明確にお伝えしてください。</a:t>
             </a:r>
             <a:endParaRPr lang="en-US" dirty="0"/>
           </a:p>
@@ -2252,7 +2430,7 @@
                 <a:ea typeface="Meiryo" pitchFamily="34" charset="-122"/>
                 <a:cs typeface="Meiryo" pitchFamily="34" charset="-120"/>
               </a:rPr>
-              <a:t>CHAPTER 5</a:t>
+              <a:t>CHAPTER 4</a:t>
             </a:r>
             <a:endParaRPr lang="en-US" sz="1100" dirty="0"/>
           </a:p>
@@ -2291,7 +2469,7 @@
                 <a:ea typeface="Meiryo" pitchFamily="34" charset="-122"/>
                 <a:cs typeface="Meiryo" pitchFamily="34" charset="-120"/>
               </a:rPr>
-              <a:t>介護報酬</a:t>
+              <a:t>看護師の視点・医療連携</a:t>
             </a:r>
             <a:endParaRPr lang="en-US" sz="1200" dirty="0"/>
           </a:p>
@@ -2330,6 +2508,1587 @@
                 <a:ea typeface="Meiryo" pitchFamily="34" charset="-122"/>
                 <a:cs typeface="Meiryo" pitchFamily="34" charset="-120"/>
               </a:rPr>
+              <a:t>訪問看護のみなさまへ ── 連携のお願い</a:t>
+            </a:r>
+            <a:endParaRPr lang="en-US" sz="3000" dirty="0"/>
+          </a:p>
+        </p:txBody>
+      </p:sp>
+      <p:sp>
+        <p:nvSpPr>
+          <p:cNvPr id="6" name="Shape 4"/>
+          <p:cNvSpPr/>
+          <p:nvPr/>
+        </p:nvSpPr>
+        <p:spPr>
+          <a:xfrm>
+            <a:off x="566928" y="1517904"/>
+            <a:ext cx="3551834" cy="2926080"/>
+          </a:xfrm>
+          <a:prstGeom prst="roundRect">
+            <a:avLst>
+              <a:gd name="adj" fmla="val 1875"/>
+            </a:avLst>
+          </a:prstGeom>
+          <a:solidFill>
+            <a:srgbClr val="EAF7F1"/>
+          </a:solidFill>
+          <a:ln w="12700">
+            <a:solidFill>
+              <a:srgbClr val="EAF7F1"/>
+            </a:solidFill>
+            <a:prstDash val="solid"/>
+          </a:ln>
+        </p:spPr>
+      </p:sp>
+      <p:sp>
+        <p:nvSpPr>
+          <p:cNvPr id="7" name="Text 5"/>
+          <p:cNvSpPr txBox="1"/>
+          <p:nvPr/>
+        </p:nvSpPr>
+        <p:spPr>
+          <a:xfrm>
+            <a:off x="786384" y="1700784"/>
+            <a:ext cx="3112922" cy="310896"/>
+          </a:xfrm>
+          <a:prstGeom prst="rect">
+            <a:avLst/>
+          </a:prstGeom>
+          <a:noFill/>
+          <a:ln/>
+        </p:spPr>
+        <p:txBody>
+          <a:bodyPr wrap="square" lIns="0" tIns="0" rIns="0" bIns="0" rtlCol="0" anchor="ctr"/>
+          <a:lstStyle/>
+          <a:p>
+            <a:pPr indent="0" marL="0">
+              <a:buNone/>
+            </a:pPr>
+            <a:r>
+              <a:rPr lang="en-US" sz="1500" b="1" dirty="0">
+                <a:solidFill>
+                  <a:srgbClr val="1D9E75"/>
+                </a:solidFill>
+                <a:latin typeface="Meiryo" pitchFamily="34" charset="0"/>
+                <a:ea typeface="Meiryo" pitchFamily="34" charset="-122"/>
+                <a:cs typeface="Meiryo" pitchFamily="34" charset="-120"/>
+              </a:rPr>
+              <a:t>① 訪問日を合わせてください</a:t>
+            </a:r>
+            <a:endParaRPr lang="en-US" sz="1500" dirty="0"/>
+          </a:p>
+        </p:txBody>
+      </p:sp>
+      <p:sp>
+        <p:nvSpPr>
+          <p:cNvPr id="8" name="Text 6"/>
+          <p:cNvSpPr txBox="1"/>
+          <p:nvPr/>
+        </p:nvSpPr>
+        <p:spPr>
+          <a:xfrm>
+            <a:off x="786384" y="2103120"/>
+            <a:ext cx="3112922" cy="2194560"/>
+          </a:xfrm>
+          <a:prstGeom prst="rect">
+            <a:avLst/>
+          </a:prstGeom>
+          <a:noFill/>
+          <a:ln/>
+        </p:spPr>
+        <p:txBody>
+          <a:bodyPr wrap="square" lIns="0" tIns="0" rIns="0" bIns="0" rtlCol="0" anchor="t"/>
+          <a:lstStyle/>
+          <a:p>
+            <a:pPr indent="0" marL="0">
+              <a:lnSpc>
+                <a:spcPct val="125000"/>
+              </a:lnSpc>
+              <a:buNone/>
+            </a:pPr>
+            <a:r>
+              <a:rPr lang="en-US" sz="1250" dirty="0">
+                <a:solidFill>
+                  <a:srgbClr val="1C2833"/>
+                </a:solidFill>
+                <a:latin typeface="Meiryo" pitchFamily="34" charset="0"/>
+                <a:ea typeface="Meiryo" pitchFamily="34" charset="-122"/>
+                <a:cs typeface="Meiryo" pitchFamily="34" charset="-120"/>
+              </a:rPr>
+              <a:t>入浴直後は皮膚が清潔で、</a:t>
+            </a:r>
+            <a:pPr indent="0" marL="0">
+              <a:lnSpc>
+                <a:spcPct val="125000"/>
+              </a:lnSpc>
+              <a:buNone/>
+            </a:pPr>
+            <a:r>
+              <a:rPr lang="en-US" sz="1250" b="1" dirty="0">
+                <a:solidFill>
+                  <a:srgbClr val="1D9E75"/>
+                </a:solidFill>
+                <a:latin typeface="Meiryo" pitchFamily="34" charset="0"/>
+                <a:ea typeface="Meiryo" pitchFamily="34" charset="-122"/>
+                <a:cs typeface="Meiryo" pitchFamily="34" charset="-120"/>
+              </a:rPr>
+              <a:t>創部の観察と処置に最も適した状態</a:t>
+            </a:r>
+            <a:pPr indent="0" marL="0">
+              <a:lnSpc>
+                <a:spcPct val="125000"/>
+              </a:lnSpc>
+              <a:buNone/>
+            </a:pPr>
+            <a:r>
+              <a:rPr lang="en-US" sz="1250" dirty="0">
+                <a:solidFill>
+                  <a:srgbClr val="1C2833"/>
+                </a:solidFill>
+                <a:latin typeface="Meiryo" pitchFamily="34" charset="0"/>
+                <a:ea typeface="Meiryo" pitchFamily="34" charset="-122"/>
+                <a:cs typeface="Meiryo" pitchFamily="34" charset="-120"/>
+              </a:rPr>
+              <a:t>です。同日・入浴後にご訪問いただけると、処置の条件が整います。</a:t>
+            </a:r>
+            <a:endParaRPr lang="en-US" sz="1250" dirty="0"/>
+          </a:p>
+        </p:txBody>
+      </p:sp>
+      <p:sp>
+        <p:nvSpPr>
+          <p:cNvPr id="9" name="Shape 7"/>
+          <p:cNvSpPr/>
+          <p:nvPr/>
+        </p:nvSpPr>
+        <p:spPr>
+          <a:xfrm>
+            <a:off x="4319930" y="1517904"/>
+            <a:ext cx="3551834" cy="2926080"/>
+          </a:xfrm>
+          <a:prstGeom prst="roundRect">
+            <a:avLst>
+              <a:gd name="adj" fmla="val 1875"/>
+            </a:avLst>
+          </a:prstGeom>
+          <a:solidFill>
+            <a:srgbClr val="F4F8FA"/>
+          </a:solidFill>
+          <a:ln w="12700">
+            <a:solidFill>
+              <a:srgbClr val="F4F8FA"/>
+            </a:solidFill>
+            <a:prstDash val="solid"/>
+          </a:ln>
+        </p:spPr>
+      </p:sp>
+      <p:sp>
+        <p:nvSpPr>
+          <p:cNvPr id="10" name="Text 8"/>
+          <p:cNvSpPr txBox="1"/>
+          <p:nvPr/>
+        </p:nvSpPr>
+        <p:spPr>
+          <a:xfrm>
+            <a:off x="4539386" y="1700784"/>
+            <a:ext cx="3112922" cy="310896"/>
+          </a:xfrm>
+          <a:prstGeom prst="rect">
+            <a:avLst/>
+          </a:prstGeom>
+          <a:noFill/>
+          <a:ln/>
+        </p:spPr>
+        <p:txBody>
+          <a:bodyPr wrap="square" lIns="0" tIns="0" rIns="0" bIns="0" rtlCol="0" anchor="ctr"/>
+          <a:lstStyle/>
+          <a:p>
+            <a:pPr indent="0" marL="0">
+              <a:buNone/>
+            </a:pPr>
+            <a:r>
+              <a:rPr lang="en-US" sz="1500" b="1" dirty="0">
+                <a:solidFill>
+                  <a:srgbClr val="1A5276"/>
+                </a:solidFill>
+                <a:latin typeface="Meiryo" pitchFamily="34" charset="0"/>
+                <a:ea typeface="Meiryo" pitchFamily="34" charset="-122"/>
+                <a:cs typeface="Meiryo" pitchFamily="34" charset="-120"/>
+              </a:rPr>
+              <a:t>② 見てほしい部位を</a:t>
+            </a:r>
+            <a:endParaRPr lang="en-US" sz="1500" dirty="0"/>
+          </a:p>
+        </p:txBody>
+      </p:sp>
+      <p:sp>
+        <p:nvSpPr>
+          <p:cNvPr id="11" name="Text 9"/>
+          <p:cNvSpPr txBox="1"/>
+          <p:nvPr/>
+        </p:nvSpPr>
+        <p:spPr>
+          <a:xfrm>
+            <a:off x="4539386" y="2103120"/>
+            <a:ext cx="3112922" cy="2194560"/>
+          </a:xfrm>
+          <a:prstGeom prst="rect">
+            <a:avLst/>
+          </a:prstGeom>
+          <a:noFill/>
+          <a:ln/>
+        </p:spPr>
+        <p:txBody>
+          <a:bodyPr wrap="square" lIns="0" tIns="0" rIns="0" bIns="0" rtlCol="0" anchor="t"/>
+          <a:lstStyle/>
+          <a:p>
+            <a:pPr indent="0" marL="0">
+              <a:lnSpc>
+                <a:spcPct val="125000"/>
+              </a:lnSpc>
+              <a:buNone/>
+            </a:pPr>
+            <a:r>
+              <a:rPr lang="en-US" sz="1250" dirty="0">
+                <a:solidFill>
+                  <a:srgbClr val="1C2833"/>
+                </a:solidFill>
+                <a:latin typeface="Meiryo" pitchFamily="34" charset="0"/>
+                <a:ea typeface="Meiryo" pitchFamily="34" charset="-122"/>
+                <a:cs typeface="Meiryo" pitchFamily="34" charset="-120"/>
+              </a:rPr>
+              <a:t>前回の</a:t>
+            </a:r>
+            <a:pPr indent="0" marL="0">
+              <a:lnSpc>
+                <a:spcPct val="125000"/>
+              </a:lnSpc>
+              <a:buNone/>
+            </a:pPr>
+            <a:r>
+              <a:rPr lang="en-US" sz="1250" b="1" dirty="0">
+                <a:solidFill>
+                  <a:srgbClr val="1D9E75"/>
+                </a:solidFill>
+                <a:latin typeface="Meiryo" pitchFamily="34" charset="0"/>
+                <a:ea typeface="Meiryo" pitchFamily="34" charset="-122"/>
+                <a:cs typeface="Meiryo" pitchFamily="34" charset="-120"/>
+              </a:rPr>
+              <a:t>処置内容と注意部位</a:t>
+            </a:r>
+            <a:pPr indent="0" marL="0">
+              <a:lnSpc>
+                <a:spcPct val="125000"/>
+              </a:lnSpc>
+              <a:buNone/>
+            </a:pPr>
+            <a:r>
+              <a:rPr lang="en-US" sz="1250" dirty="0">
+                <a:solidFill>
+                  <a:srgbClr val="1C2833"/>
+                </a:solidFill>
+                <a:latin typeface="Meiryo" pitchFamily="34" charset="0"/>
+                <a:ea typeface="Meiryo" pitchFamily="34" charset="-122"/>
+                <a:cs typeface="Meiryo" pitchFamily="34" charset="-120"/>
+              </a:rPr>
+              <a:t>を共有いただければ、その点を重点的に観察し、当日中に連絡ノート・電話・必要時は写真でお返しします。</a:t>
+            </a:r>
+            <a:endParaRPr lang="en-US" sz="1250" dirty="0"/>
+          </a:p>
+        </p:txBody>
+      </p:sp>
+      <p:sp>
+        <p:nvSpPr>
+          <p:cNvPr id="12" name="Shape 10"/>
+          <p:cNvSpPr/>
+          <p:nvPr/>
+        </p:nvSpPr>
+        <p:spPr>
+          <a:xfrm>
+            <a:off x="8072933" y="1517904"/>
+            <a:ext cx="3551834" cy="2926080"/>
+          </a:xfrm>
+          <a:prstGeom prst="roundRect">
+            <a:avLst>
+              <a:gd name="adj" fmla="val 1875"/>
+            </a:avLst>
+          </a:prstGeom>
+          <a:solidFill>
+            <a:srgbClr val="F4F8FA"/>
+          </a:solidFill>
+          <a:ln w="12700">
+            <a:solidFill>
+              <a:srgbClr val="F4F8FA"/>
+            </a:solidFill>
+            <a:prstDash val="solid"/>
+          </a:ln>
+        </p:spPr>
+      </p:sp>
+      <p:sp>
+        <p:nvSpPr>
+          <p:cNvPr id="13" name="Text 11"/>
+          <p:cNvSpPr txBox="1"/>
+          <p:nvPr/>
+        </p:nvSpPr>
+        <p:spPr>
+          <a:xfrm>
+            <a:off x="8292389" y="1700784"/>
+            <a:ext cx="3112922" cy="310896"/>
+          </a:xfrm>
+          <a:prstGeom prst="rect">
+            <a:avLst/>
+          </a:prstGeom>
+          <a:noFill/>
+          <a:ln/>
+        </p:spPr>
+        <p:txBody>
+          <a:bodyPr wrap="square" lIns="0" tIns="0" rIns="0" bIns="0" rtlCol="0" anchor="ctr"/>
+          <a:lstStyle/>
+          <a:p>
+            <a:pPr indent="0" marL="0">
+              <a:buNone/>
+            </a:pPr>
+            <a:r>
+              <a:rPr lang="en-US" sz="1500" b="1" dirty="0">
+                <a:solidFill>
+                  <a:srgbClr val="1A5276"/>
+                </a:solidFill>
+                <a:latin typeface="Meiryo" pitchFamily="34" charset="0"/>
+                <a:ea typeface="Meiryo" pitchFamily="34" charset="-122"/>
+                <a:cs typeface="Meiryo" pitchFamily="34" charset="-120"/>
+              </a:rPr>
+              <a:t>③ 医療的ケアは事前に相談</a:t>
+            </a:r>
+            <a:endParaRPr lang="en-US" sz="1500" dirty="0"/>
+          </a:p>
+        </p:txBody>
+      </p:sp>
+      <p:sp>
+        <p:nvSpPr>
+          <p:cNvPr id="14" name="Text 12"/>
+          <p:cNvSpPr txBox="1"/>
+          <p:nvPr/>
+        </p:nvSpPr>
+        <p:spPr>
+          <a:xfrm>
+            <a:off x="8292389" y="2103120"/>
+            <a:ext cx="3112922" cy="2194560"/>
+          </a:xfrm>
+          <a:prstGeom prst="rect">
+            <a:avLst/>
+          </a:prstGeom>
+          <a:noFill/>
+          <a:ln/>
+        </p:spPr>
+        <p:txBody>
+          <a:bodyPr wrap="square" lIns="0" tIns="0" rIns="0" bIns="0" rtlCol="0" anchor="t"/>
+          <a:lstStyle/>
+          <a:p>
+            <a:pPr indent="0" marL="0">
+              <a:lnSpc>
+                <a:spcPct val="125000"/>
+              </a:lnSpc>
+              <a:buNone/>
+            </a:pPr>
+            <a:r>
+              <a:rPr lang="en-US" sz="1250" dirty="0">
+                <a:solidFill>
+                  <a:srgbClr val="1C2833"/>
+                </a:solidFill>
+                <a:latin typeface="Meiryo" pitchFamily="34" charset="0"/>
+                <a:ea typeface="Meiryo" pitchFamily="34" charset="-122"/>
+                <a:cs typeface="Meiryo" pitchFamily="34" charset="-120"/>
+              </a:rPr>
+              <a:t>気管切開・経管栄養・在宅酸素など。</a:t>
+            </a:r>
+            <a:pPr indent="0" marL="0">
+              <a:lnSpc>
+                <a:spcPct val="125000"/>
+              </a:lnSpc>
+              <a:buNone/>
+            </a:pPr>
+            <a:r>
+              <a:rPr lang="en-US" sz="1250" b="1" dirty="0">
+                <a:solidFill>
+                  <a:srgbClr val="1D9E75"/>
+                </a:solidFill>
+                <a:latin typeface="Meiryo" pitchFamily="34" charset="0"/>
+                <a:ea typeface="Meiryo" pitchFamily="34" charset="-122"/>
+                <a:cs typeface="Meiryo" pitchFamily="34" charset="-120"/>
+              </a:rPr>
+              <a:t>主治医の指示内容と留意点</a:t>
+            </a:r>
+            <a:pPr indent="0" marL="0">
+              <a:lnSpc>
+                <a:spcPct val="125000"/>
+              </a:lnSpc>
+              <a:buNone/>
+            </a:pPr>
+            <a:r>
+              <a:rPr lang="en-US" sz="1250" dirty="0">
+                <a:solidFill>
+                  <a:srgbClr val="1C2833"/>
+                </a:solidFill>
+                <a:latin typeface="Meiryo" pitchFamily="34" charset="0"/>
+                <a:ea typeface="Meiryo" pitchFamily="34" charset="-122"/>
+                <a:cs typeface="Meiryo" pitchFamily="34" charset="-120"/>
+              </a:rPr>
+              <a:t>を共有いただければ、受け入れ可否と入浴時の注意点を一緒に検討します。</a:t>
+            </a:r>
+            <a:endParaRPr lang="en-US" sz="1250" dirty="0"/>
+          </a:p>
+        </p:txBody>
+      </p:sp>
+      <p:sp>
+        <p:nvSpPr>
+          <p:cNvPr id="15" name="Shape 13"/>
+          <p:cNvSpPr/>
+          <p:nvPr/>
+        </p:nvSpPr>
+        <p:spPr>
+          <a:xfrm>
+            <a:off x="566928" y="4608576"/>
+            <a:ext cx="11057839" cy="868680"/>
+          </a:xfrm>
+          <a:prstGeom prst="roundRect">
+            <a:avLst>
+              <a:gd name="adj" fmla="val 7368"/>
+            </a:avLst>
+          </a:prstGeom>
+          <a:solidFill>
+            <a:srgbClr val="1D9E75"/>
+          </a:solidFill>
+          <a:ln w="12700">
+            <a:solidFill>
+              <a:srgbClr val="1D9E75"/>
+            </a:solidFill>
+            <a:prstDash val="solid"/>
+          </a:ln>
+        </p:spPr>
+      </p:sp>
+      <p:sp>
+        <p:nvSpPr>
+          <p:cNvPr id="16" name="Text 14"/>
+          <p:cNvSpPr txBox="1"/>
+          <p:nvPr/>
+        </p:nvSpPr>
+        <p:spPr>
+          <a:xfrm>
+            <a:off x="841248" y="4608576"/>
+            <a:ext cx="10509199" cy="868680"/>
+          </a:xfrm>
+          <a:prstGeom prst="rect">
+            <a:avLst/>
+          </a:prstGeom>
+          <a:noFill/>
+          <a:ln/>
+        </p:spPr>
+        <p:txBody>
+          <a:bodyPr wrap="square" lIns="0" tIns="0" rIns="0" bIns="0" rtlCol="0" anchor="ctr"/>
+          <a:lstStyle/>
+          <a:p>
+            <a:pPr algn="ctr" indent="0" marL="0">
+              <a:buNone/>
+            </a:pPr>
+            <a:r>
+              <a:rPr lang="en-US" sz="1700" b="1" dirty="0">
+                <a:solidFill>
+                  <a:srgbClr val="FFFFFF"/>
+                </a:solidFill>
+                <a:latin typeface="Meiryo" pitchFamily="34" charset="0"/>
+                <a:ea typeface="Meiryo" pitchFamily="34" charset="-122"/>
+                <a:cs typeface="Meiryo" pitchFamily="34" charset="-120"/>
+              </a:rPr>
+              <a:t>「この状態で入浴させてよいか」——迷った時点でご連絡ください。一緒に判断させてください。</a:t>
+            </a:r>
+            <a:endParaRPr lang="en-US" sz="1700" dirty="0"/>
+          </a:p>
+        </p:txBody>
+      </p:sp>
+    </p:spTree>
+  </p:cSld>
+  <p:clrMapOvr>
+    <a:masterClrMapping/>
+  </p:clrMapOvr>
+</p:sld>
+</file>
+
+<file path=ppt/slides/slide11.xml><?xml version="1.0" encoding="utf-8"?>
+<p:sld xmlns:a="http://schemas.openxmlformats.org/drawingml/2006/main" xmlns:r="http://schemas.openxmlformats.org/officeDocument/2006/relationships" xmlns:p="http://schemas.openxmlformats.org/presentationml/2006/main">
+  <p:cSld name="Slide 11">
+    <p:spTree>
+      <p:nvGrpSpPr>
+        <p:cNvPr id="1" name=""/>
+        <p:cNvGrpSpPr/>
+        <p:nvPr/>
+      </p:nvGrpSpPr>
+      <p:grpSpPr>
+        <a:xfrm>
+          <a:off x="0" y="0"/>
+          <a:ext cx="0" cy="0"/>
+          <a:chOff x="0" y="0"/>
+          <a:chExt cx="0" cy="0"/>
+        </a:xfrm>
+      </p:grpSpPr>
+      <p:sp>
+        <p:nvSpPr>
+          <p:cNvPr id="2" name="Shape 0"/>
+          <p:cNvSpPr/>
+          <p:nvPr/>
+        </p:nvSpPr>
+        <p:spPr>
+          <a:xfrm>
+            <a:off x="566928" y="329184"/>
+            <a:ext cx="1481328" cy="310896"/>
+          </a:xfrm>
+          <a:prstGeom prst="roundRect">
+            <a:avLst>
+              <a:gd name="adj" fmla="val 14706"/>
+            </a:avLst>
+          </a:prstGeom>
+          <a:solidFill>
+            <a:srgbClr val="1A5276"/>
+          </a:solidFill>
+          <a:ln w="12700">
+            <a:solidFill>
+              <a:srgbClr val="1A5276"/>
+            </a:solidFill>
+            <a:prstDash val="solid"/>
+          </a:ln>
+        </p:spPr>
+      </p:sp>
+      <p:sp>
+        <p:nvSpPr>
+          <p:cNvPr id="3" name="Text 1"/>
+          <p:cNvSpPr txBox="1"/>
+          <p:nvPr/>
+        </p:nvSpPr>
+        <p:spPr>
+          <a:xfrm>
+            <a:off x="566928" y="329184"/>
+            <a:ext cx="1481328" cy="310896"/>
+          </a:xfrm>
+          <a:prstGeom prst="rect">
+            <a:avLst/>
+          </a:prstGeom>
+          <a:noFill/>
+          <a:ln/>
+        </p:spPr>
+        <p:txBody>
+          <a:bodyPr wrap="square" lIns="0" tIns="0" rIns="0" bIns="0" rtlCol="0" anchor="ctr"/>
+          <a:lstStyle/>
+          <a:p>
+            <a:pPr algn="ctr" indent="0" marL="0">
+              <a:buNone/>
+            </a:pPr>
+            <a:r>
+              <a:rPr lang="en-US" sz="1100" b="1" dirty="0">
+                <a:solidFill>
+                  <a:srgbClr val="FFFFFF"/>
+                </a:solidFill>
+                <a:latin typeface="Meiryo" pitchFamily="34" charset="0"/>
+                <a:ea typeface="Meiryo" pitchFamily="34" charset="-122"/>
+                <a:cs typeface="Meiryo" pitchFamily="34" charset="-120"/>
+              </a:rPr>
+              <a:t>CHAPTER 4</a:t>
+            </a:r>
+            <a:endParaRPr lang="en-US" sz="1100" dirty="0"/>
+          </a:p>
+        </p:txBody>
+      </p:sp>
+      <p:sp>
+        <p:nvSpPr>
+          <p:cNvPr id="4" name="Text 2"/>
+          <p:cNvSpPr txBox="1"/>
+          <p:nvPr/>
+        </p:nvSpPr>
+        <p:spPr>
+          <a:xfrm>
+            <a:off x="2194560" y="329184"/>
+            <a:ext cx="5486400" cy="310896"/>
+          </a:xfrm>
+          <a:prstGeom prst="rect">
+            <a:avLst/>
+          </a:prstGeom>
+          <a:noFill/>
+          <a:ln/>
+        </p:spPr>
+        <p:txBody>
+          <a:bodyPr wrap="square" lIns="0" tIns="0" rIns="0" bIns="0" rtlCol="0" anchor="ctr"/>
+          <a:lstStyle/>
+          <a:p>
+            <a:pPr indent="0" marL="0">
+              <a:buNone/>
+            </a:pPr>
+            <a:r>
+              <a:rPr lang="en-US" sz="1200" dirty="0">
+                <a:solidFill>
+                  <a:srgbClr val="566573"/>
+                </a:solidFill>
+                <a:latin typeface="Meiryo" pitchFamily="34" charset="0"/>
+                <a:ea typeface="Meiryo" pitchFamily="34" charset="-122"/>
+                <a:cs typeface="Meiryo" pitchFamily="34" charset="-120"/>
+              </a:rPr>
+              <a:t>看護師の視点・医療連携</a:t>
+            </a:r>
+            <a:endParaRPr lang="en-US" sz="1200" dirty="0"/>
+          </a:p>
+        </p:txBody>
+      </p:sp>
+      <p:sp>
+        <p:nvSpPr>
+          <p:cNvPr id="5" name="Text 3"/>
+          <p:cNvSpPr txBox="1"/>
+          <p:nvPr/>
+        </p:nvSpPr>
+        <p:spPr>
+          <a:xfrm>
+            <a:off x="566928" y="749808"/>
+            <a:ext cx="11057839" cy="566928"/>
+          </a:xfrm>
+          <a:prstGeom prst="rect">
+            <a:avLst/>
+          </a:prstGeom>
+          <a:noFill/>
+          <a:ln/>
+        </p:spPr>
+        <p:txBody>
+          <a:bodyPr wrap="square" lIns="0" tIns="0" rIns="0" bIns="0" rtlCol="0" anchor="ctr"/>
+          <a:lstStyle/>
+          <a:p>
+            <a:pPr indent="0" marL="0">
+              <a:buNone/>
+            </a:pPr>
+            <a:r>
+              <a:rPr lang="en-US" sz="3000" b="1" dirty="0">
+                <a:solidFill>
+                  <a:srgbClr val="1A5276"/>
+                </a:solidFill>
+                <a:latin typeface="Meiryo" pitchFamily="34" charset="0"/>
+                <a:ea typeface="Meiryo" pitchFamily="34" charset="-122"/>
+                <a:cs typeface="Meiryo" pitchFamily="34" charset="-120"/>
+              </a:rPr>
+              <a:t>在宅チームの一員として</a:t>
+            </a:r>
+            <a:endParaRPr lang="en-US" sz="3000" dirty="0"/>
+          </a:p>
+        </p:txBody>
+      </p:sp>
+      <p:sp>
+        <p:nvSpPr>
+          <p:cNvPr id="6" name="Shape 4"/>
+          <p:cNvSpPr/>
+          <p:nvPr/>
+        </p:nvSpPr>
+        <p:spPr>
+          <a:xfrm>
+            <a:off x="566928" y="1700784"/>
+            <a:ext cx="2286000" cy="1481328"/>
+          </a:xfrm>
+          <a:prstGeom prst="roundRect">
+            <a:avLst>
+              <a:gd name="adj" fmla="val 4321"/>
+            </a:avLst>
+          </a:prstGeom>
+          <a:solidFill>
+            <a:srgbClr val="1D9E75"/>
+          </a:solidFill>
+          <a:ln w="12700">
+            <a:solidFill>
+              <a:srgbClr val="1D9E75"/>
+            </a:solidFill>
+            <a:prstDash val="solid"/>
+          </a:ln>
+        </p:spPr>
+      </p:sp>
+      <p:sp>
+        <p:nvSpPr>
+          <p:cNvPr id="7" name="Text 5"/>
+          <p:cNvSpPr txBox="1"/>
+          <p:nvPr/>
+        </p:nvSpPr>
+        <p:spPr>
+          <a:xfrm>
+            <a:off x="658368" y="1700784"/>
+            <a:ext cx="2103120" cy="1481328"/>
+          </a:xfrm>
+          <a:prstGeom prst="rect">
+            <a:avLst/>
+          </a:prstGeom>
+          <a:noFill/>
+          <a:ln/>
+        </p:spPr>
+        <p:txBody>
+          <a:bodyPr wrap="square" lIns="0" tIns="0" rIns="0" bIns="0" rtlCol="0" anchor="ctr"/>
+          <a:lstStyle/>
+          <a:p>
+            <a:pPr algn="ctr" indent="0" marL="0">
+              <a:lnSpc>
+                <a:spcPct val="130000"/>
+              </a:lnSpc>
+              <a:buNone/>
+            </a:pPr>
+            <a:r>
+              <a:rPr lang="en-US" sz="1600" b="1" dirty="0">
+                <a:solidFill>
+                  <a:srgbClr val="FFFFFF"/>
+                </a:solidFill>
+                <a:latin typeface="Meiryo" pitchFamily="34" charset="0"/>
+                <a:ea typeface="Meiryo" pitchFamily="34" charset="-122"/>
+                <a:cs typeface="Meiryo" pitchFamily="34" charset="-120"/>
+              </a:rPr>
+              <a:t>訪問入浴介護</a:t>
+            </a:r>
+            <a:endParaRPr lang="en-US" sz="1600" dirty="0"/>
+          </a:p>
+          <a:p>
+            <a:pPr algn="ctr" indent="0" marL="0">
+              <a:lnSpc>
+                <a:spcPct val="130000"/>
+              </a:lnSpc>
+              <a:buNone/>
+            </a:pPr>
+            <a:r>
+              <a:rPr lang="en-US" sz="1050" dirty="0">
+                <a:solidFill>
+                  <a:srgbClr val="D6F3E6"/>
+                </a:solidFill>
+                <a:latin typeface="Meiryo" pitchFamily="34" charset="0"/>
+                <a:ea typeface="Meiryo" pitchFamily="34" charset="-122"/>
+                <a:cs typeface="Meiryo" pitchFamily="34" charset="-120"/>
+              </a:rPr>
+              <a:t>看護師1名＋介護2名</a:t>
+            </a:r>
+            <a:endParaRPr lang="en-US" sz="1600" dirty="0"/>
+          </a:p>
+        </p:txBody>
+      </p:sp>
+      <p:sp>
+        <p:nvSpPr>
+          <p:cNvPr id="8" name="Text 6"/>
+          <p:cNvSpPr txBox="1"/>
+          <p:nvPr/>
+        </p:nvSpPr>
+        <p:spPr>
+          <a:xfrm>
+            <a:off x="2907792" y="1700784"/>
+            <a:ext cx="384048" cy="1481328"/>
+          </a:xfrm>
+          <a:prstGeom prst="rect">
+            <a:avLst/>
+          </a:prstGeom>
+          <a:noFill/>
+          <a:ln/>
+        </p:spPr>
+        <p:txBody>
+          <a:bodyPr wrap="square" lIns="0" tIns="0" rIns="0" bIns="0" rtlCol="0" anchor="ctr"/>
+          <a:lstStyle/>
+          <a:p>
+            <a:pPr algn="ctr" indent="0" marL="0">
+              <a:buNone/>
+            </a:pPr>
+            <a:r>
+              <a:rPr lang="en-US" sz="2200" b="1" dirty="0">
+                <a:solidFill>
+                  <a:srgbClr val="1D9E75"/>
+                </a:solidFill>
+                <a:latin typeface="Meiryo" pitchFamily="34" charset="0"/>
+                <a:ea typeface="Meiryo" pitchFamily="34" charset="-122"/>
+                <a:cs typeface="Meiryo" pitchFamily="34" charset="-120"/>
+              </a:rPr>
+              <a:t>⇄</a:t>
+            </a:r>
+            <a:endParaRPr lang="en-US" sz="2200" dirty="0"/>
+          </a:p>
+        </p:txBody>
+      </p:sp>
+      <p:sp>
+        <p:nvSpPr>
+          <p:cNvPr id="9" name="Shape 7"/>
+          <p:cNvSpPr/>
+          <p:nvPr/>
+        </p:nvSpPr>
+        <p:spPr>
+          <a:xfrm>
+            <a:off x="3364992" y="1700784"/>
+            <a:ext cx="4029304" cy="676656"/>
+          </a:xfrm>
+          <a:prstGeom prst="roundRect">
+            <a:avLst>
+              <a:gd name="adj" fmla="val 6757"/>
+            </a:avLst>
+          </a:prstGeom>
+          <a:solidFill>
+            <a:srgbClr val="F4F8FA"/>
+          </a:solidFill>
+          <a:ln w="12700">
+            <a:solidFill>
+              <a:srgbClr val="F4F8FA"/>
+            </a:solidFill>
+            <a:prstDash val="solid"/>
+          </a:ln>
+        </p:spPr>
+      </p:sp>
+      <p:sp>
+        <p:nvSpPr>
+          <p:cNvPr id="10" name="Text 8"/>
+          <p:cNvSpPr txBox="1"/>
+          <p:nvPr/>
+        </p:nvSpPr>
+        <p:spPr>
+          <a:xfrm>
+            <a:off x="3566160" y="1700784"/>
+            <a:ext cx="3626968" cy="676656"/>
+          </a:xfrm>
+          <a:prstGeom prst="rect">
+            <a:avLst/>
+          </a:prstGeom>
+          <a:noFill/>
+          <a:ln/>
+        </p:spPr>
+        <p:txBody>
+          <a:bodyPr wrap="square" lIns="0" tIns="0" rIns="0" bIns="0" rtlCol="0" anchor="ctr"/>
+          <a:lstStyle/>
+          <a:p>
+            <a:pPr indent="0" marL="0">
+              <a:lnSpc>
+                <a:spcPct val="115000"/>
+              </a:lnSpc>
+              <a:buNone/>
+            </a:pPr>
+            <a:r>
+              <a:rPr lang="en-US" sz="1350" b="1" dirty="0">
+                <a:solidFill>
+                  <a:srgbClr val="1A5276"/>
+                </a:solidFill>
+                <a:latin typeface="Meiryo" pitchFamily="34" charset="0"/>
+                <a:ea typeface="Meiryo" pitchFamily="34" charset="-122"/>
+                <a:cs typeface="Meiryo" pitchFamily="34" charset="-120"/>
+              </a:rPr>
+              <a:t>主治医・在宅医</a:t>
+            </a:r>
+            <a:endParaRPr lang="en-US" sz="1350" dirty="0"/>
+          </a:p>
+          <a:p>
+            <a:pPr indent="0" marL="0">
+              <a:lnSpc>
+                <a:spcPct val="115000"/>
+              </a:lnSpc>
+              <a:buNone/>
+            </a:pPr>
+            <a:r>
+              <a:rPr lang="en-US" sz="1000" dirty="0">
+                <a:solidFill>
+                  <a:srgbClr val="566573"/>
+                </a:solidFill>
+                <a:latin typeface="Meiryo" pitchFamily="34" charset="0"/>
+                <a:ea typeface="Meiryo" pitchFamily="34" charset="-122"/>
+                <a:cs typeface="Meiryo" pitchFamily="34" charset="-120"/>
+              </a:rPr>
+              <a:t>創部・全身状態の報告／指示の確認</a:t>
+            </a:r>
+            <a:endParaRPr lang="en-US" sz="1350" dirty="0"/>
+          </a:p>
+        </p:txBody>
+      </p:sp>
+      <p:sp>
+        <p:nvSpPr>
+          <p:cNvPr id="11" name="Shape 9"/>
+          <p:cNvSpPr/>
+          <p:nvPr/>
+        </p:nvSpPr>
+        <p:spPr>
+          <a:xfrm>
+            <a:off x="7595464" y="1700784"/>
+            <a:ext cx="4029304" cy="676656"/>
+          </a:xfrm>
+          <a:prstGeom prst="roundRect">
+            <a:avLst>
+              <a:gd name="adj" fmla="val 6757"/>
+            </a:avLst>
+          </a:prstGeom>
+          <a:solidFill>
+            <a:srgbClr val="F4F8FA"/>
+          </a:solidFill>
+          <a:ln w="12700">
+            <a:solidFill>
+              <a:srgbClr val="F4F8FA"/>
+            </a:solidFill>
+            <a:prstDash val="solid"/>
+          </a:ln>
+        </p:spPr>
+      </p:sp>
+      <p:sp>
+        <p:nvSpPr>
+          <p:cNvPr id="12" name="Text 10"/>
+          <p:cNvSpPr txBox="1"/>
+          <p:nvPr/>
+        </p:nvSpPr>
+        <p:spPr>
+          <a:xfrm>
+            <a:off x="7796632" y="1700784"/>
+            <a:ext cx="3626968" cy="676656"/>
+          </a:xfrm>
+          <a:prstGeom prst="rect">
+            <a:avLst/>
+          </a:prstGeom>
+          <a:noFill/>
+          <a:ln/>
+        </p:spPr>
+        <p:txBody>
+          <a:bodyPr wrap="square" lIns="0" tIns="0" rIns="0" bIns="0" rtlCol="0" anchor="ctr"/>
+          <a:lstStyle/>
+          <a:p>
+            <a:pPr indent="0" marL="0">
+              <a:lnSpc>
+                <a:spcPct val="115000"/>
+              </a:lnSpc>
+              <a:buNone/>
+            </a:pPr>
+            <a:r>
+              <a:rPr lang="en-US" sz="1350" b="1" dirty="0">
+                <a:solidFill>
+                  <a:srgbClr val="1A5276"/>
+                </a:solidFill>
+                <a:latin typeface="Meiryo" pitchFamily="34" charset="0"/>
+                <a:ea typeface="Meiryo" pitchFamily="34" charset="-122"/>
+                <a:cs typeface="Meiryo" pitchFamily="34" charset="-120"/>
+              </a:rPr>
+              <a:t>訪問看護ステーション</a:t>
+            </a:r>
+            <a:endParaRPr lang="en-US" sz="1350" dirty="0"/>
+          </a:p>
+          <a:p>
+            <a:pPr indent="0" marL="0">
+              <a:lnSpc>
+                <a:spcPct val="115000"/>
+              </a:lnSpc>
+              <a:buNone/>
+            </a:pPr>
+            <a:r>
+              <a:rPr lang="en-US" sz="1000" dirty="0">
+                <a:solidFill>
+                  <a:srgbClr val="566573"/>
+                </a:solidFill>
+                <a:latin typeface="Meiryo" pitchFamily="34" charset="0"/>
+                <a:ea typeface="Meiryo" pitchFamily="34" charset="-122"/>
+                <a:cs typeface="Meiryo" pitchFamily="34" charset="-120"/>
+              </a:rPr>
+              <a:t>観察所見の共有／医療処置の依頼</a:t>
+            </a:r>
+            <a:endParaRPr lang="en-US" sz="1350" dirty="0"/>
+          </a:p>
+        </p:txBody>
+      </p:sp>
+      <p:sp>
+        <p:nvSpPr>
+          <p:cNvPr id="13" name="Shape 11"/>
+          <p:cNvSpPr/>
+          <p:nvPr/>
+        </p:nvSpPr>
+        <p:spPr>
+          <a:xfrm>
+            <a:off x="3364992" y="2487168"/>
+            <a:ext cx="4029304" cy="676656"/>
+          </a:xfrm>
+          <a:prstGeom prst="roundRect">
+            <a:avLst>
+              <a:gd name="adj" fmla="val 6757"/>
+            </a:avLst>
+          </a:prstGeom>
+          <a:solidFill>
+            <a:srgbClr val="F4F8FA"/>
+          </a:solidFill>
+          <a:ln w="12700">
+            <a:solidFill>
+              <a:srgbClr val="F4F8FA"/>
+            </a:solidFill>
+            <a:prstDash val="solid"/>
+          </a:ln>
+        </p:spPr>
+      </p:sp>
+      <p:sp>
+        <p:nvSpPr>
+          <p:cNvPr id="14" name="Text 12"/>
+          <p:cNvSpPr txBox="1"/>
+          <p:nvPr/>
+        </p:nvSpPr>
+        <p:spPr>
+          <a:xfrm>
+            <a:off x="3566160" y="2487168"/>
+            <a:ext cx="3626968" cy="676656"/>
+          </a:xfrm>
+          <a:prstGeom prst="rect">
+            <a:avLst/>
+          </a:prstGeom>
+          <a:noFill/>
+          <a:ln/>
+        </p:spPr>
+        <p:txBody>
+          <a:bodyPr wrap="square" lIns="0" tIns="0" rIns="0" bIns="0" rtlCol="0" anchor="ctr"/>
+          <a:lstStyle/>
+          <a:p>
+            <a:pPr indent="0" marL="0">
+              <a:lnSpc>
+                <a:spcPct val="115000"/>
+              </a:lnSpc>
+              <a:buNone/>
+            </a:pPr>
+            <a:r>
+              <a:rPr lang="en-US" sz="1350" b="1" dirty="0">
+                <a:solidFill>
+                  <a:srgbClr val="1A5276"/>
+                </a:solidFill>
+                <a:latin typeface="Meiryo" pitchFamily="34" charset="0"/>
+                <a:ea typeface="Meiryo" pitchFamily="34" charset="-122"/>
+                <a:cs typeface="Meiryo" pitchFamily="34" charset="-120"/>
+              </a:rPr>
+              <a:t>ケアマネジャー</a:t>
+            </a:r>
+            <a:endParaRPr lang="en-US" sz="1350" dirty="0"/>
+          </a:p>
+          <a:p>
+            <a:pPr indent="0" marL="0">
+              <a:lnSpc>
+                <a:spcPct val="115000"/>
+              </a:lnSpc>
+              <a:buNone/>
+            </a:pPr>
+            <a:r>
+              <a:rPr lang="en-US" sz="1000" dirty="0">
+                <a:solidFill>
+                  <a:srgbClr val="566573"/>
+                </a:solidFill>
+                <a:latin typeface="Meiryo" pitchFamily="34" charset="0"/>
+                <a:ea typeface="Meiryo" pitchFamily="34" charset="-122"/>
+                <a:cs typeface="Meiryo" pitchFamily="34" charset="-120"/>
+              </a:rPr>
+              <a:t>状態変化・生活課題のフィードバック</a:t>
+            </a:r>
+            <a:endParaRPr lang="en-US" sz="1350" dirty="0"/>
+          </a:p>
+        </p:txBody>
+      </p:sp>
+      <p:sp>
+        <p:nvSpPr>
+          <p:cNvPr id="15" name="Shape 13"/>
+          <p:cNvSpPr/>
+          <p:nvPr/>
+        </p:nvSpPr>
+        <p:spPr>
+          <a:xfrm>
+            <a:off x="7595464" y="2487168"/>
+            <a:ext cx="4029304" cy="676656"/>
+          </a:xfrm>
+          <a:prstGeom prst="roundRect">
+            <a:avLst>
+              <a:gd name="adj" fmla="val 6757"/>
+            </a:avLst>
+          </a:prstGeom>
+          <a:solidFill>
+            <a:srgbClr val="F4F8FA"/>
+          </a:solidFill>
+          <a:ln w="12700">
+            <a:solidFill>
+              <a:srgbClr val="F4F8FA"/>
+            </a:solidFill>
+            <a:prstDash val="solid"/>
+          </a:ln>
+        </p:spPr>
+      </p:sp>
+      <p:sp>
+        <p:nvSpPr>
+          <p:cNvPr id="16" name="Text 14"/>
+          <p:cNvSpPr txBox="1"/>
+          <p:nvPr/>
+        </p:nvSpPr>
+        <p:spPr>
+          <a:xfrm>
+            <a:off x="7796632" y="2487168"/>
+            <a:ext cx="3626968" cy="676656"/>
+          </a:xfrm>
+          <a:prstGeom prst="rect">
+            <a:avLst/>
+          </a:prstGeom>
+          <a:noFill/>
+          <a:ln/>
+        </p:spPr>
+        <p:txBody>
+          <a:bodyPr wrap="square" lIns="0" tIns="0" rIns="0" bIns="0" rtlCol="0" anchor="ctr"/>
+          <a:lstStyle/>
+          <a:p>
+            <a:pPr indent="0" marL="0">
+              <a:lnSpc>
+                <a:spcPct val="115000"/>
+              </a:lnSpc>
+              <a:buNone/>
+            </a:pPr>
+            <a:r>
+              <a:rPr lang="en-US" sz="1350" b="1" dirty="0">
+                <a:solidFill>
+                  <a:srgbClr val="1A5276"/>
+                </a:solidFill>
+                <a:latin typeface="Meiryo" pitchFamily="34" charset="0"/>
+                <a:ea typeface="Meiryo" pitchFamily="34" charset="-122"/>
+                <a:cs typeface="Meiryo" pitchFamily="34" charset="-120"/>
+              </a:rPr>
+              <a:t>デイサービス・訪問介護</a:t>
+            </a:r>
+            <a:endParaRPr lang="en-US" sz="1350" dirty="0"/>
+          </a:p>
+          <a:p>
+            <a:pPr indent="0" marL="0">
+              <a:lnSpc>
+                <a:spcPct val="115000"/>
+              </a:lnSpc>
+              <a:buNone/>
+            </a:pPr>
+            <a:r>
+              <a:rPr lang="en-US" sz="1000" dirty="0">
+                <a:solidFill>
+                  <a:srgbClr val="566573"/>
+                </a:solidFill>
+                <a:latin typeface="Meiryo" pitchFamily="34" charset="0"/>
+                <a:ea typeface="Meiryo" pitchFamily="34" charset="-122"/>
+                <a:cs typeface="Meiryo" pitchFamily="34" charset="-120"/>
+              </a:rPr>
+              <a:t>入浴日の分担／スキンケアの継続</a:t>
+            </a:r>
+            <a:endParaRPr lang="en-US" sz="1350" dirty="0"/>
+          </a:p>
+        </p:txBody>
+      </p:sp>
+      <p:sp>
+        <p:nvSpPr>
+          <p:cNvPr id="17" name="Shape 15"/>
+          <p:cNvSpPr/>
+          <p:nvPr/>
+        </p:nvSpPr>
+        <p:spPr>
+          <a:xfrm>
+            <a:off x="566928" y="3419856"/>
+            <a:ext cx="5382616" cy="1517904"/>
+          </a:xfrm>
+          <a:prstGeom prst="roundRect">
+            <a:avLst>
+              <a:gd name="adj" fmla="val 3614"/>
+            </a:avLst>
+          </a:prstGeom>
+          <a:solidFill>
+            <a:srgbClr val="F4F8FA"/>
+          </a:solidFill>
+          <a:ln w="12700">
+            <a:solidFill>
+              <a:srgbClr val="F4F8FA"/>
+            </a:solidFill>
+            <a:prstDash val="solid"/>
+          </a:ln>
+        </p:spPr>
+      </p:sp>
+      <p:sp>
+        <p:nvSpPr>
+          <p:cNvPr id="18" name="Text 16"/>
+          <p:cNvSpPr txBox="1"/>
+          <p:nvPr/>
+        </p:nvSpPr>
+        <p:spPr>
+          <a:xfrm>
+            <a:off x="786384" y="3602736"/>
+            <a:ext cx="4943704" cy="310896"/>
+          </a:xfrm>
+          <a:prstGeom prst="rect">
+            <a:avLst/>
+          </a:prstGeom>
+          <a:noFill/>
+          <a:ln/>
+        </p:spPr>
+        <p:txBody>
+          <a:bodyPr wrap="square" lIns="0" tIns="0" rIns="0" bIns="0" rtlCol="0" anchor="ctr"/>
+          <a:lstStyle/>
+          <a:p>
+            <a:pPr indent="0" marL="0">
+              <a:buNone/>
+            </a:pPr>
+            <a:r>
+              <a:rPr lang="en-US" sz="1500" b="1" dirty="0">
+                <a:solidFill>
+                  <a:srgbClr val="1A5276"/>
+                </a:solidFill>
+                <a:latin typeface="Meiryo" pitchFamily="34" charset="0"/>
+                <a:ea typeface="Meiryo" pitchFamily="34" charset="-122"/>
+                <a:cs typeface="Meiryo" pitchFamily="34" charset="-120"/>
+              </a:rPr>
+              <a:t>「競合」ではありません</a:t>
+            </a:r>
+            <a:endParaRPr lang="en-US" sz="1500" dirty="0"/>
+          </a:p>
+        </p:txBody>
+      </p:sp>
+      <p:sp>
+        <p:nvSpPr>
+          <p:cNvPr id="19" name="Text 17"/>
+          <p:cNvSpPr txBox="1"/>
+          <p:nvPr/>
+        </p:nvSpPr>
+        <p:spPr>
+          <a:xfrm>
+            <a:off x="786384" y="4005072"/>
+            <a:ext cx="4943704" cy="786384"/>
+          </a:xfrm>
+          <a:prstGeom prst="rect">
+            <a:avLst/>
+          </a:prstGeom>
+          <a:noFill/>
+          <a:ln/>
+        </p:spPr>
+        <p:txBody>
+          <a:bodyPr wrap="square" lIns="0" tIns="0" rIns="0" bIns="0" rtlCol="0" anchor="t"/>
+          <a:lstStyle/>
+          <a:p>
+            <a:pPr indent="0" marL="0">
+              <a:lnSpc>
+                <a:spcPct val="125000"/>
+              </a:lnSpc>
+              <a:buNone/>
+            </a:pPr>
+            <a:r>
+              <a:rPr lang="en-US" sz="1250" dirty="0">
+                <a:solidFill>
+                  <a:srgbClr val="1C2833"/>
+                </a:solidFill>
+                <a:latin typeface="Meiryo" pitchFamily="34" charset="0"/>
+                <a:ea typeface="Meiryo" pitchFamily="34" charset="-122"/>
+                <a:cs typeface="Meiryo" pitchFamily="34" charset="-120"/>
+              </a:rPr>
+              <a:t>デイサービスに通えている間はデイでの入浴を。</a:t>
+            </a:r>
+            <a:pPr indent="0" marL="0">
+              <a:lnSpc>
+                <a:spcPct val="125000"/>
+              </a:lnSpc>
+              <a:buNone/>
+            </a:pPr>
+            <a:r>
+              <a:rPr lang="en-US" sz="1250" b="1" dirty="0">
+                <a:solidFill>
+                  <a:srgbClr val="1D9E75"/>
+                </a:solidFill>
+                <a:latin typeface="Meiryo" pitchFamily="34" charset="0"/>
+                <a:ea typeface="Meiryo" pitchFamily="34" charset="-122"/>
+                <a:cs typeface="Meiryo" pitchFamily="34" charset="-120"/>
+              </a:rPr>
+              <a:t>体調やADLの低下で通所が難しくなった時期</a:t>
+            </a:r>
+            <a:pPr indent="0" marL="0">
+              <a:lnSpc>
+                <a:spcPct val="125000"/>
+              </a:lnSpc>
+              <a:buNone/>
+            </a:pPr>
+            <a:r>
+              <a:rPr lang="en-US" sz="1250" dirty="0">
+                <a:solidFill>
+                  <a:srgbClr val="1C2833"/>
+                </a:solidFill>
+                <a:latin typeface="Meiryo" pitchFamily="34" charset="0"/>
+                <a:ea typeface="Meiryo" pitchFamily="34" charset="-122"/>
+                <a:cs typeface="Meiryo" pitchFamily="34" charset="-120"/>
+              </a:rPr>
+              <a:t>に訪問入浴が引き継ぐ、という補完関係です。</a:t>
+            </a:r>
+            <a:endParaRPr lang="en-US" sz="1250" dirty="0"/>
+          </a:p>
+        </p:txBody>
+      </p:sp>
+      <p:sp>
+        <p:nvSpPr>
+          <p:cNvPr id="20" name="Shape 18"/>
+          <p:cNvSpPr/>
+          <p:nvPr/>
+        </p:nvSpPr>
+        <p:spPr>
+          <a:xfrm>
+            <a:off x="6242152" y="3419856"/>
+            <a:ext cx="5382616" cy="1517904"/>
+          </a:xfrm>
+          <a:prstGeom prst="roundRect">
+            <a:avLst>
+              <a:gd name="adj" fmla="val 3614"/>
+            </a:avLst>
+          </a:prstGeom>
+          <a:solidFill>
+            <a:srgbClr val="EAF7F1"/>
+          </a:solidFill>
+          <a:ln w="12700">
+            <a:solidFill>
+              <a:srgbClr val="EAF7F1"/>
+            </a:solidFill>
+            <a:prstDash val="solid"/>
+          </a:ln>
+        </p:spPr>
+      </p:sp>
+      <p:sp>
+        <p:nvSpPr>
+          <p:cNvPr id="21" name="Text 19"/>
+          <p:cNvSpPr txBox="1"/>
+          <p:nvPr/>
+        </p:nvSpPr>
+        <p:spPr>
+          <a:xfrm>
+            <a:off x="6461608" y="3602736"/>
+            <a:ext cx="4943704" cy="310896"/>
+          </a:xfrm>
+          <a:prstGeom prst="rect">
+            <a:avLst/>
+          </a:prstGeom>
+          <a:noFill/>
+          <a:ln/>
+        </p:spPr>
+        <p:txBody>
+          <a:bodyPr wrap="square" lIns="0" tIns="0" rIns="0" bIns="0" rtlCol="0" anchor="ctr"/>
+          <a:lstStyle/>
+          <a:p>
+            <a:pPr indent="0" marL="0">
+              <a:buNone/>
+            </a:pPr>
+            <a:r>
+              <a:rPr lang="en-US" sz="1500" b="1" dirty="0">
+                <a:solidFill>
+                  <a:srgbClr val="1D9E75"/>
+                </a:solidFill>
+                <a:latin typeface="Meiryo" pitchFamily="34" charset="0"/>
+                <a:ea typeface="Meiryo" pitchFamily="34" charset="-122"/>
+                <a:cs typeface="Meiryo" pitchFamily="34" charset="-120"/>
+              </a:rPr>
+              <a:t>併用が最も現実的</a:t>
+            </a:r>
+            <a:endParaRPr lang="en-US" sz="1500" dirty="0"/>
+          </a:p>
+        </p:txBody>
+      </p:sp>
+      <p:sp>
+        <p:nvSpPr>
+          <p:cNvPr id="22" name="Text 20"/>
+          <p:cNvSpPr txBox="1"/>
+          <p:nvPr/>
+        </p:nvSpPr>
+        <p:spPr>
+          <a:xfrm>
+            <a:off x="6461608" y="4005072"/>
+            <a:ext cx="4943704" cy="786384"/>
+          </a:xfrm>
+          <a:prstGeom prst="rect">
+            <a:avLst/>
+          </a:prstGeom>
+          <a:noFill/>
+          <a:ln/>
+        </p:spPr>
+        <p:txBody>
+          <a:bodyPr wrap="square" lIns="0" tIns="0" rIns="0" bIns="0" rtlCol="0" anchor="t"/>
+          <a:lstStyle/>
+          <a:p>
+            <a:pPr indent="0" marL="0">
+              <a:lnSpc>
+                <a:spcPct val="125000"/>
+              </a:lnSpc>
+              <a:buNone/>
+            </a:pPr>
+            <a:r>
+              <a:rPr lang="en-US" sz="1250" dirty="0">
+                <a:solidFill>
+                  <a:srgbClr val="1C2833"/>
+                </a:solidFill>
+                <a:latin typeface="Meiryo" pitchFamily="34" charset="0"/>
+                <a:ea typeface="Meiryo" pitchFamily="34" charset="-122"/>
+                <a:cs typeface="Meiryo" pitchFamily="34" charset="-120"/>
+              </a:rPr>
+              <a:t>「デイ入浴＋訪問入浴」「訪問入浴の観察＋訪問看護の処置」。</a:t>
+            </a:r>
+            <a:pPr indent="0" marL="0">
+              <a:lnSpc>
+                <a:spcPct val="125000"/>
+              </a:lnSpc>
+              <a:buNone/>
+            </a:pPr>
+            <a:r>
+              <a:rPr lang="en-US" sz="1250" b="1" dirty="0">
+                <a:solidFill>
+                  <a:srgbClr val="1D9E75"/>
+                </a:solidFill>
+                <a:latin typeface="Meiryo" pitchFamily="34" charset="0"/>
+                <a:ea typeface="Meiryo" pitchFamily="34" charset="-122"/>
+                <a:cs typeface="Meiryo" pitchFamily="34" charset="-120"/>
+              </a:rPr>
+              <a:t>役割を分け合うことで在宅の限界点が延びます。</a:t>
+            </a:r>
+            <a:endParaRPr lang="en-US" sz="1250" dirty="0"/>
+          </a:p>
+        </p:txBody>
+      </p:sp>
+    </p:spTree>
+  </p:cSld>
+  <p:clrMapOvr>
+    <a:masterClrMapping/>
+  </p:clrMapOvr>
+</p:sld>
+</file>
+
+<file path=ppt/slides/slide12.xml><?xml version="1.0" encoding="utf-8"?>
+<p:sld xmlns:a="http://schemas.openxmlformats.org/drawingml/2006/main" xmlns:r="http://schemas.openxmlformats.org/officeDocument/2006/relationships" xmlns:p="http://schemas.openxmlformats.org/presentationml/2006/main">
+  <p:cSld name="Slide 12">
+    <p:spTree>
+      <p:nvGrpSpPr>
+        <p:cNvPr id="1" name=""/>
+        <p:cNvGrpSpPr/>
+        <p:nvPr/>
+      </p:nvGrpSpPr>
+      <p:grpSpPr>
+        <a:xfrm>
+          <a:off x="0" y="0"/>
+          <a:ext cx="0" cy="0"/>
+          <a:chOff x="0" y="0"/>
+          <a:chExt cx="0" cy="0"/>
+        </a:xfrm>
+      </p:grpSpPr>
+      <p:sp>
+        <p:nvSpPr>
+          <p:cNvPr id="2" name="Shape 0"/>
+          <p:cNvSpPr/>
+          <p:nvPr/>
+        </p:nvSpPr>
+        <p:spPr>
+          <a:xfrm>
+            <a:off x="566928" y="329184"/>
+            <a:ext cx="1481328" cy="310896"/>
+          </a:xfrm>
+          <a:prstGeom prst="roundRect">
+            <a:avLst>
+              <a:gd name="adj" fmla="val 14706"/>
+            </a:avLst>
+          </a:prstGeom>
+          <a:solidFill>
+            <a:srgbClr val="1A5276"/>
+          </a:solidFill>
+          <a:ln w="12700">
+            <a:solidFill>
+              <a:srgbClr val="1A5276"/>
+            </a:solidFill>
+            <a:prstDash val="solid"/>
+          </a:ln>
+        </p:spPr>
+      </p:sp>
+      <p:sp>
+        <p:nvSpPr>
+          <p:cNvPr id="3" name="Text 1"/>
+          <p:cNvSpPr txBox="1"/>
+          <p:nvPr/>
+        </p:nvSpPr>
+        <p:spPr>
+          <a:xfrm>
+            <a:off x="566928" y="329184"/>
+            <a:ext cx="1481328" cy="310896"/>
+          </a:xfrm>
+          <a:prstGeom prst="rect">
+            <a:avLst/>
+          </a:prstGeom>
+          <a:noFill/>
+          <a:ln/>
+        </p:spPr>
+        <p:txBody>
+          <a:bodyPr wrap="square" lIns="0" tIns="0" rIns="0" bIns="0" rtlCol="0" anchor="ctr"/>
+          <a:lstStyle/>
+          <a:p>
+            <a:pPr algn="ctr" indent="0" marL="0">
+              <a:buNone/>
+            </a:pPr>
+            <a:r>
+              <a:rPr lang="en-US" sz="1100" b="1" dirty="0">
+                <a:solidFill>
+                  <a:srgbClr val="FFFFFF"/>
+                </a:solidFill>
+                <a:latin typeface="Meiryo" pitchFamily="34" charset="0"/>
+                <a:ea typeface="Meiryo" pitchFamily="34" charset="-122"/>
+                <a:cs typeface="Meiryo" pitchFamily="34" charset="-120"/>
+              </a:rPr>
+              <a:t>CHAPTER 5</a:t>
+            </a:r>
+            <a:endParaRPr lang="en-US" sz="1100" dirty="0"/>
+          </a:p>
+        </p:txBody>
+      </p:sp>
+      <p:sp>
+        <p:nvSpPr>
+          <p:cNvPr id="4" name="Text 2"/>
+          <p:cNvSpPr txBox="1"/>
+          <p:nvPr/>
+        </p:nvSpPr>
+        <p:spPr>
+          <a:xfrm>
+            <a:off x="2194560" y="329184"/>
+            <a:ext cx="5486400" cy="310896"/>
+          </a:xfrm>
+          <a:prstGeom prst="rect">
+            <a:avLst/>
+          </a:prstGeom>
+          <a:noFill/>
+          <a:ln/>
+        </p:spPr>
+        <p:txBody>
+          <a:bodyPr wrap="square" lIns="0" tIns="0" rIns="0" bIns="0" rtlCol="0" anchor="ctr"/>
+          <a:lstStyle/>
+          <a:p>
+            <a:pPr indent="0" marL="0">
+              <a:buNone/>
+            </a:pPr>
+            <a:r>
+              <a:rPr lang="en-US" sz="1200" dirty="0">
+                <a:solidFill>
+                  <a:srgbClr val="566573"/>
+                </a:solidFill>
+                <a:latin typeface="Meiryo" pitchFamily="34" charset="0"/>
+                <a:ea typeface="Meiryo" pitchFamily="34" charset="-122"/>
+                <a:cs typeface="Meiryo" pitchFamily="34" charset="-120"/>
+              </a:rPr>
+              <a:t>介護報酬</a:t>
+            </a:r>
+            <a:endParaRPr lang="en-US" sz="1200" dirty="0"/>
+          </a:p>
+        </p:txBody>
+      </p:sp>
+      <p:sp>
+        <p:nvSpPr>
+          <p:cNvPr id="5" name="Text 3"/>
+          <p:cNvSpPr txBox="1"/>
+          <p:nvPr/>
+        </p:nvSpPr>
+        <p:spPr>
+          <a:xfrm>
+            <a:off x="566928" y="749808"/>
+            <a:ext cx="11057839" cy="566928"/>
+          </a:xfrm>
+          <a:prstGeom prst="rect">
+            <a:avLst/>
+          </a:prstGeom>
+          <a:noFill/>
+          <a:ln/>
+        </p:spPr>
+        <p:txBody>
+          <a:bodyPr wrap="square" lIns="0" tIns="0" rIns="0" bIns="0" rtlCol="0" anchor="ctr"/>
+          <a:lstStyle/>
+          <a:p>
+            <a:pPr indent="0" marL="0">
+              <a:buNone/>
+            </a:pPr>
+            <a:r>
+              <a:rPr lang="en-US" sz="3000" b="1" dirty="0">
+                <a:solidFill>
+                  <a:srgbClr val="1A5276"/>
+                </a:solidFill>
+                <a:latin typeface="Meiryo" pitchFamily="34" charset="0"/>
+                <a:ea typeface="Meiryo" pitchFamily="34" charset="-122"/>
+                <a:cs typeface="Meiryo" pitchFamily="34" charset="-120"/>
+              </a:rPr>
               <a:t>単位数と主な加算</a:t>
             </a:r>
             <a:endParaRPr lang="en-US" sz="3000" dirty="0"/>
@@ -2338,7 +4097,7 @@
       </p:sp>
       <p:graphicFrame>
         <p:nvGraphicFramePr>
-          <p:cNvPr id="11" name="Table 0"/>
+          <p:cNvPr id="13" name="Table 0"/>
           <p:cNvGraphicFramePr>
             <a:graphicFrameLocks noGrp="1"/>
           </p:cNvGraphicFramePr>
@@ -3949,9 +5708,9 @@
 </p:sld>
 </file>
 
-<file path=ppt/slides/slide11.xml><?xml version="1.0" encoding="utf-8"?>
+<file path=ppt/slides/slide13.xml><?xml version="1.0" encoding="utf-8"?>
 <p:sld xmlns:a="http://schemas.openxmlformats.org/drawingml/2006/main" xmlns:r="http://schemas.openxmlformats.org/officeDocument/2006/relationships" xmlns:p="http://schemas.openxmlformats.org/presentationml/2006/main">
-  <p:cSld name="Slide 11">
+  <p:cSld name="Slide 13">
     <p:spTree>
       <p:nvGrpSpPr>
         <p:cNvPr id="1" name=""/>
@@ -4410,9 +6169,9 @@
 </p:sld>
 </file>
 
-<file path=ppt/slides/slide12.xml><?xml version="1.0" encoding="utf-8"?>
+<file path=ppt/slides/slide14.xml><?xml version="1.0" encoding="utf-8"?>
 <p:sld xmlns:a="http://schemas.openxmlformats.org/drawingml/2006/main" xmlns:r="http://schemas.openxmlformats.org/officeDocument/2006/relationships" xmlns:p="http://schemas.openxmlformats.org/presentationml/2006/main">
-  <p:cSld name="Slide 12">
+  <p:cSld name="Slide 14">
     <p:spTree>
       <p:nvGrpSpPr>
         <p:cNvPr id="1" name=""/>
@@ -4722,7 +6481,7 @@
                 <a:ea typeface="Meiryo" pitchFamily="34" charset="-122"/>
                 <a:cs typeface="Meiryo" pitchFamily="34" charset="-120"/>
               </a:rPr>
-              <a:t>在宅チームへの情報のハブ</a:t>
+              <a:t>医療行為は行わず「見つけて、つなぐ」</a:t>
             </a:r>
             <a:pPr indent="0" marL="0">
               <a:spcAft>
@@ -4739,7 +6498,7 @@
                 <a:ea typeface="Meiryo" pitchFamily="34" charset="-122"/>
                 <a:cs typeface="Meiryo" pitchFamily="34" charset="-120"/>
               </a:rPr>
-              <a:t>——主治医・訪問看護・CMへその日のうちに共有。</a:t>
+              <a:t>——訪問看護と役割を分け合い、その日のうちに情報を共有。</a:t>
             </a:r>
             <a:endParaRPr lang="en-US" sz="1500" dirty="0"/>
           </a:p>
@@ -4881,9 +6640,9 @@
 </p:sld>
 </file>
 
-<file path=ppt/slides/slide13.xml><?xml version="1.0" encoding="utf-8"?>
+<file path=ppt/slides/slide15.xml><?xml version="1.0" encoding="utf-8"?>
 <p:sld xmlns:a="http://schemas.openxmlformats.org/drawingml/2006/main" xmlns:r="http://schemas.openxmlformats.org/officeDocument/2006/relationships" xmlns:p="http://schemas.openxmlformats.org/presentationml/2006/main">
-  <p:cSld name="Slide 13">
+  <p:cSld name="Slide 15">
     <p:bg>
       <p:bgPr>
         <a:solidFill>
@@ -10443,7 +12202,7 @@
                 <a:ea typeface="Meiryo" pitchFamily="34" charset="-122"/>
                 <a:cs typeface="Meiryo" pitchFamily="34" charset="-120"/>
               </a:rPr>
-              <a:t>訪問の流れ（滞在およそ45〜60分）</a:t>
+              <a:t>訪問の流れ（サービス提供時間 45分以内）</a:t>
             </a:r>
             <a:endParaRPr lang="en-US" sz="3000" dirty="0"/>
           </a:p>
@@ -10770,7 +12529,7 @@
                 <a:ea typeface="Meiryo" pitchFamily="34" charset="-122"/>
                 <a:cs typeface="Meiryo" pitchFamily="34" charset="-120"/>
               </a:rPr>
-              <a:t>浴槽を組立／10〜15分</a:t>
+              <a:t>浴槽を組立／約10分</a:t>
             </a:r>
             <a:endParaRPr lang="en-US" sz="1000" dirty="0"/>
           </a:p>
@@ -11136,7 +12895,7 @@
                 <a:ea typeface="Meiryo" pitchFamily="34" charset="-122"/>
                 <a:cs typeface="Meiryo" pitchFamily="34" charset="-120"/>
               </a:rPr>
-              <a:t>全身浴・洗髪／20〜30分</a:t>
+              <a:t>全身浴・洗髪／約20分</a:t>
             </a:r>
             <a:endParaRPr lang="en-US" sz="1000" dirty="0"/>
           </a:p>
@@ -11280,7 +13039,7 @@
                 <a:ea typeface="Meiryo" pitchFamily="34" charset="-122"/>
                 <a:cs typeface="Meiryo" pitchFamily="34" charset="-120"/>
               </a:rPr>
-              <a:t>スキンケア</a:t>
+              <a:t>更衣・保湿ケア</a:t>
             </a:r>
             <a:endParaRPr lang="en-US" sz="1350" dirty="0"/>
           </a:p>
@@ -11319,7 +13078,7 @@
                 <a:ea typeface="Meiryo" pitchFamily="34" charset="-122"/>
                 <a:cs typeface="Meiryo" pitchFamily="34" charset="-120"/>
               </a:rPr>
-              <a:t>保湿・軟膏塗布・褥瘡処置</a:t>
+              <a:t>整容・保湿（医療処置は行いません）</a:t>
             </a:r>
             <a:endParaRPr lang="en-US" sz="1000" dirty="0"/>
           </a:p>
@@ -12223,7 +13982,41 @@
                 <a:ea typeface="Meiryo" pitchFamily="34" charset="-122"/>
                 <a:cs typeface="Meiryo" pitchFamily="34" charset="-120"/>
               </a:rPr>
-              <a:t>褥瘡・創傷の観察と処置、軟膏塗布</a:t>
+              <a:t>褥瘡・創傷の</a:t>
+            </a:r>
+            <a:pPr indent="0" marL="0">
+              <a:spcAft>
+                <a:spcPts val="600"/>
+              </a:spcAft>
+              <a:buNone/>
+            </a:pPr>
+            <a:r>
+              <a:rPr lang="en-US" sz="1250" b="1" dirty="0">
+                <a:solidFill>
+                  <a:srgbClr val="1D9E75"/>
+                </a:solidFill>
+                <a:latin typeface="Meiryo" pitchFamily="34" charset="0"/>
+                <a:ea typeface="Meiryo" pitchFamily="34" charset="-122"/>
+                <a:cs typeface="Meiryo" pitchFamily="34" charset="-120"/>
+              </a:rPr>
+              <a:t>観察と記録</a:t>
+            </a:r>
+            <a:pPr indent="0" marL="0">
+              <a:spcAft>
+                <a:spcPts val="600"/>
+              </a:spcAft>
+              <a:buNone/>
+            </a:pPr>
+            <a:r>
+              <a:rPr lang="en-US" sz="1250" dirty="0">
+                <a:solidFill>
+                  <a:srgbClr val="1C2833"/>
+                </a:solidFill>
+                <a:latin typeface="Meiryo" pitchFamily="34" charset="0"/>
+                <a:ea typeface="Meiryo" pitchFamily="34" charset="-122"/>
+                <a:cs typeface="Meiryo" pitchFamily="34" charset="-120"/>
+              </a:rPr>
+              <a:t>（処置は訪問看護へ）</a:t>
             </a:r>
             <a:endParaRPr lang="en-US" sz="1250" dirty="0"/>
           </a:p>
@@ -12261,7 +14054,7 @@
                 <a:ea typeface="Meiryo" pitchFamily="34" charset="-122"/>
                 <a:cs typeface="Meiryo" pitchFamily="34" charset="-120"/>
               </a:rPr>
-              <a:t>初期対応と主治医への連絡</a:t>
+              <a:t>初期判断と主治医・訪問看護師への連絡</a:t>
             </a:r>
             <a:endParaRPr lang="en-US" sz="1250" dirty="0"/>
           </a:p>
@@ -13437,7 +15230,7 @@
                 <a:ea typeface="Meiryo" pitchFamily="34" charset="-122"/>
                 <a:cs typeface="Meiryo" pitchFamily="34" charset="-120"/>
               </a:rPr>
-              <a:t>処置の申し送り</a:t>
+              <a:t>観察所見の申し送り</a:t>
             </a:r>
             <a:endParaRPr lang="en-US" sz="1200" dirty="0"/>
           </a:p>
@@ -13765,7 +15558,7 @@
                 <a:ea typeface="Meiryo" pitchFamily="34" charset="-122"/>
                 <a:cs typeface="Meiryo" pitchFamily="34" charset="-120"/>
               </a:rPr>
-              <a:t>在宅チームの一員として</a:t>
+              <a:t>訪問入浴と訪問看護の役割分担</a:t>
             </a:r>
             <a:endParaRPr lang="en-US" sz="3000" dirty="0"/>
           </a:p>
@@ -13773,26 +15566,93 @@
       </p:sp>
       <p:sp>
         <p:nvSpPr>
-          <p:cNvPr id="6" name="Shape 4"/>
+          <p:cNvPr id="6" name="Text 4"/>
+          <p:cNvSpPr txBox="1"/>
+          <p:nvPr/>
+        </p:nvSpPr>
+        <p:spPr>
+          <a:xfrm>
+            <a:off x="566928" y="1444752"/>
+            <a:ext cx="11057839" cy="384048"/>
+          </a:xfrm>
+          <a:prstGeom prst="rect">
+            <a:avLst/>
+          </a:prstGeom>
+          <a:noFill/>
+          <a:ln/>
+        </p:spPr>
+        <p:txBody>
+          <a:bodyPr wrap="square" lIns="0" tIns="0" rIns="0" bIns="0" rtlCol="0" anchor="ctr"/>
+          <a:lstStyle/>
+          <a:p>
+            <a:pPr indent="0" marL="0">
+              <a:buNone/>
+            </a:pPr>
+            <a:r>
+              <a:rPr lang="en-US" sz="1500" dirty="0">
+                <a:solidFill>
+                  <a:srgbClr val="1A5276"/>
+                </a:solidFill>
+                <a:latin typeface="Meiryo" pitchFamily="34" charset="0"/>
+                <a:ea typeface="Meiryo" pitchFamily="34" charset="-122"/>
+                <a:cs typeface="Meiryo" pitchFamily="34" charset="-120"/>
+              </a:rPr>
+              <a:t>訪問入浴は介護保険サービスであり、</a:t>
+            </a:r>
+            <a:pPr indent="0" marL="0">
+              <a:buNone/>
+            </a:pPr>
+            <a:r>
+              <a:rPr lang="en-US" sz="1500" b="1" dirty="0">
+                <a:solidFill>
+                  <a:srgbClr val="1D9E75"/>
+                </a:solidFill>
+                <a:latin typeface="Meiryo" pitchFamily="34" charset="0"/>
+                <a:ea typeface="Meiryo" pitchFamily="34" charset="-122"/>
+                <a:cs typeface="Meiryo" pitchFamily="34" charset="-120"/>
+              </a:rPr>
+              <a:t>医療行為は行えません</a:t>
+            </a:r>
+            <a:pPr indent="0" marL="0">
+              <a:buNone/>
+            </a:pPr>
+            <a:r>
+              <a:rPr lang="en-US" sz="1500" dirty="0">
+                <a:solidFill>
+                  <a:srgbClr val="1A5276"/>
+                </a:solidFill>
+                <a:latin typeface="Meiryo" pitchFamily="34" charset="0"/>
+                <a:ea typeface="Meiryo" pitchFamily="34" charset="-122"/>
+                <a:cs typeface="Meiryo" pitchFamily="34" charset="-120"/>
+              </a:rPr>
+              <a:t>。だからこそ訪問看護との連携が欠かせません。</a:t>
+            </a:r>
+            <a:endParaRPr lang="en-US" sz="1500" dirty="0"/>
+          </a:p>
+        </p:txBody>
+      </p:sp>
+      <p:sp>
+        <p:nvSpPr>
+          <p:cNvPr id="7" name="Shape 5"/>
           <p:cNvSpPr/>
           <p:nvPr/>
         </p:nvSpPr>
         <p:spPr>
           <a:xfrm>
-            <a:off x="566928" y="1700784"/>
-            <a:ext cx="2286000" cy="1481328"/>
+            <a:off x="566928" y="1956816"/>
+            <a:ext cx="5382616" cy="2615184"/>
           </a:xfrm>
           <a:prstGeom prst="roundRect">
             <a:avLst>
-              <a:gd name="adj" fmla="val 4321"/>
+              <a:gd name="adj" fmla="val 2098"/>
             </a:avLst>
           </a:prstGeom>
           <a:solidFill>
-            <a:srgbClr val="1D9E75"/>
+            <a:srgbClr val="EAF7F1"/>
           </a:solidFill>
           <a:ln w="12700">
             <a:solidFill>
-              <a:srgbClr val="1D9E75"/>
+              <a:srgbClr val="EAF7F1"/>
             </a:solidFill>
             <a:prstDash val="solid"/>
           </a:ln>
@@ -13800,14 +15660,14 @@
       </p:sp>
       <p:sp>
         <p:nvSpPr>
-          <p:cNvPr id="7" name="Text 5"/>
+          <p:cNvPr id="8" name="Text 6"/>
           <p:cNvSpPr txBox="1"/>
           <p:nvPr/>
         </p:nvSpPr>
         <p:spPr>
           <a:xfrm>
-            <a:off x="658368" y="1700784"/>
-            <a:ext cx="2103120" cy="1481328"/>
+            <a:off x="786384" y="2139696"/>
+            <a:ext cx="4943704" cy="310896"/>
           </a:xfrm>
           <a:prstGeom prst="rect">
             <a:avLst/>
@@ -13819,57 +15679,34 @@
           <a:bodyPr wrap="square" lIns="0" tIns="0" rIns="0" bIns="0" rtlCol="0" anchor="ctr"/>
           <a:lstStyle/>
           <a:p>
-            <a:pPr algn="ctr" indent="0" marL="0">
-              <a:lnSpc>
-                <a:spcPct val="130000"/>
-              </a:lnSpc>
-              <a:buNone/>
-            </a:pPr>
-            <a:r>
-              <a:rPr lang="en-US" sz="1600" b="1" dirty="0">
-                <a:solidFill>
-                  <a:srgbClr val="FFFFFF"/>
-                </a:solidFill>
-                <a:latin typeface="Meiryo" pitchFamily="34" charset="0"/>
-                <a:ea typeface="Meiryo" pitchFamily="34" charset="-122"/>
-                <a:cs typeface="Meiryo" pitchFamily="34" charset="-120"/>
-              </a:rPr>
-              <a:t>訪問入浴介護</a:t>
-            </a:r>
-            <a:endParaRPr lang="en-US" sz="1600" dirty="0"/>
-          </a:p>
-          <a:p>
-            <a:pPr algn="ctr" indent="0" marL="0">
-              <a:lnSpc>
-                <a:spcPct val="130000"/>
-              </a:lnSpc>
-              <a:buNone/>
-            </a:pPr>
-            <a:r>
-              <a:rPr lang="en-US" sz="1050" dirty="0">
-                <a:solidFill>
-                  <a:srgbClr val="D6F3E6"/>
-                </a:solidFill>
-                <a:latin typeface="Meiryo" pitchFamily="34" charset="0"/>
-                <a:ea typeface="Meiryo" pitchFamily="34" charset="-122"/>
-                <a:cs typeface="Meiryo" pitchFamily="34" charset="-120"/>
-              </a:rPr>
-              <a:t>看護師1名＋介護2名</a:t>
-            </a:r>
-            <a:endParaRPr lang="en-US" sz="1600" dirty="0"/>
-          </a:p>
-        </p:txBody>
-      </p:sp>
-      <p:sp>
-        <p:nvSpPr>
-          <p:cNvPr id="8" name="Text 6"/>
+            <a:pPr indent="0" marL="0">
+              <a:buNone/>
+            </a:pPr>
+            <a:r>
+              <a:rPr lang="en-US" sz="1500" b="1" dirty="0">
+                <a:solidFill>
+                  <a:srgbClr val="1D9E75"/>
+                </a:solidFill>
+                <a:latin typeface="Meiryo" pitchFamily="34" charset="0"/>
+                <a:ea typeface="Meiryo" pitchFamily="34" charset="-122"/>
+                <a:cs typeface="Meiryo" pitchFamily="34" charset="-120"/>
+              </a:rPr>
+              <a:t>訪問入浴が担うこと</a:t>
+            </a:r>
+            <a:endParaRPr lang="en-US" sz="1500" dirty="0"/>
+          </a:p>
+        </p:txBody>
+      </p:sp>
+      <p:sp>
+        <p:nvSpPr>
+          <p:cNvPr id="9" name="Text 7"/>
           <p:cNvSpPr txBox="1"/>
           <p:nvPr/>
         </p:nvSpPr>
         <p:spPr>
           <a:xfrm>
-            <a:off x="2907792" y="1700784"/>
-            <a:ext cx="384048" cy="1481328"/>
+            <a:off x="786384" y="2542032"/>
+            <a:ext cx="4943704" cy="1883664"/>
           </a:xfrm>
           <a:prstGeom prst="rect">
             <a:avLst/>
@@ -13878,14 +15715,35 @@
           <a:ln/>
         </p:spPr>
         <p:txBody>
-          <a:bodyPr wrap="square" lIns="0" tIns="0" rIns="0" bIns="0" rtlCol="0" anchor="ctr"/>
-          <a:lstStyle/>
-          <a:p>
-            <a:pPr algn="ctr" indent="0" marL="0">
-              <a:buNone/>
-            </a:pPr>
-            <a:r>
-              <a:rPr lang="en-US" sz="2200" b="1" dirty="0">
+          <a:bodyPr wrap="square" lIns="0" tIns="0" rIns="0" bIns="0" rtlCol="0" anchor="t"/>
+          <a:lstStyle/>
+          <a:p>
+            <a:pPr marL="342900" indent="-342900">
+              <a:spcAft>
+                <a:spcPts val="600"/>
+              </a:spcAft>
+              <a:buSzPct val="100000"/>
+              <a:buChar char="●"/>
+            </a:pPr>
+            <a:r>
+              <a:rPr lang="en-US" sz="1250" dirty="0">
+                <a:solidFill>
+                  <a:srgbClr val="1C2833"/>
+                </a:solidFill>
+                <a:latin typeface="Meiryo" pitchFamily="34" charset="0"/>
+                <a:ea typeface="Meiryo" pitchFamily="34" charset="-122"/>
+                <a:cs typeface="Meiryo" pitchFamily="34" charset="-120"/>
+              </a:rPr>
+              <a:t>バイタル測定と</a:t>
+            </a:r>
+            <a:pPr indent="0" marL="0">
+              <a:spcAft>
+                <a:spcPts val="600"/>
+              </a:spcAft>
+              <a:buNone/>
+            </a:pPr>
+            <a:r>
+              <a:rPr lang="en-US" sz="1250" b="1" dirty="0">
                 <a:solidFill>
                   <a:srgbClr val="1D9E75"/>
                 </a:solidFill>
@@ -13893,26 +15751,157 @@
                 <a:ea typeface="Meiryo" pitchFamily="34" charset="-122"/>
                 <a:cs typeface="Meiryo" pitchFamily="34" charset="-120"/>
               </a:rPr>
-              <a:t>⇄</a:t>
-            </a:r>
-            <a:endParaRPr lang="en-US" sz="2200" dirty="0"/>
-          </a:p>
-        </p:txBody>
-      </p:sp>
-      <p:sp>
-        <p:nvSpPr>
-          <p:cNvPr id="9" name="Shape 7"/>
+              <a:t>入浴可否の判断</a:t>
+            </a:r>
+            <a:endParaRPr lang="en-US" sz="1250" dirty="0"/>
+          </a:p>
+          <a:p>
+            <a:pPr marL="342900" indent="-342900">
+              <a:spcAft>
+                <a:spcPts val="600"/>
+              </a:spcAft>
+              <a:buSzPct val="100000"/>
+              <a:buChar char="●"/>
+            </a:pPr>
+            <a:r>
+              <a:rPr lang="en-US" sz="1250" dirty="0">
+                <a:solidFill>
+                  <a:srgbClr val="1C2833"/>
+                </a:solidFill>
+                <a:latin typeface="Meiryo" pitchFamily="34" charset="0"/>
+                <a:ea typeface="Meiryo" pitchFamily="34" charset="-122"/>
+                <a:cs typeface="Meiryo" pitchFamily="34" charset="-120"/>
+              </a:rPr>
+              <a:t>入浴時の</a:t>
+            </a:r>
+            <a:pPr indent="0" marL="0">
+              <a:spcAft>
+                <a:spcPts val="600"/>
+              </a:spcAft>
+              <a:buNone/>
+            </a:pPr>
+            <a:r>
+              <a:rPr lang="en-US" sz="1250" b="1" dirty="0">
+                <a:solidFill>
+                  <a:srgbClr val="1D9E75"/>
+                </a:solidFill>
+                <a:latin typeface="Meiryo" pitchFamily="34" charset="0"/>
+                <a:ea typeface="Meiryo" pitchFamily="34" charset="-122"/>
+                <a:cs typeface="Meiryo" pitchFamily="34" charset="-120"/>
+              </a:rPr>
+              <a:t>全身観察</a:t>
+            </a:r>
+            <a:pPr indent="0" marL="0">
+              <a:spcAft>
+                <a:spcPts val="600"/>
+              </a:spcAft>
+              <a:buNone/>
+            </a:pPr>
+            <a:r>
+              <a:rPr lang="en-US" sz="1250" dirty="0">
+                <a:solidFill>
+                  <a:srgbClr val="1C2833"/>
+                </a:solidFill>
+                <a:latin typeface="Meiryo" pitchFamily="34" charset="0"/>
+                <a:ea typeface="Meiryo" pitchFamily="34" charset="-122"/>
+                <a:cs typeface="Meiryo" pitchFamily="34" charset="-120"/>
+              </a:rPr>
+              <a:t>（褥瘡・浮腫・皮膚）</a:t>
+            </a:r>
+            <a:endParaRPr lang="en-US" sz="1250" dirty="0"/>
+          </a:p>
+          <a:p>
+            <a:pPr marL="342900" indent="-342900">
+              <a:spcAft>
+                <a:spcPts val="600"/>
+              </a:spcAft>
+              <a:buSzPct val="100000"/>
+              <a:buChar char="●"/>
+            </a:pPr>
+            <a:r>
+              <a:rPr lang="en-US" sz="1250" dirty="0">
+                <a:solidFill>
+                  <a:srgbClr val="1C2833"/>
+                </a:solidFill>
+                <a:latin typeface="Meiryo" pitchFamily="34" charset="0"/>
+                <a:ea typeface="Meiryo" pitchFamily="34" charset="-122"/>
+                <a:cs typeface="Meiryo" pitchFamily="34" charset="-120"/>
+              </a:rPr>
+              <a:t>洗身・洗髪と</a:t>
+            </a:r>
+            <a:pPr indent="0" marL="0">
+              <a:spcAft>
+                <a:spcPts val="600"/>
+              </a:spcAft>
+              <a:buNone/>
+            </a:pPr>
+            <a:r>
+              <a:rPr lang="en-US" sz="1250" b="1" dirty="0">
+                <a:solidFill>
+                  <a:srgbClr val="1D9E75"/>
+                </a:solidFill>
+                <a:latin typeface="Meiryo" pitchFamily="34" charset="0"/>
+                <a:ea typeface="Meiryo" pitchFamily="34" charset="-122"/>
+                <a:cs typeface="Meiryo" pitchFamily="34" charset="-120"/>
+              </a:rPr>
+              <a:t>日常的な保湿ケア</a:t>
+            </a:r>
+            <a:endParaRPr lang="en-US" sz="1250" dirty="0"/>
+          </a:p>
+          <a:p>
+            <a:pPr marL="342900" indent="-342900">
+              <a:spcAft>
+                <a:spcPts val="600"/>
+              </a:spcAft>
+              <a:buSzPct val="100000"/>
+              <a:buChar char="●"/>
+            </a:pPr>
+            <a:r>
+              <a:rPr lang="en-US" sz="1250" dirty="0">
+                <a:solidFill>
+                  <a:srgbClr val="1C2833"/>
+                </a:solidFill>
+                <a:latin typeface="Meiryo" pitchFamily="34" charset="0"/>
+                <a:ea typeface="Meiryo" pitchFamily="34" charset="-122"/>
+                <a:cs typeface="Meiryo" pitchFamily="34" charset="-120"/>
+              </a:rPr>
+              <a:t>観察所見の</a:t>
+            </a:r>
+            <a:pPr indent="0" marL="0">
+              <a:spcAft>
+                <a:spcPts val="600"/>
+              </a:spcAft>
+              <a:buNone/>
+            </a:pPr>
+            <a:r>
+              <a:rPr lang="en-US" sz="1250" b="1" dirty="0">
+                <a:solidFill>
+                  <a:srgbClr val="1D9E75"/>
+                </a:solidFill>
+                <a:latin typeface="Meiryo" pitchFamily="34" charset="0"/>
+                <a:ea typeface="Meiryo" pitchFamily="34" charset="-122"/>
+                <a:cs typeface="Meiryo" pitchFamily="34" charset="-120"/>
+              </a:rPr>
+              <a:t>記録と当日中の報告</a:t>
+            </a:r>
+            <a:endParaRPr lang="en-US" sz="1250" dirty="0"/>
+          </a:p>
+        </p:txBody>
+      </p:sp>
+      <p:sp>
+        <p:nvSpPr>
+          <p:cNvPr id="10" name="Shape 8"/>
           <p:cNvSpPr/>
           <p:nvPr/>
         </p:nvSpPr>
         <p:spPr>
           <a:xfrm>
-            <a:off x="3364992" y="1700784"/>
-            <a:ext cx="4029304" cy="676656"/>
+            <a:off x="6242152" y="1956816"/>
+            <a:ext cx="5382616" cy="2615184"/>
           </a:xfrm>
           <a:prstGeom prst="roundRect">
             <a:avLst>
-              <a:gd name="adj" fmla="val 6757"/>
+              <a:gd name="adj" fmla="val 2098"/>
             </a:avLst>
           </a:prstGeom>
           <a:solidFill>
@@ -13928,14 +15917,14 @@
       </p:sp>
       <p:sp>
         <p:nvSpPr>
-          <p:cNvPr id="10" name="Text 8"/>
+          <p:cNvPr id="11" name="Text 9"/>
           <p:cNvSpPr txBox="1"/>
           <p:nvPr/>
         </p:nvSpPr>
         <p:spPr>
           <a:xfrm>
-            <a:off x="3566160" y="1700784"/>
-            <a:ext cx="3626968" cy="676656"/>
+            <a:off x="6461608" y="2139696"/>
+            <a:ext cx="4943704" cy="310896"/>
           </a:xfrm>
           <a:prstGeom prst="rect">
             <a:avLst/>
@@ -13948,13 +15937,10 @@
           <a:lstStyle/>
           <a:p>
             <a:pPr indent="0" marL="0">
-              <a:lnSpc>
-                <a:spcPct val="115000"/>
-              </a:lnSpc>
-              <a:buNone/>
-            </a:pPr>
-            <a:r>
-              <a:rPr lang="en-US" sz="1350" b="1" dirty="0">
+              <a:buNone/>
+            </a:pPr>
+            <a:r>
+              <a:rPr lang="en-US" sz="1500" b="1" dirty="0">
                 <a:solidFill>
                   <a:srgbClr val="1A5276"/>
                 </a:solidFill>
@@ -13962,46 +15948,204 @@
                 <a:ea typeface="Meiryo" pitchFamily="34" charset="-122"/>
                 <a:cs typeface="Meiryo" pitchFamily="34" charset="-120"/>
               </a:rPr>
-              <a:t>主治医・在宅医</a:t>
-            </a:r>
-            <a:endParaRPr lang="en-US" sz="1350" dirty="0"/>
-          </a:p>
-          <a:p>
-            <a:pPr indent="0" marL="0">
-              <a:lnSpc>
-                <a:spcPct val="115000"/>
-              </a:lnSpc>
-              <a:buNone/>
-            </a:pPr>
-            <a:r>
-              <a:rPr lang="en-US" sz="1000" dirty="0">
-                <a:solidFill>
-                  <a:srgbClr val="566573"/>
-                </a:solidFill>
-                <a:latin typeface="Meiryo" pitchFamily="34" charset="0"/>
-                <a:ea typeface="Meiryo" pitchFamily="34" charset="-122"/>
-                <a:cs typeface="Meiryo" pitchFamily="34" charset="-120"/>
-              </a:rPr>
-              <a:t>創部・全身状態の報告／指示の確認</a:t>
-            </a:r>
-            <a:endParaRPr lang="en-US" sz="1350" dirty="0"/>
-          </a:p>
-        </p:txBody>
-      </p:sp>
-      <p:sp>
-        <p:nvSpPr>
-          <p:cNvPr id="11" name="Shape 9"/>
+              <a:t>訪問看護におつなぎすること</a:t>
+            </a:r>
+            <a:endParaRPr lang="en-US" sz="1500" dirty="0"/>
+          </a:p>
+        </p:txBody>
+      </p:sp>
+      <p:sp>
+        <p:nvSpPr>
+          <p:cNvPr id="12" name="Text 10"/>
+          <p:cNvSpPr txBox="1"/>
+          <p:nvPr/>
+        </p:nvSpPr>
+        <p:spPr>
+          <a:xfrm>
+            <a:off x="6461608" y="2542032"/>
+            <a:ext cx="4943704" cy="1883664"/>
+          </a:xfrm>
+          <a:prstGeom prst="rect">
+            <a:avLst/>
+          </a:prstGeom>
+          <a:noFill/>
+          <a:ln/>
+        </p:spPr>
+        <p:txBody>
+          <a:bodyPr wrap="square" lIns="0" tIns="0" rIns="0" bIns="0" rtlCol="0" anchor="t"/>
+          <a:lstStyle/>
+          <a:p>
+            <a:pPr marL="342900" indent="-342900">
+              <a:spcAft>
+                <a:spcPts val="600"/>
+              </a:spcAft>
+              <a:buSzPct val="100000"/>
+              <a:buChar char="●"/>
+            </a:pPr>
+            <a:r>
+              <a:rPr lang="en-US" sz="1250" dirty="0">
+                <a:solidFill>
+                  <a:srgbClr val="1C2833"/>
+                </a:solidFill>
+                <a:latin typeface="Meiryo" pitchFamily="34" charset="0"/>
+                <a:ea typeface="Meiryo" pitchFamily="34" charset="-122"/>
+                <a:cs typeface="Meiryo" pitchFamily="34" charset="-120"/>
+              </a:rPr>
+              <a:t>褥瘡・創傷の</a:t>
+            </a:r>
+            <a:pPr indent="0" marL="0">
+              <a:spcAft>
+                <a:spcPts val="600"/>
+              </a:spcAft>
+              <a:buNone/>
+            </a:pPr>
+            <a:r>
+              <a:rPr lang="en-US" sz="1250" b="1" dirty="0">
+                <a:solidFill>
+                  <a:srgbClr val="1D9E75"/>
+                </a:solidFill>
+                <a:latin typeface="Meiryo" pitchFamily="34" charset="0"/>
+                <a:ea typeface="Meiryo" pitchFamily="34" charset="-122"/>
+                <a:cs typeface="Meiryo" pitchFamily="34" charset="-120"/>
+              </a:rPr>
+              <a:t>処置</a:t>
+            </a:r>
+            <a:pPr indent="0" marL="0">
+              <a:spcAft>
+                <a:spcPts val="600"/>
+              </a:spcAft>
+              <a:buNone/>
+            </a:pPr>
+            <a:r>
+              <a:rPr lang="en-US" sz="1250" dirty="0">
+                <a:solidFill>
+                  <a:srgbClr val="1C2833"/>
+                </a:solidFill>
+                <a:latin typeface="Meiryo" pitchFamily="34" charset="0"/>
+                <a:ea typeface="Meiryo" pitchFamily="34" charset="-122"/>
+                <a:cs typeface="Meiryo" pitchFamily="34" charset="-120"/>
+              </a:rPr>
+              <a:t>、薬剤の塗布</a:t>
+            </a:r>
+            <a:endParaRPr lang="en-US" sz="1250" dirty="0"/>
+          </a:p>
+          <a:p>
+            <a:pPr marL="342900" indent="-342900">
+              <a:spcAft>
+                <a:spcPts val="600"/>
+              </a:spcAft>
+              <a:buSzPct val="100000"/>
+              <a:buChar char="●"/>
+            </a:pPr>
+            <a:r>
+              <a:rPr lang="en-US" sz="1250" dirty="0">
+                <a:solidFill>
+                  <a:srgbClr val="1C2833"/>
+                </a:solidFill>
+                <a:latin typeface="Meiryo" pitchFamily="34" charset="0"/>
+                <a:ea typeface="Meiryo" pitchFamily="34" charset="-122"/>
+                <a:cs typeface="Meiryo" pitchFamily="34" charset="-120"/>
+              </a:rPr>
+              <a:t>点滴・注射・採血</a:t>
+            </a:r>
+            <a:endParaRPr lang="en-US" sz="1250" dirty="0"/>
+          </a:p>
+          <a:p>
+            <a:pPr marL="342900" indent="-342900">
+              <a:spcAft>
+                <a:spcPts val="600"/>
+              </a:spcAft>
+              <a:buSzPct val="100000"/>
+              <a:buChar char="●"/>
+            </a:pPr>
+            <a:r>
+              <a:rPr lang="en-US" sz="1250" dirty="0">
+                <a:solidFill>
+                  <a:srgbClr val="1C2833"/>
+                </a:solidFill>
+                <a:latin typeface="Meiryo" pitchFamily="34" charset="0"/>
+                <a:ea typeface="Meiryo" pitchFamily="34" charset="-122"/>
+                <a:cs typeface="Meiryo" pitchFamily="34" charset="-120"/>
+              </a:rPr>
+              <a:t>カテーテル・ストーマの管理</a:t>
+            </a:r>
+            <a:endParaRPr lang="en-US" sz="1250" dirty="0"/>
+          </a:p>
+          <a:p>
+            <a:pPr marL="342900" indent="-342900">
+              <a:spcAft>
+                <a:spcPts val="600"/>
+              </a:spcAft>
+              <a:buSzPct val="100000"/>
+              <a:buChar char="●"/>
+            </a:pPr>
+            <a:r>
+              <a:rPr lang="en-US" sz="1250" dirty="0">
+                <a:solidFill>
+                  <a:srgbClr val="1C2833"/>
+                </a:solidFill>
+                <a:latin typeface="Meiryo" pitchFamily="34" charset="0"/>
+                <a:ea typeface="Meiryo" pitchFamily="34" charset="-122"/>
+                <a:cs typeface="Meiryo" pitchFamily="34" charset="-120"/>
+              </a:rPr>
+              <a:t>喀痰吸引・経管栄養の管理</a:t>
+            </a:r>
+            <a:endParaRPr lang="en-US" sz="1250" dirty="0"/>
+          </a:p>
+          <a:p>
+            <a:pPr marL="342900" indent="-342900">
+              <a:spcAft>
+                <a:spcPts val="600"/>
+              </a:spcAft>
+              <a:buSzPct val="100000"/>
+              <a:buChar char="●"/>
+            </a:pPr>
+            <a:r>
+              <a:rPr lang="en-US" sz="1250" dirty="0">
+                <a:solidFill>
+                  <a:srgbClr val="1C2833"/>
+                </a:solidFill>
+                <a:latin typeface="Meiryo" pitchFamily="34" charset="0"/>
+                <a:ea typeface="Meiryo" pitchFamily="34" charset="-122"/>
+                <a:cs typeface="Meiryo" pitchFamily="34" charset="-120"/>
+              </a:rPr>
+              <a:t>医師の指示に基づく</a:t>
+            </a:r>
+            <a:pPr indent="0" marL="0">
+              <a:spcAft>
+                <a:spcPts val="600"/>
+              </a:spcAft>
+              <a:buNone/>
+            </a:pPr>
+            <a:r>
+              <a:rPr lang="en-US" sz="1250" b="1" dirty="0">
+                <a:solidFill>
+                  <a:srgbClr val="1D9E75"/>
+                </a:solidFill>
+                <a:latin typeface="Meiryo" pitchFamily="34" charset="0"/>
+                <a:ea typeface="Meiryo" pitchFamily="34" charset="-122"/>
+                <a:cs typeface="Meiryo" pitchFamily="34" charset="-120"/>
+              </a:rPr>
+              <a:t>医療的ケア全般</a:t>
+            </a:r>
+            <a:endParaRPr lang="en-US" sz="1250" dirty="0"/>
+          </a:p>
+        </p:txBody>
+      </p:sp>
+      <p:sp>
+        <p:nvSpPr>
+          <p:cNvPr id="13" name="Shape 11"/>
           <p:cNvSpPr/>
           <p:nvPr/>
         </p:nvSpPr>
         <p:spPr>
           <a:xfrm>
-            <a:off x="7595464" y="1700784"/>
-            <a:ext cx="4029304" cy="676656"/>
+            <a:off x="566928" y="4736592"/>
+            <a:ext cx="11057839" cy="804672"/>
           </a:xfrm>
           <a:prstGeom prst="roundRect">
             <a:avLst>
-              <a:gd name="adj" fmla="val 6757"/>
+              <a:gd name="adj" fmla="val 6818"/>
             </a:avLst>
           </a:prstGeom>
           <a:solidFill>
@@ -14017,14 +16161,14 @@
       </p:sp>
       <p:sp>
         <p:nvSpPr>
-          <p:cNvPr id="12" name="Text 10"/>
+          <p:cNvPr id="14" name="Text 12"/>
           <p:cNvSpPr txBox="1"/>
           <p:nvPr/>
         </p:nvSpPr>
         <p:spPr>
           <a:xfrm>
-            <a:off x="7796632" y="1700784"/>
-            <a:ext cx="3626968" cy="676656"/>
+            <a:off x="822960" y="4736592"/>
+            <a:ext cx="10545775" cy="804672"/>
           </a:xfrm>
           <a:prstGeom prst="rect">
             <a:avLst/>
@@ -14038,487 +16182,56 @@
           <a:p>
             <a:pPr indent="0" marL="0">
               <a:lnSpc>
-                <a:spcPct val="115000"/>
+                <a:spcPct val="130000"/>
               </a:lnSpc>
               <a:buNone/>
             </a:pPr>
             <a:r>
-              <a:rPr lang="en-US" sz="1350" b="1" dirty="0">
-                <a:solidFill>
-                  <a:srgbClr val="1A5276"/>
-                </a:solidFill>
-                <a:latin typeface="Meiryo" pitchFamily="34" charset="0"/>
-                <a:ea typeface="Meiryo" pitchFamily="34" charset="-122"/>
-                <a:cs typeface="Meiryo" pitchFamily="34" charset="-120"/>
-              </a:rPr>
-              <a:t>訪問看護ステーション</a:t>
-            </a:r>
-            <a:endParaRPr lang="en-US" sz="1350" dirty="0"/>
-          </a:p>
-          <a:p>
+              <a:rPr lang="en-US" sz="1500" dirty="0">
+                <a:solidFill>
+                  <a:srgbClr val="1C2833"/>
+                </a:solidFill>
+                <a:latin typeface="Meiryo" pitchFamily="34" charset="0"/>
+                <a:ea typeface="Meiryo" pitchFamily="34" charset="-122"/>
+                <a:cs typeface="Meiryo" pitchFamily="34" charset="-120"/>
+              </a:rPr>
+              <a:t>私たちの役割は</a:t>
+            </a:r>
             <a:pPr indent="0" marL="0">
               <a:lnSpc>
-                <a:spcPct val="115000"/>
+                <a:spcPct val="130000"/>
               </a:lnSpc>
               <a:buNone/>
             </a:pPr>
             <a:r>
-              <a:rPr lang="en-US" sz="1000" dirty="0">
-                <a:solidFill>
-                  <a:srgbClr val="566573"/>
-                </a:solidFill>
-                <a:latin typeface="Meiryo" pitchFamily="34" charset="0"/>
-                <a:ea typeface="Meiryo" pitchFamily="34" charset="-122"/>
-                <a:cs typeface="Meiryo" pitchFamily="34" charset="-120"/>
-              </a:rPr>
-              <a:t>処置内容の共有／訪問日の調整</a:t>
-            </a:r>
-            <a:endParaRPr lang="en-US" sz="1350" dirty="0"/>
-          </a:p>
-        </p:txBody>
-      </p:sp>
-      <p:sp>
-        <p:nvSpPr>
-          <p:cNvPr id="13" name="Shape 11"/>
-          <p:cNvSpPr/>
-          <p:nvPr/>
-        </p:nvSpPr>
-        <p:spPr>
-          <a:xfrm>
-            <a:off x="3364992" y="2487168"/>
-            <a:ext cx="4029304" cy="676656"/>
-          </a:xfrm>
-          <a:prstGeom prst="roundRect">
-            <a:avLst>
-              <a:gd name="adj" fmla="val 6757"/>
-            </a:avLst>
-          </a:prstGeom>
-          <a:solidFill>
-            <a:srgbClr val="F4F8FA"/>
-          </a:solidFill>
-          <a:ln w="12700">
-            <a:solidFill>
-              <a:srgbClr val="F4F8FA"/>
-            </a:solidFill>
-            <a:prstDash val="solid"/>
-          </a:ln>
-        </p:spPr>
-      </p:sp>
-      <p:sp>
-        <p:nvSpPr>
-          <p:cNvPr id="14" name="Text 12"/>
-          <p:cNvSpPr txBox="1"/>
-          <p:nvPr/>
-        </p:nvSpPr>
-        <p:spPr>
-          <a:xfrm>
-            <a:off x="3566160" y="2487168"/>
-            <a:ext cx="3626968" cy="676656"/>
-          </a:xfrm>
-          <a:prstGeom prst="rect">
-            <a:avLst/>
-          </a:prstGeom>
-          <a:noFill/>
-          <a:ln/>
-        </p:spPr>
-        <p:txBody>
-          <a:bodyPr wrap="square" lIns="0" tIns="0" rIns="0" bIns="0" rtlCol="0" anchor="ctr"/>
-          <a:lstStyle/>
-          <a:p>
+              <a:rPr lang="en-US" sz="1500" b="1" dirty="0">
+                <a:solidFill>
+                  <a:srgbClr val="1D9E75"/>
+                </a:solidFill>
+                <a:latin typeface="Meiryo" pitchFamily="34" charset="0"/>
+                <a:ea typeface="Meiryo" pitchFamily="34" charset="-122"/>
+                <a:cs typeface="Meiryo" pitchFamily="34" charset="-120"/>
+              </a:rPr>
+              <a:t>「見つけて、つなぐ」</a:t>
+            </a:r>
             <a:pPr indent="0" marL="0">
               <a:lnSpc>
-                <a:spcPct val="115000"/>
+                <a:spcPct val="130000"/>
               </a:lnSpc>
               <a:buNone/>
             </a:pPr>
             <a:r>
-              <a:rPr lang="en-US" sz="1350" b="1" dirty="0">
-                <a:solidFill>
-                  <a:srgbClr val="1A5276"/>
-                </a:solidFill>
-                <a:latin typeface="Meiryo" pitchFamily="34" charset="0"/>
-                <a:ea typeface="Meiryo" pitchFamily="34" charset="-122"/>
-                <a:cs typeface="Meiryo" pitchFamily="34" charset="-120"/>
-              </a:rPr>
-              <a:t>ケアマネジャー</a:t>
-            </a:r>
-            <a:endParaRPr lang="en-US" sz="1350" dirty="0"/>
-          </a:p>
-          <a:p>
-            <a:pPr indent="0" marL="0">
-              <a:lnSpc>
-                <a:spcPct val="115000"/>
-              </a:lnSpc>
-              <a:buNone/>
-            </a:pPr>
-            <a:r>
-              <a:rPr lang="en-US" sz="1000" dirty="0">
-                <a:solidFill>
-                  <a:srgbClr val="566573"/>
-                </a:solidFill>
-                <a:latin typeface="Meiryo" pitchFamily="34" charset="0"/>
-                <a:ea typeface="Meiryo" pitchFamily="34" charset="-122"/>
-                <a:cs typeface="Meiryo" pitchFamily="34" charset="-120"/>
-              </a:rPr>
-              <a:t>状態変化・生活課題のフィードバック</a:t>
-            </a:r>
-            <a:endParaRPr lang="en-US" sz="1350" dirty="0"/>
-          </a:p>
-        </p:txBody>
-      </p:sp>
-      <p:sp>
-        <p:nvSpPr>
-          <p:cNvPr id="15" name="Shape 13"/>
-          <p:cNvSpPr/>
-          <p:nvPr/>
-        </p:nvSpPr>
-        <p:spPr>
-          <a:xfrm>
-            <a:off x="7595464" y="2487168"/>
-            <a:ext cx="4029304" cy="676656"/>
-          </a:xfrm>
-          <a:prstGeom prst="roundRect">
-            <a:avLst>
-              <a:gd name="adj" fmla="val 6757"/>
-            </a:avLst>
-          </a:prstGeom>
-          <a:solidFill>
-            <a:srgbClr val="F4F8FA"/>
-          </a:solidFill>
-          <a:ln w="12700">
-            <a:solidFill>
-              <a:srgbClr val="F4F8FA"/>
-            </a:solidFill>
-            <a:prstDash val="solid"/>
-          </a:ln>
-        </p:spPr>
-      </p:sp>
-      <p:sp>
-        <p:nvSpPr>
-          <p:cNvPr id="16" name="Text 14"/>
-          <p:cNvSpPr txBox="1"/>
-          <p:nvPr/>
-        </p:nvSpPr>
-        <p:spPr>
-          <a:xfrm>
-            <a:off x="7796632" y="2487168"/>
-            <a:ext cx="3626968" cy="676656"/>
-          </a:xfrm>
-          <a:prstGeom prst="rect">
-            <a:avLst/>
-          </a:prstGeom>
-          <a:noFill/>
-          <a:ln/>
-        </p:spPr>
-        <p:txBody>
-          <a:bodyPr wrap="square" lIns="0" tIns="0" rIns="0" bIns="0" rtlCol="0" anchor="ctr"/>
-          <a:lstStyle/>
-          <a:p>
-            <a:pPr indent="0" marL="0">
-              <a:lnSpc>
-                <a:spcPct val="115000"/>
-              </a:lnSpc>
-              <a:buNone/>
-            </a:pPr>
-            <a:r>
-              <a:rPr lang="en-US" sz="1350" b="1" dirty="0">
-                <a:solidFill>
-                  <a:srgbClr val="1A5276"/>
-                </a:solidFill>
-                <a:latin typeface="Meiryo" pitchFamily="34" charset="0"/>
-                <a:ea typeface="Meiryo" pitchFamily="34" charset="-122"/>
-                <a:cs typeface="Meiryo" pitchFamily="34" charset="-120"/>
-              </a:rPr>
-              <a:t>デイサービス・訪問介護</a:t>
-            </a:r>
-            <a:endParaRPr lang="en-US" sz="1350" dirty="0"/>
-          </a:p>
-          <a:p>
-            <a:pPr indent="0" marL="0">
-              <a:lnSpc>
-                <a:spcPct val="115000"/>
-              </a:lnSpc>
-              <a:buNone/>
-            </a:pPr>
-            <a:r>
-              <a:rPr lang="en-US" sz="1000" dirty="0">
-                <a:solidFill>
-                  <a:srgbClr val="566573"/>
-                </a:solidFill>
-                <a:latin typeface="Meiryo" pitchFamily="34" charset="0"/>
-                <a:ea typeface="Meiryo" pitchFamily="34" charset="-122"/>
-                <a:cs typeface="Meiryo" pitchFamily="34" charset="-120"/>
-              </a:rPr>
-              <a:t>入浴日の分担／スキンケアの継続</a:t>
-            </a:r>
-            <a:endParaRPr lang="en-US" sz="1350" dirty="0"/>
-          </a:p>
-        </p:txBody>
-      </p:sp>
-      <p:sp>
-        <p:nvSpPr>
-          <p:cNvPr id="17" name="Shape 15"/>
-          <p:cNvSpPr/>
-          <p:nvPr/>
-        </p:nvSpPr>
-        <p:spPr>
-          <a:xfrm>
-            <a:off x="566928" y="3419856"/>
-            <a:ext cx="5382616" cy="1517904"/>
-          </a:xfrm>
-          <a:prstGeom prst="roundRect">
-            <a:avLst>
-              <a:gd name="adj" fmla="val 3614"/>
-            </a:avLst>
-          </a:prstGeom>
-          <a:solidFill>
-            <a:srgbClr val="F4F8FA"/>
-          </a:solidFill>
-          <a:ln w="12700">
-            <a:solidFill>
-              <a:srgbClr val="F4F8FA"/>
-            </a:solidFill>
-            <a:prstDash val="solid"/>
-          </a:ln>
-        </p:spPr>
-      </p:sp>
-      <p:sp>
-        <p:nvSpPr>
-          <p:cNvPr id="18" name="Text 16"/>
-          <p:cNvSpPr txBox="1"/>
-          <p:nvPr/>
-        </p:nvSpPr>
-        <p:spPr>
-          <a:xfrm>
-            <a:off x="786384" y="3602736"/>
-            <a:ext cx="4943704" cy="310896"/>
-          </a:xfrm>
-          <a:prstGeom prst="rect">
-            <a:avLst/>
-          </a:prstGeom>
-          <a:noFill/>
-          <a:ln/>
-        </p:spPr>
-        <p:txBody>
-          <a:bodyPr wrap="square" lIns="0" tIns="0" rIns="0" bIns="0" rtlCol="0" anchor="ctr"/>
-          <a:lstStyle/>
-          <a:p>
-            <a:pPr indent="0" marL="0">
-              <a:buNone/>
-            </a:pPr>
-            <a:r>
-              <a:rPr lang="en-US" sz="1500" b="1" dirty="0">
-                <a:solidFill>
-                  <a:srgbClr val="1A5276"/>
-                </a:solidFill>
-                <a:latin typeface="Meiryo" pitchFamily="34" charset="0"/>
-                <a:ea typeface="Meiryo" pitchFamily="34" charset="-122"/>
-                <a:cs typeface="Meiryo" pitchFamily="34" charset="-120"/>
-              </a:rPr>
-              <a:t>「競合」ではありません</a:t>
+              <a:rPr lang="en-US" sz="1500" dirty="0">
+                <a:solidFill>
+                  <a:srgbClr val="1C2833"/>
+                </a:solidFill>
+                <a:latin typeface="Meiryo" pitchFamily="34" charset="0"/>
+                <a:ea typeface="Meiryo" pitchFamily="34" charset="-122"/>
+                <a:cs typeface="Meiryo" pitchFamily="34" charset="-120"/>
+              </a:rPr>
+              <a:t>こと。処置は訪問看護へ——この線引きを明確にすることが、安全な在宅ケアにつながります。</a:t>
             </a:r>
             <a:endParaRPr lang="en-US" sz="1500" dirty="0"/>
-          </a:p>
-        </p:txBody>
-      </p:sp>
-      <p:sp>
-        <p:nvSpPr>
-          <p:cNvPr id="19" name="Text 17"/>
-          <p:cNvSpPr txBox="1"/>
-          <p:nvPr/>
-        </p:nvSpPr>
-        <p:spPr>
-          <a:xfrm>
-            <a:off x="786384" y="4005072"/>
-            <a:ext cx="4943704" cy="786384"/>
-          </a:xfrm>
-          <a:prstGeom prst="rect">
-            <a:avLst/>
-          </a:prstGeom>
-          <a:noFill/>
-          <a:ln/>
-        </p:spPr>
-        <p:txBody>
-          <a:bodyPr wrap="square" lIns="0" tIns="0" rIns="0" bIns="0" rtlCol="0" anchor="t"/>
-          <a:lstStyle/>
-          <a:p>
-            <a:pPr indent="0" marL="0">
-              <a:lnSpc>
-                <a:spcPct val="125000"/>
-              </a:lnSpc>
-              <a:buNone/>
-            </a:pPr>
-            <a:r>
-              <a:rPr lang="en-US" sz="1250" dirty="0">
-                <a:solidFill>
-                  <a:srgbClr val="1C2833"/>
-                </a:solidFill>
-                <a:latin typeface="Meiryo" pitchFamily="34" charset="0"/>
-                <a:ea typeface="Meiryo" pitchFamily="34" charset="-122"/>
-                <a:cs typeface="Meiryo" pitchFamily="34" charset="-120"/>
-              </a:rPr>
-              <a:t>デイサービスに通えている間はデイでの入浴を。</a:t>
-            </a:r>
-            <a:pPr indent="0" marL="0">
-              <a:lnSpc>
-                <a:spcPct val="125000"/>
-              </a:lnSpc>
-              <a:buNone/>
-            </a:pPr>
-            <a:r>
-              <a:rPr lang="en-US" sz="1250" b="1" dirty="0">
-                <a:solidFill>
-                  <a:srgbClr val="1D9E75"/>
-                </a:solidFill>
-                <a:latin typeface="Meiryo" pitchFamily="34" charset="0"/>
-                <a:ea typeface="Meiryo" pitchFamily="34" charset="-122"/>
-                <a:cs typeface="Meiryo" pitchFamily="34" charset="-120"/>
-              </a:rPr>
-              <a:t>体調やADLの低下で通所が難しくなった時期</a:t>
-            </a:r>
-            <a:pPr indent="0" marL="0">
-              <a:lnSpc>
-                <a:spcPct val="125000"/>
-              </a:lnSpc>
-              <a:buNone/>
-            </a:pPr>
-            <a:r>
-              <a:rPr lang="en-US" sz="1250" dirty="0">
-                <a:solidFill>
-                  <a:srgbClr val="1C2833"/>
-                </a:solidFill>
-                <a:latin typeface="Meiryo" pitchFamily="34" charset="0"/>
-                <a:ea typeface="Meiryo" pitchFamily="34" charset="-122"/>
-                <a:cs typeface="Meiryo" pitchFamily="34" charset="-120"/>
-              </a:rPr>
-              <a:t>に訪問入浴が引き継ぐ、という補完関係です。</a:t>
-            </a:r>
-            <a:endParaRPr lang="en-US" sz="1250" dirty="0"/>
-          </a:p>
-        </p:txBody>
-      </p:sp>
-      <p:sp>
-        <p:nvSpPr>
-          <p:cNvPr id="20" name="Shape 18"/>
-          <p:cNvSpPr/>
-          <p:nvPr/>
-        </p:nvSpPr>
-        <p:spPr>
-          <a:xfrm>
-            <a:off x="6242152" y="3419856"/>
-            <a:ext cx="5382616" cy="1517904"/>
-          </a:xfrm>
-          <a:prstGeom prst="roundRect">
-            <a:avLst>
-              <a:gd name="adj" fmla="val 3614"/>
-            </a:avLst>
-          </a:prstGeom>
-          <a:solidFill>
-            <a:srgbClr val="EAF7F1"/>
-          </a:solidFill>
-          <a:ln w="12700">
-            <a:solidFill>
-              <a:srgbClr val="EAF7F1"/>
-            </a:solidFill>
-            <a:prstDash val="solid"/>
-          </a:ln>
-        </p:spPr>
-      </p:sp>
-      <p:sp>
-        <p:nvSpPr>
-          <p:cNvPr id="21" name="Text 19"/>
-          <p:cNvSpPr txBox="1"/>
-          <p:nvPr/>
-        </p:nvSpPr>
-        <p:spPr>
-          <a:xfrm>
-            <a:off x="6461608" y="3602736"/>
-            <a:ext cx="4943704" cy="310896"/>
-          </a:xfrm>
-          <a:prstGeom prst="rect">
-            <a:avLst/>
-          </a:prstGeom>
-          <a:noFill/>
-          <a:ln/>
-        </p:spPr>
-        <p:txBody>
-          <a:bodyPr wrap="square" lIns="0" tIns="0" rIns="0" bIns="0" rtlCol="0" anchor="ctr"/>
-          <a:lstStyle/>
-          <a:p>
-            <a:pPr indent="0" marL="0">
-              <a:buNone/>
-            </a:pPr>
-            <a:r>
-              <a:rPr lang="en-US" sz="1500" b="1" dirty="0">
-                <a:solidFill>
-                  <a:srgbClr val="1D9E75"/>
-                </a:solidFill>
-                <a:latin typeface="Meiryo" pitchFamily="34" charset="0"/>
-                <a:ea typeface="Meiryo" pitchFamily="34" charset="-122"/>
-                <a:cs typeface="Meiryo" pitchFamily="34" charset="-120"/>
-              </a:rPr>
-              <a:t>併用が最も現実的</a:t>
-            </a:r>
-            <a:endParaRPr lang="en-US" sz="1500" dirty="0"/>
-          </a:p>
-        </p:txBody>
-      </p:sp>
-      <p:sp>
-        <p:nvSpPr>
-          <p:cNvPr id="22" name="Text 20"/>
-          <p:cNvSpPr txBox="1"/>
-          <p:nvPr/>
-        </p:nvSpPr>
-        <p:spPr>
-          <a:xfrm>
-            <a:off x="6461608" y="4005072"/>
-            <a:ext cx="4943704" cy="786384"/>
-          </a:xfrm>
-          <a:prstGeom prst="rect">
-            <a:avLst/>
-          </a:prstGeom>
-          <a:noFill/>
-          <a:ln/>
-        </p:spPr>
-        <p:txBody>
-          <a:bodyPr wrap="square" lIns="0" tIns="0" rIns="0" bIns="0" rtlCol="0" anchor="t"/>
-          <a:lstStyle/>
-          <a:p>
-            <a:pPr indent="0" marL="0">
-              <a:lnSpc>
-                <a:spcPct val="125000"/>
-              </a:lnSpc>
-              <a:buNone/>
-            </a:pPr>
-            <a:r>
-              <a:rPr lang="en-US" sz="1250" dirty="0">
-                <a:solidFill>
-                  <a:srgbClr val="1C2833"/>
-                </a:solidFill>
-                <a:latin typeface="Meiryo" pitchFamily="34" charset="0"/>
-                <a:ea typeface="Meiryo" pitchFamily="34" charset="-122"/>
-                <a:cs typeface="Meiryo" pitchFamily="34" charset="-120"/>
-              </a:rPr>
-              <a:t>「デイ入浴＋訪問入浴」「訪問看護の処置＋訪問入浴のスキンケア」。</a:t>
-            </a:r>
-            <a:pPr indent="0" marL="0">
-              <a:lnSpc>
-                <a:spcPct val="125000"/>
-              </a:lnSpc>
-              <a:buNone/>
-            </a:pPr>
-            <a:r>
-              <a:rPr lang="en-US" sz="1250" b="1" dirty="0">
-                <a:solidFill>
-                  <a:srgbClr val="1D9E75"/>
-                </a:solidFill>
-                <a:latin typeface="Meiryo" pitchFamily="34" charset="0"/>
-                <a:ea typeface="Meiryo" pitchFamily="34" charset="-122"/>
-                <a:cs typeface="Meiryo" pitchFamily="34" charset="-120"/>
-              </a:rPr>
-              <a:t>役割を分け合うことで在宅の限界点が延びます。</a:t>
-            </a:r>
-            <a:endParaRPr lang="en-US" sz="1250" dirty="0"/>
           </a:p>
         </p:txBody>
       </p:sp>

--- a/houmon-nyuyoku-slides.pptx
+++ b/houmon-nyuyoku-slides.pptx
@@ -1484,7 +1484,7 @@
           <a:p>
             <a:r>
               <a:rPr lang="en-US" dirty="0"/>
-              <a:t>全6ステップ。バイタル確認から記録までが看護師の関わる部分です。中止判断も含めて必ず報告します。</a:t>
+              <a:t>準備・入浴・片付けの3区分、各15分で計45分以内です。入浴可否の判断と記録・連絡が看護師の関わる部分になります。</a:t>
             </a:r>
             <a:endParaRPr lang="en-US" dirty="0"/>
           </a:p>
@@ -12217,11 +12217,11 @@
         <p:spPr>
           <a:xfrm>
             <a:off x="566928" y="1554480"/>
-            <a:ext cx="1721053" cy="1371600"/>
+            <a:ext cx="3478682" cy="2286000"/>
           </a:xfrm>
           <a:prstGeom prst="roundRect">
             <a:avLst>
-              <a:gd name="adj" fmla="val 4000"/>
+              <a:gd name="adj" fmla="val 2800"/>
             </a:avLst>
           </a:prstGeom>
           <a:solidFill>
@@ -12237,14 +12237,41 @@
       </p:sp>
       <p:sp>
         <p:nvSpPr>
-          <p:cNvPr id="7" name="Text 5"/>
+          <p:cNvPr id="7" name="Shape 5"/>
+          <p:cNvSpPr/>
+          <p:nvPr/>
+        </p:nvSpPr>
+        <p:spPr>
+          <a:xfrm>
+            <a:off x="1830781" y="1773936"/>
+            <a:ext cx="950976" cy="329184"/>
+          </a:xfrm>
+          <a:prstGeom prst="roundRect">
+            <a:avLst>
+              <a:gd name="adj" fmla="val 13889"/>
+            </a:avLst>
+          </a:prstGeom>
+          <a:solidFill>
+            <a:srgbClr val="1A5276"/>
+          </a:solidFill>
+          <a:ln w="12700">
+            <a:solidFill>
+              <a:srgbClr val="1A5276"/>
+            </a:solidFill>
+            <a:prstDash val="solid"/>
+          </a:ln>
+        </p:spPr>
+      </p:sp>
+      <p:sp>
+        <p:nvSpPr>
+          <p:cNvPr id="8" name="Text 6"/>
           <p:cNvSpPr txBox="1"/>
           <p:nvPr/>
         </p:nvSpPr>
         <p:spPr>
           <a:xfrm>
-            <a:off x="621792" y="1664208"/>
-            <a:ext cx="1611325" cy="219456"/>
+            <a:off x="1830781" y="1773936"/>
+            <a:ext cx="950976" cy="329184"/>
           </a:xfrm>
           <a:prstGeom prst="rect">
             <a:avLst/>
@@ -12260,30 +12287,30 @@
               <a:buNone/>
             </a:pPr>
             <a:r>
-              <a:rPr lang="en-US" sz="950" b="1" dirty="0">
-                <a:solidFill>
-                  <a:srgbClr val="566573"/>
-                </a:solidFill>
-                <a:latin typeface="Meiryo" pitchFamily="34" charset="0"/>
-                <a:ea typeface="Meiryo" pitchFamily="34" charset="-122"/>
-                <a:cs typeface="Meiryo" pitchFamily="34" charset="-120"/>
-              </a:rPr>
-              <a:t>STEP 1</a:t>
-            </a:r>
-            <a:endParaRPr lang="en-US" sz="950" dirty="0"/>
-          </a:p>
-        </p:txBody>
-      </p:sp>
-      <p:sp>
-        <p:nvSpPr>
-          <p:cNvPr id="8" name="Text 6"/>
+              <a:rPr lang="en-US" sz="1300" b="1" dirty="0">
+                <a:solidFill>
+                  <a:srgbClr val="FFFFFF"/>
+                </a:solidFill>
+                <a:latin typeface="Meiryo" pitchFamily="34" charset="0"/>
+                <a:ea typeface="Meiryo" pitchFamily="34" charset="-122"/>
+                <a:cs typeface="Meiryo" pitchFamily="34" charset="-120"/>
+              </a:rPr>
+              <a:t>15分</a:t>
+            </a:r>
+            <a:endParaRPr lang="en-US" sz="1300" dirty="0"/>
+          </a:p>
+        </p:txBody>
+      </p:sp>
+      <p:sp>
+        <p:nvSpPr>
+          <p:cNvPr id="9" name="Text 7"/>
           <p:cNvSpPr txBox="1"/>
           <p:nvPr/>
         </p:nvSpPr>
         <p:spPr>
           <a:xfrm>
-            <a:off x="621792" y="1901952"/>
-            <a:ext cx="1611325" cy="310896"/>
+            <a:off x="676656" y="2212848"/>
+            <a:ext cx="3259226" cy="365760"/>
           </a:xfrm>
           <a:prstGeom prst="rect">
             <a:avLst/>
@@ -12299,7 +12326,7 @@
               <a:buNone/>
             </a:pPr>
             <a:r>
-              <a:rPr lang="en-US" sz="1350" b="1" dirty="0">
+              <a:rPr lang="en-US" sz="2000" b="1" dirty="0">
                 <a:solidFill>
                   <a:srgbClr val="1A5276"/>
                 </a:solidFill>
@@ -12307,22 +12334,22 @@
                 <a:ea typeface="Meiryo" pitchFamily="34" charset="-122"/>
                 <a:cs typeface="Meiryo" pitchFamily="34" charset="-120"/>
               </a:rPr>
-              <a:t>到着・ご挨拶</a:t>
-            </a:r>
-            <a:endParaRPr lang="en-US" sz="1350" dirty="0"/>
-          </a:p>
-        </p:txBody>
-      </p:sp>
-      <p:sp>
-        <p:nvSpPr>
-          <p:cNvPr id="9" name="Text 7"/>
+              <a:t>準備・設置</a:t>
+            </a:r>
+            <a:endParaRPr lang="en-US" sz="2000" dirty="0"/>
+          </a:p>
+        </p:txBody>
+      </p:sp>
+      <p:sp>
+        <p:nvSpPr>
+          <p:cNvPr id="10" name="Text 8"/>
           <p:cNvSpPr txBox="1"/>
           <p:nvPr/>
         </p:nvSpPr>
         <p:spPr>
           <a:xfrm>
-            <a:off x="621792" y="2231136"/>
-            <a:ext cx="1611325" cy="548640"/>
+            <a:off x="676656" y="2633472"/>
+            <a:ext cx="3259226" cy="1097280"/>
           </a:xfrm>
           <a:prstGeom prst="rect">
             <a:avLst/>
@@ -12335,10 +12362,13 @@
           <a:lstStyle/>
           <a:p>
             <a:pPr algn="ctr" indent="0" marL="0">
-              <a:buNone/>
-            </a:pPr>
-            <a:r>
-              <a:rPr lang="en-US" sz="1000" dirty="0">
+              <a:lnSpc>
+                <a:spcPct val="135000"/>
+              </a:lnSpc>
+              <a:buNone/>
+            </a:pPr>
+            <a:r>
+              <a:rPr lang="en-US" sz="1250" dirty="0">
                 <a:solidFill>
                   <a:srgbClr val="566573"/>
                 </a:solidFill>
@@ -12346,22 +12376,62 @@
                 <a:ea typeface="Meiryo" pitchFamily="34" charset="-122"/>
                 <a:cs typeface="Meiryo" pitchFamily="34" charset="-120"/>
               </a:rPr>
-              <a:t>体調の確認</a:t>
-            </a:r>
-            <a:endParaRPr lang="en-US" sz="1000" dirty="0"/>
-          </a:p>
-        </p:txBody>
-      </p:sp>
-      <p:sp>
-        <p:nvSpPr>
-          <p:cNvPr id="10" name="Text 8"/>
+              <a:t>到着・ご挨拶／当日の体調確認</a:t>
+            </a:r>
+            <a:endParaRPr lang="en-US" sz="1250" dirty="0"/>
+          </a:p>
+          <a:p>
+            <a:pPr algn="ctr" indent="0" marL="0">
+              <a:lnSpc>
+                <a:spcPct val="135000"/>
+              </a:lnSpc>
+              <a:buNone/>
+            </a:pPr>
+            <a:r>
+              <a:rPr lang="en-US" sz="1250" dirty="0">
+                <a:solidFill>
+                  <a:srgbClr val="566573"/>
+                </a:solidFill>
+                <a:latin typeface="Meiryo" pitchFamily="34" charset="0"/>
+                <a:ea typeface="Meiryo" pitchFamily="34" charset="-122"/>
+                <a:cs typeface="Meiryo" pitchFamily="34" charset="-120"/>
+              </a:rPr>
+              <a:t>専用浴槽の搬入・組立</a:t>
+            </a:r>
+            <a:endParaRPr lang="en-US" sz="1250" dirty="0"/>
+          </a:p>
+          <a:p>
+            <a:pPr algn="ctr" indent="0" marL="0">
+              <a:lnSpc>
+                <a:spcPct val="135000"/>
+              </a:lnSpc>
+              <a:buNone/>
+            </a:pPr>
+            <a:r>
+              <a:rPr lang="en-US" sz="1250" dirty="0">
+                <a:solidFill>
+                  <a:srgbClr val="566573"/>
+                </a:solidFill>
+                <a:latin typeface="Meiryo" pitchFamily="34" charset="0"/>
+                <a:ea typeface="Meiryo" pitchFamily="34" charset="-122"/>
+                <a:cs typeface="Meiryo" pitchFamily="34" charset="-120"/>
+              </a:rPr>
+              <a:t>バイタル確認と入浴可否の判断</a:t>
+            </a:r>
+            <a:endParaRPr lang="en-US" sz="1250" dirty="0"/>
+          </a:p>
+        </p:txBody>
+      </p:sp>
+      <p:sp>
+        <p:nvSpPr>
+          <p:cNvPr id="11" name="Text 9"/>
           <p:cNvSpPr txBox="1"/>
           <p:nvPr/>
         </p:nvSpPr>
         <p:spPr>
           <a:xfrm>
-            <a:off x="2287981" y="1554480"/>
-            <a:ext cx="146304" cy="1371600"/>
+            <a:off x="4045610" y="1554480"/>
+            <a:ext cx="310896" cy="2286000"/>
           </a:xfrm>
           <a:prstGeom prst="rect">
             <a:avLst/>
@@ -12377,7 +12447,7 @@
               <a:buNone/>
             </a:pPr>
             <a:r>
-              <a:rPr lang="en-US" sz="1600" b="1" dirty="0">
+              <a:rPr lang="en-US" sz="2600" b="1" dirty="0">
                 <a:solidFill>
                   <a:srgbClr val="BDC3C7"/>
                 </a:solidFill>
@@ -12387,24 +12457,277 @@
               </a:rPr>
               <a:t>›</a:t>
             </a:r>
-            <a:endParaRPr lang="en-US" sz="1600" dirty="0"/>
-          </a:p>
-        </p:txBody>
-      </p:sp>
-      <p:sp>
-        <p:nvSpPr>
-          <p:cNvPr id="11" name="Shape 9"/>
+            <a:endParaRPr lang="en-US" sz="2600" dirty="0"/>
+          </a:p>
+        </p:txBody>
+      </p:sp>
+      <p:sp>
+        <p:nvSpPr>
+          <p:cNvPr id="12" name="Shape 10"/>
           <p:cNvSpPr/>
           <p:nvPr/>
         </p:nvSpPr>
         <p:spPr>
           <a:xfrm>
-            <a:off x="2434285" y="1554480"/>
-            <a:ext cx="1721053" cy="1371600"/>
+            <a:off x="4356506" y="1554480"/>
+            <a:ext cx="3478682" cy="2286000"/>
           </a:xfrm>
           <a:prstGeom prst="roundRect">
             <a:avLst>
-              <a:gd name="adj" fmla="val 4000"/>
+              <a:gd name="adj" fmla="val 2800"/>
+            </a:avLst>
+          </a:prstGeom>
+          <a:solidFill>
+            <a:srgbClr val="EAF7F1"/>
+          </a:solidFill>
+          <a:ln w="12700">
+            <a:solidFill>
+              <a:srgbClr val="EAF7F1"/>
+            </a:solidFill>
+            <a:prstDash val="solid"/>
+          </a:ln>
+        </p:spPr>
+      </p:sp>
+      <p:sp>
+        <p:nvSpPr>
+          <p:cNvPr id="13" name="Shape 11"/>
+          <p:cNvSpPr/>
+          <p:nvPr/>
+        </p:nvSpPr>
+        <p:spPr>
+          <a:xfrm>
+            <a:off x="5620360" y="1773936"/>
+            <a:ext cx="950976" cy="329184"/>
+          </a:xfrm>
+          <a:prstGeom prst="roundRect">
+            <a:avLst>
+              <a:gd name="adj" fmla="val 13889"/>
+            </a:avLst>
+          </a:prstGeom>
+          <a:solidFill>
+            <a:srgbClr val="1D9E75"/>
+          </a:solidFill>
+          <a:ln w="12700">
+            <a:solidFill>
+              <a:srgbClr val="1D9E75"/>
+            </a:solidFill>
+            <a:prstDash val="solid"/>
+          </a:ln>
+        </p:spPr>
+      </p:sp>
+      <p:sp>
+        <p:nvSpPr>
+          <p:cNvPr id="14" name="Text 12"/>
+          <p:cNvSpPr txBox="1"/>
+          <p:nvPr/>
+        </p:nvSpPr>
+        <p:spPr>
+          <a:xfrm>
+            <a:off x="5620360" y="1773936"/>
+            <a:ext cx="950976" cy="329184"/>
+          </a:xfrm>
+          <a:prstGeom prst="rect">
+            <a:avLst/>
+          </a:prstGeom>
+          <a:noFill/>
+          <a:ln/>
+        </p:spPr>
+        <p:txBody>
+          <a:bodyPr wrap="square" lIns="0" tIns="0" rIns="0" bIns="0" rtlCol="0" anchor="ctr"/>
+          <a:lstStyle/>
+          <a:p>
+            <a:pPr algn="ctr" indent="0" marL="0">
+              <a:buNone/>
+            </a:pPr>
+            <a:r>
+              <a:rPr lang="en-US" sz="1300" b="1" dirty="0">
+                <a:solidFill>
+                  <a:srgbClr val="FFFFFF"/>
+                </a:solidFill>
+                <a:latin typeface="Meiryo" pitchFamily="34" charset="0"/>
+                <a:ea typeface="Meiryo" pitchFamily="34" charset="-122"/>
+                <a:cs typeface="Meiryo" pitchFamily="34" charset="-120"/>
+              </a:rPr>
+              <a:t>15分</a:t>
+            </a:r>
+            <a:endParaRPr lang="en-US" sz="1300" dirty="0"/>
+          </a:p>
+        </p:txBody>
+      </p:sp>
+      <p:sp>
+        <p:nvSpPr>
+          <p:cNvPr id="15" name="Text 13"/>
+          <p:cNvSpPr txBox="1"/>
+          <p:nvPr/>
+        </p:nvSpPr>
+        <p:spPr>
+          <a:xfrm>
+            <a:off x="4466234" y="2212848"/>
+            <a:ext cx="3259226" cy="365760"/>
+          </a:xfrm>
+          <a:prstGeom prst="rect">
+            <a:avLst/>
+          </a:prstGeom>
+          <a:noFill/>
+          <a:ln/>
+        </p:spPr>
+        <p:txBody>
+          <a:bodyPr wrap="square" lIns="0" tIns="0" rIns="0" bIns="0" rtlCol="0" anchor="ctr"/>
+          <a:lstStyle/>
+          <a:p>
+            <a:pPr algn="ctr" indent="0" marL="0">
+              <a:buNone/>
+            </a:pPr>
+            <a:r>
+              <a:rPr lang="en-US" sz="2000" b="1" dirty="0">
+                <a:solidFill>
+                  <a:srgbClr val="1A5276"/>
+                </a:solidFill>
+                <a:latin typeface="Meiryo" pitchFamily="34" charset="0"/>
+                <a:ea typeface="Meiryo" pitchFamily="34" charset="-122"/>
+                <a:cs typeface="Meiryo" pitchFamily="34" charset="-120"/>
+              </a:rPr>
+              <a:t>入　浴</a:t>
+            </a:r>
+            <a:endParaRPr lang="en-US" sz="2000" dirty="0"/>
+          </a:p>
+        </p:txBody>
+      </p:sp>
+      <p:sp>
+        <p:nvSpPr>
+          <p:cNvPr id="16" name="Text 14"/>
+          <p:cNvSpPr txBox="1"/>
+          <p:nvPr/>
+        </p:nvSpPr>
+        <p:spPr>
+          <a:xfrm>
+            <a:off x="4466234" y="2633472"/>
+            <a:ext cx="3259226" cy="1097280"/>
+          </a:xfrm>
+          <a:prstGeom prst="rect">
+            <a:avLst/>
+          </a:prstGeom>
+          <a:noFill/>
+          <a:ln/>
+        </p:spPr>
+        <p:txBody>
+          <a:bodyPr wrap="square" lIns="0" tIns="0" rIns="0" bIns="0" rtlCol="0" anchor="t"/>
+          <a:lstStyle/>
+          <a:p>
+            <a:pPr algn="ctr" indent="0" marL="0">
+              <a:lnSpc>
+                <a:spcPct val="135000"/>
+              </a:lnSpc>
+              <a:buNone/>
+            </a:pPr>
+            <a:r>
+              <a:rPr lang="en-US" sz="1250" dirty="0">
+                <a:solidFill>
+                  <a:srgbClr val="566573"/>
+                </a:solidFill>
+                <a:latin typeface="Meiryo" pitchFamily="34" charset="0"/>
+                <a:ea typeface="Meiryo" pitchFamily="34" charset="-122"/>
+                <a:cs typeface="Meiryo" pitchFamily="34" charset="-120"/>
+              </a:rPr>
+              <a:t>全身浴・洗髪</a:t>
+            </a:r>
+            <a:endParaRPr lang="en-US" sz="1250" dirty="0"/>
+          </a:p>
+          <a:p>
+            <a:pPr algn="ctr" indent="0" marL="0">
+              <a:lnSpc>
+                <a:spcPct val="135000"/>
+              </a:lnSpc>
+              <a:buNone/>
+            </a:pPr>
+            <a:r>
+              <a:rPr lang="en-US" sz="1250" dirty="0">
+                <a:solidFill>
+                  <a:srgbClr val="566573"/>
+                </a:solidFill>
+                <a:latin typeface="Meiryo" pitchFamily="34" charset="0"/>
+                <a:ea typeface="Meiryo" pitchFamily="34" charset="-122"/>
+                <a:cs typeface="Meiryo" pitchFamily="34" charset="-120"/>
+              </a:rPr>
+              <a:t>入浴中の全身観察</a:t>
+            </a:r>
+            <a:endParaRPr lang="en-US" sz="1250" dirty="0"/>
+          </a:p>
+          <a:p>
+            <a:pPr algn="ctr" indent="0" marL="0">
+              <a:lnSpc>
+                <a:spcPct val="135000"/>
+              </a:lnSpc>
+              <a:buNone/>
+            </a:pPr>
+            <a:r>
+              <a:rPr lang="en-US" sz="1250" dirty="0">
+                <a:solidFill>
+                  <a:srgbClr val="566573"/>
+                </a:solidFill>
+                <a:latin typeface="Meiryo" pitchFamily="34" charset="0"/>
+                <a:ea typeface="Meiryo" pitchFamily="34" charset="-122"/>
+                <a:cs typeface="Meiryo" pitchFamily="34" charset="-120"/>
+              </a:rPr>
+              <a:t>（褥瘡・浮腫・皮膚の状態）</a:t>
+            </a:r>
+            <a:endParaRPr lang="en-US" sz="1250" dirty="0"/>
+          </a:p>
+        </p:txBody>
+      </p:sp>
+      <p:sp>
+        <p:nvSpPr>
+          <p:cNvPr id="17" name="Text 15"/>
+          <p:cNvSpPr txBox="1"/>
+          <p:nvPr/>
+        </p:nvSpPr>
+        <p:spPr>
+          <a:xfrm>
+            <a:off x="7835189" y="1554480"/>
+            <a:ext cx="310896" cy="2286000"/>
+          </a:xfrm>
+          <a:prstGeom prst="rect">
+            <a:avLst/>
+          </a:prstGeom>
+          <a:noFill/>
+          <a:ln/>
+        </p:spPr>
+        <p:txBody>
+          <a:bodyPr wrap="square" lIns="0" tIns="0" rIns="0" bIns="0" rtlCol="0" anchor="ctr"/>
+          <a:lstStyle/>
+          <a:p>
+            <a:pPr algn="ctr" indent="0" marL="0">
+              <a:buNone/>
+            </a:pPr>
+            <a:r>
+              <a:rPr lang="en-US" sz="2600" b="1" dirty="0">
+                <a:solidFill>
+                  <a:srgbClr val="BDC3C7"/>
+                </a:solidFill>
+                <a:latin typeface="Meiryo" pitchFamily="34" charset="0"/>
+                <a:ea typeface="Meiryo" pitchFamily="34" charset="-122"/>
+                <a:cs typeface="Meiryo" pitchFamily="34" charset="-120"/>
+              </a:rPr>
+              <a:t>›</a:t>
+            </a:r>
+            <a:endParaRPr lang="en-US" sz="2600" dirty="0"/>
+          </a:p>
+        </p:txBody>
+      </p:sp>
+      <p:sp>
+        <p:nvSpPr>
+          <p:cNvPr id="18" name="Shape 16"/>
+          <p:cNvSpPr/>
+          <p:nvPr/>
+        </p:nvSpPr>
+        <p:spPr>
+          <a:xfrm>
+            <a:off x="8146085" y="1554480"/>
+            <a:ext cx="3478682" cy="2286000"/>
+          </a:xfrm>
+          <a:prstGeom prst="roundRect">
+            <a:avLst>
+              <a:gd name="adj" fmla="val 2800"/>
             </a:avLst>
           </a:prstGeom>
           <a:solidFill>
@@ -12420,14 +12743,41 @@
       </p:sp>
       <p:sp>
         <p:nvSpPr>
-          <p:cNvPr id="12" name="Text 10"/>
+          <p:cNvPr id="19" name="Shape 17"/>
+          <p:cNvSpPr/>
+          <p:nvPr/>
+        </p:nvSpPr>
+        <p:spPr>
+          <a:xfrm>
+            <a:off x="9409938" y="1773936"/>
+            <a:ext cx="950976" cy="329184"/>
+          </a:xfrm>
+          <a:prstGeom prst="roundRect">
+            <a:avLst>
+              <a:gd name="adj" fmla="val 13889"/>
+            </a:avLst>
+          </a:prstGeom>
+          <a:solidFill>
+            <a:srgbClr val="1A5276"/>
+          </a:solidFill>
+          <a:ln w="12700">
+            <a:solidFill>
+              <a:srgbClr val="1A5276"/>
+            </a:solidFill>
+            <a:prstDash val="solid"/>
+          </a:ln>
+        </p:spPr>
+      </p:sp>
+      <p:sp>
+        <p:nvSpPr>
+          <p:cNvPr id="20" name="Text 18"/>
           <p:cNvSpPr txBox="1"/>
           <p:nvPr/>
         </p:nvSpPr>
         <p:spPr>
           <a:xfrm>
-            <a:off x="2489149" y="1664208"/>
-            <a:ext cx="1611325" cy="219456"/>
+            <a:off x="9409938" y="1773936"/>
+            <a:ext cx="950976" cy="329184"/>
           </a:xfrm>
           <a:prstGeom prst="rect">
             <a:avLst/>
@@ -12443,30 +12793,30 @@
               <a:buNone/>
             </a:pPr>
             <a:r>
-              <a:rPr lang="en-US" sz="950" b="1" dirty="0">
-                <a:solidFill>
-                  <a:srgbClr val="566573"/>
-                </a:solidFill>
-                <a:latin typeface="Meiryo" pitchFamily="34" charset="0"/>
-                <a:ea typeface="Meiryo" pitchFamily="34" charset="-122"/>
-                <a:cs typeface="Meiryo" pitchFamily="34" charset="-120"/>
-              </a:rPr>
-              <a:t>STEP 2</a:t>
-            </a:r>
-            <a:endParaRPr lang="en-US" sz="950" dirty="0"/>
-          </a:p>
-        </p:txBody>
-      </p:sp>
-      <p:sp>
-        <p:nvSpPr>
-          <p:cNvPr id="13" name="Text 11"/>
+              <a:rPr lang="en-US" sz="1300" b="1" dirty="0">
+                <a:solidFill>
+                  <a:srgbClr val="FFFFFF"/>
+                </a:solidFill>
+                <a:latin typeface="Meiryo" pitchFamily="34" charset="0"/>
+                <a:ea typeface="Meiryo" pitchFamily="34" charset="-122"/>
+                <a:cs typeface="Meiryo" pitchFamily="34" charset="-120"/>
+              </a:rPr>
+              <a:t>15分</a:t>
+            </a:r>
+            <a:endParaRPr lang="en-US" sz="1300" dirty="0"/>
+          </a:p>
+        </p:txBody>
+      </p:sp>
+      <p:sp>
+        <p:nvSpPr>
+          <p:cNvPr id="21" name="Text 19"/>
           <p:cNvSpPr txBox="1"/>
           <p:nvPr/>
         </p:nvSpPr>
         <p:spPr>
           <a:xfrm>
-            <a:off x="2489149" y="1901952"/>
-            <a:ext cx="1611325" cy="310896"/>
+            <a:off x="8255813" y="2212848"/>
+            <a:ext cx="3259226" cy="365760"/>
           </a:xfrm>
           <a:prstGeom prst="rect">
             <a:avLst/>
@@ -12482,7 +12832,7 @@
               <a:buNone/>
             </a:pPr>
             <a:r>
-              <a:rPr lang="en-US" sz="1350" b="1" dirty="0">
+              <a:rPr lang="en-US" sz="2000" b="1" dirty="0">
                 <a:solidFill>
                   <a:srgbClr val="1A5276"/>
                 </a:solidFill>
@@ -12490,22 +12840,22 @@
                 <a:ea typeface="Meiryo" pitchFamily="34" charset="-122"/>
                 <a:cs typeface="Meiryo" pitchFamily="34" charset="-120"/>
               </a:rPr>
-              <a:t>機材搬入・設置</a:t>
-            </a:r>
-            <a:endParaRPr lang="en-US" sz="1350" dirty="0"/>
-          </a:p>
-        </p:txBody>
-      </p:sp>
-      <p:sp>
-        <p:nvSpPr>
-          <p:cNvPr id="14" name="Text 12"/>
+              <a:t>片付け・記録</a:t>
+            </a:r>
+            <a:endParaRPr lang="en-US" sz="2000" dirty="0"/>
+          </a:p>
+        </p:txBody>
+      </p:sp>
+      <p:sp>
+        <p:nvSpPr>
+          <p:cNvPr id="22" name="Text 20"/>
           <p:cNvSpPr txBox="1"/>
           <p:nvPr/>
         </p:nvSpPr>
         <p:spPr>
           <a:xfrm>
-            <a:off x="2489149" y="2231136"/>
-            <a:ext cx="1611325" cy="548640"/>
+            <a:off x="8255813" y="2633472"/>
+            <a:ext cx="3259226" cy="1097280"/>
           </a:xfrm>
           <a:prstGeom prst="rect">
             <a:avLst/>
@@ -12518,10 +12868,13 @@
           <a:lstStyle/>
           <a:p>
             <a:pPr algn="ctr" indent="0" marL="0">
-              <a:buNone/>
-            </a:pPr>
-            <a:r>
-              <a:rPr lang="en-US" sz="1000" dirty="0">
+              <a:lnSpc>
+                <a:spcPct val="135000"/>
+              </a:lnSpc>
+              <a:buNone/>
+            </a:pPr>
+            <a:r>
+              <a:rPr lang="en-US" sz="1250" dirty="0">
                 <a:solidFill>
                   <a:srgbClr val="566573"/>
                 </a:solidFill>
@@ -12529,22 +12882,89 @@
                 <a:ea typeface="Meiryo" pitchFamily="34" charset="-122"/>
                 <a:cs typeface="Meiryo" pitchFamily="34" charset="-120"/>
               </a:rPr>
-              <a:t>浴槽を組立／約10分</a:t>
-            </a:r>
-            <a:endParaRPr lang="en-US" sz="1000" dirty="0"/>
-          </a:p>
-        </p:txBody>
-      </p:sp>
-      <p:sp>
-        <p:nvSpPr>
-          <p:cNvPr id="15" name="Text 13"/>
+              <a:t>更衣・保湿ケア／整容</a:t>
+            </a:r>
+            <a:endParaRPr lang="en-US" sz="1250" dirty="0"/>
+          </a:p>
+          <a:p>
+            <a:pPr algn="ctr" indent="0" marL="0">
+              <a:lnSpc>
+                <a:spcPct val="135000"/>
+              </a:lnSpc>
+              <a:buNone/>
+            </a:pPr>
+            <a:r>
+              <a:rPr lang="en-US" sz="1250" dirty="0">
+                <a:solidFill>
+                  <a:srgbClr val="566573"/>
+                </a:solidFill>
+                <a:latin typeface="Meiryo" pitchFamily="34" charset="0"/>
+                <a:ea typeface="Meiryo" pitchFamily="34" charset="-122"/>
+                <a:cs typeface="Meiryo" pitchFamily="34" charset="-120"/>
+              </a:rPr>
+              <a:t>機材の撤収・原状復帰</a:t>
+            </a:r>
+            <a:endParaRPr lang="en-US" sz="1250" dirty="0"/>
+          </a:p>
+          <a:p>
+            <a:pPr algn="ctr" indent="0" marL="0">
+              <a:lnSpc>
+                <a:spcPct val="135000"/>
+              </a:lnSpc>
+              <a:buNone/>
+            </a:pPr>
+            <a:r>
+              <a:rPr lang="en-US" sz="1250" dirty="0">
+                <a:solidFill>
+                  <a:srgbClr val="566573"/>
+                </a:solidFill>
+                <a:latin typeface="Meiryo" pitchFamily="34" charset="0"/>
+                <a:ea typeface="Meiryo" pitchFamily="34" charset="-122"/>
+                <a:cs typeface="Meiryo" pitchFamily="34" charset="-120"/>
+              </a:rPr>
+              <a:t>記録と関係職種への連絡</a:t>
+            </a:r>
+            <a:endParaRPr lang="en-US" sz="1250" dirty="0"/>
+          </a:p>
+        </p:txBody>
+      </p:sp>
+      <p:sp>
+        <p:nvSpPr>
+          <p:cNvPr id="23" name="Shape 21"/>
+          <p:cNvSpPr/>
+          <p:nvPr/>
+        </p:nvSpPr>
+        <p:spPr>
+          <a:xfrm>
+            <a:off x="566928" y="4059936"/>
+            <a:ext cx="5382616" cy="1481328"/>
+          </a:xfrm>
+          <a:prstGeom prst="roundRect">
+            <a:avLst>
+              <a:gd name="adj" fmla="val 3704"/>
+            </a:avLst>
+          </a:prstGeom>
+          <a:solidFill>
+            <a:srgbClr val="F4F8FA"/>
+          </a:solidFill>
+          <a:ln w="12700">
+            <a:solidFill>
+              <a:srgbClr val="F4F8FA"/>
+            </a:solidFill>
+            <a:prstDash val="solid"/>
+          </a:ln>
+        </p:spPr>
+      </p:sp>
+      <p:sp>
+        <p:nvSpPr>
+          <p:cNvPr id="24" name="Text 22"/>
           <p:cNvSpPr txBox="1"/>
           <p:nvPr/>
         </p:nvSpPr>
         <p:spPr>
           <a:xfrm>
-            <a:off x="4155338" y="1554480"/>
-            <a:ext cx="146304" cy="1371600"/>
+            <a:off x="786384" y="4242816"/>
+            <a:ext cx="4943704" cy="310896"/>
           </a:xfrm>
           <a:prstGeom prst="rect">
             <a:avLst/>
@@ -12556,38 +12976,114 @@
           <a:bodyPr wrap="square" lIns="0" tIns="0" rIns="0" bIns="0" rtlCol="0" anchor="ctr"/>
           <a:lstStyle/>
           <a:p>
-            <a:pPr algn="ctr" indent="0" marL="0">
-              <a:buNone/>
-            </a:pPr>
-            <a:r>
-              <a:rPr lang="en-US" sz="1600" b="1" dirty="0">
-                <a:solidFill>
-                  <a:srgbClr val="BDC3C7"/>
-                </a:solidFill>
-                <a:latin typeface="Meiryo" pitchFamily="34" charset="0"/>
-                <a:ea typeface="Meiryo" pitchFamily="34" charset="-122"/>
-                <a:cs typeface="Meiryo" pitchFamily="34" charset="-120"/>
-              </a:rPr>
-              <a:t>›</a:t>
-            </a:r>
-            <a:endParaRPr lang="en-US" sz="1600" dirty="0"/>
-          </a:p>
-        </p:txBody>
-      </p:sp>
-      <p:sp>
-        <p:nvSpPr>
-          <p:cNvPr id="16" name="Shape 14"/>
+            <a:pPr indent="0" marL="0">
+              <a:buNone/>
+            </a:pPr>
+            <a:r>
+              <a:rPr lang="en-US" sz="1500" b="1" dirty="0">
+                <a:solidFill>
+                  <a:srgbClr val="1A5276"/>
+                </a:solidFill>
+                <a:latin typeface="Meiryo" pitchFamily="34" charset="0"/>
+                <a:ea typeface="Meiryo" pitchFamily="34" charset="-122"/>
+                <a:cs typeface="Meiryo" pitchFamily="34" charset="-120"/>
+              </a:rPr>
+              <a:t>入浴できないと判断した場合</a:t>
+            </a:r>
+            <a:endParaRPr lang="en-US" sz="1500" dirty="0"/>
+          </a:p>
+        </p:txBody>
+      </p:sp>
+      <p:sp>
+        <p:nvSpPr>
+          <p:cNvPr id="25" name="Text 23"/>
+          <p:cNvSpPr txBox="1"/>
+          <p:nvPr/>
+        </p:nvSpPr>
+        <p:spPr>
+          <a:xfrm>
+            <a:off x="786384" y="4645152"/>
+            <a:ext cx="4943704" cy="749808"/>
+          </a:xfrm>
+          <a:prstGeom prst="rect">
+            <a:avLst/>
+          </a:prstGeom>
+          <a:noFill/>
+          <a:ln/>
+        </p:spPr>
+        <p:txBody>
+          <a:bodyPr wrap="square" lIns="0" tIns="0" rIns="0" bIns="0" rtlCol="0" anchor="t"/>
+          <a:lstStyle/>
+          <a:p>
+            <a:pPr indent="0" marL="0">
+              <a:lnSpc>
+                <a:spcPct val="125000"/>
+              </a:lnSpc>
+              <a:buNone/>
+            </a:pPr>
+            <a:r>
+              <a:rPr lang="en-US" sz="1250" dirty="0">
+                <a:solidFill>
+                  <a:srgbClr val="1C2833"/>
+                </a:solidFill>
+                <a:latin typeface="Meiryo" pitchFamily="34" charset="0"/>
+                <a:ea typeface="Meiryo" pitchFamily="34" charset="-122"/>
+                <a:cs typeface="Meiryo" pitchFamily="34" charset="-120"/>
+              </a:rPr>
+              <a:t>発熱・血圧変動・全身状態の悪化時は、看護師の判断で</a:t>
+            </a:r>
+            <a:pPr indent="0" marL="0">
+              <a:lnSpc>
+                <a:spcPct val="125000"/>
+              </a:lnSpc>
+              <a:buNone/>
+            </a:pPr>
+            <a:r>
+              <a:rPr lang="en-US" sz="1250" b="1" dirty="0">
+                <a:solidFill>
+                  <a:srgbClr val="1D9E75"/>
+                </a:solidFill>
+                <a:latin typeface="Meiryo" pitchFamily="34" charset="0"/>
+                <a:ea typeface="Meiryo" pitchFamily="34" charset="-122"/>
+                <a:cs typeface="Meiryo" pitchFamily="34" charset="-120"/>
+              </a:rPr>
+              <a:t>清拭や部分浴に切り替え</a:t>
+            </a:r>
+            <a:pPr indent="0" marL="0">
+              <a:lnSpc>
+                <a:spcPct val="125000"/>
+              </a:lnSpc>
+              <a:buNone/>
+            </a:pPr>
+            <a:r>
+              <a:rPr lang="en-US" sz="1250" dirty="0">
+                <a:solidFill>
+                  <a:srgbClr val="1C2833"/>
+                </a:solidFill>
+                <a:latin typeface="Meiryo" pitchFamily="34" charset="0"/>
+                <a:ea typeface="Meiryo" pitchFamily="34" charset="-122"/>
+                <a:cs typeface="Meiryo" pitchFamily="34" charset="-120"/>
+              </a:rPr>
+              <a:t>。中止時もご家族・ケアマネジャーへ理由を報告します。</a:t>
+            </a:r>
+            <a:endParaRPr lang="en-US" sz="1250" dirty="0"/>
+          </a:p>
+        </p:txBody>
+      </p:sp>
+      <p:sp>
+        <p:nvSpPr>
+          <p:cNvPr id="26" name="Shape 24"/>
           <p:cNvSpPr/>
           <p:nvPr/>
         </p:nvSpPr>
         <p:spPr>
           <a:xfrm>
-            <a:off x="4301642" y="1554480"/>
-            <a:ext cx="1721053" cy="1371600"/>
+            <a:off x="6242152" y="4059936"/>
+            <a:ext cx="5382616" cy="1481328"/>
           </a:xfrm>
           <a:prstGeom prst="roundRect">
             <a:avLst>
-              <a:gd name="adj" fmla="val 4000"/>
+              <a:gd name="adj" fmla="val 3704"/>
             </a:avLst>
           </a:prstGeom>
           <a:solidFill>
@@ -12603,14 +13099,14 @@
       </p:sp>
       <p:sp>
         <p:nvSpPr>
-          <p:cNvPr id="17" name="Text 15"/>
+          <p:cNvPr id="27" name="Text 25"/>
           <p:cNvSpPr txBox="1"/>
           <p:nvPr/>
         </p:nvSpPr>
         <p:spPr>
           <a:xfrm>
-            <a:off x="4356506" y="1664208"/>
-            <a:ext cx="1611325" cy="219456"/>
+            <a:off x="6461608" y="4242816"/>
+            <a:ext cx="4943704" cy="310896"/>
           </a:xfrm>
           <a:prstGeom prst="rect">
             <a:avLst/>
@@ -12622,387 +13118,21 @@
           <a:bodyPr wrap="square" lIns="0" tIns="0" rIns="0" bIns="0" rtlCol="0" anchor="ctr"/>
           <a:lstStyle/>
           <a:p>
-            <a:pPr algn="ctr" indent="0" marL="0">
-              <a:buNone/>
-            </a:pPr>
-            <a:r>
-              <a:rPr lang="en-US" sz="950" b="1" dirty="0">
-                <a:solidFill>
-                  <a:srgbClr val="566573"/>
-                </a:solidFill>
-                <a:latin typeface="Meiryo" pitchFamily="34" charset="0"/>
-                <a:ea typeface="Meiryo" pitchFamily="34" charset="-122"/>
-                <a:cs typeface="Meiryo" pitchFamily="34" charset="-120"/>
-              </a:rPr>
-              <a:t>STEP 3</a:t>
-            </a:r>
-            <a:endParaRPr lang="en-US" sz="950" dirty="0"/>
-          </a:p>
-        </p:txBody>
-      </p:sp>
-      <p:sp>
-        <p:nvSpPr>
-          <p:cNvPr id="18" name="Text 16"/>
-          <p:cNvSpPr txBox="1"/>
-          <p:nvPr/>
-        </p:nvSpPr>
-        <p:spPr>
-          <a:xfrm>
-            <a:off x="4356506" y="1901952"/>
-            <a:ext cx="1611325" cy="310896"/>
-          </a:xfrm>
-          <a:prstGeom prst="rect">
-            <a:avLst/>
-          </a:prstGeom>
-          <a:noFill/>
-          <a:ln/>
-        </p:spPr>
-        <p:txBody>
-          <a:bodyPr wrap="square" lIns="0" tIns="0" rIns="0" bIns="0" rtlCol="0" anchor="ctr"/>
-          <a:lstStyle/>
-          <a:p>
-            <a:pPr algn="ctr" indent="0" marL="0">
-              <a:buNone/>
-            </a:pPr>
-            <a:r>
-              <a:rPr lang="en-US" sz="1350" b="1" dirty="0">
-                <a:solidFill>
-                  <a:srgbClr val="1A5276"/>
-                </a:solidFill>
-                <a:latin typeface="Meiryo" pitchFamily="34" charset="0"/>
-                <a:ea typeface="Meiryo" pitchFamily="34" charset="-122"/>
-                <a:cs typeface="Meiryo" pitchFamily="34" charset="-120"/>
-              </a:rPr>
-              <a:t>バイタル確認</a:t>
-            </a:r>
-            <a:endParaRPr lang="en-US" sz="1350" dirty="0"/>
-          </a:p>
-        </p:txBody>
-      </p:sp>
-      <p:sp>
-        <p:nvSpPr>
-          <p:cNvPr id="19" name="Text 17"/>
-          <p:cNvSpPr txBox="1"/>
-          <p:nvPr/>
-        </p:nvSpPr>
-        <p:spPr>
-          <a:xfrm>
-            <a:off x="4356506" y="2231136"/>
-            <a:ext cx="1611325" cy="548640"/>
-          </a:xfrm>
-          <a:prstGeom prst="rect">
-            <a:avLst/>
-          </a:prstGeom>
-          <a:noFill/>
-          <a:ln/>
-        </p:spPr>
-        <p:txBody>
-          <a:bodyPr wrap="square" lIns="0" tIns="0" rIns="0" bIns="0" rtlCol="0" anchor="t"/>
-          <a:lstStyle/>
-          <a:p>
-            <a:pPr algn="ctr" indent="0" marL="0">
-              <a:buNone/>
-            </a:pPr>
-            <a:r>
-              <a:rPr lang="en-US" sz="1000" dirty="0">
-                <a:solidFill>
-                  <a:srgbClr val="566573"/>
-                </a:solidFill>
-                <a:latin typeface="Meiryo" pitchFamily="34" charset="0"/>
-                <a:ea typeface="Meiryo" pitchFamily="34" charset="-122"/>
-                <a:cs typeface="Meiryo" pitchFamily="34" charset="-120"/>
-              </a:rPr>
-              <a:t>看護師が入浴可否を判断</a:t>
-            </a:r>
-            <a:endParaRPr lang="en-US" sz="1000" dirty="0"/>
-          </a:p>
-        </p:txBody>
-      </p:sp>
-      <p:sp>
-        <p:nvSpPr>
-          <p:cNvPr id="20" name="Text 18"/>
-          <p:cNvSpPr txBox="1"/>
-          <p:nvPr/>
-        </p:nvSpPr>
-        <p:spPr>
-          <a:xfrm>
-            <a:off x="6022696" y="1554480"/>
-            <a:ext cx="146304" cy="1371600"/>
-          </a:xfrm>
-          <a:prstGeom prst="rect">
-            <a:avLst/>
-          </a:prstGeom>
-          <a:noFill/>
-          <a:ln/>
-        </p:spPr>
-        <p:txBody>
-          <a:bodyPr wrap="square" lIns="0" tIns="0" rIns="0" bIns="0" rtlCol="0" anchor="ctr"/>
-          <a:lstStyle/>
-          <a:p>
-            <a:pPr algn="ctr" indent="0" marL="0">
-              <a:buNone/>
-            </a:pPr>
-            <a:r>
-              <a:rPr lang="en-US" sz="1600" b="1" dirty="0">
-                <a:solidFill>
-                  <a:srgbClr val="BDC3C7"/>
-                </a:solidFill>
-                <a:latin typeface="Meiryo" pitchFamily="34" charset="0"/>
-                <a:ea typeface="Meiryo" pitchFamily="34" charset="-122"/>
-                <a:cs typeface="Meiryo" pitchFamily="34" charset="-120"/>
-              </a:rPr>
-              <a:t>›</a:t>
-            </a:r>
-            <a:endParaRPr lang="en-US" sz="1600" dirty="0"/>
-          </a:p>
-        </p:txBody>
-      </p:sp>
-      <p:sp>
-        <p:nvSpPr>
-          <p:cNvPr id="21" name="Shape 19"/>
-          <p:cNvSpPr/>
-          <p:nvPr/>
-        </p:nvSpPr>
-        <p:spPr>
-          <a:xfrm>
-            <a:off x="6169000" y="1554480"/>
-            <a:ext cx="1721053" cy="1371600"/>
-          </a:xfrm>
-          <a:prstGeom prst="roundRect">
-            <a:avLst>
-              <a:gd name="adj" fmla="val 4000"/>
-            </a:avLst>
-          </a:prstGeom>
-          <a:solidFill>
-            <a:srgbClr val="EAF7F1"/>
-          </a:solidFill>
-          <a:ln w="12700">
-            <a:solidFill>
-              <a:srgbClr val="EAF7F1"/>
-            </a:solidFill>
-            <a:prstDash val="solid"/>
-          </a:ln>
-        </p:spPr>
-      </p:sp>
-      <p:sp>
-        <p:nvSpPr>
-          <p:cNvPr id="22" name="Text 20"/>
-          <p:cNvSpPr txBox="1"/>
-          <p:nvPr/>
-        </p:nvSpPr>
-        <p:spPr>
-          <a:xfrm>
-            <a:off x="6223864" y="1664208"/>
-            <a:ext cx="1611325" cy="219456"/>
-          </a:xfrm>
-          <a:prstGeom prst="rect">
-            <a:avLst/>
-          </a:prstGeom>
-          <a:noFill/>
-          <a:ln/>
-        </p:spPr>
-        <p:txBody>
-          <a:bodyPr wrap="square" lIns="0" tIns="0" rIns="0" bIns="0" rtlCol="0" anchor="ctr"/>
-          <a:lstStyle/>
-          <a:p>
-            <a:pPr algn="ctr" indent="0" marL="0">
-              <a:buNone/>
-            </a:pPr>
-            <a:r>
-              <a:rPr lang="en-US" sz="950" b="1" dirty="0">
-                <a:solidFill>
-                  <a:srgbClr val="566573"/>
-                </a:solidFill>
-                <a:latin typeface="Meiryo" pitchFamily="34" charset="0"/>
-                <a:ea typeface="Meiryo" pitchFamily="34" charset="-122"/>
-                <a:cs typeface="Meiryo" pitchFamily="34" charset="-120"/>
-              </a:rPr>
-              <a:t>STEP 4</a:t>
-            </a:r>
-            <a:endParaRPr lang="en-US" sz="950" dirty="0"/>
-          </a:p>
-        </p:txBody>
-      </p:sp>
-      <p:sp>
-        <p:nvSpPr>
-          <p:cNvPr id="23" name="Text 21"/>
-          <p:cNvSpPr txBox="1"/>
-          <p:nvPr/>
-        </p:nvSpPr>
-        <p:spPr>
-          <a:xfrm>
-            <a:off x="6223864" y="1901952"/>
-            <a:ext cx="1611325" cy="310896"/>
-          </a:xfrm>
-          <a:prstGeom prst="rect">
-            <a:avLst/>
-          </a:prstGeom>
-          <a:noFill/>
-          <a:ln/>
-        </p:spPr>
-        <p:txBody>
-          <a:bodyPr wrap="square" lIns="0" tIns="0" rIns="0" bIns="0" rtlCol="0" anchor="ctr"/>
-          <a:lstStyle/>
-          <a:p>
-            <a:pPr algn="ctr" indent="0" marL="0">
-              <a:buNone/>
-            </a:pPr>
-            <a:r>
-              <a:rPr lang="en-US" sz="1350" b="1" dirty="0">
-                <a:solidFill>
-                  <a:srgbClr val="1A5276"/>
-                </a:solidFill>
-                <a:latin typeface="Meiryo" pitchFamily="34" charset="0"/>
-                <a:ea typeface="Meiryo" pitchFamily="34" charset="-122"/>
-                <a:cs typeface="Meiryo" pitchFamily="34" charset="-120"/>
-              </a:rPr>
-              <a:t>入　浴</a:t>
-            </a:r>
-            <a:endParaRPr lang="en-US" sz="1350" dirty="0"/>
-          </a:p>
-        </p:txBody>
-      </p:sp>
-      <p:sp>
-        <p:nvSpPr>
-          <p:cNvPr id="24" name="Text 22"/>
-          <p:cNvSpPr txBox="1"/>
-          <p:nvPr/>
-        </p:nvSpPr>
-        <p:spPr>
-          <a:xfrm>
-            <a:off x="6223864" y="2231136"/>
-            <a:ext cx="1611325" cy="548640"/>
-          </a:xfrm>
-          <a:prstGeom prst="rect">
-            <a:avLst/>
-          </a:prstGeom>
-          <a:noFill/>
-          <a:ln/>
-        </p:spPr>
-        <p:txBody>
-          <a:bodyPr wrap="square" lIns="0" tIns="0" rIns="0" bIns="0" rtlCol="0" anchor="t"/>
-          <a:lstStyle/>
-          <a:p>
-            <a:pPr algn="ctr" indent="0" marL="0">
-              <a:buNone/>
-            </a:pPr>
-            <a:r>
-              <a:rPr lang="en-US" sz="1000" dirty="0">
-                <a:solidFill>
-                  <a:srgbClr val="566573"/>
-                </a:solidFill>
-                <a:latin typeface="Meiryo" pitchFamily="34" charset="0"/>
-                <a:ea typeface="Meiryo" pitchFamily="34" charset="-122"/>
-                <a:cs typeface="Meiryo" pitchFamily="34" charset="-120"/>
-              </a:rPr>
-              <a:t>全身浴・洗髪／約20分</a:t>
-            </a:r>
-            <a:endParaRPr lang="en-US" sz="1000" dirty="0"/>
-          </a:p>
-        </p:txBody>
-      </p:sp>
-      <p:sp>
-        <p:nvSpPr>
-          <p:cNvPr id="25" name="Text 23"/>
-          <p:cNvSpPr txBox="1"/>
-          <p:nvPr/>
-        </p:nvSpPr>
-        <p:spPr>
-          <a:xfrm>
-            <a:off x="7890053" y="1554480"/>
-            <a:ext cx="146304" cy="1371600"/>
-          </a:xfrm>
-          <a:prstGeom prst="rect">
-            <a:avLst/>
-          </a:prstGeom>
-          <a:noFill/>
-          <a:ln/>
-        </p:spPr>
-        <p:txBody>
-          <a:bodyPr wrap="square" lIns="0" tIns="0" rIns="0" bIns="0" rtlCol="0" anchor="ctr"/>
-          <a:lstStyle/>
-          <a:p>
-            <a:pPr algn="ctr" indent="0" marL="0">
-              <a:buNone/>
-            </a:pPr>
-            <a:r>
-              <a:rPr lang="en-US" sz="1600" b="1" dirty="0">
-                <a:solidFill>
-                  <a:srgbClr val="BDC3C7"/>
-                </a:solidFill>
-                <a:latin typeface="Meiryo" pitchFamily="34" charset="0"/>
-                <a:ea typeface="Meiryo" pitchFamily="34" charset="-122"/>
-                <a:cs typeface="Meiryo" pitchFamily="34" charset="-120"/>
-              </a:rPr>
-              <a:t>›</a:t>
-            </a:r>
-            <a:endParaRPr lang="en-US" sz="1600" dirty="0"/>
-          </a:p>
-        </p:txBody>
-      </p:sp>
-      <p:sp>
-        <p:nvSpPr>
-          <p:cNvPr id="26" name="Shape 24"/>
-          <p:cNvSpPr/>
-          <p:nvPr/>
-        </p:nvSpPr>
-        <p:spPr>
-          <a:xfrm>
-            <a:off x="8036357" y="1554480"/>
-            <a:ext cx="1721053" cy="1371600"/>
-          </a:xfrm>
-          <a:prstGeom prst="roundRect">
-            <a:avLst>
-              <a:gd name="adj" fmla="val 4000"/>
-            </a:avLst>
-          </a:prstGeom>
-          <a:solidFill>
-            <a:srgbClr val="EAF7F1"/>
-          </a:solidFill>
-          <a:ln w="12700">
-            <a:solidFill>
-              <a:srgbClr val="EAF7F1"/>
-            </a:solidFill>
-            <a:prstDash val="solid"/>
-          </a:ln>
-        </p:spPr>
-      </p:sp>
-      <p:sp>
-        <p:nvSpPr>
-          <p:cNvPr id="27" name="Text 25"/>
-          <p:cNvSpPr txBox="1"/>
-          <p:nvPr/>
-        </p:nvSpPr>
-        <p:spPr>
-          <a:xfrm>
-            <a:off x="8091221" y="1664208"/>
-            <a:ext cx="1611325" cy="219456"/>
-          </a:xfrm>
-          <a:prstGeom prst="rect">
-            <a:avLst/>
-          </a:prstGeom>
-          <a:noFill/>
-          <a:ln/>
-        </p:spPr>
-        <p:txBody>
-          <a:bodyPr wrap="square" lIns="0" tIns="0" rIns="0" bIns="0" rtlCol="0" anchor="ctr"/>
-          <a:lstStyle/>
-          <a:p>
-            <a:pPr algn="ctr" indent="0" marL="0">
-              <a:buNone/>
-            </a:pPr>
-            <a:r>
-              <a:rPr lang="en-US" sz="950" b="1" dirty="0">
-                <a:solidFill>
-                  <a:srgbClr val="566573"/>
-                </a:solidFill>
-                <a:latin typeface="Meiryo" pitchFamily="34" charset="0"/>
-                <a:ea typeface="Meiryo" pitchFamily="34" charset="-122"/>
-                <a:cs typeface="Meiryo" pitchFamily="34" charset="-120"/>
-              </a:rPr>
-              <a:t>STEP 5</a:t>
-            </a:r>
-            <a:endParaRPr lang="en-US" sz="950" dirty="0"/>
+            <a:pPr indent="0" marL="0">
+              <a:buNone/>
+            </a:pPr>
+            <a:r>
+              <a:rPr lang="en-US" sz="1500" b="1" dirty="0">
+                <a:solidFill>
+                  <a:srgbClr val="1D9E75"/>
+                </a:solidFill>
+                <a:latin typeface="Meiryo" pitchFamily="34" charset="0"/>
+                <a:ea typeface="Meiryo" pitchFamily="34" charset="-122"/>
+                <a:cs typeface="Meiryo" pitchFamily="34" charset="-120"/>
+              </a:rPr>
+              <a:t>住環境への配慮</a:t>
+            </a:r>
+            <a:endParaRPr lang="en-US" sz="1500" dirty="0"/>
           </a:p>
         </p:txBody>
       </p:sp>
@@ -13014,476 +13144,7 @@
         </p:nvSpPr>
         <p:spPr>
           <a:xfrm>
-            <a:off x="8091221" y="1901952"/>
-            <a:ext cx="1611325" cy="310896"/>
-          </a:xfrm>
-          <a:prstGeom prst="rect">
-            <a:avLst/>
-          </a:prstGeom>
-          <a:noFill/>
-          <a:ln/>
-        </p:spPr>
-        <p:txBody>
-          <a:bodyPr wrap="square" lIns="0" tIns="0" rIns="0" bIns="0" rtlCol="0" anchor="ctr"/>
-          <a:lstStyle/>
-          <a:p>
-            <a:pPr algn="ctr" indent="0" marL="0">
-              <a:buNone/>
-            </a:pPr>
-            <a:r>
-              <a:rPr lang="en-US" sz="1350" b="1" dirty="0">
-                <a:solidFill>
-                  <a:srgbClr val="1A5276"/>
-                </a:solidFill>
-                <a:latin typeface="Meiryo" pitchFamily="34" charset="0"/>
-                <a:ea typeface="Meiryo" pitchFamily="34" charset="-122"/>
-                <a:cs typeface="Meiryo" pitchFamily="34" charset="-120"/>
-              </a:rPr>
-              <a:t>更衣・保湿ケア</a:t>
-            </a:r>
-            <a:endParaRPr lang="en-US" sz="1350" dirty="0"/>
-          </a:p>
-        </p:txBody>
-      </p:sp>
-      <p:sp>
-        <p:nvSpPr>
-          <p:cNvPr id="29" name="Text 27"/>
-          <p:cNvSpPr txBox="1"/>
-          <p:nvPr/>
-        </p:nvSpPr>
-        <p:spPr>
-          <a:xfrm>
-            <a:off x="8091221" y="2231136"/>
-            <a:ext cx="1611325" cy="548640"/>
-          </a:xfrm>
-          <a:prstGeom prst="rect">
-            <a:avLst/>
-          </a:prstGeom>
-          <a:noFill/>
-          <a:ln/>
-        </p:spPr>
-        <p:txBody>
-          <a:bodyPr wrap="square" lIns="0" tIns="0" rIns="0" bIns="0" rtlCol="0" anchor="t"/>
-          <a:lstStyle/>
-          <a:p>
-            <a:pPr algn="ctr" indent="0" marL="0">
-              <a:buNone/>
-            </a:pPr>
-            <a:r>
-              <a:rPr lang="en-US" sz="1000" dirty="0">
-                <a:solidFill>
-                  <a:srgbClr val="566573"/>
-                </a:solidFill>
-                <a:latin typeface="Meiryo" pitchFamily="34" charset="0"/>
-                <a:ea typeface="Meiryo" pitchFamily="34" charset="-122"/>
-                <a:cs typeface="Meiryo" pitchFamily="34" charset="-120"/>
-              </a:rPr>
-              <a:t>整容・保湿（医療処置は行いません）</a:t>
-            </a:r>
-            <a:endParaRPr lang="en-US" sz="1000" dirty="0"/>
-          </a:p>
-        </p:txBody>
-      </p:sp>
-      <p:sp>
-        <p:nvSpPr>
-          <p:cNvPr id="30" name="Text 28"/>
-          <p:cNvSpPr txBox="1"/>
-          <p:nvPr/>
-        </p:nvSpPr>
-        <p:spPr>
-          <a:xfrm>
-            <a:off x="9757410" y="1554480"/>
-            <a:ext cx="146304" cy="1371600"/>
-          </a:xfrm>
-          <a:prstGeom prst="rect">
-            <a:avLst/>
-          </a:prstGeom>
-          <a:noFill/>
-          <a:ln/>
-        </p:spPr>
-        <p:txBody>
-          <a:bodyPr wrap="square" lIns="0" tIns="0" rIns="0" bIns="0" rtlCol="0" anchor="ctr"/>
-          <a:lstStyle/>
-          <a:p>
-            <a:pPr algn="ctr" indent="0" marL="0">
-              <a:buNone/>
-            </a:pPr>
-            <a:r>
-              <a:rPr lang="en-US" sz="1600" b="1" dirty="0">
-                <a:solidFill>
-                  <a:srgbClr val="BDC3C7"/>
-                </a:solidFill>
-                <a:latin typeface="Meiryo" pitchFamily="34" charset="0"/>
-                <a:ea typeface="Meiryo" pitchFamily="34" charset="-122"/>
-                <a:cs typeface="Meiryo" pitchFamily="34" charset="-120"/>
-              </a:rPr>
-              <a:t>›</a:t>
-            </a:r>
-            <a:endParaRPr lang="en-US" sz="1600" dirty="0"/>
-          </a:p>
-        </p:txBody>
-      </p:sp>
-      <p:sp>
-        <p:nvSpPr>
-          <p:cNvPr id="31" name="Shape 29"/>
-          <p:cNvSpPr/>
-          <p:nvPr/>
-        </p:nvSpPr>
-        <p:spPr>
-          <a:xfrm>
-            <a:off x="9903714" y="1554480"/>
-            <a:ext cx="1721053" cy="1371600"/>
-          </a:xfrm>
-          <a:prstGeom prst="roundRect">
-            <a:avLst>
-              <a:gd name="adj" fmla="val 4000"/>
-            </a:avLst>
-          </a:prstGeom>
-          <a:solidFill>
-            <a:srgbClr val="F4F8FA"/>
-          </a:solidFill>
-          <a:ln w="12700">
-            <a:solidFill>
-              <a:srgbClr val="F4F8FA"/>
-            </a:solidFill>
-            <a:prstDash val="solid"/>
-          </a:ln>
-        </p:spPr>
-      </p:sp>
-      <p:sp>
-        <p:nvSpPr>
-          <p:cNvPr id="32" name="Text 30"/>
-          <p:cNvSpPr txBox="1"/>
-          <p:nvPr/>
-        </p:nvSpPr>
-        <p:spPr>
-          <a:xfrm>
-            <a:off x="9958578" y="1664208"/>
-            <a:ext cx="1611325" cy="219456"/>
-          </a:xfrm>
-          <a:prstGeom prst="rect">
-            <a:avLst/>
-          </a:prstGeom>
-          <a:noFill/>
-          <a:ln/>
-        </p:spPr>
-        <p:txBody>
-          <a:bodyPr wrap="square" lIns="0" tIns="0" rIns="0" bIns="0" rtlCol="0" anchor="ctr"/>
-          <a:lstStyle/>
-          <a:p>
-            <a:pPr algn="ctr" indent="0" marL="0">
-              <a:buNone/>
-            </a:pPr>
-            <a:r>
-              <a:rPr lang="en-US" sz="950" b="1" dirty="0">
-                <a:solidFill>
-                  <a:srgbClr val="566573"/>
-                </a:solidFill>
-                <a:latin typeface="Meiryo" pitchFamily="34" charset="0"/>
-                <a:ea typeface="Meiryo" pitchFamily="34" charset="-122"/>
-                <a:cs typeface="Meiryo" pitchFamily="34" charset="-120"/>
-              </a:rPr>
-              <a:t>STEP 6</a:t>
-            </a:r>
-            <a:endParaRPr lang="en-US" sz="950" dirty="0"/>
-          </a:p>
-        </p:txBody>
-      </p:sp>
-      <p:sp>
-        <p:nvSpPr>
-          <p:cNvPr id="33" name="Text 31"/>
-          <p:cNvSpPr txBox="1"/>
-          <p:nvPr/>
-        </p:nvSpPr>
-        <p:spPr>
-          <a:xfrm>
-            <a:off x="9958578" y="1901952"/>
-            <a:ext cx="1611325" cy="310896"/>
-          </a:xfrm>
-          <a:prstGeom prst="rect">
-            <a:avLst/>
-          </a:prstGeom>
-          <a:noFill/>
-          <a:ln/>
-        </p:spPr>
-        <p:txBody>
-          <a:bodyPr wrap="square" lIns="0" tIns="0" rIns="0" bIns="0" rtlCol="0" anchor="ctr"/>
-          <a:lstStyle/>
-          <a:p>
-            <a:pPr algn="ctr" indent="0" marL="0">
-              <a:buNone/>
-            </a:pPr>
-            <a:r>
-              <a:rPr lang="en-US" sz="1350" b="1" dirty="0">
-                <a:solidFill>
-                  <a:srgbClr val="1A5276"/>
-                </a:solidFill>
-                <a:latin typeface="Meiryo" pitchFamily="34" charset="0"/>
-                <a:ea typeface="Meiryo" pitchFamily="34" charset="-122"/>
-                <a:cs typeface="Meiryo" pitchFamily="34" charset="-120"/>
-              </a:rPr>
-              <a:t>記録・連絡</a:t>
-            </a:r>
-            <a:endParaRPr lang="en-US" sz="1350" dirty="0"/>
-          </a:p>
-        </p:txBody>
-      </p:sp>
-      <p:sp>
-        <p:nvSpPr>
-          <p:cNvPr id="34" name="Text 32"/>
-          <p:cNvSpPr txBox="1"/>
-          <p:nvPr/>
-        </p:nvSpPr>
-        <p:spPr>
-          <a:xfrm>
-            <a:off x="9958578" y="2231136"/>
-            <a:ext cx="1611325" cy="548640"/>
-          </a:xfrm>
-          <a:prstGeom prst="rect">
-            <a:avLst/>
-          </a:prstGeom>
-          <a:noFill/>
-          <a:ln/>
-        </p:spPr>
-        <p:txBody>
-          <a:bodyPr wrap="square" lIns="0" tIns="0" rIns="0" bIns="0" rtlCol="0" anchor="t"/>
-          <a:lstStyle/>
-          <a:p>
-            <a:pPr algn="ctr" indent="0" marL="0">
-              <a:buNone/>
-            </a:pPr>
-            <a:r>
-              <a:rPr lang="en-US" sz="1000" dirty="0">
-                <a:solidFill>
-                  <a:srgbClr val="566573"/>
-                </a:solidFill>
-                <a:latin typeface="Meiryo" pitchFamily="34" charset="0"/>
-                <a:ea typeface="Meiryo" pitchFamily="34" charset="-122"/>
-                <a:cs typeface="Meiryo" pitchFamily="34" charset="-120"/>
-              </a:rPr>
-              <a:t>関係職種へ報告</a:t>
-            </a:r>
-            <a:endParaRPr lang="en-US" sz="1000" dirty="0"/>
-          </a:p>
-        </p:txBody>
-      </p:sp>
-      <p:sp>
-        <p:nvSpPr>
-          <p:cNvPr id="35" name="Shape 33"/>
-          <p:cNvSpPr/>
-          <p:nvPr/>
-        </p:nvSpPr>
-        <p:spPr>
-          <a:xfrm>
-            <a:off x="566928" y="3145536"/>
-            <a:ext cx="5382616" cy="1481328"/>
-          </a:xfrm>
-          <a:prstGeom prst="roundRect">
-            <a:avLst>
-              <a:gd name="adj" fmla="val 3704"/>
-            </a:avLst>
-          </a:prstGeom>
-          <a:solidFill>
-            <a:srgbClr val="F4F8FA"/>
-          </a:solidFill>
-          <a:ln w="12700">
-            <a:solidFill>
-              <a:srgbClr val="F4F8FA"/>
-            </a:solidFill>
-            <a:prstDash val="solid"/>
-          </a:ln>
-        </p:spPr>
-      </p:sp>
-      <p:sp>
-        <p:nvSpPr>
-          <p:cNvPr id="36" name="Text 34"/>
-          <p:cNvSpPr txBox="1"/>
-          <p:nvPr/>
-        </p:nvSpPr>
-        <p:spPr>
-          <a:xfrm>
-            <a:off x="786384" y="3328416"/>
-            <a:ext cx="4943704" cy="310896"/>
-          </a:xfrm>
-          <a:prstGeom prst="rect">
-            <a:avLst/>
-          </a:prstGeom>
-          <a:noFill/>
-          <a:ln/>
-        </p:spPr>
-        <p:txBody>
-          <a:bodyPr wrap="square" lIns="0" tIns="0" rIns="0" bIns="0" rtlCol="0" anchor="ctr"/>
-          <a:lstStyle/>
-          <a:p>
-            <a:pPr indent="0" marL="0">
-              <a:buNone/>
-            </a:pPr>
-            <a:r>
-              <a:rPr lang="en-US" sz="1500" b="1" dirty="0">
-                <a:solidFill>
-                  <a:srgbClr val="1A5276"/>
-                </a:solidFill>
-                <a:latin typeface="Meiryo" pitchFamily="34" charset="0"/>
-                <a:ea typeface="Meiryo" pitchFamily="34" charset="-122"/>
-                <a:cs typeface="Meiryo" pitchFamily="34" charset="-120"/>
-              </a:rPr>
-              <a:t>入浴できないと判断した場合</a:t>
-            </a:r>
-            <a:endParaRPr lang="en-US" sz="1500" dirty="0"/>
-          </a:p>
-        </p:txBody>
-      </p:sp>
-      <p:sp>
-        <p:nvSpPr>
-          <p:cNvPr id="37" name="Text 35"/>
-          <p:cNvSpPr txBox="1"/>
-          <p:nvPr/>
-        </p:nvSpPr>
-        <p:spPr>
-          <a:xfrm>
-            <a:off x="786384" y="3730752"/>
-            <a:ext cx="4943704" cy="749808"/>
-          </a:xfrm>
-          <a:prstGeom prst="rect">
-            <a:avLst/>
-          </a:prstGeom>
-          <a:noFill/>
-          <a:ln/>
-        </p:spPr>
-        <p:txBody>
-          <a:bodyPr wrap="square" lIns="0" tIns="0" rIns="0" bIns="0" rtlCol="0" anchor="t"/>
-          <a:lstStyle/>
-          <a:p>
-            <a:pPr indent="0" marL="0">
-              <a:lnSpc>
-                <a:spcPct val="125000"/>
-              </a:lnSpc>
-              <a:buNone/>
-            </a:pPr>
-            <a:r>
-              <a:rPr lang="en-US" sz="1250" dirty="0">
-                <a:solidFill>
-                  <a:srgbClr val="1C2833"/>
-                </a:solidFill>
-                <a:latin typeface="Meiryo" pitchFamily="34" charset="0"/>
-                <a:ea typeface="Meiryo" pitchFamily="34" charset="-122"/>
-                <a:cs typeface="Meiryo" pitchFamily="34" charset="-120"/>
-              </a:rPr>
-              <a:t>発熱・血圧変動・全身状態の悪化時は、看護師の判断で</a:t>
-            </a:r>
-            <a:pPr indent="0" marL="0">
-              <a:lnSpc>
-                <a:spcPct val="125000"/>
-              </a:lnSpc>
-              <a:buNone/>
-            </a:pPr>
-            <a:r>
-              <a:rPr lang="en-US" sz="1250" b="1" dirty="0">
-                <a:solidFill>
-                  <a:srgbClr val="1D9E75"/>
-                </a:solidFill>
-                <a:latin typeface="Meiryo" pitchFamily="34" charset="0"/>
-                <a:ea typeface="Meiryo" pitchFamily="34" charset="-122"/>
-                <a:cs typeface="Meiryo" pitchFamily="34" charset="-120"/>
-              </a:rPr>
-              <a:t>清拭や部分浴に切り替え</a:t>
-            </a:r>
-            <a:pPr indent="0" marL="0">
-              <a:lnSpc>
-                <a:spcPct val="125000"/>
-              </a:lnSpc>
-              <a:buNone/>
-            </a:pPr>
-            <a:r>
-              <a:rPr lang="en-US" sz="1250" dirty="0">
-                <a:solidFill>
-                  <a:srgbClr val="1C2833"/>
-                </a:solidFill>
-                <a:latin typeface="Meiryo" pitchFamily="34" charset="0"/>
-                <a:ea typeface="Meiryo" pitchFamily="34" charset="-122"/>
-                <a:cs typeface="Meiryo" pitchFamily="34" charset="-120"/>
-              </a:rPr>
-              <a:t>。中止時もご家族・ケアマネジャーへ理由を報告します。</a:t>
-            </a:r>
-            <a:endParaRPr lang="en-US" sz="1250" dirty="0"/>
-          </a:p>
-        </p:txBody>
-      </p:sp>
-      <p:sp>
-        <p:nvSpPr>
-          <p:cNvPr id="38" name="Shape 36"/>
-          <p:cNvSpPr/>
-          <p:nvPr/>
-        </p:nvSpPr>
-        <p:spPr>
-          <a:xfrm>
-            <a:off x="6242152" y="3145536"/>
-            <a:ext cx="5382616" cy="1481328"/>
-          </a:xfrm>
-          <a:prstGeom prst="roundRect">
-            <a:avLst>
-              <a:gd name="adj" fmla="val 3704"/>
-            </a:avLst>
-          </a:prstGeom>
-          <a:solidFill>
-            <a:srgbClr val="EAF7F1"/>
-          </a:solidFill>
-          <a:ln w="12700">
-            <a:solidFill>
-              <a:srgbClr val="EAF7F1"/>
-            </a:solidFill>
-            <a:prstDash val="solid"/>
-          </a:ln>
-        </p:spPr>
-      </p:sp>
-      <p:sp>
-        <p:nvSpPr>
-          <p:cNvPr id="39" name="Text 37"/>
-          <p:cNvSpPr txBox="1"/>
-          <p:nvPr/>
-        </p:nvSpPr>
-        <p:spPr>
-          <a:xfrm>
-            <a:off x="6461608" y="3328416"/>
-            <a:ext cx="4943704" cy="310896"/>
-          </a:xfrm>
-          <a:prstGeom prst="rect">
-            <a:avLst/>
-          </a:prstGeom>
-          <a:noFill/>
-          <a:ln/>
-        </p:spPr>
-        <p:txBody>
-          <a:bodyPr wrap="square" lIns="0" tIns="0" rIns="0" bIns="0" rtlCol="0" anchor="ctr"/>
-          <a:lstStyle/>
-          <a:p>
-            <a:pPr indent="0" marL="0">
-              <a:buNone/>
-            </a:pPr>
-            <a:r>
-              <a:rPr lang="en-US" sz="1500" b="1" dirty="0">
-                <a:solidFill>
-                  <a:srgbClr val="1D9E75"/>
-                </a:solidFill>
-                <a:latin typeface="Meiryo" pitchFamily="34" charset="0"/>
-                <a:ea typeface="Meiryo" pitchFamily="34" charset="-122"/>
-                <a:cs typeface="Meiryo" pitchFamily="34" charset="-120"/>
-              </a:rPr>
-              <a:t>住環境への配慮</a:t>
-            </a:r>
-            <a:endParaRPr lang="en-US" sz="1500" dirty="0"/>
-          </a:p>
-        </p:txBody>
-      </p:sp>
-      <p:sp>
-        <p:nvSpPr>
-          <p:cNvPr id="40" name="Text 38"/>
-          <p:cNvSpPr txBox="1"/>
-          <p:nvPr/>
-        </p:nvSpPr>
-        <p:spPr>
-          <a:xfrm>
-            <a:off x="6461608" y="3730752"/>
+            <a:off x="6461608" y="4645152"/>
             <a:ext cx="4943704" cy="749808"/>
           </a:xfrm>
           <a:prstGeom prst="rect">

--- a/houmon-nyuyoku-slides.pptx
+++ b/houmon-nyuyoku-slides.pptx
@@ -1308,7 +1308,7 @@
           <a:p>
             <a:r>
               <a:rPr lang="en-US" dirty="0"/>
-              <a:t>この表が本日の中心です。訪問入浴の列だけがすべて丸になる、という点に注目してください。</a:t>
+              <a:t>この表が本日の中心です。訪問看護・訪問介護の入浴介助も比較に入れました。訪問入浴の違いは、専用浴槽を持参するため浴室環境に左右されない点と、3名体制で移乗できる点です。</a:t>
             </a:r>
             <a:endParaRPr lang="en-US" dirty="0"/>
           </a:p>
@@ -8148,7 +8148,7 @@
                 <a:ea typeface="Meiryo" pitchFamily="34" charset="-122"/>
                 <a:cs typeface="Meiryo" pitchFamily="34" charset="-120"/>
               </a:rPr>
-              <a:t>① 訪問介護（清拭）</a:t>
+              <a:t>① 訪問介護・訪問看護</a:t>
             </a:r>
             <a:endParaRPr lang="en-US" sz="1500" dirty="0"/>
           </a:p>
@@ -8190,7 +8190,7 @@
                 <a:ea typeface="Meiryo" pitchFamily="34" charset="-122"/>
                 <a:cs typeface="Meiryo" pitchFamily="34" charset="-120"/>
               </a:rPr>
-              <a:t>自宅で受けられ、導入しやすい。
+              <a:t>自宅の浴室を使い、ヘルパーや看護師が介助。清拭・部分浴も含む。
 </a:t>
             </a:r>
             <a:pPr indent="0" marL="0">
@@ -8225,7 +8225,7 @@
                 <a:ea typeface="Meiryo" pitchFamily="34" charset="-122"/>
                 <a:cs typeface="Meiryo" pitchFamily="34" charset="-120"/>
               </a:rPr>
-              <a:t>全身浴ではなく洗髪・背部が不十分。温熱効果が得られず、看護職の観察も入らない。</a:t>
+              <a:t>浴室環境に左右され原則1名対応。全介助や寝たきりの方は難しい。</a:t>
             </a:r>
             <a:endParaRPr lang="en-US" sz="1250" dirty="0"/>
           </a:p>
@@ -8760,7 +8760,7 @@
                 <a:ea typeface="Meiryo" pitchFamily="34" charset="-122"/>
                 <a:cs typeface="Meiryo" pitchFamily="34" charset="-120"/>
               </a:rPr>
-              <a:t>3つの入浴支援を比べる</a:t>
+              <a:t>5つの入浴支援を比べる</a:t>
             </a:r>
             <a:endParaRPr lang="en-US" sz="3000" dirty="0"/>
           </a:p>
@@ -8781,7 +8781,7 @@
           </p:nvPr>
         </p:nvGraphicFramePr>
         <p:xfrm>
-          <a:off x="566928" y="1481328"/>
+          <a:off x="566928" y="1444752"/>
           <a:ext cx="11057839" cy="914400"/>
         </p:xfrm>
         <a:graphic>
@@ -8789,12 +8789,14 @@
             <a:tbl>
               <a:tblPr/>
               <a:tblGrid>
-                <a:gridCol w="3566160"/>
-                <a:gridCol w="2514600"/>
-                <a:gridCol w="2514600"/>
-                <a:gridCol w="2478024"/>
+                <a:gridCol w="3017520"/>
+                <a:gridCol w="1664208"/>
+                <a:gridCol w="1600200"/>
+                <a:gridCol w="1600200"/>
+                <a:gridCol w="1600200"/>
+                <a:gridCol w="1563624"/>
               </a:tblGrid>
-              <a:tr h="402336">
+              <a:tr h="329184">
                 <a:tc>
                   <a:txBody>
                     <a:bodyPr/>
@@ -8804,7 +8806,7 @@
                         <a:buNone/>
                       </a:pPr>
                       <a:r>
-                        <a:rPr lang="en-US" sz="1300" b="1" dirty="0">
+                        <a:rPr lang="en-US" sz="1100" b="1" dirty="0">
                           <a:solidFill>
                             <a:srgbClr val="FFFFFF"/>
                           </a:solidFill>
@@ -8814,7 +8816,7 @@
                         </a:rPr>
                         <a:t>項目</a:t>
                       </a:r>
-                      <a:endParaRPr lang="en-US" sz="1300" dirty="0">
+                      <a:endParaRPr lang="en-US" sz="1100" dirty="0">
                         <a:latin typeface="Meiryo" charset="0"/>
                         <a:ea typeface="Meiryo" charset="0"/>
                         <a:cs typeface="Meiryo" charset="0"/>
@@ -8872,7 +8874,7 @@
                         <a:buNone/>
                       </a:pPr>
                       <a:r>
-                        <a:rPr lang="en-US" sz="1300" b="1" dirty="0">
+                        <a:rPr lang="en-US" sz="1100" b="1" dirty="0">
                           <a:solidFill>
                             <a:srgbClr val="FFFFFF"/>
                           </a:solidFill>
@@ -8882,7 +8884,7 @@
                         </a:rPr>
                         <a:t>訪問入浴</a:t>
                       </a:r>
-                      <a:endParaRPr lang="en-US" sz="1300" dirty="0">
+                      <a:endParaRPr lang="en-US" sz="1100" dirty="0">
                         <a:latin typeface="Meiryo" charset="0"/>
                         <a:ea typeface="Meiryo" charset="0"/>
                         <a:cs typeface="Meiryo" charset="0"/>
@@ -8940,7 +8942,7 @@
                         <a:buNone/>
                       </a:pPr>
                       <a:r>
-                        <a:rPr lang="en-US" sz="1300" b="1" dirty="0">
+                        <a:rPr lang="en-US" sz="1100" b="1" dirty="0">
                           <a:solidFill>
                             <a:srgbClr val="FFFFFF"/>
                           </a:solidFill>
@@ -8948,9 +8950,9 @@
                           <a:ea typeface="Meiryo" pitchFamily="34" charset="-122"/>
                           <a:cs typeface="Meiryo" pitchFamily="34" charset="-120"/>
                         </a:rPr>
-                        <a:t>デイ入浴</a:t>
+                        <a:t>訪問看護</a:t>
                       </a:r>
-                      <a:endParaRPr lang="en-US" sz="1300" dirty="0">
+                      <a:endParaRPr lang="en-US" sz="1100" dirty="0">
                         <a:latin typeface="Meiryo" charset="0"/>
                         <a:ea typeface="Meiryo" charset="0"/>
                         <a:cs typeface="Meiryo" charset="0"/>
@@ -9008,7 +9010,143 @@
                         <a:buNone/>
                       </a:pPr>
                       <a:r>
-                        <a:rPr lang="en-US" sz="1300" b="1" dirty="0">
+                        <a:rPr lang="en-US" sz="1100" b="1" dirty="0">
+                          <a:solidFill>
+                            <a:srgbClr val="FFFFFF"/>
+                          </a:solidFill>
+                          <a:latin typeface="Meiryo" pitchFamily="34" charset="0"/>
+                          <a:ea typeface="Meiryo" pitchFamily="34" charset="-122"/>
+                          <a:cs typeface="Meiryo" pitchFamily="34" charset="-120"/>
+                        </a:rPr>
+                        <a:t>訪問介護</a:t>
+                      </a:r>
+                      <a:endParaRPr lang="en-US" sz="1100" dirty="0">
+                        <a:latin typeface="Meiryo" charset="0"/>
+                        <a:ea typeface="Meiryo" charset="0"/>
+                        <a:cs typeface="Meiryo" charset="0"/>
+                      </a:endParaRPr>
+                    </a:p>
+                  </a:txBody>
+                  <a:tcPr marL="91440" marR="91440" marT="45720" marB="45720" anchor="ctr">
+                    <a:lnL w="12700" cap="flat" cmpd="sng" algn="ctr">
+                      <a:solidFill>
+                        <a:srgbClr val="E5E9EC"/>
+                      </a:solidFill>
+                      <a:prstDash val="solid"/>
+                      <a:round/>
+                      <a:headEnd type="none" w="med" len="med"/>
+                      <a:tailEnd type="none" w="med" len="med"/>
+                    </a:lnL>
+                    <a:lnR w="12700" cap="flat" cmpd="sng" algn="ctr">
+                      <a:solidFill>
+                        <a:srgbClr val="E5E9EC"/>
+                      </a:solidFill>
+                      <a:prstDash val="solid"/>
+                      <a:round/>
+                      <a:headEnd type="none" w="med" len="med"/>
+                      <a:tailEnd type="none" w="med" len="med"/>
+                    </a:lnR>
+                    <a:lnT w="12700" cap="flat" cmpd="sng" algn="ctr">
+                      <a:solidFill>
+                        <a:srgbClr val="E5E9EC"/>
+                      </a:solidFill>
+                      <a:prstDash val="solid"/>
+                      <a:round/>
+                      <a:headEnd type="none" w="med" len="med"/>
+                      <a:tailEnd type="none" w="med" len="med"/>
+                    </a:lnT>
+                    <a:lnB w="12700" cap="flat" cmpd="sng" algn="ctr">
+                      <a:solidFill>
+                        <a:srgbClr val="E5E9EC"/>
+                      </a:solidFill>
+                      <a:prstDash val="solid"/>
+                      <a:round/>
+                      <a:headEnd type="none" w="med" len="med"/>
+                      <a:tailEnd type="none" w="med" len="med"/>
+                    </a:lnB>
+                    <a:solidFill>
+                      <a:srgbClr val="1A5276"/>
+                    </a:solidFill>
+                  </a:tcPr>
+                </a:tc>
+                <a:tc>
+                  <a:txBody>
+                    <a:bodyPr/>
+                    <a:lstStyle/>
+                    <a:p>
+                      <a:pPr algn="ctr" indent="0" marL="0">
+                        <a:buNone/>
+                      </a:pPr>
+                      <a:r>
+                        <a:rPr lang="en-US" sz="1100" b="1" dirty="0">
+                          <a:solidFill>
+                            <a:srgbClr val="FFFFFF"/>
+                          </a:solidFill>
+                          <a:latin typeface="Meiryo" pitchFamily="34" charset="0"/>
+                          <a:ea typeface="Meiryo" pitchFamily="34" charset="-122"/>
+                          <a:cs typeface="Meiryo" pitchFamily="34" charset="-120"/>
+                        </a:rPr>
+                        <a:t>デイ入浴</a:t>
+                      </a:r>
+                      <a:endParaRPr lang="en-US" sz="1100" dirty="0">
+                        <a:latin typeface="Meiryo" charset="0"/>
+                        <a:ea typeface="Meiryo" charset="0"/>
+                        <a:cs typeface="Meiryo" charset="0"/>
+                      </a:endParaRPr>
+                    </a:p>
+                  </a:txBody>
+                  <a:tcPr marL="91440" marR="91440" marT="45720" marB="45720" anchor="ctr">
+                    <a:lnL w="12700" cap="flat" cmpd="sng" algn="ctr">
+                      <a:solidFill>
+                        <a:srgbClr val="E5E9EC"/>
+                      </a:solidFill>
+                      <a:prstDash val="solid"/>
+                      <a:round/>
+                      <a:headEnd type="none" w="med" len="med"/>
+                      <a:tailEnd type="none" w="med" len="med"/>
+                    </a:lnL>
+                    <a:lnR w="12700" cap="flat" cmpd="sng" algn="ctr">
+                      <a:solidFill>
+                        <a:srgbClr val="E5E9EC"/>
+                      </a:solidFill>
+                      <a:prstDash val="solid"/>
+                      <a:round/>
+                      <a:headEnd type="none" w="med" len="med"/>
+                      <a:tailEnd type="none" w="med" len="med"/>
+                    </a:lnR>
+                    <a:lnT w="12700" cap="flat" cmpd="sng" algn="ctr">
+                      <a:solidFill>
+                        <a:srgbClr val="E5E9EC"/>
+                      </a:solidFill>
+                      <a:prstDash val="solid"/>
+                      <a:round/>
+                      <a:headEnd type="none" w="med" len="med"/>
+                      <a:tailEnd type="none" w="med" len="med"/>
+                    </a:lnT>
+                    <a:lnB w="12700" cap="flat" cmpd="sng" algn="ctr">
+                      <a:solidFill>
+                        <a:srgbClr val="E5E9EC"/>
+                      </a:solidFill>
+                      <a:prstDash val="solid"/>
+                      <a:round/>
+                      <a:headEnd type="none" w="med" len="med"/>
+                      <a:tailEnd type="none" w="med" len="med"/>
+                    </a:lnB>
+                    <a:solidFill>
+                      <a:srgbClr val="1A5276"/>
+                    </a:solidFill>
+                  </a:tcPr>
+                </a:tc>
+                <a:tc>
+                  <a:txBody>
+                    <a:bodyPr/>
+                    <a:lstStyle/>
+                    <a:p>
+                      <a:pPr algn="ctr" indent="0" marL="0">
+                        <a:buNone/>
+                      </a:pPr>
+                      <a:r>
+                        <a:rPr lang="en-US" sz="1100" b="1" dirty="0">
                           <a:solidFill>
                             <a:srgbClr val="FFFFFF"/>
                           </a:solidFill>
@@ -9018,7 +9156,7 @@
                         </a:rPr>
                         <a:t>清拭・部分浴</a:t>
                       </a:r>
-                      <a:endParaRPr lang="en-US" sz="1300" dirty="0">
+                      <a:endParaRPr lang="en-US" sz="1100" dirty="0">
                         <a:latin typeface="Meiryo" charset="0"/>
                         <a:ea typeface="Meiryo" charset="0"/>
                         <a:cs typeface="Meiryo" charset="0"/>
@@ -9068,7 +9206,7 @@
                   </a:tcPr>
                 </a:tc>
               </a:tr>
-              <a:tr h="402336">
+              <a:tr h="329184">
                 <a:tc>
                   <a:txBody>
                     <a:bodyPr/>
@@ -9078,7 +9216,7 @@
                         <a:buNone/>
                       </a:pPr>
                       <a:r>
-                        <a:rPr lang="en-US" sz="1300" b="1" dirty="0">
+                        <a:rPr lang="en-US" sz="1150" b="1" dirty="0">
                           <a:solidFill>
                             <a:srgbClr val="1C2833"/>
                           </a:solidFill>
@@ -9088,7 +9226,7 @@
                         </a:rPr>
                         <a:t>自宅で受けられる</a:t>
                       </a:r>
-                      <a:endParaRPr lang="en-US" sz="1300" dirty="0">
+                      <a:endParaRPr lang="en-US" sz="1150" dirty="0">
                         <a:latin typeface="Meiryo" charset="0"/>
                         <a:ea typeface="Meiryo" charset="0"/>
                         <a:cs typeface="Meiryo" charset="0"/>
@@ -9146,7 +9284,7 @@
                         <a:buNone/>
                       </a:pPr>
                       <a:r>
-                        <a:rPr lang="en-US" sz="1800" b="1" dirty="0">
+                        <a:rPr lang="en-US" sz="1500" b="1" dirty="0">
                           <a:solidFill>
                             <a:srgbClr val="1D9E75"/>
                           </a:solidFill>
@@ -9156,7 +9294,7 @@
                         </a:rPr>
                         <a:t>✓</a:t>
                       </a:r>
-                      <a:endParaRPr lang="en-US" sz="1800" dirty="0">
+                      <a:endParaRPr lang="en-US" sz="1500" dirty="0">
                         <a:latin typeface="Meiryo" charset="0"/>
                         <a:ea typeface="Meiryo" charset="0"/>
                         <a:cs typeface="Meiryo" charset="0"/>
@@ -9214,17 +9352,17 @@
                         <a:buNone/>
                       </a:pPr>
                       <a:r>
-                        <a:rPr lang="en-US" sz="1800" b="1" dirty="0">
+                        <a:rPr lang="en-US" sz="1500" b="1" dirty="0">
                           <a:solidFill>
-                            <a:srgbClr val="BDC3C7"/>
+                            <a:srgbClr val="1D9E75"/>
                           </a:solidFill>
                           <a:latin typeface="Meiryo" pitchFamily="34" charset="0"/>
                           <a:ea typeface="Meiryo" pitchFamily="34" charset="-122"/>
                           <a:cs typeface="Meiryo" pitchFamily="34" charset="-120"/>
                         </a:rPr>
-                        <a:t>✕</a:t>
+                        <a:t>✓</a:t>
                       </a:r>
-                      <a:endParaRPr lang="en-US" sz="1800" dirty="0">
+                      <a:endParaRPr lang="en-US" sz="1500" dirty="0">
                         <a:latin typeface="Meiryo" charset="0"/>
                         <a:ea typeface="Meiryo" charset="0"/>
                         <a:cs typeface="Meiryo" charset="0"/>
@@ -9279,7 +9417,7 @@
                         <a:buNone/>
                       </a:pPr>
                       <a:r>
-                        <a:rPr lang="en-US" sz="1800" b="1" dirty="0">
+                        <a:rPr lang="en-US" sz="1500" b="1" dirty="0">
                           <a:solidFill>
                             <a:srgbClr val="1D9E75"/>
                           </a:solidFill>
@@ -9289,7 +9427,7 @@
                         </a:rPr>
                         <a:t>✓</a:t>
                       </a:r>
-                      <a:endParaRPr lang="en-US" sz="1800" dirty="0">
+                      <a:endParaRPr lang="en-US" sz="1500" dirty="0">
                         <a:latin typeface="Meiryo" charset="0"/>
                         <a:ea typeface="Meiryo" charset="0"/>
                         <a:cs typeface="Meiryo" charset="0"/>
@@ -9335,8 +9473,138 @@
                     </a:lnB>
                   </a:tcPr>
                 </a:tc>
+                <a:tc>
+                  <a:txBody>
+                    <a:bodyPr/>
+                    <a:lstStyle/>
+                    <a:p>
+                      <a:pPr algn="ctr" indent="0" marL="0">
+                        <a:buNone/>
+                      </a:pPr>
+                      <a:r>
+                        <a:rPr lang="en-US" sz="1500" b="1" dirty="0">
+                          <a:solidFill>
+                            <a:srgbClr val="BDC3C7"/>
+                          </a:solidFill>
+                          <a:latin typeface="Meiryo" pitchFamily="34" charset="0"/>
+                          <a:ea typeface="Meiryo" pitchFamily="34" charset="-122"/>
+                          <a:cs typeface="Meiryo" pitchFamily="34" charset="-120"/>
+                        </a:rPr>
+                        <a:t>✕</a:t>
+                      </a:r>
+                      <a:endParaRPr lang="en-US" sz="1500" dirty="0">
+                        <a:latin typeface="Meiryo" charset="0"/>
+                        <a:ea typeface="Meiryo" charset="0"/>
+                        <a:cs typeface="Meiryo" charset="0"/>
+                      </a:endParaRPr>
+                    </a:p>
+                  </a:txBody>
+                  <a:tcPr marL="91440" marR="91440" marT="45720" marB="45720" anchor="ctr">
+                    <a:lnL w="12700" cap="flat" cmpd="sng" algn="ctr">
+                      <a:solidFill>
+                        <a:srgbClr val="E5E9EC"/>
+                      </a:solidFill>
+                      <a:prstDash val="solid"/>
+                      <a:round/>
+                      <a:headEnd type="none" w="med" len="med"/>
+                      <a:tailEnd type="none" w="med" len="med"/>
+                    </a:lnL>
+                    <a:lnR w="12700" cap="flat" cmpd="sng" algn="ctr">
+                      <a:solidFill>
+                        <a:srgbClr val="E5E9EC"/>
+                      </a:solidFill>
+                      <a:prstDash val="solid"/>
+                      <a:round/>
+                      <a:headEnd type="none" w="med" len="med"/>
+                      <a:tailEnd type="none" w="med" len="med"/>
+                    </a:lnR>
+                    <a:lnT w="12700" cap="flat" cmpd="sng" algn="ctr">
+                      <a:solidFill>
+                        <a:srgbClr val="E5E9EC"/>
+                      </a:solidFill>
+                      <a:prstDash val="solid"/>
+                      <a:round/>
+                      <a:headEnd type="none" w="med" len="med"/>
+                      <a:tailEnd type="none" w="med" len="med"/>
+                    </a:lnT>
+                    <a:lnB w="12700" cap="flat" cmpd="sng" algn="ctr">
+                      <a:solidFill>
+                        <a:srgbClr val="E5E9EC"/>
+                      </a:solidFill>
+                      <a:prstDash val="solid"/>
+                      <a:round/>
+                      <a:headEnd type="none" w="med" len="med"/>
+                      <a:tailEnd type="none" w="med" len="med"/>
+                    </a:lnB>
+                  </a:tcPr>
+                </a:tc>
+                <a:tc>
+                  <a:txBody>
+                    <a:bodyPr/>
+                    <a:lstStyle/>
+                    <a:p>
+                      <a:pPr algn="ctr" indent="0" marL="0">
+                        <a:buNone/>
+                      </a:pPr>
+                      <a:r>
+                        <a:rPr lang="en-US" sz="1500" b="1" dirty="0">
+                          <a:solidFill>
+                            <a:srgbClr val="1D9E75"/>
+                          </a:solidFill>
+                          <a:latin typeface="Meiryo" pitchFamily="34" charset="0"/>
+                          <a:ea typeface="Meiryo" pitchFamily="34" charset="-122"/>
+                          <a:cs typeface="Meiryo" pitchFamily="34" charset="-120"/>
+                        </a:rPr>
+                        <a:t>✓</a:t>
+                      </a:r>
+                      <a:endParaRPr lang="en-US" sz="1500" dirty="0">
+                        <a:latin typeface="Meiryo" charset="0"/>
+                        <a:ea typeface="Meiryo" charset="0"/>
+                        <a:cs typeface="Meiryo" charset="0"/>
+                      </a:endParaRPr>
+                    </a:p>
+                  </a:txBody>
+                  <a:tcPr marL="91440" marR="91440" marT="45720" marB="45720" anchor="ctr">
+                    <a:lnL w="12700" cap="flat" cmpd="sng" algn="ctr">
+                      <a:solidFill>
+                        <a:srgbClr val="E5E9EC"/>
+                      </a:solidFill>
+                      <a:prstDash val="solid"/>
+                      <a:round/>
+                      <a:headEnd type="none" w="med" len="med"/>
+                      <a:tailEnd type="none" w="med" len="med"/>
+                    </a:lnL>
+                    <a:lnR w="12700" cap="flat" cmpd="sng" algn="ctr">
+                      <a:solidFill>
+                        <a:srgbClr val="E5E9EC"/>
+                      </a:solidFill>
+                      <a:prstDash val="solid"/>
+                      <a:round/>
+                      <a:headEnd type="none" w="med" len="med"/>
+                      <a:tailEnd type="none" w="med" len="med"/>
+                    </a:lnR>
+                    <a:lnT w="12700" cap="flat" cmpd="sng" algn="ctr">
+                      <a:solidFill>
+                        <a:srgbClr val="E5E9EC"/>
+                      </a:solidFill>
+                      <a:prstDash val="solid"/>
+                      <a:round/>
+                      <a:headEnd type="none" w="med" len="med"/>
+                      <a:tailEnd type="none" w="med" len="med"/>
+                    </a:lnT>
+                    <a:lnB w="12700" cap="flat" cmpd="sng" algn="ctr">
+                      <a:solidFill>
+                        <a:srgbClr val="E5E9EC"/>
+                      </a:solidFill>
+                      <a:prstDash val="solid"/>
+                      <a:round/>
+                      <a:headEnd type="none" w="med" len="med"/>
+                      <a:tailEnd type="none" w="med" len="med"/>
+                    </a:lnB>
+                  </a:tcPr>
+                </a:tc>
               </a:tr>
-              <a:tr h="402336">
+              <a:tr h="329184">
                 <a:tc>
                   <a:txBody>
                     <a:bodyPr/>
@@ -9346,7 +9614,7 @@
                         <a:buNone/>
                       </a:pPr>
                       <a:r>
-                        <a:rPr lang="en-US" sz="1300" b="1" dirty="0">
+                        <a:rPr lang="en-US" sz="1150" b="1" dirty="0">
                           <a:solidFill>
                             <a:srgbClr val="1C2833"/>
                           </a:solidFill>
@@ -9356,7 +9624,7 @@
                         </a:rPr>
                         <a:t>全身浴ができる</a:t>
                       </a:r>
-                      <a:endParaRPr lang="en-US" sz="1300" dirty="0">
+                      <a:endParaRPr lang="en-US" sz="1150" dirty="0">
                         <a:latin typeface="Meiryo" charset="0"/>
                         <a:ea typeface="Meiryo" charset="0"/>
                         <a:cs typeface="Meiryo" charset="0"/>
@@ -9414,7 +9682,7 @@
                         <a:buNone/>
                       </a:pPr>
                       <a:r>
-                        <a:rPr lang="en-US" sz="1800" b="1" dirty="0">
+                        <a:rPr lang="en-US" sz="1500" b="1" dirty="0">
                           <a:solidFill>
                             <a:srgbClr val="1D9E75"/>
                           </a:solidFill>
@@ -9424,7 +9692,7 @@
                         </a:rPr>
                         <a:t>✓</a:t>
                       </a:r>
-                      <a:endParaRPr lang="en-US" sz="1800" dirty="0">
+                      <a:endParaRPr lang="en-US" sz="1500" dirty="0">
                         <a:latin typeface="Meiryo" charset="0"/>
                         <a:ea typeface="Meiryo" charset="0"/>
                         <a:cs typeface="Meiryo" charset="0"/>
@@ -9482,17 +9750,17 @@
                         <a:buNone/>
                       </a:pPr>
                       <a:r>
-                        <a:rPr lang="en-US" sz="1800" b="1" dirty="0">
+                        <a:rPr lang="en-US" sz="1500" b="1" dirty="0">
                           <a:solidFill>
-                            <a:srgbClr val="1D9E75"/>
+                            <a:srgbClr val="F39C12"/>
                           </a:solidFill>
                           <a:latin typeface="Meiryo" pitchFamily="34" charset="0"/>
                           <a:ea typeface="Meiryo" pitchFamily="34" charset="-122"/>
                           <a:cs typeface="Meiryo" pitchFamily="34" charset="-120"/>
                         </a:rPr>
-                        <a:t>✓</a:t>
+                        <a:t>△</a:t>
                       </a:r>
-                      <a:endParaRPr lang="en-US" sz="1800" dirty="0">
+                      <a:endParaRPr lang="en-US" sz="1500" dirty="0">
                         <a:latin typeface="Meiryo" charset="0"/>
                         <a:ea typeface="Meiryo" charset="0"/>
                         <a:cs typeface="Meiryo" charset="0"/>
@@ -9547,7 +9815,137 @@
                         <a:buNone/>
                       </a:pPr>
                       <a:r>
-                        <a:rPr lang="en-US" sz="1800" b="1" dirty="0">
+                        <a:rPr lang="en-US" sz="1500" b="1" dirty="0">
+                          <a:solidFill>
+                            <a:srgbClr val="F39C12"/>
+                          </a:solidFill>
+                          <a:latin typeface="Meiryo" pitchFamily="34" charset="0"/>
+                          <a:ea typeface="Meiryo" pitchFamily="34" charset="-122"/>
+                          <a:cs typeface="Meiryo" pitchFamily="34" charset="-120"/>
+                        </a:rPr>
+                        <a:t>△</a:t>
+                      </a:r>
+                      <a:endParaRPr lang="en-US" sz="1500" dirty="0">
+                        <a:latin typeface="Meiryo" charset="0"/>
+                        <a:ea typeface="Meiryo" charset="0"/>
+                        <a:cs typeface="Meiryo" charset="0"/>
+                      </a:endParaRPr>
+                    </a:p>
+                  </a:txBody>
+                  <a:tcPr marL="91440" marR="91440" marT="45720" marB="45720" anchor="ctr">
+                    <a:lnL w="12700" cap="flat" cmpd="sng" algn="ctr">
+                      <a:solidFill>
+                        <a:srgbClr val="E5E9EC"/>
+                      </a:solidFill>
+                      <a:prstDash val="solid"/>
+                      <a:round/>
+                      <a:headEnd type="none" w="med" len="med"/>
+                      <a:tailEnd type="none" w="med" len="med"/>
+                    </a:lnL>
+                    <a:lnR w="12700" cap="flat" cmpd="sng" algn="ctr">
+                      <a:solidFill>
+                        <a:srgbClr val="E5E9EC"/>
+                      </a:solidFill>
+                      <a:prstDash val="solid"/>
+                      <a:round/>
+                      <a:headEnd type="none" w="med" len="med"/>
+                      <a:tailEnd type="none" w="med" len="med"/>
+                    </a:lnR>
+                    <a:lnT w="12700" cap="flat" cmpd="sng" algn="ctr">
+                      <a:solidFill>
+                        <a:srgbClr val="E5E9EC"/>
+                      </a:solidFill>
+                      <a:prstDash val="solid"/>
+                      <a:round/>
+                      <a:headEnd type="none" w="med" len="med"/>
+                      <a:tailEnd type="none" w="med" len="med"/>
+                    </a:lnT>
+                    <a:lnB w="12700" cap="flat" cmpd="sng" algn="ctr">
+                      <a:solidFill>
+                        <a:srgbClr val="E5E9EC"/>
+                      </a:solidFill>
+                      <a:prstDash val="solid"/>
+                      <a:round/>
+                      <a:headEnd type="none" w="med" len="med"/>
+                      <a:tailEnd type="none" w="med" len="med"/>
+                    </a:lnB>
+                  </a:tcPr>
+                </a:tc>
+                <a:tc>
+                  <a:txBody>
+                    <a:bodyPr/>
+                    <a:lstStyle/>
+                    <a:p>
+                      <a:pPr algn="ctr" indent="0" marL="0">
+                        <a:buNone/>
+                      </a:pPr>
+                      <a:r>
+                        <a:rPr lang="en-US" sz="1500" b="1" dirty="0">
+                          <a:solidFill>
+                            <a:srgbClr val="1D9E75"/>
+                          </a:solidFill>
+                          <a:latin typeface="Meiryo" pitchFamily="34" charset="0"/>
+                          <a:ea typeface="Meiryo" pitchFamily="34" charset="-122"/>
+                          <a:cs typeface="Meiryo" pitchFamily="34" charset="-120"/>
+                        </a:rPr>
+                        <a:t>✓</a:t>
+                      </a:r>
+                      <a:endParaRPr lang="en-US" sz="1500" dirty="0">
+                        <a:latin typeface="Meiryo" charset="0"/>
+                        <a:ea typeface="Meiryo" charset="0"/>
+                        <a:cs typeface="Meiryo" charset="0"/>
+                      </a:endParaRPr>
+                    </a:p>
+                  </a:txBody>
+                  <a:tcPr marL="91440" marR="91440" marT="45720" marB="45720" anchor="ctr">
+                    <a:lnL w="12700" cap="flat" cmpd="sng" algn="ctr">
+                      <a:solidFill>
+                        <a:srgbClr val="E5E9EC"/>
+                      </a:solidFill>
+                      <a:prstDash val="solid"/>
+                      <a:round/>
+                      <a:headEnd type="none" w="med" len="med"/>
+                      <a:tailEnd type="none" w="med" len="med"/>
+                    </a:lnL>
+                    <a:lnR w="12700" cap="flat" cmpd="sng" algn="ctr">
+                      <a:solidFill>
+                        <a:srgbClr val="E5E9EC"/>
+                      </a:solidFill>
+                      <a:prstDash val="solid"/>
+                      <a:round/>
+                      <a:headEnd type="none" w="med" len="med"/>
+                      <a:tailEnd type="none" w="med" len="med"/>
+                    </a:lnR>
+                    <a:lnT w="12700" cap="flat" cmpd="sng" algn="ctr">
+                      <a:solidFill>
+                        <a:srgbClr val="E5E9EC"/>
+                      </a:solidFill>
+                      <a:prstDash val="solid"/>
+                      <a:round/>
+                      <a:headEnd type="none" w="med" len="med"/>
+                      <a:tailEnd type="none" w="med" len="med"/>
+                    </a:lnT>
+                    <a:lnB w="12700" cap="flat" cmpd="sng" algn="ctr">
+                      <a:solidFill>
+                        <a:srgbClr val="E5E9EC"/>
+                      </a:solidFill>
+                      <a:prstDash val="solid"/>
+                      <a:round/>
+                      <a:headEnd type="none" w="med" len="med"/>
+                      <a:tailEnd type="none" w="med" len="med"/>
+                    </a:lnB>
+                  </a:tcPr>
+                </a:tc>
+                <a:tc>
+                  <a:txBody>
+                    <a:bodyPr/>
+                    <a:lstStyle/>
+                    <a:p>
+                      <a:pPr algn="ctr" indent="0" marL="0">
+                        <a:buNone/>
+                      </a:pPr>
+                      <a:r>
+                        <a:rPr lang="en-US" sz="1500" b="1" dirty="0">
                           <a:solidFill>
                             <a:srgbClr val="BDC3C7"/>
                           </a:solidFill>
@@ -9557,7 +9955,7 @@
                         </a:rPr>
                         <a:t>✕</a:t>
                       </a:r>
-                      <a:endParaRPr lang="en-US" sz="1800" dirty="0">
+                      <a:endParaRPr lang="en-US" sz="1500" dirty="0">
                         <a:latin typeface="Meiryo" charset="0"/>
                         <a:ea typeface="Meiryo" charset="0"/>
                         <a:cs typeface="Meiryo" charset="0"/>
@@ -9604,7 +10002,7 @@
                   </a:tcPr>
                 </a:tc>
               </a:tr>
-              <a:tr h="402336">
+              <a:tr h="329184">
                 <a:tc>
                   <a:txBody>
                     <a:bodyPr/>
@@ -9614,7 +10012,7 @@
                         <a:buNone/>
                       </a:pPr>
                       <a:r>
-                        <a:rPr lang="en-US" sz="1300" b="1" dirty="0">
+                        <a:rPr lang="en-US" sz="1150" b="1" dirty="0">
                           <a:solidFill>
                             <a:srgbClr val="1C2833"/>
                           </a:solidFill>
@@ -9622,9 +10020,9 @@
                           <a:ea typeface="Meiryo" pitchFamily="34" charset="-122"/>
                           <a:cs typeface="Meiryo" pitchFamily="34" charset="-120"/>
                         </a:rPr>
-                        <a:t>看護師が同行</a:t>
+                        <a:t>浴室の環境に左右されない</a:t>
                       </a:r>
-                      <a:endParaRPr lang="en-US" sz="1300" dirty="0">
+                      <a:endParaRPr lang="en-US" sz="1150" dirty="0">
                         <a:latin typeface="Meiryo" charset="0"/>
                         <a:ea typeface="Meiryo" charset="0"/>
                         <a:cs typeface="Meiryo" charset="0"/>
@@ -9682,7 +10080,7 @@
                         <a:buNone/>
                       </a:pPr>
                       <a:r>
-                        <a:rPr lang="en-US" sz="1800" b="1" dirty="0">
+                        <a:rPr lang="en-US" sz="1500" b="1" dirty="0">
                           <a:solidFill>
                             <a:srgbClr val="1D9E75"/>
                           </a:solidFill>
@@ -9692,7 +10090,7 @@
                         </a:rPr>
                         <a:t>✓</a:t>
                       </a:r>
-                      <a:endParaRPr lang="en-US" sz="1800" dirty="0">
+                      <a:endParaRPr lang="en-US" sz="1500" dirty="0">
                         <a:latin typeface="Meiryo" charset="0"/>
                         <a:ea typeface="Meiryo" charset="0"/>
                         <a:cs typeface="Meiryo" charset="0"/>
@@ -9750,17 +10148,17 @@
                         <a:buNone/>
                       </a:pPr>
                       <a:r>
-                        <a:rPr lang="en-US" sz="1800" b="1" dirty="0">
+                        <a:rPr lang="en-US" sz="1500" b="1" dirty="0">
                           <a:solidFill>
-                            <a:srgbClr val="F39C12"/>
+                            <a:srgbClr val="BDC3C7"/>
                           </a:solidFill>
                           <a:latin typeface="Meiryo" pitchFamily="34" charset="0"/>
                           <a:ea typeface="Meiryo" pitchFamily="34" charset="-122"/>
                           <a:cs typeface="Meiryo" pitchFamily="34" charset="-120"/>
                         </a:rPr>
-                        <a:t>△</a:t>
+                        <a:t>✕</a:t>
                       </a:r>
-                      <a:endParaRPr lang="en-US" sz="1800" dirty="0">
+                      <a:endParaRPr lang="en-US" sz="1500" dirty="0">
                         <a:latin typeface="Meiryo" charset="0"/>
                         <a:ea typeface="Meiryo" charset="0"/>
                         <a:cs typeface="Meiryo" charset="0"/>
@@ -9815,7 +10213,7 @@
                         <a:buNone/>
                       </a:pPr>
                       <a:r>
-                        <a:rPr lang="en-US" sz="1800" b="1" dirty="0">
+                        <a:rPr lang="en-US" sz="1500" b="1" dirty="0">
                           <a:solidFill>
                             <a:srgbClr val="BDC3C7"/>
                           </a:solidFill>
@@ -9825,7 +10223,7 @@
                         </a:rPr>
                         <a:t>✕</a:t>
                       </a:r>
-                      <a:endParaRPr lang="en-US" sz="1800" dirty="0">
+                      <a:endParaRPr lang="en-US" sz="1500" dirty="0">
                         <a:latin typeface="Meiryo" charset="0"/>
                         <a:ea typeface="Meiryo" charset="0"/>
                         <a:cs typeface="Meiryo" charset="0"/>
@@ -9871,8 +10269,138 @@
                     </a:lnB>
                   </a:tcPr>
                 </a:tc>
+                <a:tc>
+                  <a:txBody>
+                    <a:bodyPr/>
+                    <a:lstStyle/>
+                    <a:p>
+                      <a:pPr algn="ctr" indent="0" marL="0">
+                        <a:buNone/>
+                      </a:pPr>
+                      <a:r>
+                        <a:rPr lang="en-US" sz="1500" b="1" dirty="0">
+                          <a:solidFill>
+                            <a:srgbClr val="1D9E75"/>
+                          </a:solidFill>
+                          <a:latin typeface="Meiryo" pitchFamily="34" charset="0"/>
+                          <a:ea typeface="Meiryo" pitchFamily="34" charset="-122"/>
+                          <a:cs typeface="Meiryo" pitchFamily="34" charset="-120"/>
+                        </a:rPr>
+                        <a:t>✓</a:t>
+                      </a:r>
+                      <a:endParaRPr lang="en-US" sz="1500" dirty="0">
+                        <a:latin typeface="Meiryo" charset="0"/>
+                        <a:ea typeface="Meiryo" charset="0"/>
+                        <a:cs typeface="Meiryo" charset="0"/>
+                      </a:endParaRPr>
+                    </a:p>
+                  </a:txBody>
+                  <a:tcPr marL="91440" marR="91440" marT="45720" marB="45720" anchor="ctr">
+                    <a:lnL w="12700" cap="flat" cmpd="sng" algn="ctr">
+                      <a:solidFill>
+                        <a:srgbClr val="E5E9EC"/>
+                      </a:solidFill>
+                      <a:prstDash val="solid"/>
+                      <a:round/>
+                      <a:headEnd type="none" w="med" len="med"/>
+                      <a:tailEnd type="none" w="med" len="med"/>
+                    </a:lnL>
+                    <a:lnR w="12700" cap="flat" cmpd="sng" algn="ctr">
+                      <a:solidFill>
+                        <a:srgbClr val="E5E9EC"/>
+                      </a:solidFill>
+                      <a:prstDash val="solid"/>
+                      <a:round/>
+                      <a:headEnd type="none" w="med" len="med"/>
+                      <a:tailEnd type="none" w="med" len="med"/>
+                    </a:lnR>
+                    <a:lnT w="12700" cap="flat" cmpd="sng" algn="ctr">
+                      <a:solidFill>
+                        <a:srgbClr val="E5E9EC"/>
+                      </a:solidFill>
+                      <a:prstDash val="solid"/>
+                      <a:round/>
+                      <a:headEnd type="none" w="med" len="med"/>
+                      <a:tailEnd type="none" w="med" len="med"/>
+                    </a:lnT>
+                    <a:lnB w="12700" cap="flat" cmpd="sng" algn="ctr">
+                      <a:solidFill>
+                        <a:srgbClr val="E5E9EC"/>
+                      </a:solidFill>
+                      <a:prstDash val="solid"/>
+                      <a:round/>
+                      <a:headEnd type="none" w="med" len="med"/>
+                      <a:tailEnd type="none" w="med" len="med"/>
+                    </a:lnB>
+                  </a:tcPr>
+                </a:tc>
+                <a:tc>
+                  <a:txBody>
+                    <a:bodyPr/>
+                    <a:lstStyle/>
+                    <a:p>
+                      <a:pPr algn="ctr" indent="0" marL="0">
+                        <a:buNone/>
+                      </a:pPr>
+                      <a:r>
+                        <a:rPr lang="en-US" sz="1500" b="1" dirty="0">
+                          <a:solidFill>
+                            <a:srgbClr val="1D9E75"/>
+                          </a:solidFill>
+                          <a:latin typeface="Meiryo" pitchFamily="34" charset="0"/>
+                          <a:ea typeface="Meiryo" pitchFamily="34" charset="-122"/>
+                          <a:cs typeface="Meiryo" pitchFamily="34" charset="-120"/>
+                        </a:rPr>
+                        <a:t>✓</a:t>
+                      </a:r>
+                      <a:endParaRPr lang="en-US" sz="1500" dirty="0">
+                        <a:latin typeface="Meiryo" charset="0"/>
+                        <a:ea typeface="Meiryo" charset="0"/>
+                        <a:cs typeface="Meiryo" charset="0"/>
+                      </a:endParaRPr>
+                    </a:p>
+                  </a:txBody>
+                  <a:tcPr marL="91440" marR="91440" marT="45720" marB="45720" anchor="ctr">
+                    <a:lnL w="12700" cap="flat" cmpd="sng" algn="ctr">
+                      <a:solidFill>
+                        <a:srgbClr val="E5E9EC"/>
+                      </a:solidFill>
+                      <a:prstDash val="solid"/>
+                      <a:round/>
+                      <a:headEnd type="none" w="med" len="med"/>
+                      <a:tailEnd type="none" w="med" len="med"/>
+                    </a:lnL>
+                    <a:lnR w="12700" cap="flat" cmpd="sng" algn="ctr">
+                      <a:solidFill>
+                        <a:srgbClr val="E5E9EC"/>
+                      </a:solidFill>
+                      <a:prstDash val="solid"/>
+                      <a:round/>
+                      <a:headEnd type="none" w="med" len="med"/>
+                      <a:tailEnd type="none" w="med" len="med"/>
+                    </a:lnR>
+                    <a:lnT w="12700" cap="flat" cmpd="sng" algn="ctr">
+                      <a:solidFill>
+                        <a:srgbClr val="E5E9EC"/>
+                      </a:solidFill>
+                      <a:prstDash val="solid"/>
+                      <a:round/>
+                      <a:headEnd type="none" w="med" len="med"/>
+                      <a:tailEnd type="none" w="med" len="med"/>
+                    </a:lnT>
+                    <a:lnB w="12700" cap="flat" cmpd="sng" algn="ctr">
+                      <a:solidFill>
+                        <a:srgbClr val="E5E9EC"/>
+                      </a:solidFill>
+                      <a:prstDash val="solid"/>
+                      <a:round/>
+                      <a:headEnd type="none" w="med" len="med"/>
+                      <a:tailEnd type="none" w="med" len="med"/>
+                    </a:lnB>
+                  </a:tcPr>
+                </a:tc>
               </a:tr>
-              <a:tr h="402336">
+              <a:tr h="329184">
                 <a:tc>
                   <a:txBody>
                     <a:bodyPr/>
@@ -9882,7 +10410,7 @@
                         <a:buNone/>
                       </a:pPr>
                       <a:r>
-                        <a:rPr lang="en-US" sz="1300" b="1" dirty="0">
+                        <a:rPr lang="en-US" sz="1150" b="1" dirty="0">
                           <a:solidFill>
                             <a:srgbClr val="1C2833"/>
                           </a:solidFill>
@@ -9890,9 +10418,9 @@
                           <a:ea typeface="Meiryo" pitchFamily="34" charset="-122"/>
                           <a:cs typeface="Meiryo" pitchFamily="34" charset="-120"/>
                         </a:rPr>
-                        <a:t>重度・寝たきり対応</a:t>
+                        <a:t>看護師が同行</a:t>
                       </a:r>
-                      <a:endParaRPr lang="en-US" sz="1300" dirty="0">
+                      <a:endParaRPr lang="en-US" sz="1150" dirty="0">
                         <a:latin typeface="Meiryo" charset="0"/>
                         <a:ea typeface="Meiryo" charset="0"/>
                         <a:cs typeface="Meiryo" charset="0"/>
@@ -9950,7 +10478,7 @@
                         <a:buNone/>
                       </a:pPr>
                       <a:r>
-                        <a:rPr lang="en-US" sz="1800" b="1" dirty="0">
+                        <a:rPr lang="en-US" sz="1500" b="1" dirty="0">
                           <a:solidFill>
                             <a:srgbClr val="1D9E75"/>
                           </a:solidFill>
@@ -9960,7 +10488,7 @@
                         </a:rPr>
                         <a:t>✓</a:t>
                       </a:r>
-                      <a:endParaRPr lang="en-US" sz="1800" dirty="0">
+                      <a:endParaRPr lang="en-US" sz="1500" dirty="0">
                         <a:latin typeface="Meiryo" charset="0"/>
                         <a:ea typeface="Meiryo" charset="0"/>
                         <a:cs typeface="Meiryo" charset="0"/>
@@ -10018,17 +10546,17 @@
                         <a:buNone/>
                       </a:pPr>
                       <a:r>
-                        <a:rPr lang="en-US" sz="1800" b="1" dirty="0">
+                        <a:rPr lang="en-US" sz="1500" b="1" dirty="0">
                           <a:solidFill>
-                            <a:srgbClr val="BDC3C7"/>
+                            <a:srgbClr val="1D9E75"/>
                           </a:solidFill>
                           <a:latin typeface="Meiryo" pitchFamily="34" charset="0"/>
                           <a:ea typeface="Meiryo" pitchFamily="34" charset="-122"/>
                           <a:cs typeface="Meiryo" pitchFamily="34" charset="-120"/>
                         </a:rPr>
-                        <a:t>✕</a:t>
+                        <a:t>✓</a:t>
                       </a:r>
-                      <a:endParaRPr lang="en-US" sz="1800" dirty="0">
+                      <a:endParaRPr lang="en-US" sz="1500" dirty="0">
                         <a:latin typeface="Meiryo" charset="0"/>
                         <a:ea typeface="Meiryo" charset="0"/>
                         <a:cs typeface="Meiryo" charset="0"/>
@@ -10083,7 +10611,72 @@
                         <a:buNone/>
                       </a:pPr>
                       <a:r>
-                        <a:rPr lang="en-US" sz="1800" b="1" dirty="0">
+                        <a:rPr lang="en-US" sz="1500" b="1" dirty="0">
+                          <a:solidFill>
+                            <a:srgbClr val="BDC3C7"/>
+                          </a:solidFill>
+                          <a:latin typeface="Meiryo" pitchFamily="34" charset="0"/>
+                          <a:ea typeface="Meiryo" pitchFamily="34" charset="-122"/>
+                          <a:cs typeface="Meiryo" pitchFamily="34" charset="-120"/>
+                        </a:rPr>
+                        <a:t>✕</a:t>
+                      </a:r>
+                      <a:endParaRPr lang="en-US" sz="1500" dirty="0">
+                        <a:latin typeface="Meiryo" charset="0"/>
+                        <a:ea typeface="Meiryo" charset="0"/>
+                        <a:cs typeface="Meiryo" charset="0"/>
+                      </a:endParaRPr>
+                    </a:p>
+                  </a:txBody>
+                  <a:tcPr marL="91440" marR="91440" marT="45720" marB="45720" anchor="ctr">
+                    <a:lnL w="12700" cap="flat" cmpd="sng" algn="ctr">
+                      <a:solidFill>
+                        <a:srgbClr val="E5E9EC"/>
+                      </a:solidFill>
+                      <a:prstDash val="solid"/>
+                      <a:round/>
+                      <a:headEnd type="none" w="med" len="med"/>
+                      <a:tailEnd type="none" w="med" len="med"/>
+                    </a:lnL>
+                    <a:lnR w="12700" cap="flat" cmpd="sng" algn="ctr">
+                      <a:solidFill>
+                        <a:srgbClr val="E5E9EC"/>
+                      </a:solidFill>
+                      <a:prstDash val="solid"/>
+                      <a:round/>
+                      <a:headEnd type="none" w="med" len="med"/>
+                      <a:tailEnd type="none" w="med" len="med"/>
+                    </a:lnR>
+                    <a:lnT w="12700" cap="flat" cmpd="sng" algn="ctr">
+                      <a:solidFill>
+                        <a:srgbClr val="E5E9EC"/>
+                      </a:solidFill>
+                      <a:prstDash val="solid"/>
+                      <a:round/>
+                      <a:headEnd type="none" w="med" len="med"/>
+                      <a:tailEnd type="none" w="med" len="med"/>
+                    </a:lnT>
+                    <a:lnB w="12700" cap="flat" cmpd="sng" algn="ctr">
+                      <a:solidFill>
+                        <a:srgbClr val="E5E9EC"/>
+                      </a:solidFill>
+                      <a:prstDash val="solid"/>
+                      <a:round/>
+                      <a:headEnd type="none" w="med" len="med"/>
+                      <a:tailEnd type="none" w="med" len="med"/>
+                    </a:lnB>
+                  </a:tcPr>
+                </a:tc>
+                <a:tc>
+                  <a:txBody>
+                    <a:bodyPr/>
+                    <a:lstStyle/>
+                    <a:p>
+                      <a:pPr algn="ctr" indent="0" marL="0">
+                        <a:buNone/>
+                      </a:pPr>
+                      <a:r>
+                        <a:rPr lang="en-US" sz="1500" b="1" dirty="0">
                           <a:solidFill>
                             <a:srgbClr val="F39C12"/>
                           </a:solidFill>
@@ -10093,7 +10686,7 @@
                         </a:rPr>
                         <a:t>△</a:t>
                       </a:r>
-                      <a:endParaRPr lang="en-US" sz="1800" dirty="0">
+                      <a:endParaRPr lang="en-US" sz="1500" dirty="0">
                         <a:latin typeface="Meiryo" charset="0"/>
                         <a:ea typeface="Meiryo" charset="0"/>
                         <a:cs typeface="Meiryo" charset="0"/>
@@ -10139,8 +10732,73 @@
                     </a:lnB>
                   </a:tcPr>
                 </a:tc>
+                <a:tc>
+                  <a:txBody>
+                    <a:bodyPr/>
+                    <a:lstStyle/>
+                    <a:p>
+                      <a:pPr algn="ctr" indent="0" marL="0">
+                        <a:buNone/>
+                      </a:pPr>
+                      <a:r>
+                        <a:rPr lang="en-US" sz="1500" b="1" dirty="0">
+                          <a:solidFill>
+                            <a:srgbClr val="BDC3C7"/>
+                          </a:solidFill>
+                          <a:latin typeface="Meiryo" pitchFamily="34" charset="0"/>
+                          <a:ea typeface="Meiryo" pitchFamily="34" charset="-122"/>
+                          <a:cs typeface="Meiryo" pitchFamily="34" charset="-120"/>
+                        </a:rPr>
+                        <a:t>✕</a:t>
+                      </a:r>
+                      <a:endParaRPr lang="en-US" sz="1500" dirty="0">
+                        <a:latin typeface="Meiryo" charset="0"/>
+                        <a:ea typeface="Meiryo" charset="0"/>
+                        <a:cs typeface="Meiryo" charset="0"/>
+                      </a:endParaRPr>
+                    </a:p>
+                  </a:txBody>
+                  <a:tcPr marL="91440" marR="91440" marT="45720" marB="45720" anchor="ctr">
+                    <a:lnL w="12700" cap="flat" cmpd="sng" algn="ctr">
+                      <a:solidFill>
+                        <a:srgbClr val="E5E9EC"/>
+                      </a:solidFill>
+                      <a:prstDash val="solid"/>
+                      <a:round/>
+                      <a:headEnd type="none" w="med" len="med"/>
+                      <a:tailEnd type="none" w="med" len="med"/>
+                    </a:lnL>
+                    <a:lnR w="12700" cap="flat" cmpd="sng" algn="ctr">
+                      <a:solidFill>
+                        <a:srgbClr val="E5E9EC"/>
+                      </a:solidFill>
+                      <a:prstDash val="solid"/>
+                      <a:round/>
+                      <a:headEnd type="none" w="med" len="med"/>
+                      <a:tailEnd type="none" w="med" len="med"/>
+                    </a:lnR>
+                    <a:lnT w="12700" cap="flat" cmpd="sng" algn="ctr">
+                      <a:solidFill>
+                        <a:srgbClr val="E5E9EC"/>
+                      </a:solidFill>
+                      <a:prstDash val="solid"/>
+                      <a:round/>
+                      <a:headEnd type="none" w="med" len="med"/>
+                      <a:tailEnd type="none" w="med" len="med"/>
+                    </a:lnT>
+                    <a:lnB w="12700" cap="flat" cmpd="sng" algn="ctr">
+                      <a:solidFill>
+                        <a:srgbClr val="E5E9EC"/>
+                      </a:solidFill>
+                      <a:prstDash val="solid"/>
+                      <a:round/>
+                      <a:headEnd type="none" w="med" len="med"/>
+                      <a:tailEnd type="none" w="med" len="med"/>
+                    </a:lnB>
+                  </a:tcPr>
+                </a:tc>
               </a:tr>
-              <a:tr h="402336">
+              <a:tr h="329184">
                 <a:tc>
                   <a:txBody>
                     <a:bodyPr/>
@@ -10150,7 +10808,7 @@
                         <a:buNone/>
                       </a:pPr>
                       <a:r>
-                        <a:rPr lang="en-US" sz="1300" b="1" dirty="0">
+                        <a:rPr lang="en-US" sz="1150" b="1" dirty="0">
                           <a:solidFill>
                             <a:srgbClr val="1C2833"/>
                           </a:solidFill>
@@ -10158,9 +10816,9 @@
                           <a:ea typeface="Meiryo" pitchFamily="34" charset="-122"/>
                           <a:cs typeface="Meiryo" pitchFamily="34" charset="-120"/>
                         </a:rPr>
-                        <a:t>移動・外出が不要</a:t>
+                        <a:t>複数名での移乗介助</a:t>
                       </a:r>
-                      <a:endParaRPr lang="en-US" sz="1300" dirty="0">
+                      <a:endParaRPr lang="en-US" sz="1150" dirty="0">
                         <a:latin typeface="Meiryo" charset="0"/>
                         <a:ea typeface="Meiryo" charset="0"/>
                         <a:cs typeface="Meiryo" charset="0"/>
@@ -10218,7 +10876,7 @@
                         <a:buNone/>
                       </a:pPr>
                       <a:r>
-                        <a:rPr lang="en-US" sz="1800" b="1" dirty="0">
+                        <a:rPr lang="en-US" sz="1500" b="1" dirty="0">
                           <a:solidFill>
                             <a:srgbClr val="1D9E75"/>
                           </a:solidFill>
@@ -10228,7 +10886,7 @@
                         </a:rPr>
                         <a:t>✓</a:t>
                       </a:r>
-                      <a:endParaRPr lang="en-US" sz="1800" dirty="0">
+                      <a:endParaRPr lang="en-US" sz="1500" dirty="0">
                         <a:latin typeface="Meiryo" charset="0"/>
                         <a:ea typeface="Meiryo" charset="0"/>
                         <a:cs typeface="Meiryo" charset="0"/>
@@ -10286,7 +10944,7 @@
                         <a:buNone/>
                       </a:pPr>
                       <a:r>
-                        <a:rPr lang="en-US" sz="1800" b="1" dirty="0">
+                        <a:rPr lang="en-US" sz="1500" b="1" dirty="0">
                           <a:solidFill>
                             <a:srgbClr val="BDC3C7"/>
                           </a:solidFill>
@@ -10296,7 +10954,7 @@
                         </a:rPr>
                         <a:t>✕</a:t>
                       </a:r>
-                      <a:endParaRPr lang="en-US" sz="1800" dirty="0">
+                      <a:endParaRPr lang="en-US" sz="1500" dirty="0">
                         <a:latin typeface="Meiryo" charset="0"/>
                         <a:ea typeface="Meiryo" charset="0"/>
                         <a:cs typeface="Meiryo" charset="0"/>
@@ -10351,7 +11009,72 @@
                         <a:buNone/>
                       </a:pPr>
                       <a:r>
-                        <a:rPr lang="en-US" sz="1800" b="1" dirty="0">
+                        <a:rPr lang="en-US" sz="1500" b="1" dirty="0">
+                          <a:solidFill>
+                            <a:srgbClr val="BDC3C7"/>
+                          </a:solidFill>
+                          <a:latin typeface="Meiryo" pitchFamily="34" charset="0"/>
+                          <a:ea typeface="Meiryo" pitchFamily="34" charset="-122"/>
+                          <a:cs typeface="Meiryo" pitchFamily="34" charset="-120"/>
+                        </a:rPr>
+                        <a:t>✕</a:t>
+                      </a:r>
+                      <a:endParaRPr lang="en-US" sz="1500" dirty="0">
+                        <a:latin typeface="Meiryo" charset="0"/>
+                        <a:ea typeface="Meiryo" charset="0"/>
+                        <a:cs typeface="Meiryo" charset="0"/>
+                      </a:endParaRPr>
+                    </a:p>
+                  </a:txBody>
+                  <a:tcPr marL="91440" marR="91440" marT="45720" marB="45720" anchor="ctr">
+                    <a:lnL w="12700" cap="flat" cmpd="sng" algn="ctr">
+                      <a:solidFill>
+                        <a:srgbClr val="E5E9EC"/>
+                      </a:solidFill>
+                      <a:prstDash val="solid"/>
+                      <a:round/>
+                      <a:headEnd type="none" w="med" len="med"/>
+                      <a:tailEnd type="none" w="med" len="med"/>
+                    </a:lnL>
+                    <a:lnR w="12700" cap="flat" cmpd="sng" algn="ctr">
+                      <a:solidFill>
+                        <a:srgbClr val="E5E9EC"/>
+                      </a:solidFill>
+                      <a:prstDash val="solid"/>
+                      <a:round/>
+                      <a:headEnd type="none" w="med" len="med"/>
+                      <a:tailEnd type="none" w="med" len="med"/>
+                    </a:lnR>
+                    <a:lnT w="12700" cap="flat" cmpd="sng" algn="ctr">
+                      <a:solidFill>
+                        <a:srgbClr val="E5E9EC"/>
+                      </a:solidFill>
+                      <a:prstDash val="solid"/>
+                      <a:round/>
+                      <a:headEnd type="none" w="med" len="med"/>
+                      <a:tailEnd type="none" w="med" len="med"/>
+                    </a:lnT>
+                    <a:lnB w="12700" cap="flat" cmpd="sng" algn="ctr">
+                      <a:solidFill>
+                        <a:srgbClr val="E5E9EC"/>
+                      </a:solidFill>
+                      <a:prstDash val="solid"/>
+                      <a:round/>
+                      <a:headEnd type="none" w="med" len="med"/>
+                      <a:tailEnd type="none" w="med" len="med"/>
+                    </a:lnB>
+                  </a:tcPr>
+                </a:tc>
+                <a:tc>
+                  <a:txBody>
+                    <a:bodyPr/>
+                    <a:lstStyle/>
+                    <a:p>
+                      <a:pPr algn="ctr" indent="0" marL="0">
+                        <a:buNone/>
+                      </a:pPr>
+                      <a:r>
+                        <a:rPr lang="en-US" sz="1500" b="1" dirty="0">
                           <a:solidFill>
                             <a:srgbClr val="1D9E75"/>
                           </a:solidFill>
@@ -10361,7 +11084,7 @@
                         </a:rPr>
                         <a:t>✓</a:t>
                       </a:r>
-                      <a:endParaRPr lang="en-US" sz="1800" dirty="0">
+                      <a:endParaRPr lang="en-US" sz="1500" dirty="0">
                         <a:latin typeface="Meiryo" charset="0"/>
                         <a:ea typeface="Meiryo" charset="0"/>
                         <a:cs typeface="Meiryo" charset="0"/>
@@ -10407,8 +11130,73 @@
                     </a:lnB>
                   </a:tcPr>
                 </a:tc>
+                <a:tc>
+                  <a:txBody>
+                    <a:bodyPr/>
+                    <a:lstStyle/>
+                    <a:p>
+                      <a:pPr algn="ctr" indent="0" marL="0">
+                        <a:buNone/>
+                      </a:pPr>
+                      <a:r>
+                        <a:rPr lang="en-US" sz="1500" b="1" dirty="0">
+                          <a:solidFill>
+                            <a:srgbClr val="BDC3C7"/>
+                          </a:solidFill>
+                          <a:latin typeface="Meiryo" pitchFamily="34" charset="0"/>
+                          <a:ea typeface="Meiryo" pitchFamily="34" charset="-122"/>
+                          <a:cs typeface="Meiryo" pitchFamily="34" charset="-120"/>
+                        </a:rPr>
+                        <a:t>✕</a:t>
+                      </a:r>
+                      <a:endParaRPr lang="en-US" sz="1500" dirty="0">
+                        <a:latin typeface="Meiryo" charset="0"/>
+                        <a:ea typeface="Meiryo" charset="0"/>
+                        <a:cs typeface="Meiryo" charset="0"/>
+                      </a:endParaRPr>
+                    </a:p>
+                  </a:txBody>
+                  <a:tcPr marL="91440" marR="91440" marT="45720" marB="45720" anchor="ctr">
+                    <a:lnL w="12700" cap="flat" cmpd="sng" algn="ctr">
+                      <a:solidFill>
+                        <a:srgbClr val="E5E9EC"/>
+                      </a:solidFill>
+                      <a:prstDash val="solid"/>
+                      <a:round/>
+                      <a:headEnd type="none" w="med" len="med"/>
+                      <a:tailEnd type="none" w="med" len="med"/>
+                    </a:lnL>
+                    <a:lnR w="12700" cap="flat" cmpd="sng" algn="ctr">
+                      <a:solidFill>
+                        <a:srgbClr val="E5E9EC"/>
+                      </a:solidFill>
+                      <a:prstDash val="solid"/>
+                      <a:round/>
+                      <a:headEnd type="none" w="med" len="med"/>
+                      <a:tailEnd type="none" w="med" len="med"/>
+                    </a:lnR>
+                    <a:lnT w="12700" cap="flat" cmpd="sng" algn="ctr">
+                      <a:solidFill>
+                        <a:srgbClr val="E5E9EC"/>
+                      </a:solidFill>
+                      <a:prstDash val="solid"/>
+                      <a:round/>
+                      <a:headEnd type="none" w="med" len="med"/>
+                      <a:tailEnd type="none" w="med" len="med"/>
+                    </a:lnT>
+                    <a:lnB w="12700" cap="flat" cmpd="sng" algn="ctr">
+                      <a:solidFill>
+                        <a:srgbClr val="E5E9EC"/>
+                      </a:solidFill>
+                      <a:prstDash val="solid"/>
+                      <a:round/>
+                      <a:headEnd type="none" w="med" len="med"/>
+                      <a:tailEnd type="none" w="med" len="med"/>
+                    </a:lnB>
+                  </a:tcPr>
+                </a:tc>
               </a:tr>
-              <a:tr h="402336">
+              <a:tr h="329184">
                 <a:tc>
                   <a:txBody>
                     <a:bodyPr/>
@@ -10418,7 +11206,7 @@
                         <a:buNone/>
                       </a:pPr>
                       <a:r>
-                        <a:rPr lang="en-US" sz="1300" b="1" dirty="0">
+                        <a:rPr lang="en-US" sz="1150" b="1" dirty="0">
                           <a:solidFill>
                             <a:srgbClr val="1C2833"/>
                           </a:solidFill>
@@ -10426,9 +11214,9 @@
                           <a:ea typeface="Meiryo" pitchFamily="34" charset="-122"/>
                           <a:cs typeface="Meiryo" pitchFamily="34" charset="-120"/>
                         </a:rPr>
-                        <a:t>バイタル・皮膚観察</a:t>
+                        <a:t>重度・寝たきり対応</a:t>
                       </a:r>
-                      <a:endParaRPr lang="en-US" sz="1300" dirty="0">
+                      <a:endParaRPr lang="en-US" sz="1150" dirty="0">
                         <a:latin typeface="Meiryo" charset="0"/>
                         <a:ea typeface="Meiryo" charset="0"/>
                         <a:cs typeface="Meiryo" charset="0"/>
@@ -10486,7 +11274,7 @@
                         <a:buNone/>
                       </a:pPr>
                       <a:r>
-                        <a:rPr lang="en-US" sz="1800" b="1" dirty="0">
+                        <a:rPr lang="en-US" sz="1500" b="1" dirty="0">
                           <a:solidFill>
                             <a:srgbClr val="1D9E75"/>
                           </a:solidFill>
@@ -10496,7 +11284,7 @@
                         </a:rPr>
                         <a:t>✓</a:t>
                       </a:r>
-                      <a:endParaRPr lang="en-US" sz="1800" dirty="0">
+                      <a:endParaRPr lang="en-US" sz="1500" dirty="0">
                         <a:latin typeface="Meiryo" charset="0"/>
                         <a:ea typeface="Meiryo" charset="0"/>
                         <a:cs typeface="Meiryo" charset="0"/>
@@ -10554,7 +11342,7 @@
                         <a:buNone/>
                       </a:pPr>
                       <a:r>
-                        <a:rPr lang="en-US" sz="1800" b="1" dirty="0">
+                        <a:rPr lang="en-US" sz="1500" b="1" dirty="0">
                           <a:solidFill>
                             <a:srgbClr val="F39C12"/>
                           </a:solidFill>
@@ -10564,7 +11352,7 @@
                         </a:rPr>
                         <a:t>△</a:t>
                       </a:r>
-                      <a:endParaRPr lang="en-US" sz="1800" dirty="0">
+                      <a:endParaRPr lang="en-US" sz="1500" dirty="0">
                         <a:latin typeface="Meiryo" charset="0"/>
                         <a:ea typeface="Meiryo" charset="0"/>
                         <a:cs typeface="Meiryo" charset="0"/>
@@ -10619,7 +11407,7 @@
                         <a:buNone/>
                       </a:pPr>
                       <a:r>
-                        <a:rPr lang="en-US" sz="1800" b="1" dirty="0">
+                        <a:rPr lang="en-US" sz="1500" b="1" dirty="0">
                           <a:solidFill>
                             <a:srgbClr val="BDC3C7"/>
                           </a:solidFill>
@@ -10629,7 +11417,7 @@
                         </a:rPr>
                         <a:t>✕</a:t>
                       </a:r>
-                      <a:endParaRPr lang="en-US" sz="1800" dirty="0">
+                      <a:endParaRPr lang="en-US" sz="1500" dirty="0">
                         <a:latin typeface="Meiryo" charset="0"/>
                         <a:ea typeface="Meiryo" charset="0"/>
                         <a:cs typeface="Meiryo" charset="0"/>
@@ -10675,8 +11463,138 @@
                     </a:lnB>
                   </a:tcPr>
                 </a:tc>
+                <a:tc>
+                  <a:txBody>
+                    <a:bodyPr/>
+                    <a:lstStyle/>
+                    <a:p>
+                      <a:pPr algn="ctr" indent="0" marL="0">
+                        <a:buNone/>
+                      </a:pPr>
+                      <a:r>
+                        <a:rPr lang="en-US" sz="1500" b="1" dirty="0">
+                          <a:solidFill>
+                            <a:srgbClr val="BDC3C7"/>
+                          </a:solidFill>
+                          <a:latin typeface="Meiryo" pitchFamily="34" charset="0"/>
+                          <a:ea typeface="Meiryo" pitchFamily="34" charset="-122"/>
+                          <a:cs typeface="Meiryo" pitchFamily="34" charset="-120"/>
+                        </a:rPr>
+                        <a:t>✕</a:t>
+                      </a:r>
+                      <a:endParaRPr lang="en-US" sz="1500" dirty="0">
+                        <a:latin typeface="Meiryo" charset="0"/>
+                        <a:ea typeface="Meiryo" charset="0"/>
+                        <a:cs typeface="Meiryo" charset="0"/>
+                      </a:endParaRPr>
+                    </a:p>
+                  </a:txBody>
+                  <a:tcPr marL="91440" marR="91440" marT="45720" marB="45720" anchor="ctr">
+                    <a:lnL w="12700" cap="flat" cmpd="sng" algn="ctr">
+                      <a:solidFill>
+                        <a:srgbClr val="E5E9EC"/>
+                      </a:solidFill>
+                      <a:prstDash val="solid"/>
+                      <a:round/>
+                      <a:headEnd type="none" w="med" len="med"/>
+                      <a:tailEnd type="none" w="med" len="med"/>
+                    </a:lnL>
+                    <a:lnR w="12700" cap="flat" cmpd="sng" algn="ctr">
+                      <a:solidFill>
+                        <a:srgbClr val="E5E9EC"/>
+                      </a:solidFill>
+                      <a:prstDash val="solid"/>
+                      <a:round/>
+                      <a:headEnd type="none" w="med" len="med"/>
+                      <a:tailEnd type="none" w="med" len="med"/>
+                    </a:lnR>
+                    <a:lnT w="12700" cap="flat" cmpd="sng" algn="ctr">
+                      <a:solidFill>
+                        <a:srgbClr val="E5E9EC"/>
+                      </a:solidFill>
+                      <a:prstDash val="solid"/>
+                      <a:round/>
+                      <a:headEnd type="none" w="med" len="med"/>
+                      <a:tailEnd type="none" w="med" len="med"/>
+                    </a:lnT>
+                    <a:lnB w="12700" cap="flat" cmpd="sng" algn="ctr">
+                      <a:solidFill>
+                        <a:srgbClr val="E5E9EC"/>
+                      </a:solidFill>
+                      <a:prstDash val="solid"/>
+                      <a:round/>
+                      <a:headEnd type="none" w="med" len="med"/>
+                      <a:tailEnd type="none" w="med" len="med"/>
+                    </a:lnB>
+                  </a:tcPr>
+                </a:tc>
+                <a:tc>
+                  <a:txBody>
+                    <a:bodyPr/>
+                    <a:lstStyle/>
+                    <a:p>
+                      <a:pPr algn="ctr" indent="0" marL="0">
+                        <a:buNone/>
+                      </a:pPr>
+                      <a:r>
+                        <a:rPr lang="en-US" sz="1500" b="1" dirty="0">
+                          <a:solidFill>
+                            <a:srgbClr val="F39C12"/>
+                          </a:solidFill>
+                          <a:latin typeface="Meiryo" pitchFamily="34" charset="0"/>
+                          <a:ea typeface="Meiryo" pitchFamily="34" charset="-122"/>
+                          <a:cs typeface="Meiryo" pitchFamily="34" charset="-120"/>
+                        </a:rPr>
+                        <a:t>△</a:t>
+                      </a:r>
+                      <a:endParaRPr lang="en-US" sz="1500" dirty="0">
+                        <a:latin typeface="Meiryo" charset="0"/>
+                        <a:ea typeface="Meiryo" charset="0"/>
+                        <a:cs typeface="Meiryo" charset="0"/>
+                      </a:endParaRPr>
+                    </a:p>
+                  </a:txBody>
+                  <a:tcPr marL="91440" marR="91440" marT="45720" marB="45720" anchor="ctr">
+                    <a:lnL w="12700" cap="flat" cmpd="sng" algn="ctr">
+                      <a:solidFill>
+                        <a:srgbClr val="E5E9EC"/>
+                      </a:solidFill>
+                      <a:prstDash val="solid"/>
+                      <a:round/>
+                      <a:headEnd type="none" w="med" len="med"/>
+                      <a:tailEnd type="none" w="med" len="med"/>
+                    </a:lnL>
+                    <a:lnR w="12700" cap="flat" cmpd="sng" algn="ctr">
+                      <a:solidFill>
+                        <a:srgbClr val="E5E9EC"/>
+                      </a:solidFill>
+                      <a:prstDash val="solid"/>
+                      <a:round/>
+                      <a:headEnd type="none" w="med" len="med"/>
+                      <a:tailEnd type="none" w="med" len="med"/>
+                    </a:lnR>
+                    <a:lnT w="12700" cap="flat" cmpd="sng" algn="ctr">
+                      <a:solidFill>
+                        <a:srgbClr val="E5E9EC"/>
+                      </a:solidFill>
+                      <a:prstDash val="solid"/>
+                      <a:round/>
+                      <a:headEnd type="none" w="med" len="med"/>
+                      <a:tailEnd type="none" w="med" len="med"/>
+                    </a:lnT>
+                    <a:lnB w="12700" cap="flat" cmpd="sng" algn="ctr">
+                      <a:solidFill>
+                        <a:srgbClr val="E5E9EC"/>
+                      </a:solidFill>
+                      <a:prstDash val="solid"/>
+                      <a:round/>
+                      <a:headEnd type="none" w="med" len="med"/>
+                      <a:tailEnd type="none" w="med" len="med"/>
+                    </a:lnB>
+                  </a:tcPr>
+                </a:tc>
               </a:tr>
-              <a:tr h="402336">
+              <a:tr h="329184">
                 <a:tc>
                   <a:txBody>
                     <a:bodyPr/>
@@ -10686,7 +11604,7 @@
                         <a:buNone/>
                       </a:pPr>
                       <a:r>
-                        <a:rPr lang="en-US" sz="1300" b="1" dirty="0">
+                        <a:rPr lang="en-US" sz="1150" b="1" dirty="0">
                           <a:solidFill>
                             <a:srgbClr val="1C2833"/>
                           </a:solidFill>
@@ -10694,9 +11612,9 @@
                           <a:ea typeface="Meiryo" pitchFamily="34" charset="-122"/>
                           <a:cs typeface="Meiryo" pitchFamily="34" charset="-120"/>
                         </a:rPr>
-                        <a:t>在宅チームへ情報共有</a:t>
+                        <a:t>バイタル・皮膚観察</a:t>
                       </a:r>
-                      <a:endParaRPr lang="en-US" sz="1300" dirty="0">
+                      <a:endParaRPr lang="en-US" sz="1150" dirty="0">
                         <a:latin typeface="Meiryo" charset="0"/>
                         <a:ea typeface="Meiryo" charset="0"/>
                         <a:cs typeface="Meiryo" charset="0"/>
@@ -10754,7 +11672,7 @@
                         <a:buNone/>
                       </a:pPr>
                       <a:r>
-                        <a:rPr lang="en-US" sz="1800" b="1" dirty="0">
+                        <a:rPr lang="en-US" sz="1500" b="1" dirty="0">
                           <a:solidFill>
                             <a:srgbClr val="1D9E75"/>
                           </a:solidFill>
@@ -10764,7 +11682,7 @@
                         </a:rPr>
                         <a:t>✓</a:t>
                       </a:r>
-                      <a:endParaRPr lang="en-US" sz="1800" dirty="0">
+                      <a:endParaRPr lang="en-US" sz="1500" dirty="0">
                         <a:latin typeface="Meiryo" charset="0"/>
                         <a:ea typeface="Meiryo" charset="0"/>
                         <a:cs typeface="Meiryo" charset="0"/>
@@ -10822,17 +11740,17 @@
                         <a:buNone/>
                       </a:pPr>
                       <a:r>
-                        <a:rPr lang="en-US" sz="1800" b="1" dirty="0">
+                        <a:rPr lang="en-US" sz="1500" b="1" dirty="0">
                           <a:solidFill>
-                            <a:srgbClr val="BDC3C7"/>
+                            <a:srgbClr val="1D9E75"/>
                           </a:solidFill>
                           <a:latin typeface="Meiryo" pitchFamily="34" charset="0"/>
                           <a:ea typeface="Meiryo" pitchFamily="34" charset="-122"/>
                           <a:cs typeface="Meiryo" pitchFamily="34" charset="-120"/>
                         </a:rPr>
-                        <a:t>✕</a:t>
+                        <a:t>✓</a:t>
                       </a:r>
-                      <a:endParaRPr lang="en-US" sz="1800" dirty="0">
+                      <a:endParaRPr lang="en-US" sz="1500" dirty="0">
                         <a:latin typeface="Meiryo" charset="0"/>
                         <a:ea typeface="Meiryo" charset="0"/>
                         <a:cs typeface="Meiryo" charset="0"/>
@@ -10887,7 +11805,7 @@
                         <a:buNone/>
                       </a:pPr>
                       <a:r>
-                        <a:rPr lang="en-US" sz="1800" b="1" dirty="0">
+                        <a:rPr lang="en-US" sz="1500" b="1" dirty="0">
                           <a:solidFill>
                             <a:srgbClr val="BDC3C7"/>
                           </a:solidFill>
@@ -10897,7 +11815,7 @@
                         </a:rPr>
                         <a:t>✕</a:t>
                       </a:r>
-                      <a:endParaRPr lang="en-US" sz="1800" dirty="0">
+                      <a:endParaRPr lang="en-US" sz="1500" dirty="0">
                         <a:latin typeface="Meiryo" charset="0"/>
                         <a:ea typeface="Meiryo" charset="0"/>
                         <a:cs typeface="Meiryo" charset="0"/>
@@ -10943,6 +11861,534 @@
                     </a:lnB>
                   </a:tcPr>
                 </a:tc>
+                <a:tc>
+                  <a:txBody>
+                    <a:bodyPr/>
+                    <a:lstStyle/>
+                    <a:p>
+                      <a:pPr algn="ctr" indent="0" marL="0">
+                        <a:buNone/>
+                      </a:pPr>
+                      <a:r>
+                        <a:rPr lang="en-US" sz="1500" b="1" dirty="0">
+                          <a:solidFill>
+                            <a:srgbClr val="F39C12"/>
+                          </a:solidFill>
+                          <a:latin typeface="Meiryo" pitchFamily="34" charset="0"/>
+                          <a:ea typeface="Meiryo" pitchFamily="34" charset="-122"/>
+                          <a:cs typeface="Meiryo" pitchFamily="34" charset="-120"/>
+                        </a:rPr>
+                        <a:t>△</a:t>
+                      </a:r>
+                      <a:endParaRPr lang="en-US" sz="1500" dirty="0">
+                        <a:latin typeface="Meiryo" charset="0"/>
+                        <a:ea typeface="Meiryo" charset="0"/>
+                        <a:cs typeface="Meiryo" charset="0"/>
+                      </a:endParaRPr>
+                    </a:p>
+                  </a:txBody>
+                  <a:tcPr marL="91440" marR="91440" marT="45720" marB="45720" anchor="ctr">
+                    <a:lnL w="12700" cap="flat" cmpd="sng" algn="ctr">
+                      <a:solidFill>
+                        <a:srgbClr val="E5E9EC"/>
+                      </a:solidFill>
+                      <a:prstDash val="solid"/>
+                      <a:round/>
+                      <a:headEnd type="none" w="med" len="med"/>
+                      <a:tailEnd type="none" w="med" len="med"/>
+                    </a:lnL>
+                    <a:lnR w="12700" cap="flat" cmpd="sng" algn="ctr">
+                      <a:solidFill>
+                        <a:srgbClr val="E5E9EC"/>
+                      </a:solidFill>
+                      <a:prstDash val="solid"/>
+                      <a:round/>
+                      <a:headEnd type="none" w="med" len="med"/>
+                      <a:tailEnd type="none" w="med" len="med"/>
+                    </a:lnR>
+                    <a:lnT w="12700" cap="flat" cmpd="sng" algn="ctr">
+                      <a:solidFill>
+                        <a:srgbClr val="E5E9EC"/>
+                      </a:solidFill>
+                      <a:prstDash val="solid"/>
+                      <a:round/>
+                      <a:headEnd type="none" w="med" len="med"/>
+                      <a:tailEnd type="none" w="med" len="med"/>
+                    </a:lnT>
+                    <a:lnB w="12700" cap="flat" cmpd="sng" algn="ctr">
+                      <a:solidFill>
+                        <a:srgbClr val="E5E9EC"/>
+                      </a:solidFill>
+                      <a:prstDash val="solid"/>
+                      <a:round/>
+                      <a:headEnd type="none" w="med" len="med"/>
+                      <a:tailEnd type="none" w="med" len="med"/>
+                    </a:lnB>
+                  </a:tcPr>
+                </a:tc>
+                <a:tc>
+                  <a:txBody>
+                    <a:bodyPr/>
+                    <a:lstStyle/>
+                    <a:p>
+                      <a:pPr algn="ctr" indent="0" marL="0">
+                        <a:buNone/>
+                      </a:pPr>
+                      <a:r>
+                        <a:rPr lang="en-US" sz="1500" b="1" dirty="0">
+                          <a:solidFill>
+                            <a:srgbClr val="BDC3C7"/>
+                          </a:solidFill>
+                          <a:latin typeface="Meiryo" pitchFamily="34" charset="0"/>
+                          <a:ea typeface="Meiryo" pitchFamily="34" charset="-122"/>
+                          <a:cs typeface="Meiryo" pitchFamily="34" charset="-120"/>
+                        </a:rPr>
+                        <a:t>✕</a:t>
+                      </a:r>
+                      <a:endParaRPr lang="en-US" sz="1500" dirty="0">
+                        <a:latin typeface="Meiryo" charset="0"/>
+                        <a:ea typeface="Meiryo" charset="0"/>
+                        <a:cs typeface="Meiryo" charset="0"/>
+                      </a:endParaRPr>
+                    </a:p>
+                  </a:txBody>
+                  <a:tcPr marL="91440" marR="91440" marT="45720" marB="45720" anchor="ctr">
+                    <a:lnL w="12700" cap="flat" cmpd="sng" algn="ctr">
+                      <a:solidFill>
+                        <a:srgbClr val="E5E9EC"/>
+                      </a:solidFill>
+                      <a:prstDash val="solid"/>
+                      <a:round/>
+                      <a:headEnd type="none" w="med" len="med"/>
+                      <a:tailEnd type="none" w="med" len="med"/>
+                    </a:lnL>
+                    <a:lnR w="12700" cap="flat" cmpd="sng" algn="ctr">
+                      <a:solidFill>
+                        <a:srgbClr val="E5E9EC"/>
+                      </a:solidFill>
+                      <a:prstDash val="solid"/>
+                      <a:round/>
+                      <a:headEnd type="none" w="med" len="med"/>
+                      <a:tailEnd type="none" w="med" len="med"/>
+                    </a:lnR>
+                    <a:lnT w="12700" cap="flat" cmpd="sng" algn="ctr">
+                      <a:solidFill>
+                        <a:srgbClr val="E5E9EC"/>
+                      </a:solidFill>
+                      <a:prstDash val="solid"/>
+                      <a:round/>
+                      <a:headEnd type="none" w="med" len="med"/>
+                      <a:tailEnd type="none" w="med" len="med"/>
+                    </a:lnT>
+                    <a:lnB w="12700" cap="flat" cmpd="sng" algn="ctr">
+                      <a:solidFill>
+                        <a:srgbClr val="E5E9EC"/>
+                      </a:solidFill>
+                      <a:prstDash val="solid"/>
+                      <a:round/>
+                      <a:headEnd type="none" w="med" len="med"/>
+                      <a:tailEnd type="none" w="med" len="med"/>
+                    </a:lnB>
+                  </a:tcPr>
+                </a:tc>
+              </a:tr>
+              <a:tr h="329184">
+                <a:tc>
+                  <a:txBody>
+                    <a:bodyPr/>
+                    <a:lstStyle/>
+                    <a:p>
+                      <a:pPr algn="l" indent="0" marL="0">
+                        <a:buNone/>
+                      </a:pPr>
+                      <a:r>
+                        <a:rPr lang="en-US" sz="1150" b="1" dirty="0">
+                          <a:solidFill>
+                            <a:srgbClr val="1C2833"/>
+                          </a:solidFill>
+                          <a:latin typeface="Meiryo" pitchFamily="34" charset="0"/>
+                          <a:ea typeface="Meiryo" pitchFamily="34" charset="-122"/>
+                          <a:cs typeface="Meiryo" pitchFamily="34" charset="-120"/>
+                        </a:rPr>
+                        <a:t>在宅チームへ情報共有</a:t>
+                      </a:r>
+                      <a:endParaRPr lang="en-US" sz="1150" dirty="0">
+                        <a:latin typeface="Meiryo" charset="0"/>
+                        <a:ea typeface="Meiryo" charset="0"/>
+                        <a:cs typeface="Meiryo" charset="0"/>
+                      </a:endParaRPr>
+                    </a:p>
+                  </a:txBody>
+                  <a:tcPr marL="91440" marR="91440" marT="45720" marB="45720" anchor="ctr">
+                    <a:lnL w="12700" cap="flat" cmpd="sng" algn="ctr">
+                      <a:solidFill>
+                        <a:srgbClr val="E5E9EC"/>
+                      </a:solidFill>
+                      <a:prstDash val="solid"/>
+                      <a:round/>
+                      <a:headEnd type="none" w="med" len="med"/>
+                      <a:tailEnd type="none" w="med" len="med"/>
+                    </a:lnL>
+                    <a:lnR w="12700" cap="flat" cmpd="sng" algn="ctr">
+                      <a:solidFill>
+                        <a:srgbClr val="E5E9EC"/>
+                      </a:solidFill>
+                      <a:prstDash val="solid"/>
+                      <a:round/>
+                      <a:headEnd type="none" w="med" len="med"/>
+                      <a:tailEnd type="none" w="med" len="med"/>
+                    </a:lnR>
+                    <a:lnT w="12700" cap="flat" cmpd="sng" algn="ctr">
+                      <a:solidFill>
+                        <a:srgbClr val="E5E9EC"/>
+                      </a:solidFill>
+                      <a:prstDash val="solid"/>
+                      <a:round/>
+                      <a:headEnd type="none" w="med" len="med"/>
+                      <a:tailEnd type="none" w="med" len="med"/>
+                    </a:lnT>
+                    <a:lnB w="12700" cap="flat" cmpd="sng" algn="ctr">
+                      <a:solidFill>
+                        <a:srgbClr val="E5E9EC"/>
+                      </a:solidFill>
+                      <a:prstDash val="solid"/>
+                      <a:round/>
+                      <a:headEnd type="none" w="med" len="med"/>
+                      <a:tailEnd type="none" w="med" len="med"/>
+                    </a:lnB>
+                    <a:solidFill>
+                      <a:srgbClr val="F4F8FA"/>
+                    </a:solidFill>
+                  </a:tcPr>
+                </a:tc>
+                <a:tc>
+                  <a:txBody>
+                    <a:bodyPr/>
+                    <a:lstStyle/>
+                    <a:p>
+                      <a:pPr algn="ctr" indent="0" marL="0">
+                        <a:buNone/>
+                      </a:pPr>
+                      <a:r>
+                        <a:rPr lang="en-US" sz="1500" b="1" dirty="0">
+                          <a:solidFill>
+                            <a:srgbClr val="1D9E75"/>
+                          </a:solidFill>
+                          <a:latin typeface="Meiryo" pitchFamily="34" charset="0"/>
+                          <a:ea typeface="Meiryo" pitchFamily="34" charset="-122"/>
+                          <a:cs typeface="Meiryo" pitchFamily="34" charset="-120"/>
+                        </a:rPr>
+                        <a:t>✓</a:t>
+                      </a:r>
+                      <a:endParaRPr lang="en-US" sz="1500" dirty="0">
+                        <a:latin typeface="Meiryo" charset="0"/>
+                        <a:ea typeface="Meiryo" charset="0"/>
+                        <a:cs typeface="Meiryo" charset="0"/>
+                      </a:endParaRPr>
+                    </a:p>
+                  </a:txBody>
+                  <a:tcPr marL="91440" marR="91440" marT="45720" marB="45720" anchor="ctr">
+                    <a:lnL w="12700" cap="flat" cmpd="sng" algn="ctr">
+                      <a:solidFill>
+                        <a:srgbClr val="E5E9EC"/>
+                      </a:solidFill>
+                      <a:prstDash val="solid"/>
+                      <a:round/>
+                      <a:headEnd type="none" w="med" len="med"/>
+                      <a:tailEnd type="none" w="med" len="med"/>
+                    </a:lnL>
+                    <a:lnR w="12700" cap="flat" cmpd="sng" algn="ctr">
+                      <a:solidFill>
+                        <a:srgbClr val="E5E9EC"/>
+                      </a:solidFill>
+                      <a:prstDash val="solid"/>
+                      <a:round/>
+                      <a:headEnd type="none" w="med" len="med"/>
+                      <a:tailEnd type="none" w="med" len="med"/>
+                    </a:lnR>
+                    <a:lnT w="12700" cap="flat" cmpd="sng" algn="ctr">
+                      <a:solidFill>
+                        <a:srgbClr val="E5E9EC"/>
+                      </a:solidFill>
+                      <a:prstDash val="solid"/>
+                      <a:round/>
+                      <a:headEnd type="none" w="med" len="med"/>
+                      <a:tailEnd type="none" w="med" len="med"/>
+                    </a:lnT>
+                    <a:lnB w="12700" cap="flat" cmpd="sng" algn="ctr">
+                      <a:solidFill>
+                        <a:srgbClr val="E5E9EC"/>
+                      </a:solidFill>
+                      <a:prstDash val="solid"/>
+                      <a:round/>
+                      <a:headEnd type="none" w="med" len="med"/>
+                      <a:tailEnd type="none" w="med" len="med"/>
+                    </a:lnB>
+                    <a:solidFill>
+                      <a:srgbClr val="EAF7F1"/>
+                    </a:solidFill>
+                  </a:tcPr>
+                </a:tc>
+                <a:tc>
+                  <a:txBody>
+                    <a:bodyPr/>
+                    <a:lstStyle/>
+                    <a:p>
+                      <a:pPr algn="ctr" indent="0" marL="0">
+                        <a:buNone/>
+                      </a:pPr>
+                      <a:r>
+                        <a:rPr lang="en-US" sz="1500" b="1" dirty="0">
+                          <a:solidFill>
+                            <a:srgbClr val="1D9E75"/>
+                          </a:solidFill>
+                          <a:latin typeface="Meiryo" pitchFamily="34" charset="0"/>
+                          <a:ea typeface="Meiryo" pitchFamily="34" charset="-122"/>
+                          <a:cs typeface="Meiryo" pitchFamily="34" charset="-120"/>
+                        </a:rPr>
+                        <a:t>✓</a:t>
+                      </a:r>
+                      <a:endParaRPr lang="en-US" sz="1500" dirty="0">
+                        <a:latin typeface="Meiryo" charset="0"/>
+                        <a:ea typeface="Meiryo" charset="0"/>
+                        <a:cs typeface="Meiryo" charset="0"/>
+                      </a:endParaRPr>
+                    </a:p>
+                  </a:txBody>
+                  <a:tcPr marL="91440" marR="91440" marT="45720" marB="45720" anchor="ctr">
+                    <a:lnL w="12700" cap="flat" cmpd="sng" algn="ctr">
+                      <a:solidFill>
+                        <a:srgbClr val="E5E9EC"/>
+                      </a:solidFill>
+                      <a:prstDash val="solid"/>
+                      <a:round/>
+                      <a:headEnd type="none" w="med" len="med"/>
+                      <a:tailEnd type="none" w="med" len="med"/>
+                    </a:lnL>
+                    <a:lnR w="12700" cap="flat" cmpd="sng" algn="ctr">
+                      <a:solidFill>
+                        <a:srgbClr val="E5E9EC"/>
+                      </a:solidFill>
+                      <a:prstDash val="solid"/>
+                      <a:round/>
+                      <a:headEnd type="none" w="med" len="med"/>
+                      <a:tailEnd type="none" w="med" len="med"/>
+                    </a:lnR>
+                    <a:lnT w="12700" cap="flat" cmpd="sng" algn="ctr">
+                      <a:solidFill>
+                        <a:srgbClr val="E5E9EC"/>
+                      </a:solidFill>
+                      <a:prstDash val="solid"/>
+                      <a:round/>
+                      <a:headEnd type="none" w="med" len="med"/>
+                      <a:tailEnd type="none" w="med" len="med"/>
+                    </a:lnT>
+                    <a:lnB w="12700" cap="flat" cmpd="sng" algn="ctr">
+                      <a:solidFill>
+                        <a:srgbClr val="E5E9EC"/>
+                      </a:solidFill>
+                      <a:prstDash val="solid"/>
+                      <a:round/>
+                      <a:headEnd type="none" w="med" len="med"/>
+                      <a:tailEnd type="none" w="med" len="med"/>
+                    </a:lnB>
+                  </a:tcPr>
+                </a:tc>
+                <a:tc>
+                  <a:txBody>
+                    <a:bodyPr/>
+                    <a:lstStyle/>
+                    <a:p>
+                      <a:pPr algn="ctr" indent="0" marL="0">
+                        <a:buNone/>
+                      </a:pPr>
+                      <a:r>
+                        <a:rPr lang="en-US" sz="1500" b="1" dirty="0">
+                          <a:solidFill>
+                            <a:srgbClr val="F39C12"/>
+                          </a:solidFill>
+                          <a:latin typeface="Meiryo" pitchFamily="34" charset="0"/>
+                          <a:ea typeface="Meiryo" pitchFamily="34" charset="-122"/>
+                          <a:cs typeface="Meiryo" pitchFamily="34" charset="-120"/>
+                        </a:rPr>
+                        <a:t>△</a:t>
+                      </a:r>
+                      <a:endParaRPr lang="en-US" sz="1500" dirty="0">
+                        <a:latin typeface="Meiryo" charset="0"/>
+                        <a:ea typeface="Meiryo" charset="0"/>
+                        <a:cs typeface="Meiryo" charset="0"/>
+                      </a:endParaRPr>
+                    </a:p>
+                  </a:txBody>
+                  <a:tcPr marL="91440" marR="91440" marT="45720" marB="45720" anchor="ctr">
+                    <a:lnL w="12700" cap="flat" cmpd="sng" algn="ctr">
+                      <a:solidFill>
+                        <a:srgbClr val="E5E9EC"/>
+                      </a:solidFill>
+                      <a:prstDash val="solid"/>
+                      <a:round/>
+                      <a:headEnd type="none" w="med" len="med"/>
+                      <a:tailEnd type="none" w="med" len="med"/>
+                    </a:lnL>
+                    <a:lnR w="12700" cap="flat" cmpd="sng" algn="ctr">
+                      <a:solidFill>
+                        <a:srgbClr val="E5E9EC"/>
+                      </a:solidFill>
+                      <a:prstDash val="solid"/>
+                      <a:round/>
+                      <a:headEnd type="none" w="med" len="med"/>
+                      <a:tailEnd type="none" w="med" len="med"/>
+                    </a:lnR>
+                    <a:lnT w="12700" cap="flat" cmpd="sng" algn="ctr">
+                      <a:solidFill>
+                        <a:srgbClr val="E5E9EC"/>
+                      </a:solidFill>
+                      <a:prstDash val="solid"/>
+                      <a:round/>
+                      <a:headEnd type="none" w="med" len="med"/>
+                      <a:tailEnd type="none" w="med" len="med"/>
+                    </a:lnT>
+                    <a:lnB w="12700" cap="flat" cmpd="sng" algn="ctr">
+                      <a:solidFill>
+                        <a:srgbClr val="E5E9EC"/>
+                      </a:solidFill>
+                      <a:prstDash val="solid"/>
+                      <a:round/>
+                      <a:headEnd type="none" w="med" len="med"/>
+                      <a:tailEnd type="none" w="med" len="med"/>
+                    </a:lnB>
+                  </a:tcPr>
+                </a:tc>
+                <a:tc>
+                  <a:txBody>
+                    <a:bodyPr/>
+                    <a:lstStyle/>
+                    <a:p>
+                      <a:pPr algn="ctr" indent="0" marL="0">
+                        <a:buNone/>
+                      </a:pPr>
+                      <a:r>
+                        <a:rPr lang="en-US" sz="1500" b="1" dirty="0">
+                          <a:solidFill>
+                            <a:srgbClr val="BDC3C7"/>
+                          </a:solidFill>
+                          <a:latin typeface="Meiryo" pitchFamily="34" charset="0"/>
+                          <a:ea typeface="Meiryo" pitchFamily="34" charset="-122"/>
+                          <a:cs typeface="Meiryo" pitchFamily="34" charset="-120"/>
+                        </a:rPr>
+                        <a:t>✕</a:t>
+                      </a:r>
+                      <a:endParaRPr lang="en-US" sz="1500" dirty="0">
+                        <a:latin typeface="Meiryo" charset="0"/>
+                        <a:ea typeface="Meiryo" charset="0"/>
+                        <a:cs typeface="Meiryo" charset="0"/>
+                      </a:endParaRPr>
+                    </a:p>
+                  </a:txBody>
+                  <a:tcPr marL="91440" marR="91440" marT="45720" marB="45720" anchor="ctr">
+                    <a:lnL w="12700" cap="flat" cmpd="sng" algn="ctr">
+                      <a:solidFill>
+                        <a:srgbClr val="E5E9EC"/>
+                      </a:solidFill>
+                      <a:prstDash val="solid"/>
+                      <a:round/>
+                      <a:headEnd type="none" w="med" len="med"/>
+                      <a:tailEnd type="none" w="med" len="med"/>
+                    </a:lnL>
+                    <a:lnR w="12700" cap="flat" cmpd="sng" algn="ctr">
+                      <a:solidFill>
+                        <a:srgbClr val="E5E9EC"/>
+                      </a:solidFill>
+                      <a:prstDash val="solid"/>
+                      <a:round/>
+                      <a:headEnd type="none" w="med" len="med"/>
+                      <a:tailEnd type="none" w="med" len="med"/>
+                    </a:lnR>
+                    <a:lnT w="12700" cap="flat" cmpd="sng" algn="ctr">
+                      <a:solidFill>
+                        <a:srgbClr val="E5E9EC"/>
+                      </a:solidFill>
+                      <a:prstDash val="solid"/>
+                      <a:round/>
+                      <a:headEnd type="none" w="med" len="med"/>
+                      <a:tailEnd type="none" w="med" len="med"/>
+                    </a:lnT>
+                    <a:lnB w="12700" cap="flat" cmpd="sng" algn="ctr">
+                      <a:solidFill>
+                        <a:srgbClr val="E5E9EC"/>
+                      </a:solidFill>
+                      <a:prstDash val="solid"/>
+                      <a:round/>
+                      <a:headEnd type="none" w="med" len="med"/>
+                      <a:tailEnd type="none" w="med" len="med"/>
+                    </a:lnB>
+                  </a:tcPr>
+                </a:tc>
+                <a:tc>
+                  <a:txBody>
+                    <a:bodyPr/>
+                    <a:lstStyle/>
+                    <a:p>
+                      <a:pPr algn="ctr" indent="0" marL="0">
+                        <a:buNone/>
+                      </a:pPr>
+                      <a:r>
+                        <a:rPr lang="en-US" sz="1500" b="1" dirty="0">
+                          <a:solidFill>
+                            <a:srgbClr val="BDC3C7"/>
+                          </a:solidFill>
+                          <a:latin typeface="Meiryo" pitchFamily="34" charset="0"/>
+                          <a:ea typeface="Meiryo" pitchFamily="34" charset="-122"/>
+                          <a:cs typeface="Meiryo" pitchFamily="34" charset="-120"/>
+                        </a:rPr>
+                        <a:t>✕</a:t>
+                      </a:r>
+                      <a:endParaRPr lang="en-US" sz="1500" dirty="0">
+                        <a:latin typeface="Meiryo" charset="0"/>
+                        <a:ea typeface="Meiryo" charset="0"/>
+                        <a:cs typeface="Meiryo" charset="0"/>
+                      </a:endParaRPr>
+                    </a:p>
+                  </a:txBody>
+                  <a:tcPr marL="91440" marR="91440" marT="45720" marB="45720" anchor="ctr">
+                    <a:lnL w="12700" cap="flat" cmpd="sng" algn="ctr">
+                      <a:solidFill>
+                        <a:srgbClr val="E5E9EC"/>
+                      </a:solidFill>
+                      <a:prstDash val="solid"/>
+                      <a:round/>
+                      <a:headEnd type="none" w="med" len="med"/>
+                      <a:tailEnd type="none" w="med" len="med"/>
+                    </a:lnL>
+                    <a:lnR w="12700" cap="flat" cmpd="sng" algn="ctr">
+                      <a:solidFill>
+                        <a:srgbClr val="E5E9EC"/>
+                      </a:solidFill>
+                      <a:prstDash val="solid"/>
+                      <a:round/>
+                      <a:headEnd type="none" w="med" len="med"/>
+                      <a:tailEnd type="none" w="med" len="med"/>
+                    </a:lnR>
+                    <a:lnT w="12700" cap="flat" cmpd="sng" algn="ctr">
+                      <a:solidFill>
+                        <a:srgbClr val="E5E9EC"/>
+                      </a:solidFill>
+                      <a:prstDash val="solid"/>
+                      <a:round/>
+                      <a:headEnd type="none" w="med" len="med"/>
+                      <a:tailEnd type="none" w="med" len="med"/>
+                    </a:lnT>
+                    <a:lnB w="12700" cap="flat" cmpd="sng" algn="ctr">
+                      <a:solidFill>
+                        <a:srgbClr val="E5E9EC"/>
+                      </a:solidFill>
+                      <a:prstDash val="solid"/>
+                      <a:round/>
+                      <a:headEnd type="none" w="med" len="med"/>
+                      <a:tailEnd type="none" w="med" len="med"/>
+                    </a:lnB>
+                  </a:tcPr>
+                </a:tc>
               </a:tr>
             </a:tbl>
           </a:graphicData>
@@ -10956,8 +12402,8 @@
         </p:nvSpPr>
         <p:spPr>
           <a:xfrm>
-            <a:off x="566928" y="4956048"/>
-            <a:ext cx="11057839" cy="274320"/>
+            <a:off x="566928" y="4315968"/>
+            <a:ext cx="11057839" cy="640080"/>
           </a:xfrm>
           <a:prstGeom prst="rect">
             <a:avLst/>
@@ -10970,10 +12416,13 @@
           <a:lstStyle/>
           <a:p>
             <a:pPr indent="0" marL="0">
-              <a:buNone/>
-            </a:pPr>
-            <a:r>
-              <a:rPr lang="en-US" sz="1100" dirty="0">
+              <a:lnSpc>
+                <a:spcPct val="140000"/>
+              </a:lnSpc>
+              <a:buNone/>
+            </a:pPr>
+            <a:r>
+              <a:rPr lang="en-US" sz="1050" dirty="0">
                 <a:solidFill>
                   <a:srgbClr val="1D9E75"/>
                 </a:solidFill>
@@ -10984,10 +12433,13 @@
               <a:t>✓ 対応できる</a:t>
             </a:r>
             <a:pPr indent="0" marL="0">
-              <a:buNone/>
-            </a:pPr>
-            <a:r>
-              <a:rPr lang="en-US" sz="1100" dirty="0">
+              <a:lnSpc>
+                <a:spcPct val="140000"/>
+              </a:lnSpc>
+              <a:buNone/>
+            </a:pPr>
+            <a:r>
+              <a:rPr lang="en-US" sz="1050" dirty="0">
                 <a:solidFill>
                   <a:srgbClr val="F39C12"/>
                 </a:solidFill>
@@ -10998,10 +12450,13 @@
               <a:t>　　△ 事業所・状態により異なる</a:t>
             </a:r>
             <a:pPr indent="0" marL="0">
-              <a:buNone/>
-            </a:pPr>
-            <a:r>
-              <a:rPr lang="en-US" sz="1100" dirty="0">
+              <a:lnSpc>
+                <a:spcPct val="140000"/>
+              </a:lnSpc>
+              <a:buNone/>
+            </a:pPr>
+            <a:r>
+              <a:rPr lang="en-US" sz="1050" dirty="0">
                 <a:solidFill>
                   <a:srgbClr val="566573"/>
                 </a:solidFill>
@@ -11011,7 +12466,27 @@
               </a:rPr>
               <a:t>　　✕ 対応が難しい</a:t>
             </a:r>
-            <a:endParaRPr lang="en-US" sz="1100" dirty="0"/>
+            <a:endParaRPr lang="en-US" sz="1050" dirty="0"/>
+          </a:p>
+          <a:p>
+            <a:pPr indent="0" marL="0">
+              <a:lnSpc>
+                <a:spcPct val="140000"/>
+              </a:lnSpc>
+              <a:buNone/>
+            </a:pPr>
+            <a:r>
+              <a:rPr lang="en-US" sz="1000" dirty="0">
+                <a:solidFill>
+                  <a:srgbClr val="566573"/>
+                </a:solidFill>
+                <a:latin typeface="Meiryo" pitchFamily="34" charset="0"/>
+                <a:ea typeface="Meiryo" pitchFamily="34" charset="-122"/>
+                <a:cs typeface="Meiryo" pitchFamily="34" charset="-120"/>
+              </a:rPr>
+              <a:t>※「訪問看護」「訪問介護」欄は自宅の浴室での入浴介助を指します。清拭・部分浴はサービス種別を問わず実施される方法です。</a:t>
+            </a:r>
+            <a:endParaRPr lang="en-US" sz="1050" dirty="0"/>
           </a:p>
         </p:txBody>
       </p:sp>

--- a/houmon-nyuyoku-slides.pptx
+++ b/houmon-nyuyoku-slides.pptx
@@ -2339,7 +2339,7 @@
                 <a:ea typeface="Meiryo" pitchFamily="34" charset="-122"/>
                 <a:cs typeface="Meiryo" pitchFamily="34" charset="-120"/>
               </a:rPr>
-              <a:t>2024年10月15日（火）19:00〜</a:t>
+              <a:t>2026年10月15日（木）19:00〜</a:t>
             </a:r>
             <a:endParaRPr lang="en-US" sz="1700" dirty="0"/>
           </a:p>
@@ -5449,7 +5449,7 @@
                 <a:ea typeface="Meiryo" pitchFamily="34" charset="-122"/>
                 <a:cs typeface="Meiryo" pitchFamily="34" charset="-120"/>
               </a:rPr>
-              <a:t>3名（うち看護師1名）</a:t>
+              <a:t>3名（うち看護職員1名）</a:t>
             </a:r>
             <a:pPr indent="0" marL="0">
               <a:spcAft>
@@ -5466,7 +5466,7 @@
                 <a:ea typeface="Meiryo" pitchFamily="34" charset="-122"/>
                 <a:cs typeface="Meiryo" pitchFamily="34" charset="-120"/>
               </a:rPr>
-              <a:t>が同時に訪問</a:t>
+              <a:t>が同時に訪問（厚生労働省令で定められた体制）</a:t>
             </a:r>
             <a:endParaRPr lang="en-US" sz="1250" dirty="0"/>
           </a:p>
@@ -12403,7 +12403,7 @@
         <p:spPr>
           <a:xfrm>
             <a:off x="566928" y="4315968"/>
-            <a:ext cx="11057839" cy="640080"/>
+            <a:ext cx="11057839" cy="566928"/>
           </a:xfrm>
           <a:prstGeom prst="rect">
             <a:avLst/>
@@ -12487,6 +12487,114 @@
               <a:t>※「訪問看護」「訪問介護」欄は自宅の浴室での入浴介助を指します。清拭・部分浴はサービス種別を問わず実施される方法です。</a:t>
             </a:r>
             <a:endParaRPr lang="en-US" sz="1050" dirty="0"/>
+          </a:p>
+        </p:txBody>
+      </p:sp>
+      <p:sp>
+        <p:nvSpPr>
+          <p:cNvPr id="8" name="Shape 5"/>
+          <p:cNvSpPr/>
+          <p:nvPr/>
+        </p:nvSpPr>
+        <p:spPr>
+          <a:xfrm>
+            <a:off x="566928" y="4956048"/>
+            <a:ext cx="11057839" cy="603504"/>
+          </a:xfrm>
+          <a:prstGeom prst="roundRect">
+            <a:avLst>
+              <a:gd name="adj" fmla="val 7576"/>
+            </a:avLst>
+          </a:prstGeom>
+          <a:solidFill>
+            <a:srgbClr val="EAF7F1"/>
+          </a:solidFill>
+          <a:ln w="12700">
+            <a:solidFill>
+              <a:srgbClr val="EAF7F1"/>
+            </a:solidFill>
+            <a:prstDash val="solid"/>
+          </a:ln>
+        </p:spPr>
+      </p:sp>
+      <p:sp>
+        <p:nvSpPr>
+          <p:cNvPr id="9" name="Text 6"/>
+          <p:cNvSpPr txBox="1"/>
+          <p:nvPr/>
+        </p:nvSpPr>
+        <p:spPr>
+          <a:xfrm>
+            <a:off x="822960" y="4956048"/>
+            <a:ext cx="10545775" cy="603504"/>
+          </a:xfrm>
+          <a:prstGeom prst="rect">
+            <a:avLst/>
+          </a:prstGeom>
+          <a:noFill/>
+          <a:ln/>
+        </p:spPr>
+        <p:txBody>
+          <a:bodyPr wrap="square" lIns="0" tIns="0" rIns="0" bIns="0" rtlCol="0" anchor="ctr"/>
+          <a:lstStyle/>
+          <a:p>
+            <a:pPr indent="0" marL="0">
+              <a:buNone/>
+            </a:pPr>
+            <a:r>
+              <a:rPr lang="en-US" sz="1400" dirty="0">
+                <a:solidFill>
+                  <a:srgbClr val="1C2833"/>
+                </a:solidFill>
+                <a:latin typeface="Meiryo" pitchFamily="34" charset="0"/>
+                <a:ea typeface="Meiryo" pitchFamily="34" charset="-122"/>
+                <a:cs typeface="Meiryo" pitchFamily="34" charset="-120"/>
+              </a:rPr>
+              <a:t>訪問入浴の利用者は</a:t>
+            </a:r>
+            <a:pPr indent="0" marL="0">
+              <a:buNone/>
+            </a:pPr>
+            <a:r>
+              <a:rPr lang="en-US" sz="1400" b="1" dirty="0">
+                <a:solidFill>
+                  <a:srgbClr val="1D9E75"/>
+                </a:solidFill>
+                <a:latin typeface="Meiryo" pitchFamily="34" charset="0"/>
+                <a:ea typeface="Meiryo" pitchFamily="34" charset="-122"/>
+                <a:cs typeface="Meiryo" pitchFamily="34" charset="-120"/>
+              </a:rPr>
+              <a:t>要介護5が48.2%、要介護4が25.1%</a:t>
+            </a:r>
+            <a:pPr indent="0" marL="0">
+              <a:buNone/>
+            </a:pPr>
+            <a:r>
+              <a:rPr lang="en-US" sz="1400" b="1" dirty="0">
+                <a:solidFill>
+                  <a:srgbClr val="1C2833"/>
+                </a:solidFill>
+                <a:latin typeface="Meiryo" pitchFamily="34" charset="0"/>
+                <a:ea typeface="Meiryo" pitchFamily="34" charset="-122"/>
+                <a:cs typeface="Meiryo" pitchFamily="34" charset="-120"/>
+              </a:rPr>
+              <a:t>——約4分の3が要介護4〜5の重度の方です。</a:t>
+            </a:r>
+            <a:pPr indent="0" marL="0">
+              <a:buNone/>
+            </a:pPr>
+            <a:r>
+              <a:rPr lang="en-US" sz="1100" dirty="0">
+                <a:solidFill>
+                  <a:srgbClr val="566573"/>
+                </a:solidFill>
+                <a:latin typeface="Meiryo" pitchFamily="34" charset="0"/>
+                <a:ea typeface="Meiryo" pitchFamily="34" charset="-122"/>
+                <a:cs typeface="Meiryo" pitchFamily="34" charset="-120"/>
+              </a:rPr>
+              <a:t>（日本在宅介護協会 2025年調査）</a:t>
+            </a:r>
+            <a:endParaRPr lang="en-US" sz="1400" dirty="0"/>
           </a:p>
         </p:txBody>
       </p:sp>
@@ -15535,7 +15643,7 @@
                 <a:ea typeface="Meiryo" pitchFamily="34" charset="-122"/>
                 <a:cs typeface="Meiryo" pitchFamily="34" charset="-120"/>
               </a:rPr>
-              <a:t>3名体制である意味 — </a:t>
+              <a:t>3名体制は省令上の要件です — </a:t>
             </a:r>
             <a:pPr indent="0" marL="0">
               <a:lnSpc>
@@ -15552,7 +15660,7 @@
                 <a:ea typeface="Meiryo" pitchFamily="34" charset="-122"/>
                 <a:cs typeface="Meiryo" pitchFamily="34" charset="-120"/>
               </a:rPr>
-              <a:t>移乗を2名で担うことで</a:t>
+              <a:t>1回の訪問に看護職員1名＋介護職員2名の計3名と厚生労働省令で定められています。移乗を2名で担うため</a:t>
             </a:r>
             <a:pPr indent="0" marL="0">
               <a:lnSpc>
@@ -15586,7 +15694,7 @@
                 <a:ea typeface="Meiryo" pitchFamily="34" charset="-122"/>
                 <a:cs typeface="Meiryo" pitchFamily="34" charset="-120"/>
               </a:rPr>
-              <a:t>、看護師は介助に追われず</a:t>
+              <a:t>、看護師は</a:t>
             </a:r>
             <a:pPr indent="0" marL="0">
               <a:lnSpc>
@@ -15620,7 +15728,7 @@
                 <a:ea typeface="Meiryo" pitchFamily="34" charset="-122"/>
                 <a:cs typeface="Meiryo" pitchFamily="34" charset="-120"/>
               </a:rPr>
-              <a:t>できます。ご家族が介助に入る必要はありません。</a:t>
+              <a:t>できます。</a:t>
             </a:r>
             <a:endParaRPr lang="en-US" sz="1400" dirty="0"/>
           </a:p>

--- a/houmon-nyuyoku-slides.pptx
+++ b/houmon-nyuyoku-slides.pptx
@@ -12905,8 +12905,8 @@
         </p:nvSpPr>
         <p:spPr>
           <a:xfrm>
-            <a:off x="658368" y="2724912"/>
-            <a:ext cx="2430704" cy="365760"/>
+            <a:off x="621792" y="2706624"/>
+            <a:ext cx="2503856" cy="475488"/>
           </a:xfrm>
           <a:prstGeom prst="rect">
             <a:avLst/>
@@ -13074,8 +13074,8 @@
         </p:nvSpPr>
         <p:spPr>
           <a:xfrm>
-            <a:off x="3473120" y="2724912"/>
-            <a:ext cx="2430704" cy="365760"/>
+            <a:off x="3436544" y="2706624"/>
+            <a:ext cx="2503856" cy="475488"/>
           </a:xfrm>
           <a:prstGeom prst="rect">
             <a:avLst/>
@@ -13243,8 +13243,8 @@
         </p:nvSpPr>
         <p:spPr>
           <a:xfrm>
-            <a:off x="6287872" y="2724912"/>
-            <a:ext cx="2430704" cy="365760"/>
+            <a:off x="6251296" y="2706624"/>
+            <a:ext cx="2503856" cy="475488"/>
           </a:xfrm>
           <a:prstGeom prst="rect">
             <a:avLst/>
@@ -13412,8 +13412,8 @@
         </p:nvSpPr>
         <p:spPr>
           <a:xfrm>
-            <a:off x="9102623" y="2724912"/>
-            <a:ext cx="2430704" cy="365760"/>
+            <a:off x="9066047" y="2706624"/>
+            <a:ext cx="2503856" cy="475488"/>
           </a:xfrm>
           <a:prstGeom prst="rect">
             <a:avLst/>
@@ -13437,7 +13437,7 @@
                 <a:ea typeface="Meiryo" pitchFamily="34" charset="-122"/>
                 <a:cs typeface="Meiryo" pitchFamily="34" charset="-120"/>
               </a:rPr>
-              <a:t>寝たきり・医療的ケア可</a:t>
+              <a:t>寝たきり・全介助でも</a:t>
             </a:r>
             <a:endParaRPr lang="en-US" sz="1100" dirty="0"/>
           </a:p>

--- a/houmon-nyuyoku-slides.pptx
+++ b/houmon-nyuyoku-slides.pptx
@@ -4,6 +4,9 @@
   <p:sldMasterIdLst>
     <p:sldMasterId id="2147483648" r:id="rId1"/>
   </p:sldMasterIdLst>
+  <p:notesMasterIdLst>
+    <p:notesMasterId r:id="rId17"/>
+  </p:notesMasterIdLst>
   <p:sldIdLst>
     <p:sldId id="256" r:id="rId2"/>
     <p:sldId id="257" r:id="rId3"/>
@@ -21,9 +24,6 @@
     <p:sldId id="269" r:id="rId15"/>
     <p:sldId id="270" r:id="rId16"/>
   </p:sldIdLst>
-  <p:notesMasterIdLst>
-    <p:notesMasterId r:id="rId17"/>
-  </p:notesMasterIdLst>
   <p:sldSz cx="12192000" cy="6858000"/>
   <p:notesSz cx="6858000" cy="12192000"/>
   <p:defaultTextStyle>
@@ -118,7 +118,503 @@
       </a:defRPr>
     </a:lvl9pPr>
   </p:defaultTextStyle>
+  <p:extLst>
+    <p:ext uri="{EFAFB233-063F-42B5-8137-9DF3F51BA10A}">
+      <p15:sldGuideLst xmlns:p15="http://schemas.microsoft.com/office/powerpoint/2012/main"/>
+    </p:ext>
+  </p:extLst>
 </p:presentation>
+</file>
+
+<file path=ppt/changesInfos/changesInfo1.xml><?xml version="1.0" encoding="utf-8"?>
+<pc:chgInfo xmlns:a="http://schemas.openxmlformats.org/drawingml/2006/main" xmlns:r="http://schemas.openxmlformats.org/officeDocument/2006/relationships" xmlns:ac="http://schemas.microsoft.com/office/drawing/2013/main/command" xmlns:pc="http://schemas.microsoft.com/office/powerpoint/2013/main/command">
+  <pc:docChgLst>
+    <pc:chgData name="一心 冨永" userId="cee5b40153102c76" providerId="LiveId" clId="{BF059334-9725-4C41-8FAA-8D4F19B9D571}"/>
+    <pc:docChg chg="undo redo custSel modSld">
+      <pc:chgData name="一心 冨永" userId="cee5b40153102c76" providerId="LiveId" clId="{BF059334-9725-4C41-8FAA-8D4F19B9D571}" dt="2026-09-09T12:44:12.810" v="240" actId="20577"/>
+      <pc:docMkLst>
+        <pc:docMk/>
+      </pc:docMkLst>
+      <pc:sldChg chg="modSp mod">
+        <pc:chgData name="一心 冨永" userId="cee5b40153102c76" providerId="LiveId" clId="{BF059334-9725-4C41-8FAA-8D4F19B9D571}" dt="2026-09-09T12:14:40.262" v="21" actId="1076"/>
+        <pc:sldMkLst>
+          <pc:docMk/>
+          <pc:sldMk cId="0" sldId="257"/>
+        </pc:sldMkLst>
+        <pc:spChg chg="mod">
+          <ac:chgData name="一心 冨永" userId="cee5b40153102c76" providerId="LiveId" clId="{BF059334-9725-4C41-8FAA-8D4F19B9D571}" dt="2026-09-09T12:14:34.746" v="18" actId="403"/>
+          <ac:spMkLst>
+            <pc:docMk/>
+            <pc:sldMk cId="0" sldId="257"/>
+            <ac:spMk id="7" creationId="{00000000-0000-0000-0000-000000000000}"/>
+          </ac:spMkLst>
+        </pc:spChg>
+        <pc:spChg chg="mod">
+          <ac:chgData name="一心 冨永" userId="cee5b40153102c76" providerId="LiveId" clId="{BF059334-9725-4C41-8FAA-8D4F19B9D571}" dt="2026-09-09T12:14:09.802" v="10" actId="403"/>
+          <ac:spMkLst>
+            <pc:docMk/>
+            <pc:sldMk cId="0" sldId="257"/>
+            <ac:spMk id="8" creationId="{00000000-0000-0000-0000-000000000000}"/>
+          </ac:spMkLst>
+        </pc:spChg>
+        <pc:spChg chg="mod">
+          <ac:chgData name="一心 冨永" userId="cee5b40153102c76" providerId="LiveId" clId="{BF059334-9725-4C41-8FAA-8D4F19B9D571}" dt="2026-09-09T12:14:38.782" v="20" actId="403"/>
+          <ac:spMkLst>
+            <pc:docMk/>
+            <pc:sldMk cId="0" sldId="257"/>
+            <ac:spMk id="10" creationId="{00000000-0000-0000-0000-000000000000}"/>
+          </ac:spMkLst>
+        </pc:spChg>
+        <pc:spChg chg="mod">
+          <ac:chgData name="一心 冨永" userId="cee5b40153102c76" providerId="LiveId" clId="{BF059334-9725-4C41-8FAA-8D4F19B9D571}" dt="2026-09-09T12:14:28.793" v="15" actId="403"/>
+          <ac:spMkLst>
+            <pc:docMk/>
+            <pc:sldMk cId="0" sldId="257"/>
+            <ac:spMk id="11" creationId="{00000000-0000-0000-0000-000000000000}"/>
+          </ac:spMkLst>
+        </pc:spChg>
+        <pc:spChg chg="mod">
+          <ac:chgData name="一心 冨永" userId="cee5b40153102c76" providerId="LiveId" clId="{BF059334-9725-4C41-8FAA-8D4F19B9D571}" dt="2026-09-09T12:14:40.262" v="21" actId="1076"/>
+          <ac:spMkLst>
+            <pc:docMk/>
+            <pc:sldMk cId="0" sldId="257"/>
+            <ac:spMk id="12" creationId="{00000000-0000-0000-0000-000000000000}"/>
+          </ac:spMkLst>
+        </pc:spChg>
+      </pc:sldChg>
+      <pc:sldChg chg="modSp mod">
+        <pc:chgData name="一心 冨永" userId="cee5b40153102c76" providerId="LiveId" clId="{BF059334-9725-4C41-8FAA-8D4F19B9D571}" dt="2026-09-09T12:17:20.432" v="73" actId="20577"/>
+        <pc:sldMkLst>
+          <pc:docMk/>
+          <pc:sldMk cId="0" sldId="258"/>
+        </pc:sldMkLst>
+        <pc:spChg chg="mod">
+          <ac:chgData name="一心 冨永" userId="cee5b40153102c76" providerId="LiveId" clId="{BF059334-9725-4C41-8FAA-8D4F19B9D571}" dt="2026-09-09T12:15:51.809" v="40" actId="403"/>
+          <ac:spMkLst>
+            <pc:docMk/>
+            <pc:sldMk cId="0" sldId="258"/>
+            <ac:spMk id="7" creationId="{00000000-0000-0000-0000-000000000000}"/>
+          </ac:spMkLst>
+        </pc:spChg>
+        <pc:spChg chg="mod">
+          <ac:chgData name="一心 冨永" userId="cee5b40153102c76" providerId="LiveId" clId="{BF059334-9725-4C41-8FAA-8D4F19B9D571}" dt="2026-09-09T12:17:20.432" v="73" actId="20577"/>
+          <ac:spMkLst>
+            <pc:docMk/>
+            <pc:sldMk cId="0" sldId="258"/>
+            <ac:spMk id="8" creationId="{00000000-0000-0000-0000-000000000000}"/>
+          </ac:spMkLst>
+        </pc:spChg>
+        <pc:spChg chg="mod">
+          <ac:chgData name="一心 冨永" userId="cee5b40153102c76" providerId="LiveId" clId="{BF059334-9725-4C41-8FAA-8D4F19B9D571}" dt="2026-09-09T12:16:07.521" v="46" actId="1076"/>
+          <ac:spMkLst>
+            <pc:docMk/>
+            <pc:sldMk cId="0" sldId="258"/>
+            <ac:spMk id="9" creationId="{00000000-0000-0000-0000-000000000000}"/>
+          </ac:spMkLst>
+        </pc:spChg>
+        <pc:spChg chg="mod">
+          <ac:chgData name="一心 冨永" userId="cee5b40153102c76" providerId="LiveId" clId="{BF059334-9725-4C41-8FAA-8D4F19B9D571}" dt="2026-09-09T12:15:55.634" v="42" actId="403"/>
+          <ac:spMkLst>
+            <pc:docMk/>
+            <pc:sldMk cId="0" sldId="258"/>
+            <ac:spMk id="10" creationId="{00000000-0000-0000-0000-000000000000}"/>
+          </ac:spMkLst>
+        </pc:spChg>
+        <pc:spChg chg="mod">
+          <ac:chgData name="一心 冨永" userId="cee5b40153102c76" providerId="LiveId" clId="{BF059334-9725-4C41-8FAA-8D4F19B9D571}" dt="2026-09-09T12:15:05.692" v="26" actId="403"/>
+          <ac:spMkLst>
+            <pc:docMk/>
+            <pc:sldMk cId="0" sldId="258"/>
+            <ac:spMk id="11" creationId="{00000000-0000-0000-0000-000000000000}"/>
+          </ac:spMkLst>
+        </pc:spChg>
+        <pc:spChg chg="mod">
+          <ac:chgData name="一心 冨永" userId="cee5b40153102c76" providerId="LiveId" clId="{BF059334-9725-4C41-8FAA-8D4F19B9D571}" dt="2026-09-09T12:16:20.031" v="49" actId="1076"/>
+          <ac:spMkLst>
+            <pc:docMk/>
+            <pc:sldMk cId="0" sldId="258"/>
+            <ac:spMk id="12" creationId="{00000000-0000-0000-0000-000000000000}"/>
+          </ac:spMkLst>
+        </pc:spChg>
+        <pc:spChg chg="mod">
+          <ac:chgData name="一心 冨永" userId="cee5b40153102c76" providerId="LiveId" clId="{BF059334-9725-4C41-8FAA-8D4F19B9D571}" dt="2026-09-09T12:16:23.849" v="52" actId="403"/>
+          <ac:spMkLst>
+            <pc:docMk/>
+            <pc:sldMk cId="0" sldId="258"/>
+            <ac:spMk id="13" creationId="{00000000-0000-0000-0000-000000000000}"/>
+          </ac:spMkLst>
+        </pc:spChg>
+        <pc:spChg chg="mod">
+          <ac:chgData name="一心 冨永" userId="cee5b40153102c76" providerId="LiveId" clId="{BF059334-9725-4C41-8FAA-8D4F19B9D571}" dt="2026-09-09T12:15:34.732" v="37" actId="403"/>
+          <ac:spMkLst>
+            <pc:docMk/>
+            <pc:sldMk cId="0" sldId="258"/>
+            <ac:spMk id="14" creationId="{00000000-0000-0000-0000-000000000000}"/>
+          </ac:spMkLst>
+        </pc:spChg>
+        <pc:spChg chg="mod">
+          <ac:chgData name="一心 冨永" userId="cee5b40153102c76" providerId="LiveId" clId="{BF059334-9725-4C41-8FAA-8D4F19B9D571}" dt="2026-09-09T12:16:48.122" v="68" actId="20577"/>
+          <ac:spMkLst>
+            <pc:docMk/>
+            <pc:sldMk cId="0" sldId="258"/>
+            <ac:spMk id="16" creationId="{00000000-0000-0000-0000-000000000000}"/>
+          </ac:spMkLst>
+        </pc:spChg>
+      </pc:sldChg>
+      <pc:sldChg chg="modSp mod">
+        <pc:chgData name="一心 冨永" userId="cee5b40153102c76" providerId="LiveId" clId="{BF059334-9725-4C41-8FAA-8D4F19B9D571}" dt="2026-09-09T12:09:26.767" v="0" actId="20577"/>
+        <pc:sldMkLst>
+          <pc:docMk/>
+          <pc:sldMk cId="0" sldId="259"/>
+        </pc:sldMkLst>
+        <pc:spChg chg="mod">
+          <ac:chgData name="一心 冨永" userId="cee5b40153102c76" providerId="LiveId" clId="{BF059334-9725-4C41-8FAA-8D4F19B9D571}" dt="2026-09-09T12:09:26.767" v="0" actId="20577"/>
+          <ac:spMkLst>
+            <pc:docMk/>
+            <pc:sldMk cId="0" sldId="259"/>
+            <ac:spMk id="9" creationId="{00000000-0000-0000-0000-000000000000}"/>
+          </ac:spMkLst>
+        </pc:spChg>
+      </pc:sldChg>
+      <pc:sldChg chg="modSp mod">
+        <pc:chgData name="一心 冨永" userId="cee5b40153102c76" providerId="LiveId" clId="{BF059334-9725-4C41-8FAA-8D4F19B9D571}" dt="2026-09-09T12:34:43.851" v="119" actId="20577"/>
+        <pc:sldMkLst>
+          <pc:docMk/>
+          <pc:sldMk cId="0" sldId="260"/>
+        </pc:sldMkLst>
+        <pc:spChg chg="mod">
+          <ac:chgData name="一心 冨永" userId="cee5b40153102c76" providerId="LiveId" clId="{BF059334-9725-4C41-8FAA-8D4F19B9D571}" dt="2026-09-09T12:34:43.851" v="119" actId="20577"/>
+          <ac:spMkLst>
+            <pc:docMk/>
+            <pc:sldMk cId="0" sldId="260"/>
+            <ac:spMk id="25" creationId="{00000000-0000-0000-0000-000000000000}"/>
+          </ac:spMkLst>
+        </pc:spChg>
+        <pc:spChg chg="mod">
+          <ac:chgData name="一心 冨永" userId="cee5b40153102c76" providerId="LiveId" clId="{BF059334-9725-4C41-8FAA-8D4F19B9D571}" dt="2026-09-09T12:20:54.729" v="95" actId="404"/>
+          <ac:spMkLst>
+            <pc:docMk/>
+            <pc:sldMk cId="0" sldId="260"/>
+            <ac:spMk id="27" creationId="{00000000-0000-0000-0000-000000000000}"/>
+          </ac:spMkLst>
+        </pc:spChg>
+        <pc:spChg chg="mod">
+          <ac:chgData name="一心 冨永" userId="cee5b40153102c76" providerId="LiveId" clId="{BF059334-9725-4C41-8FAA-8D4F19B9D571}" dt="2026-09-09T12:21:13.420" v="98" actId="20577"/>
+          <ac:spMkLst>
+            <pc:docMk/>
+            <pc:sldMk cId="0" sldId="260"/>
+            <ac:spMk id="28" creationId="{00000000-0000-0000-0000-000000000000}"/>
+          </ac:spMkLst>
+        </pc:spChg>
+      </pc:sldChg>
+      <pc:sldChg chg="modSp mod">
+        <pc:chgData name="一心 冨永" userId="cee5b40153102c76" providerId="LiveId" clId="{BF059334-9725-4C41-8FAA-8D4F19B9D571}" dt="2026-09-09T12:37:03.554" v="148" actId="20577"/>
+        <pc:sldMkLst>
+          <pc:docMk/>
+          <pc:sldMk cId="0" sldId="261"/>
+        </pc:sldMkLst>
+        <pc:spChg chg="mod">
+          <ac:chgData name="一心 冨永" userId="cee5b40153102c76" providerId="LiveId" clId="{BF059334-9725-4C41-8FAA-8D4F19B9D571}" dt="2026-09-09T12:37:03.554" v="148" actId="20577"/>
+          <ac:spMkLst>
+            <pc:docMk/>
+            <pc:sldMk cId="0" sldId="261"/>
+            <ac:spMk id="28" creationId="{00000000-0000-0000-0000-000000000000}"/>
+          </ac:spMkLst>
+        </pc:spChg>
+      </pc:sldChg>
+      <pc:sldChg chg="modSp mod">
+        <pc:chgData name="一心 冨永" userId="cee5b40153102c76" providerId="LiveId" clId="{BF059334-9725-4C41-8FAA-8D4F19B9D571}" dt="2026-09-09T12:38:28.462" v="167" actId="404"/>
+        <pc:sldMkLst>
+          <pc:docMk/>
+          <pc:sldMk cId="0" sldId="262"/>
+        </pc:sldMkLst>
+        <pc:spChg chg="mod">
+          <ac:chgData name="一心 冨永" userId="cee5b40153102c76" providerId="LiveId" clId="{BF059334-9725-4C41-8FAA-8D4F19B9D571}" dt="2026-09-09T12:37:29.900" v="156" actId="1076"/>
+          <ac:spMkLst>
+            <pc:docMk/>
+            <pc:sldMk cId="0" sldId="262"/>
+            <ac:spMk id="8" creationId="{00000000-0000-0000-0000-000000000000}"/>
+          </ac:spMkLst>
+        </pc:spChg>
+        <pc:spChg chg="mod">
+          <ac:chgData name="一心 冨永" userId="cee5b40153102c76" providerId="LiveId" clId="{BF059334-9725-4C41-8FAA-8D4F19B9D571}" dt="2026-09-09T12:37:16.357" v="152" actId="403"/>
+          <ac:spMkLst>
+            <pc:docMk/>
+            <pc:sldMk cId="0" sldId="262"/>
+            <ac:spMk id="9" creationId="{00000000-0000-0000-0000-000000000000}"/>
+          </ac:spMkLst>
+        </pc:spChg>
+        <pc:spChg chg="mod">
+          <ac:chgData name="一心 冨永" userId="cee5b40153102c76" providerId="LiveId" clId="{BF059334-9725-4C41-8FAA-8D4F19B9D571}" dt="2026-09-09T12:37:12.637" v="150" actId="403"/>
+          <ac:spMkLst>
+            <pc:docMk/>
+            <pc:sldMk cId="0" sldId="262"/>
+            <ac:spMk id="10" creationId="{00000000-0000-0000-0000-000000000000}"/>
+          </ac:spMkLst>
+        </pc:spChg>
+        <pc:spChg chg="mod">
+          <ac:chgData name="一心 冨永" userId="cee5b40153102c76" providerId="LiveId" clId="{BF059334-9725-4C41-8FAA-8D4F19B9D571}" dt="2026-09-09T12:37:41" v="159" actId="403"/>
+          <ac:spMkLst>
+            <pc:docMk/>
+            <pc:sldMk cId="0" sldId="262"/>
+            <ac:spMk id="13" creationId="{00000000-0000-0000-0000-000000000000}"/>
+          </ac:spMkLst>
+        </pc:spChg>
+        <pc:spChg chg="mod">
+          <ac:chgData name="一心 冨永" userId="cee5b40153102c76" providerId="LiveId" clId="{BF059334-9725-4C41-8FAA-8D4F19B9D571}" dt="2026-09-09T12:37:50.826" v="161" actId="403"/>
+          <ac:spMkLst>
+            <pc:docMk/>
+            <pc:sldMk cId="0" sldId="262"/>
+            <ac:spMk id="14" creationId="{00000000-0000-0000-0000-000000000000}"/>
+          </ac:spMkLst>
+        </pc:spChg>
+        <pc:spChg chg="mod">
+          <ac:chgData name="一心 冨永" userId="cee5b40153102c76" providerId="LiveId" clId="{BF059334-9725-4C41-8FAA-8D4F19B9D571}" dt="2026-09-09T12:37:54.427" v="163" actId="403"/>
+          <ac:spMkLst>
+            <pc:docMk/>
+            <pc:sldMk cId="0" sldId="262"/>
+            <ac:spMk id="15" creationId="{00000000-0000-0000-0000-000000000000}"/>
+          </ac:spMkLst>
+        </pc:spChg>
+        <pc:spChg chg="mod">
+          <ac:chgData name="一心 冨永" userId="cee5b40153102c76" providerId="LiveId" clId="{BF059334-9725-4C41-8FAA-8D4F19B9D571}" dt="2026-09-09T12:38:28.462" v="167" actId="404"/>
+          <ac:spMkLst>
+            <pc:docMk/>
+            <pc:sldMk cId="0" sldId="262"/>
+            <ac:spMk id="17" creationId="{00000000-0000-0000-0000-000000000000}"/>
+          </ac:spMkLst>
+        </pc:spChg>
+      </pc:sldChg>
+      <pc:sldChg chg="modSp mod">
+        <pc:chgData name="一心 冨永" userId="cee5b40153102c76" providerId="LiveId" clId="{BF059334-9725-4C41-8FAA-8D4F19B9D571}" dt="2026-09-09T12:39:43.230" v="185" actId="403"/>
+        <pc:sldMkLst>
+          <pc:docMk/>
+          <pc:sldMk cId="0" sldId="263"/>
+        </pc:sldMkLst>
+        <pc:spChg chg="mod">
+          <ac:chgData name="一心 冨永" userId="cee5b40153102c76" providerId="LiveId" clId="{BF059334-9725-4C41-8FAA-8D4F19B9D571}" dt="2026-09-09T12:38:58.387" v="170" actId="403"/>
+          <ac:spMkLst>
+            <pc:docMk/>
+            <pc:sldMk cId="0" sldId="263"/>
+            <ac:spMk id="8" creationId="{00000000-0000-0000-0000-000000000000}"/>
+          </ac:spMkLst>
+        </pc:spChg>
+        <pc:spChg chg="mod">
+          <ac:chgData name="一心 冨永" userId="cee5b40153102c76" providerId="LiveId" clId="{BF059334-9725-4C41-8FAA-8D4F19B9D571}" dt="2026-09-09T12:39:40.065" v="183" actId="403"/>
+          <ac:spMkLst>
+            <pc:docMk/>
+            <pc:sldMk cId="0" sldId="263"/>
+            <ac:spMk id="9" creationId="{00000000-0000-0000-0000-000000000000}"/>
+          </ac:spMkLst>
+        </pc:spChg>
+        <pc:spChg chg="mod">
+          <ac:chgData name="一心 冨永" userId="cee5b40153102c76" providerId="LiveId" clId="{BF059334-9725-4C41-8FAA-8D4F19B9D571}" dt="2026-09-09T12:39:16.604" v="178" actId="404"/>
+          <ac:spMkLst>
+            <pc:docMk/>
+            <pc:sldMk cId="0" sldId="263"/>
+            <ac:spMk id="11" creationId="{00000000-0000-0000-0000-000000000000}"/>
+          </ac:spMkLst>
+        </pc:spChg>
+        <pc:spChg chg="mod">
+          <ac:chgData name="一心 冨永" userId="cee5b40153102c76" providerId="LiveId" clId="{BF059334-9725-4C41-8FAA-8D4F19B9D571}" dt="2026-09-09T12:39:37.049" v="182" actId="403"/>
+          <ac:spMkLst>
+            <pc:docMk/>
+            <pc:sldMk cId="0" sldId="263"/>
+            <ac:spMk id="12" creationId="{00000000-0000-0000-0000-000000000000}"/>
+          </ac:spMkLst>
+        </pc:spChg>
+        <pc:spChg chg="mod">
+          <ac:chgData name="一心 冨永" userId="cee5b40153102c76" providerId="LiveId" clId="{BF059334-9725-4C41-8FAA-8D4F19B9D571}" dt="2026-09-09T12:39:31.049" v="180" actId="403"/>
+          <ac:spMkLst>
+            <pc:docMk/>
+            <pc:sldMk cId="0" sldId="263"/>
+            <ac:spMk id="14" creationId="{00000000-0000-0000-0000-000000000000}"/>
+          </ac:spMkLst>
+        </pc:spChg>
+        <pc:spChg chg="mod">
+          <ac:chgData name="一心 冨永" userId="cee5b40153102c76" providerId="LiveId" clId="{BF059334-9725-4C41-8FAA-8D4F19B9D571}" dt="2026-09-09T12:39:34.230" v="181" actId="403"/>
+          <ac:spMkLst>
+            <pc:docMk/>
+            <pc:sldMk cId="0" sldId="263"/>
+            <ac:spMk id="15" creationId="{00000000-0000-0000-0000-000000000000}"/>
+          </ac:spMkLst>
+        </pc:spChg>
+        <pc:spChg chg="mod">
+          <ac:chgData name="一心 冨永" userId="cee5b40153102c76" providerId="LiveId" clId="{BF059334-9725-4C41-8FAA-8D4F19B9D571}" dt="2026-09-09T12:39:43.230" v="185" actId="403"/>
+          <ac:spMkLst>
+            <pc:docMk/>
+            <pc:sldMk cId="0" sldId="263"/>
+            <ac:spMk id="17" creationId="{00000000-0000-0000-0000-000000000000}"/>
+          </ac:spMkLst>
+        </pc:spChg>
+      </pc:sldChg>
+      <pc:sldChg chg="modSp mod">
+        <pc:chgData name="一心 冨永" userId="cee5b40153102c76" providerId="LiveId" clId="{BF059334-9725-4C41-8FAA-8D4F19B9D571}" dt="2026-09-09T12:40:53.143" v="199" actId="20577"/>
+        <pc:sldMkLst>
+          <pc:docMk/>
+          <pc:sldMk cId="0" sldId="264"/>
+        </pc:sldMkLst>
+        <pc:spChg chg="mod">
+          <ac:chgData name="一心 冨永" userId="cee5b40153102c76" providerId="LiveId" clId="{BF059334-9725-4C41-8FAA-8D4F19B9D571}" dt="2026-09-09T12:40:10.507" v="187" actId="403"/>
+          <ac:spMkLst>
+            <pc:docMk/>
+            <pc:sldMk cId="0" sldId="264"/>
+            <ac:spMk id="8" creationId="{00000000-0000-0000-0000-000000000000}"/>
+          </ac:spMkLst>
+        </pc:spChg>
+        <pc:spChg chg="mod">
+          <ac:chgData name="一心 冨永" userId="cee5b40153102c76" providerId="LiveId" clId="{BF059334-9725-4C41-8FAA-8D4F19B9D571}" dt="2026-09-09T12:40:16.920" v="192" actId="403"/>
+          <ac:spMkLst>
+            <pc:docMk/>
+            <pc:sldMk cId="0" sldId="264"/>
+            <ac:spMk id="9" creationId="{00000000-0000-0000-0000-000000000000}"/>
+          </ac:spMkLst>
+        </pc:spChg>
+        <pc:spChg chg="mod">
+          <ac:chgData name="一心 冨永" userId="cee5b40153102c76" providerId="LiveId" clId="{BF059334-9725-4C41-8FAA-8D4F19B9D571}" dt="2026-09-09T12:40:13.477" v="189" actId="403"/>
+          <ac:spMkLst>
+            <pc:docMk/>
+            <pc:sldMk cId="0" sldId="264"/>
+            <ac:spMk id="11" creationId="{00000000-0000-0000-0000-000000000000}"/>
+          </ac:spMkLst>
+        </pc:spChg>
+        <pc:spChg chg="mod">
+          <ac:chgData name="一心 冨永" userId="cee5b40153102c76" providerId="LiveId" clId="{BF059334-9725-4C41-8FAA-8D4F19B9D571}" dt="2026-09-09T12:40:22.583" v="194" actId="403"/>
+          <ac:spMkLst>
+            <pc:docMk/>
+            <pc:sldMk cId="0" sldId="264"/>
+            <ac:spMk id="12" creationId="{00000000-0000-0000-0000-000000000000}"/>
+          </ac:spMkLst>
+        </pc:spChg>
+        <pc:spChg chg="mod">
+          <ac:chgData name="一心 冨永" userId="cee5b40153102c76" providerId="LiveId" clId="{BF059334-9725-4C41-8FAA-8D4F19B9D571}" dt="2026-09-09T12:40:53.143" v="199" actId="20577"/>
+          <ac:spMkLst>
+            <pc:docMk/>
+            <pc:sldMk cId="0" sldId="264"/>
+            <ac:spMk id="14" creationId="{00000000-0000-0000-0000-000000000000}"/>
+          </ac:spMkLst>
+        </pc:spChg>
+      </pc:sldChg>
+      <pc:sldChg chg="modSp mod">
+        <pc:chgData name="一心 冨永" userId="cee5b40153102c76" providerId="LiveId" clId="{BF059334-9725-4C41-8FAA-8D4F19B9D571}" dt="2026-09-09T12:42:22.980" v="215" actId="403"/>
+        <pc:sldMkLst>
+          <pc:docMk/>
+          <pc:sldMk cId="0" sldId="265"/>
+        </pc:sldMkLst>
+        <pc:spChg chg="mod">
+          <ac:chgData name="一心 冨永" userId="cee5b40153102c76" providerId="LiveId" clId="{BF059334-9725-4C41-8FAA-8D4F19B9D571}" dt="2026-09-09T12:41:07.597" v="201" actId="403"/>
+          <ac:spMkLst>
+            <pc:docMk/>
+            <pc:sldMk cId="0" sldId="265"/>
+            <ac:spMk id="7" creationId="{00000000-0000-0000-0000-000000000000}"/>
+          </ac:spMkLst>
+        </pc:spChg>
+        <pc:spChg chg="mod">
+          <ac:chgData name="一心 冨永" userId="cee5b40153102c76" providerId="LiveId" clId="{BF059334-9725-4C41-8FAA-8D4F19B9D571}" dt="2026-09-09T12:41:27.082" v="214" actId="403"/>
+          <ac:spMkLst>
+            <pc:docMk/>
+            <pc:sldMk cId="0" sldId="265"/>
+            <ac:spMk id="8" creationId="{00000000-0000-0000-0000-000000000000}"/>
+          </ac:spMkLst>
+        </pc:spChg>
+        <pc:spChg chg="mod">
+          <ac:chgData name="一心 冨永" userId="cee5b40153102c76" providerId="LiveId" clId="{BF059334-9725-4C41-8FAA-8D4F19B9D571}" dt="2026-09-09T12:41:09.832" v="203" actId="403"/>
+          <ac:spMkLst>
+            <pc:docMk/>
+            <pc:sldMk cId="0" sldId="265"/>
+            <ac:spMk id="10" creationId="{00000000-0000-0000-0000-000000000000}"/>
+          </ac:spMkLst>
+        </pc:spChg>
+        <pc:spChg chg="mod">
+          <ac:chgData name="一心 冨永" userId="cee5b40153102c76" providerId="LiveId" clId="{BF059334-9725-4C41-8FAA-8D4F19B9D571}" dt="2026-09-09T12:41:23.940" v="213" actId="403"/>
+          <ac:spMkLst>
+            <pc:docMk/>
+            <pc:sldMk cId="0" sldId="265"/>
+            <ac:spMk id="11" creationId="{00000000-0000-0000-0000-000000000000}"/>
+          </ac:spMkLst>
+        </pc:spChg>
+        <pc:spChg chg="mod">
+          <ac:chgData name="一心 冨永" userId="cee5b40153102c76" providerId="LiveId" clId="{BF059334-9725-4C41-8FAA-8D4F19B9D571}" dt="2026-09-09T12:41:11.872" v="205" actId="403"/>
+          <ac:spMkLst>
+            <pc:docMk/>
+            <pc:sldMk cId="0" sldId="265"/>
+            <ac:spMk id="13" creationId="{00000000-0000-0000-0000-000000000000}"/>
+          </ac:spMkLst>
+        </pc:spChg>
+        <pc:spChg chg="mod">
+          <ac:chgData name="一心 冨永" userId="cee5b40153102c76" providerId="LiveId" clId="{BF059334-9725-4C41-8FAA-8D4F19B9D571}" dt="2026-09-09T12:41:21.293" v="212" actId="403"/>
+          <ac:spMkLst>
+            <pc:docMk/>
+            <pc:sldMk cId="0" sldId="265"/>
+            <ac:spMk id="14" creationId="{00000000-0000-0000-0000-000000000000}"/>
+          </ac:spMkLst>
+        </pc:spChg>
+        <pc:spChg chg="mod">
+          <ac:chgData name="一心 冨永" userId="cee5b40153102c76" providerId="LiveId" clId="{BF059334-9725-4C41-8FAA-8D4F19B9D571}" dt="2026-09-09T12:42:22.980" v="215" actId="403"/>
+          <ac:spMkLst>
+            <pc:docMk/>
+            <pc:sldMk cId="0" sldId="265"/>
+            <ac:spMk id="16" creationId="{00000000-0000-0000-0000-000000000000}"/>
+          </ac:spMkLst>
+        </pc:spChg>
+      </pc:sldChg>
+      <pc:sldChg chg="modSp mod">
+        <pc:chgData name="一心 冨永" userId="cee5b40153102c76" providerId="LiveId" clId="{BF059334-9725-4C41-8FAA-8D4F19B9D571}" dt="2026-09-09T12:43:22.027" v="221" actId="403"/>
+        <pc:sldMkLst>
+          <pc:docMk/>
+          <pc:sldMk cId="0" sldId="266"/>
+        </pc:sldMkLst>
+        <pc:spChg chg="mod">
+          <ac:chgData name="一心 冨永" userId="cee5b40153102c76" providerId="LiveId" clId="{BF059334-9725-4C41-8FAA-8D4F19B9D571}" dt="2026-09-09T12:42:53.213" v="218" actId="403"/>
+          <ac:spMkLst>
+            <pc:docMk/>
+            <pc:sldMk cId="0" sldId="266"/>
+            <ac:spMk id="18" creationId="{00000000-0000-0000-0000-000000000000}"/>
+          </ac:spMkLst>
+        </pc:spChg>
+        <pc:spChg chg="mod">
+          <ac:chgData name="一心 冨永" userId="cee5b40153102c76" providerId="LiveId" clId="{BF059334-9725-4C41-8FAA-8D4F19B9D571}" dt="2026-09-09T12:43:06.922" v="219" actId="403"/>
+          <ac:spMkLst>
+            <pc:docMk/>
+            <pc:sldMk cId="0" sldId="266"/>
+            <ac:spMk id="19" creationId="{00000000-0000-0000-0000-000000000000}"/>
+          </ac:spMkLst>
+        </pc:spChg>
+        <pc:spChg chg="mod">
+          <ac:chgData name="一心 冨永" userId="cee5b40153102c76" providerId="LiveId" clId="{BF059334-9725-4C41-8FAA-8D4F19B9D571}" dt="2026-09-09T12:43:16.906" v="220" actId="403"/>
+          <ac:spMkLst>
+            <pc:docMk/>
+            <pc:sldMk cId="0" sldId="266"/>
+            <ac:spMk id="21" creationId="{00000000-0000-0000-0000-000000000000}"/>
+          </ac:spMkLst>
+        </pc:spChg>
+        <pc:spChg chg="mod">
+          <ac:chgData name="一心 冨永" userId="cee5b40153102c76" providerId="LiveId" clId="{BF059334-9725-4C41-8FAA-8D4F19B9D571}" dt="2026-09-09T12:43:22.027" v="221" actId="403"/>
+          <ac:spMkLst>
+            <pc:docMk/>
+            <pc:sldMk cId="0" sldId="266"/>
+            <ac:spMk id="22" creationId="{00000000-0000-0000-0000-000000000000}"/>
+          </ac:spMkLst>
+        </pc:spChg>
+      </pc:sldChg>
+      <pc:sldChg chg="modSp mod">
+        <pc:chgData name="一心 冨永" userId="cee5b40153102c76" providerId="LiveId" clId="{BF059334-9725-4C41-8FAA-8D4F19B9D571}" dt="2026-09-09T12:44:12.810" v="240" actId="20577"/>
+        <pc:sldMkLst>
+          <pc:docMk/>
+          <pc:sldMk cId="0" sldId="267"/>
+        </pc:sldMkLst>
+        <pc:graphicFrameChg chg="modGraphic">
+          <ac:chgData name="一心 冨永" userId="cee5b40153102c76" providerId="LiveId" clId="{BF059334-9725-4C41-8FAA-8D4F19B9D571}" dt="2026-09-09T12:44:12.810" v="240" actId="20577"/>
+          <ac:graphicFrameMkLst>
+            <pc:docMk/>
+            <pc:sldMk cId="0" sldId="267"/>
+            <ac:graphicFrameMk id="13" creationId="{00000000-0000-0000-0000-000000000000}"/>
+          </ac:graphicFrameMkLst>
+        </pc:graphicFrameChg>
+      </pc:sldChg>
+    </pc:docChg>
+  </pc:docChgLst>
+</pc:chgInfo>
 </file>
 
 <file path=ppt/notesMasters/notesMaster1.xml><?xml version="1.0" encoding="utf-8"?>
@@ -143,241 +639,17 @@
           <a:chExt cx="0" cy="0"/>
         </a:xfrm>
       </p:grpSpPr>
-      <p:sp>
-        <p:nvSpPr>
-          <p:cNvPr id="2" name="Header Placeholder 1"/>
-          <p:cNvSpPr>
-            <a:spLocks noGrp="1"/>
-          </p:cNvSpPr>
-          <p:nvPr>
-            <p:ph type="hdr" sz="quarter"/>
-          </p:nvPr>
-        </p:nvSpPr>
-        <p:spPr>
-          <a:xfrm>
-            <a:off x="0" y="0"/>
-            <a:ext cx="2971800" cy="458788"/>
-          </a:xfrm>
-          <a:prstGeom prst="rect">
-            <a:avLst/>
-          </a:prstGeom>
-        </p:spPr>
-        <p:txBody>
-          <a:bodyPr vert="horz" lIns="91440" tIns="45720" rIns="91440" bIns="45720" rtlCol="0"/>
-          <a:lstStyle>
-            <a:lvl1pPr algn="l">
-              <a:defRPr sz="1200"/>
-            </a:lvl1pPr>
-          </a:lstStyle>
-          <a:p>
-            <a:endParaRPr lang="en-US"/>
-          </a:p>
-        </p:txBody>
-      </p:sp>
-      <p:sp>
-        <p:nvSpPr>
-          <p:cNvPr id="3" name="Date Placeholder 2"/>
-          <p:cNvSpPr>
-            <a:spLocks noGrp="1"/>
-          </p:cNvSpPr>
-          <p:nvPr>
-            <p:ph type="dt" idx="1"/>
-          </p:nvPr>
-        </p:nvSpPr>
-        <p:spPr>
-          <a:xfrm>
-            <a:off x="3884613" y="0"/>
-            <a:ext cx="2971800" cy="458788"/>
-          </a:xfrm>
-          <a:prstGeom prst="rect">
-            <a:avLst/>
-          </a:prstGeom>
-        </p:spPr>
-        <p:txBody>
-          <a:bodyPr vert="horz" lIns="91440" tIns="45720" rIns="91440" bIns="45720" rtlCol="0"/>
-          <a:lstStyle>
-            <a:lvl1pPr algn="r">
-              <a:defRPr sz="1200"/>
-            </a:lvl1pPr>
-          </a:lstStyle>
-          <a:p>
-            <a:fld id="{5282F153-3F37-0F45-9E97-73ACFA13230C}" type="datetimeFigureOut">
-              <a:rPr lang="en-US"/>
-              <a:t>7/23/19</a:t>
-            </a:fld>
-            <a:endParaRPr lang="en-US"/>
-          </a:p>
-        </p:txBody>
-      </p:sp>
-      <p:sp>
-        <p:nvSpPr>
-          <p:cNvPr id="4" name="Slide Image Placeholder 3"/>
-          <p:cNvSpPr>
-            <a:spLocks noGrp="1" noRot="1" noChangeAspect="1"/>
-          </p:cNvSpPr>
-          <p:nvPr>
-            <p:ph type="sldImg" idx="2"/>
-          </p:nvPr>
-        </p:nvSpPr>
-        <p:spPr>
-          <a:xfrm>
-            <a:off x="685800" y="1143000"/>
-            <a:ext cx="5486400" cy="3086100"/>
-          </a:xfrm>
-          <a:prstGeom prst="rect">
-            <a:avLst/>
-          </a:prstGeom>
-          <a:noFill/>
-          <a:ln w="12700">
-            <a:solidFill>
-              <a:prstClr val="black"/>
-            </a:solidFill>
-          </a:ln>
-        </p:spPr>
-        <p:txBody>
-          <a:bodyPr vert="horz" lIns="91440" tIns="45720" rIns="91440" bIns="45720" rtlCol="0" anchor="ctr"/>
-          <a:lstStyle/>
-          <a:p>
-            <a:endParaRPr lang="en-US"/>
-          </a:p>
-        </p:txBody>
-      </p:sp>
-      <p:sp>
-        <p:nvSpPr>
-          <p:cNvPr id="5" name="Notes Placeholder 4"/>
-          <p:cNvSpPr>
-            <a:spLocks noGrp="1"/>
-          </p:cNvSpPr>
-          <p:nvPr>
-            <p:ph type="body" sz="quarter" idx="3"/>
-          </p:nvPr>
-        </p:nvSpPr>
-        <p:spPr>
-          <a:xfrm>
-            <a:off x="685800" y="4400550"/>
-            <a:ext cx="5486400" cy="3600450"/>
-          </a:xfrm>
-          <a:prstGeom prst="rect">
-            <a:avLst/>
-          </a:prstGeom>
-        </p:spPr>
-        <p:txBody>
-          <a:bodyPr vert="horz" lIns="91440" tIns="45720" rIns="91440" bIns="45720" rtlCol="0"/>
-          <a:lstStyle/>
-          <a:p>
-            <a:pPr lvl="0"/>
-            <a:r>
-              <a:rPr lang="en-US"/>
-              <a:t>Click to edit Master text styles</a:t>
-            </a:r>
-          </a:p>
-          <a:p>
-            <a:pPr lvl="1"/>
-            <a:r>
-              <a:rPr lang="en-US"/>
-              <a:t>Second level</a:t>
-            </a:r>
-          </a:p>
-          <a:p>
-            <a:pPr lvl="2"/>
-            <a:r>
-              <a:rPr lang="en-US"/>
-              <a:t>Third level</a:t>
-            </a:r>
-          </a:p>
-          <a:p>
-            <a:pPr lvl="3"/>
-            <a:r>
-              <a:rPr lang="en-US"/>
-              <a:t>Fourth level</a:t>
-            </a:r>
-          </a:p>
-          <a:p>
-            <a:pPr lvl="4"/>
-            <a:r>
-              <a:rPr lang="en-US"/>
-              <a:t>Fifth level</a:t>
-            </a:r>
-          </a:p>
-        </p:txBody>
-      </p:sp>
-      <p:sp>
-        <p:nvSpPr>
-          <p:cNvPr id="6" name="Footer Placeholder 5"/>
-          <p:cNvSpPr>
-            <a:spLocks noGrp="1"/>
-          </p:cNvSpPr>
-          <p:nvPr>
-            <p:ph type="ftr" sz="quarter" idx="4"/>
-          </p:nvPr>
-        </p:nvSpPr>
-        <p:spPr>
-          <a:xfrm>
-            <a:off x="0" y="8685213"/>
-            <a:ext cx="2971800" cy="458787"/>
-          </a:xfrm>
-          <a:prstGeom prst="rect">
-            <a:avLst/>
-          </a:prstGeom>
-        </p:spPr>
-        <p:txBody>
-          <a:bodyPr vert="horz" lIns="91440" tIns="45720" rIns="91440" bIns="45720" rtlCol="0" anchor="b"/>
-          <a:lstStyle>
-            <a:lvl1pPr algn="l">
-              <a:defRPr sz="1200"/>
-            </a:lvl1pPr>
-          </a:lstStyle>
-          <a:p>
-            <a:endParaRPr lang="en-US"/>
-          </a:p>
-        </p:txBody>
-      </p:sp>
-      <p:sp>
-        <p:nvSpPr>
-          <p:cNvPr id="7" name="Slide Number Placeholder 6"/>
-          <p:cNvSpPr>
-            <a:spLocks noGrp="1"/>
-          </p:cNvSpPr>
-          <p:nvPr>
-            <p:ph type="sldNum" sz="quarter" idx="5"/>
-          </p:nvPr>
-        </p:nvSpPr>
-        <p:spPr>
-          <a:xfrm>
-            <a:off x="3884613" y="8685213"/>
-            <a:ext cx="2971800" cy="458787"/>
-          </a:xfrm>
-          <a:prstGeom prst="rect">
-            <a:avLst/>
-          </a:prstGeom>
-        </p:spPr>
-        <p:txBody>
-          <a:bodyPr vert="horz" lIns="91440" tIns="45720" rIns="91440" bIns="45720" rtlCol="0" anchor="b"/>
-          <a:lstStyle>
-            <a:lvl1pPr algn="r">
-              <a:defRPr sz="1200"/>
-            </a:lvl1pPr>
-          </a:lstStyle>
-          <a:p>
-            <a:fld id="{CE5E9CC1-C706-0F49-92D6-E571CC5EEA8F}" type="slidenum">
-              <a:rPr lang="en-US"/>
-              <a:t>‹#›</a:t>
-            </a:fld>
-            <a:endParaRPr lang="en-US"/>
-          </a:p>
-        </p:txBody>
-      </p:sp>
     </p:spTree>
     <p:extLst>
       <p:ext uri="{BB962C8B-B14F-4D97-AF65-F5344CB8AC3E}">
-        <p14:creationId xmlns:p14="http://schemas.microsoft.com/office/powerpoint/2010/main" val="1024086991"/>
+        <p14:creationId xmlns:p14="http://schemas.microsoft.com/office/powerpoint/2010/main" val="496348548"/>
       </p:ext>
     </p:extLst>
   </p:cSld>
   <p:clrMap bg1="lt1" tx1="dk1" bg2="lt2" tx2="dk2" accent1="accent1" accent2="accent2" accent3="accent3" accent4="accent4" accent5="accent5" accent6="accent6" hlink="hlink" folHlink="folHlink"/>
   <p:notesStyle>
     <a:lvl1pPr marL="0" algn="l" defTabSz="914400" rtl="0" eaLnBrk="1" latinLnBrk="0" hangingPunct="1">
-      <a:defRPr sz="1200" kern="1200">
+      <a:defRPr kumimoji="1" sz="1200" kern="1200">
         <a:solidFill>
           <a:schemeClr val="tx1"/>
         </a:solidFill>
@@ -387,7 +659,7 @@
       </a:defRPr>
     </a:lvl1pPr>
     <a:lvl2pPr marL="457200" algn="l" defTabSz="914400" rtl="0" eaLnBrk="1" latinLnBrk="0" hangingPunct="1">
-      <a:defRPr sz="1200" kern="1200">
+      <a:defRPr kumimoji="1" sz="1200" kern="1200">
         <a:solidFill>
           <a:schemeClr val="tx1"/>
         </a:solidFill>
@@ -397,7 +669,7 @@
       </a:defRPr>
     </a:lvl2pPr>
     <a:lvl3pPr marL="914400" algn="l" defTabSz="914400" rtl="0" eaLnBrk="1" latinLnBrk="0" hangingPunct="1">
-      <a:defRPr sz="1200" kern="1200">
+      <a:defRPr kumimoji="1" sz="1200" kern="1200">
         <a:solidFill>
           <a:schemeClr val="tx1"/>
         </a:solidFill>
@@ -407,7 +679,7 @@
       </a:defRPr>
     </a:lvl3pPr>
     <a:lvl4pPr marL="1371600" algn="l" defTabSz="914400" rtl="0" eaLnBrk="1" latinLnBrk="0" hangingPunct="1">
-      <a:defRPr sz="1200" kern="1200">
+      <a:defRPr kumimoji="1" sz="1200" kern="1200">
         <a:solidFill>
           <a:schemeClr val="tx1"/>
         </a:solidFill>
@@ -417,7 +689,7 @@
       </a:defRPr>
     </a:lvl4pPr>
     <a:lvl5pPr marL="1828800" algn="l" defTabSz="914400" rtl="0" eaLnBrk="1" latinLnBrk="0" hangingPunct="1">
-      <a:defRPr sz="1200" kern="1200">
+      <a:defRPr kumimoji="1" sz="1200" kern="1200">
         <a:solidFill>
           <a:schemeClr val="tx1"/>
         </a:solidFill>
@@ -427,7 +699,7 @@
       </a:defRPr>
     </a:lvl5pPr>
     <a:lvl6pPr marL="2286000" algn="l" defTabSz="914400" rtl="0" eaLnBrk="1" latinLnBrk="0" hangingPunct="1">
-      <a:defRPr sz="1200" kern="1200">
+      <a:defRPr kumimoji="1" sz="1200" kern="1200">
         <a:solidFill>
           <a:schemeClr val="tx1"/>
         </a:solidFill>
@@ -437,7 +709,7 @@
       </a:defRPr>
     </a:lvl6pPr>
     <a:lvl7pPr marL="2743200" algn="l" defTabSz="914400" rtl="0" eaLnBrk="1" latinLnBrk="0" hangingPunct="1">
-      <a:defRPr sz="1200" kern="1200">
+      <a:defRPr kumimoji="1" sz="1200" kern="1200">
         <a:solidFill>
           <a:schemeClr val="tx1"/>
         </a:solidFill>
@@ -447,7 +719,7 @@
       </a:defRPr>
     </a:lvl7pPr>
     <a:lvl8pPr marL="3200400" algn="l" defTabSz="914400" rtl="0" eaLnBrk="1" latinLnBrk="0" hangingPunct="1">
-      <a:defRPr sz="1200" kern="1200">
+      <a:defRPr kumimoji="1" sz="1200" kern="1200">
         <a:solidFill>
           <a:schemeClr val="tx1"/>
         </a:solidFill>
@@ -457,7 +729,7 @@
       </a:defRPr>
     </a:lvl8pPr>
     <a:lvl9pPr marL="3657600" algn="l" defTabSz="914400" rtl="0" eaLnBrk="1" latinLnBrk="0" hangingPunct="1">
-      <a:defRPr sz="1200" kern="1200">
+      <a:defRPr kumimoji="1" sz="1200" kern="1200">
         <a:solidFill>
           <a:schemeClr val="tx1"/>
         </a:solidFill>
@@ -518,7 +790,6 @@
               <a:rPr lang="en-US" dirty="0"/>
               <a:t>本日は訪問入浴介護についてお話しします。テーマは「自宅でお風呂に入る権利」。在宅で入浴が困難な方に、どう関わり、どう連携できるかをお伝えします。</a:t>
             </a:r>
-            <a:endParaRPr lang="en-US" dirty="0"/>
           </a:p>
         </p:txBody>
       </p:sp>
@@ -606,7 +877,6 @@
               <a:rPr lang="en-US" dirty="0"/>
               <a:t>本日いちばんお願いしたい点です。特に訪問看護ステーションの方に向けて、同日訪問と事前相談をお願いしてください。</a:t>
             </a:r>
-            <a:endParaRPr lang="en-US" dirty="0"/>
           </a:p>
         </p:txBody>
       </p:sp>
@@ -694,7 +964,6 @@
               <a:rPr lang="en-US" dirty="0"/>
               <a:t>デイサービスの方に特にお伝えしたい点です。奪い合いではなく、通所が難しくなった段階での受け皿としてお考えください。</a:t>
             </a:r>
-            <a:endParaRPr lang="en-US" dirty="0"/>
           </a:p>
         </p:txBody>
       </p:sp>
@@ -782,7 +1051,6 @@
               <a:rPr lang="en-US" dirty="0"/>
               <a:t>単位数が高いという指摘は当然あります。何が含まれているかを分解して説明できるようにしておきます。</a:t>
             </a:r>
-            <a:endParaRPr lang="en-US" dirty="0"/>
           </a:p>
         </p:txBody>
       </p:sp>
@@ -870,7 +1138,6 @@
               <a:rPr lang="en-US" dirty="0"/>
               <a:t>数字では伝わらない部分です。ご家族の負担軽減という側面も強調してください。</a:t>
             </a:r>
-            <a:endParaRPr lang="en-US" dirty="0"/>
           </a:p>
         </p:txBody>
       </p:sp>
@@ -958,7 +1225,6 @@
               <a:rPr lang="en-US" dirty="0"/>
               <a:t>4点に整理しました。最後のメッセージ——迷った段階でご相談いただきたい、を強調して締めます。</a:t>
             </a:r>
-            <a:endParaRPr lang="en-US" dirty="0"/>
           </a:p>
         </p:txBody>
       </p:sp>
@@ -1046,7 +1312,6 @@
               <a:rPr lang="en-US" dirty="0"/>
               <a:t>ご相談は電話が最も早いです。初回アセスメントは無料である点をお伝えください。</a:t>
             </a:r>
-            <a:endParaRPr lang="en-US" dirty="0"/>
           </a:p>
         </p:txBody>
       </p:sp>
@@ -1134,7 +1399,6 @@
               <a:rPr lang="en-US" dirty="0"/>
               <a:t>入浴困難は「できない理由」が複数重なって起こります。清拭だけでは代替できない意義があることを押さえてください。</a:t>
             </a:r>
-            <a:endParaRPr lang="en-US" dirty="0"/>
           </a:p>
         </p:txBody>
       </p:sp>
@@ -1222,7 +1486,6 @@
               <a:rPr lang="en-US" dirty="0"/>
               <a:t>3つの選択肢それぞれに限界があること、そしてその間に空白地帯があることが今日の出発点です。</a:t>
             </a:r>
-            <a:endParaRPr lang="en-US" dirty="0"/>
           </a:p>
         </p:txBody>
       </p:sp>
@@ -1310,7 +1573,6 @@
               <a:rPr lang="en-US" dirty="0"/>
               <a:t>この表が本日の中心です。訪問看護・訪問介護の入浴介助も比較に入れました。訪問入浴の違いは、専用浴槽を持参するため浴室環境に左右されない点と、3名体制で移乗できる点です。</a:t>
             </a:r>
-            <a:endParaRPr lang="en-US" dirty="0"/>
           </a:p>
         </p:txBody>
       </p:sp>
@@ -1398,7 +1660,6 @@
               <a:rPr lang="en-US" dirty="0"/>
               <a:t>4条件のうち3つまでなら他サービスでも満たせます。4つ同時、という点が訪問入浴の存在理由です。</a:t>
             </a:r>
-            <a:endParaRPr lang="en-US" dirty="0"/>
           </a:p>
         </p:txBody>
       </p:sp>
@@ -1486,7 +1747,6 @@
               <a:rPr lang="en-US" dirty="0"/>
               <a:t>準備・入浴・片付けの3区分、各15分で計45分以内です。入浴可否の判断と記録・連絡が看護師の関わる部分になります。</a:t>
             </a:r>
-            <a:endParaRPr lang="en-US" dirty="0"/>
           </a:p>
         </p:txBody>
       </p:sp>
@@ -1574,7 +1834,6 @@
               <a:rPr lang="en-US" dirty="0"/>
               <a:t>なぜ3名なのか、という質問をよく受けます。安全確保と、看護師が観察に専念できる体制のためです。</a:t>
             </a:r>
-            <a:endParaRPr lang="en-US" dirty="0"/>
           </a:p>
         </p:txBody>
       </p:sp>
@@ -1662,7 +1921,6 @@
               <a:rPr lang="en-US" dirty="0"/>
               <a:t>ここが訪問入浴の医療的価値です。褥瘡の初期発赤を最初に見つけるのは、入浴の場面が非常に多いです。</a:t>
             </a:r>
-            <a:endParaRPr lang="en-US" dirty="0"/>
           </a:p>
         </p:txBody>
       </p:sp>
@@ -1750,7 +2008,6 @@
               <a:rPr lang="en-US" dirty="0"/>
               <a:t>訪問入浴は介護保険サービスなので医療行為はできません。だから訪問看護との連携が前提になります。この線引きを明確にお伝えしてください。</a:t>
             </a:r>
-            <a:endParaRPr lang="en-US" dirty="0"/>
           </a:p>
         </p:txBody>
       </p:sp>
@@ -1823,6 +2080,11 @@
 <file path=ppt/slideMasters/slideMaster1.xml><?xml version="1.0" encoding="utf-8"?>
 <p:sldMaster xmlns:a="http://schemas.openxmlformats.org/drawingml/2006/main" xmlns:r="http://schemas.openxmlformats.org/officeDocument/2006/relationships" xmlns:p="http://schemas.openxmlformats.org/presentationml/2006/main">
   <p:cSld>
+    <p:bg>
+      <p:bgRef idx="1001">
+        <a:schemeClr val="bg1"/>
+      </p:bgRef>
+    </p:bg>
     <p:spTree>
       <p:nvGrpSpPr>
         <p:cNvPr id="1" name=""/>
@@ -2105,6 +2367,7 @@
         <a:solidFill>
           <a:srgbClr val="1A5276"/>
         </a:solidFill>
+        <a:effectLst/>
       </p:bgPr>
     </p:bg>
     <p:spTree>
@@ -2142,11 +2405,11 @@
           <a:bodyPr wrap="square" lIns="0" tIns="0" rIns="0" bIns="0" rtlCol="0" anchor="ctr"/>
           <a:lstStyle/>
           <a:p>
-            <a:pPr indent="0" marL="0">
+            <a:pPr marL="0" indent="0">
               <a:buNone/>
             </a:pPr>
             <a:r>
-              <a:rPr lang="en-US" sz="1400" b="1" spc="200" kern="0" dirty="0">
+              <a:rPr lang="en-US" sz="1400" b="1" kern="0" spc="200" dirty="0">
                 <a:solidFill>
                   <a:srgbClr val="7EE2BC"/>
                 </a:solidFill>
@@ -2181,7 +2444,7 @@
           <a:bodyPr wrap="square" lIns="0" tIns="0" rIns="0" bIns="0" rtlCol="0" anchor="ctr"/>
           <a:lstStyle/>
           <a:p>
-            <a:pPr indent="0" marL="0">
+            <a:pPr marL="0" indent="0">
               <a:buNone/>
             </a:pPr>
             <a:r>
@@ -2220,7 +2483,7 @@
           <a:bodyPr wrap="square" lIns="0" tIns="0" rIns="0" bIns="0" rtlCol="0" anchor="ctr"/>
           <a:lstStyle/>
           <a:p>
-            <a:pPr indent="0" marL="0">
+            <a:pPr marL="0" indent="0">
               <a:buNone/>
             </a:pPr>
             <a:r>
@@ -2262,6 +2525,13 @@
             <a:prstDash val="solid"/>
           </a:ln>
         </p:spPr>
+        <p:txBody>
+          <a:bodyPr/>
+          <a:lstStyle/>
+          <a:p>
+            <a:endParaRPr lang="ja-JP" altLang="en-US"/>
+          </a:p>
+        </p:txBody>
       </p:sp>
       <p:sp>
         <p:nvSpPr>
@@ -2284,7 +2554,7 @@
           <a:bodyPr wrap="square" lIns="0" tIns="0" rIns="0" bIns="0" rtlCol="0" anchor="ctr"/>
           <a:lstStyle/>
           <a:p>
-            <a:pPr indent="0" marL="0">
+            <a:pPr marL="0" indent="0">
               <a:lnSpc>
                 <a:spcPct val="140000"/>
               </a:lnSpc>
@@ -2304,7 +2574,7 @@
             <a:endParaRPr lang="en-US" sz="1700" dirty="0"/>
           </a:p>
           <a:p>
-            <a:pPr indent="0" marL="0">
+            <a:pPr marL="0" indent="0">
               <a:lnSpc>
                 <a:spcPct val="140000"/>
               </a:lnSpc>
@@ -2324,7 +2594,7 @@
             <a:endParaRPr lang="en-US" sz="1700" dirty="0"/>
           </a:p>
           <a:p>
-            <a:pPr indent="0" marL="0">
+            <a:pPr marL="0" indent="0">
               <a:lnSpc>
                 <a:spcPct val="140000"/>
               </a:lnSpc>
@@ -2396,6 +2666,13 @@
             <a:prstDash val="solid"/>
           </a:ln>
         </p:spPr>
+        <p:txBody>
+          <a:bodyPr/>
+          <a:lstStyle/>
+          <a:p>
+            <a:endParaRPr lang="ja-JP" altLang="en-US"/>
+          </a:p>
+        </p:txBody>
       </p:sp>
       <p:sp>
         <p:nvSpPr>
@@ -2418,7 +2695,7 @@
           <a:bodyPr wrap="square" lIns="0" tIns="0" rIns="0" bIns="0" rtlCol="0" anchor="ctr"/>
           <a:lstStyle/>
           <a:p>
-            <a:pPr algn="ctr" indent="0" marL="0">
+            <a:pPr marL="0" indent="0" algn="ctr">
               <a:buNone/>
             </a:pPr>
             <a:r>
@@ -2457,7 +2734,7 @@
           <a:bodyPr wrap="square" lIns="0" tIns="0" rIns="0" bIns="0" rtlCol="0" anchor="ctr"/>
           <a:lstStyle/>
           <a:p>
-            <a:pPr indent="0" marL="0">
+            <a:pPr marL="0" indent="0">
               <a:buNone/>
             </a:pPr>
             <a:r>
@@ -2496,7 +2773,7 @@
           <a:bodyPr wrap="square" lIns="0" tIns="0" rIns="0" bIns="0" rtlCol="0" anchor="ctr"/>
           <a:lstStyle/>
           <a:p>
-            <a:pPr indent="0" marL="0">
+            <a:pPr marL="0" indent="0">
               <a:buNone/>
             </a:pPr>
             <a:r>
@@ -2540,6 +2817,13 @@
             <a:prstDash val="solid"/>
           </a:ln>
         </p:spPr>
+        <p:txBody>
+          <a:bodyPr/>
+          <a:lstStyle/>
+          <a:p>
+            <a:endParaRPr lang="ja-JP" altLang="en-US"/>
+          </a:p>
+        </p:txBody>
       </p:sp>
       <p:sp>
         <p:nvSpPr>
@@ -2562,11 +2846,11 @@
           <a:bodyPr wrap="square" lIns="0" tIns="0" rIns="0" bIns="0" rtlCol="0" anchor="ctr"/>
           <a:lstStyle/>
           <a:p>
-            <a:pPr indent="0" marL="0">
+            <a:pPr marL="0" indent="0">
               <a:buNone/>
             </a:pPr>
             <a:r>
-              <a:rPr lang="en-US" sz="1500" b="1" dirty="0">
+              <a:rPr lang="en-US" b="1" dirty="0">
                 <a:solidFill>
                   <a:srgbClr val="1D9E75"/>
                 </a:solidFill>
@@ -2576,7 +2860,7 @@
               </a:rPr>
               <a:t>① 訪問日を合わせてください</a:t>
             </a:r>
-            <a:endParaRPr lang="en-US" sz="1500" dirty="0"/>
+            <a:endParaRPr lang="en-US" dirty="0"/>
           </a:p>
         </p:txBody>
       </p:sp>
@@ -2601,14 +2885,14 @@
           <a:bodyPr wrap="square" lIns="0" tIns="0" rIns="0" bIns="0" rtlCol="0" anchor="t"/>
           <a:lstStyle/>
           <a:p>
-            <a:pPr indent="0" marL="0">
+            <a:pPr marL="0" indent="0">
               <a:lnSpc>
                 <a:spcPct val="125000"/>
               </a:lnSpc>
               <a:buNone/>
             </a:pPr>
             <a:r>
-              <a:rPr lang="en-US" sz="1250" dirty="0">
+              <a:rPr lang="en-US" sz="1600" dirty="0">
                 <a:solidFill>
                   <a:srgbClr val="1C2833"/>
                 </a:solidFill>
@@ -2618,14 +2902,8 @@
               </a:rPr>
               <a:t>入浴直後は皮膚が清潔で、</a:t>
             </a:r>
-            <a:pPr indent="0" marL="0">
-              <a:lnSpc>
-                <a:spcPct val="125000"/>
-              </a:lnSpc>
-              <a:buNone/>
-            </a:pPr>
-            <a:r>
-              <a:rPr lang="en-US" sz="1250" b="1" dirty="0">
+            <a:r>
+              <a:rPr lang="en-US" sz="1600" b="1" dirty="0">
                 <a:solidFill>
                   <a:srgbClr val="1D9E75"/>
                 </a:solidFill>
@@ -2635,14 +2913,8 @@
               </a:rPr>
               <a:t>創部の観察と処置に最も適した状態</a:t>
             </a:r>
-            <a:pPr indent="0" marL="0">
-              <a:lnSpc>
-                <a:spcPct val="125000"/>
-              </a:lnSpc>
-              <a:buNone/>
-            </a:pPr>
-            <a:r>
-              <a:rPr lang="en-US" sz="1250" dirty="0">
+            <a:r>
+              <a:rPr lang="en-US" sz="1600" dirty="0">
                 <a:solidFill>
                   <a:srgbClr val="1C2833"/>
                 </a:solidFill>
@@ -2650,9 +2922,31 @@
                 <a:ea typeface="Meiryo" pitchFamily="34" charset="-122"/>
                 <a:cs typeface="Meiryo" pitchFamily="34" charset="-120"/>
               </a:rPr>
-              <a:t>です。同日・入浴後にご訪問いただけると、処置の条件が整います。</a:t>
-            </a:r>
-            <a:endParaRPr lang="en-US" sz="1250" dirty="0"/>
+              <a:t>です。同日・入浴後にご訪問いただけると、</a:t>
+            </a:r>
+            <a:r>
+              <a:rPr lang="en-US" dirty="0">
+                <a:solidFill>
+                  <a:srgbClr val="1C2833"/>
+                </a:solidFill>
+                <a:latin typeface="Meiryo" pitchFamily="34" charset="0"/>
+                <a:ea typeface="Meiryo" pitchFamily="34" charset="-122"/>
+                <a:cs typeface="Meiryo" pitchFamily="34" charset="-120"/>
+              </a:rPr>
+              <a:t>処置の条件が整います</a:t>
+            </a:r>
+            <a:r>
+              <a:rPr lang="en-US" sz="1600" dirty="0">
+                <a:solidFill>
+                  <a:srgbClr val="1C2833"/>
+                </a:solidFill>
+                <a:latin typeface="Meiryo" pitchFamily="34" charset="0"/>
+                <a:ea typeface="Meiryo" pitchFamily="34" charset="-122"/>
+                <a:cs typeface="Meiryo" pitchFamily="34" charset="-120"/>
+              </a:rPr>
+              <a:t>。</a:t>
+            </a:r>
+            <a:endParaRPr lang="en-US" sz="1600" dirty="0"/>
           </a:p>
         </p:txBody>
       </p:sp>
@@ -2682,6 +2976,13 @@
             <a:prstDash val="solid"/>
           </a:ln>
         </p:spPr>
+        <p:txBody>
+          <a:bodyPr/>
+          <a:lstStyle/>
+          <a:p>
+            <a:endParaRPr lang="ja-JP" altLang="en-US"/>
+          </a:p>
+        </p:txBody>
       </p:sp>
       <p:sp>
         <p:nvSpPr>
@@ -2704,11 +3005,11 @@
           <a:bodyPr wrap="square" lIns="0" tIns="0" rIns="0" bIns="0" rtlCol="0" anchor="ctr"/>
           <a:lstStyle/>
           <a:p>
-            <a:pPr indent="0" marL="0">
+            <a:pPr marL="0" indent="0">
               <a:buNone/>
             </a:pPr>
             <a:r>
-              <a:rPr lang="en-US" sz="1500" b="1" dirty="0">
+              <a:rPr lang="en-US" b="1" dirty="0">
                 <a:solidFill>
                   <a:srgbClr val="1A5276"/>
                 </a:solidFill>
@@ -2718,7 +3019,7 @@
               </a:rPr>
               <a:t>② 見てほしい部位を</a:t>
             </a:r>
-            <a:endParaRPr lang="en-US" sz="1500" dirty="0"/>
+            <a:endParaRPr lang="en-US" dirty="0"/>
           </a:p>
         </p:txBody>
       </p:sp>
@@ -2743,14 +3044,14 @@
           <a:bodyPr wrap="square" lIns="0" tIns="0" rIns="0" bIns="0" rtlCol="0" anchor="t"/>
           <a:lstStyle/>
           <a:p>
-            <a:pPr indent="0" marL="0">
+            <a:pPr marL="0" indent="0">
               <a:lnSpc>
                 <a:spcPct val="125000"/>
               </a:lnSpc>
               <a:buNone/>
             </a:pPr>
             <a:r>
-              <a:rPr lang="en-US" sz="1250" dirty="0">
+              <a:rPr lang="en-US" dirty="0">
                 <a:solidFill>
                   <a:srgbClr val="1C2833"/>
                 </a:solidFill>
@@ -2760,14 +3061,8 @@
               </a:rPr>
               <a:t>前回の</a:t>
             </a:r>
-            <a:pPr indent="0" marL="0">
-              <a:lnSpc>
-                <a:spcPct val="125000"/>
-              </a:lnSpc>
-              <a:buNone/>
-            </a:pPr>
-            <a:r>
-              <a:rPr lang="en-US" sz="1250" b="1" dirty="0">
+            <a:r>
+              <a:rPr lang="en-US" b="1" dirty="0">
                 <a:solidFill>
                   <a:srgbClr val="1D9E75"/>
                 </a:solidFill>
@@ -2777,14 +3072,8 @@
               </a:rPr>
               <a:t>処置内容と注意部位</a:t>
             </a:r>
-            <a:pPr indent="0" marL="0">
-              <a:lnSpc>
-                <a:spcPct val="125000"/>
-              </a:lnSpc>
-              <a:buNone/>
-            </a:pPr>
-            <a:r>
-              <a:rPr lang="en-US" sz="1250" dirty="0">
+            <a:r>
+              <a:rPr lang="en-US" dirty="0">
                 <a:solidFill>
                   <a:srgbClr val="1C2833"/>
                 </a:solidFill>
@@ -2794,7 +3083,7 @@
               </a:rPr>
               <a:t>を共有いただければ、その点を重点的に観察し、当日中に連絡ノート・電話・必要時は写真でお返しします。</a:t>
             </a:r>
-            <a:endParaRPr lang="en-US" sz="1250" dirty="0"/>
+            <a:endParaRPr lang="en-US" dirty="0"/>
           </a:p>
         </p:txBody>
       </p:sp>
@@ -2824,6 +3113,13 @@
             <a:prstDash val="solid"/>
           </a:ln>
         </p:spPr>
+        <p:txBody>
+          <a:bodyPr/>
+          <a:lstStyle/>
+          <a:p>
+            <a:endParaRPr lang="ja-JP" altLang="en-US"/>
+          </a:p>
+        </p:txBody>
       </p:sp>
       <p:sp>
         <p:nvSpPr>
@@ -2846,11 +3142,11 @@
           <a:bodyPr wrap="square" lIns="0" tIns="0" rIns="0" bIns="0" rtlCol="0" anchor="ctr"/>
           <a:lstStyle/>
           <a:p>
-            <a:pPr indent="0" marL="0">
+            <a:pPr marL="0" indent="0">
               <a:buNone/>
             </a:pPr>
             <a:r>
-              <a:rPr lang="en-US" sz="1500" b="1" dirty="0">
+              <a:rPr lang="en-US" b="1" dirty="0">
                 <a:solidFill>
                   <a:srgbClr val="1A5276"/>
                 </a:solidFill>
@@ -2860,7 +3156,7 @@
               </a:rPr>
               <a:t>③ 医療的ケアは事前に相談</a:t>
             </a:r>
-            <a:endParaRPr lang="en-US" sz="1500" dirty="0"/>
+            <a:endParaRPr lang="en-US" dirty="0"/>
           </a:p>
         </p:txBody>
       </p:sp>
@@ -2885,14 +3181,14 @@
           <a:bodyPr wrap="square" lIns="0" tIns="0" rIns="0" bIns="0" rtlCol="0" anchor="t"/>
           <a:lstStyle/>
           <a:p>
-            <a:pPr indent="0" marL="0">
+            <a:pPr marL="0" indent="0">
               <a:lnSpc>
                 <a:spcPct val="125000"/>
               </a:lnSpc>
               <a:buNone/>
             </a:pPr>
             <a:r>
-              <a:rPr lang="en-US" sz="1250" dirty="0">
+              <a:rPr lang="en-US" dirty="0">
                 <a:solidFill>
                   <a:srgbClr val="1C2833"/>
                 </a:solidFill>
@@ -2902,14 +3198,8 @@
               </a:rPr>
               <a:t>気管切開・経管栄養・在宅酸素など。</a:t>
             </a:r>
-            <a:pPr indent="0" marL="0">
-              <a:lnSpc>
-                <a:spcPct val="125000"/>
-              </a:lnSpc>
-              <a:buNone/>
-            </a:pPr>
-            <a:r>
-              <a:rPr lang="en-US" sz="1250" b="1" dirty="0">
+            <a:r>
+              <a:rPr lang="en-US" b="1" dirty="0">
                 <a:solidFill>
                   <a:srgbClr val="1D9E75"/>
                 </a:solidFill>
@@ -2919,14 +3209,8 @@
               </a:rPr>
               <a:t>主治医の指示内容と留意点</a:t>
             </a:r>
-            <a:pPr indent="0" marL="0">
-              <a:lnSpc>
-                <a:spcPct val="125000"/>
-              </a:lnSpc>
-              <a:buNone/>
-            </a:pPr>
-            <a:r>
-              <a:rPr lang="en-US" sz="1250" dirty="0">
+            <a:r>
+              <a:rPr lang="en-US" dirty="0">
                 <a:solidFill>
                   <a:srgbClr val="1C2833"/>
                 </a:solidFill>
@@ -2936,7 +3220,7 @@
               </a:rPr>
               <a:t>を共有いただければ、受け入れ可否と入浴時の注意点を一緒に検討します。</a:t>
             </a:r>
-            <a:endParaRPr lang="en-US" sz="1250" dirty="0"/>
+            <a:endParaRPr lang="en-US" dirty="0"/>
           </a:p>
         </p:txBody>
       </p:sp>
@@ -2966,6 +3250,13 @@
             <a:prstDash val="solid"/>
           </a:ln>
         </p:spPr>
+        <p:txBody>
+          <a:bodyPr/>
+          <a:lstStyle/>
+          <a:p>
+            <a:endParaRPr lang="ja-JP" altLang="en-US"/>
+          </a:p>
+        </p:txBody>
       </p:sp>
       <p:sp>
         <p:nvSpPr>
@@ -2988,11 +3279,11 @@
           <a:bodyPr wrap="square" lIns="0" tIns="0" rIns="0" bIns="0" rtlCol="0" anchor="ctr"/>
           <a:lstStyle/>
           <a:p>
-            <a:pPr algn="ctr" indent="0" marL="0">
+            <a:pPr marL="0" indent="0" algn="ctr">
               <a:buNone/>
             </a:pPr>
             <a:r>
-              <a:rPr lang="en-US" sz="1700" b="1" dirty="0">
+              <a:rPr lang="en-US" b="1" dirty="0">
                 <a:solidFill>
                   <a:srgbClr val="FFFFFF"/>
                 </a:solidFill>
@@ -3002,7 +3293,7 @@
               </a:rPr>
               <a:t>「この状態で入浴させてよいか」——迷った時点でご連絡ください。一緒に判断させてください。</a:t>
             </a:r>
-            <a:endParaRPr lang="en-US" sz="1700" dirty="0"/>
+            <a:endParaRPr lang="en-US" dirty="0"/>
           </a:p>
         </p:txBody>
       </p:sp>
@@ -3057,6 +3348,13 @@
             <a:prstDash val="solid"/>
           </a:ln>
         </p:spPr>
+        <p:txBody>
+          <a:bodyPr/>
+          <a:lstStyle/>
+          <a:p>
+            <a:endParaRPr lang="ja-JP" altLang="en-US"/>
+          </a:p>
+        </p:txBody>
       </p:sp>
       <p:sp>
         <p:nvSpPr>
@@ -3079,7 +3377,7 @@
           <a:bodyPr wrap="square" lIns="0" tIns="0" rIns="0" bIns="0" rtlCol="0" anchor="ctr"/>
           <a:lstStyle/>
           <a:p>
-            <a:pPr algn="ctr" indent="0" marL="0">
+            <a:pPr marL="0" indent="0" algn="ctr">
               <a:buNone/>
             </a:pPr>
             <a:r>
@@ -3118,7 +3416,7 @@
           <a:bodyPr wrap="square" lIns="0" tIns="0" rIns="0" bIns="0" rtlCol="0" anchor="ctr"/>
           <a:lstStyle/>
           <a:p>
-            <a:pPr indent="0" marL="0">
+            <a:pPr marL="0" indent="0">
               <a:buNone/>
             </a:pPr>
             <a:r>
@@ -3157,7 +3455,7 @@
           <a:bodyPr wrap="square" lIns="0" tIns="0" rIns="0" bIns="0" rtlCol="0" anchor="ctr"/>
           <a:lstStyle/>
           <a:p>
-            <a:pPr indent="0" marL="0">
+            <a:pPr marL="0" indent="0">
               <a:buNone/>
             </a:pPr>
             <a:r>
@@ -3201,6 +3499,13 @@
             <a:prstDash val="solid"/>
           </a:ln>
         </p:spPr>
+        <p:txBody>
+          <a:bodyPr/>
+          <a:lstStyle/>
+          <a:p>
+            <a:endParaRPr lang="ja-JP" altLang="en-US"/>
+          </a:p>
+        </p:txBody>
       </p:sp>
       <p:sp>
         <p:nvSpPr>
@@ -3223,7 +3528,7 @@
           <a:bodyPr wrap="square" lIns="0" tIns="0" rIns="0" bIns="0" rtlCol="0" anchor="ctr"/>
           <a:lstStyle/>
           <a:p>
-            <a:pPr algn="ctr" indent="0" marL="0">
+            <a:pPr marL="0" indent="0" algn="ctr">
               <a:lnSpc>
                 <a:spcPct val="130000"/>
               </a:lnSpc>
@@ -3243,7 +3548,7 @@
             <a:endParaRPr lang="en-US" sz="1600" dirty="0"/>
           </a:p>
           <a:p>
-            <a:pPr algn="ctr" indent="0" marL="0">
+            <a:pPr marL="0" indent="0" algn="ctr">
               <a:lnSpc>
                 <a:spcPct val="130000"/>
               </a:lnSpc>
@@ -3285,7 +3590,7 @@
           <a:bodyPr wrap="square" lIns="0" tIns="0" rIns="0" bIns="0" rtlCol="0" anchor="ctr"/>
           <a:lstStyle/>
           <a:p>
-            <a:pPr algn="ctr" indent="0" marL="0">
+            <a:pPr marL="0" indent="0" algn="ctr">
               <a:buNone/>
             </a:pPr>
             <a:r>
@@ -3329,6 +3634,13 @@
             <a:prstDash val="solid"/>
           </a:ln>
         </p:spPr>
+        <p:txBody>
+          <a:bodyPr/>
+          <a:lstStyle/>
+          <a:p>
+            <a:endParaRPr lang="ja-JP" altLang="en-US"/>
+          </a:p>
+        </p:txBody>
       </p:sp>
       <p:sp>
         <p:nvSpPr>
@@ -3351,7 +3663,7 @@
           <a:bodyPr wrap="square" lIns="0" tIns="0" rIns="0" bIns="0" rtlCol="0" anchor="ctr"/>
           <a:lstStyle/>
           <a:p>
-            <a:pPr indent="0" marL="0">
+            <a:pPr marL="0" indent="0">
               <a:lnSpc>
                 <a:spcPct val="115000"/>
               </a:lnSpc>
@@ -3371,7 +3683,7 @@
             <a:endParaRPr lang="en-US" sz="1350" dirty="0"/>
           </a:p>
           <a:p>
-            <a:pPr indent="0" marL="0">
+            <a:pPr marL="0" indent="0">
               <a:lnSpc>
                 <a:spcPct val="115000"/>
               </a:lnSpc>
@@ -3418,6 +3730,13 @@
             <a:prstDash val="solid"/>
           </a:ln>
         </p:spPr>
+        <p:txBody>
+          <a:bodyPr/>
+          <a:lstStyle/>
+          <a:p>
+            <a:endParaRPr lang="ja-JP" altLang="en-US"/>
+          </a:p>
+        </p:txBody>
       </p:sp>
       <p:sp>
         <p:nvSpPr>
@@ -3440,7 +3759,7 @@
           <a:bodyPr wrap="square" lIns="0" tIns="0" rIns="0" bIns="0" rtlCol="0" anchor="ctr"/>
           <a:lstStyle/>
           <a:p>
-            <a:pPr indent="0" marL="0">
+            <a:pPr marL="0" indent="0">
               <a:lnSpc>
                 <a:spcPct val="115000"/>
               </a:lnSpc>
@@ -3460,7 +3779,7 @@
             <a:endParaRPr lang="en-US" sz="1350" dirty="0"/>
           </a:p>
           <a:p>
-            <a:pPr indent="0" marL="0">
+            <a:pPr marL="0" indent="0">
               <a:lnSpc>
                 <a:spcPct val="115000"/>
               </a:lnSpc>
@@ -3507,6 +3826,13 @@
             <a:prstDash val="solid"/>
           </a:ln>
         </p:spPr>
+        <p:txBody>
+          <a:bodyPr/>
+          <a:lstStyle/>
+          <a:p>
+            <a:endParaRPr lang="ja-JP" altLang="en-US"/>
+          </a:p>
+        </p:txBody>
       </p:sp>
       <p:sp>
         <p:nvSpPr>
@@ -3529,7 +3855,7 @@
           <a:bodyPr wrap="square" lIns="0" tIns="0" rIns="0" bIns="0" rtlCol="0" anchor="ctr"/>
           <a:lstStyle/>
           <a:p>
-            <a:pPr indent="0" marL="0">
+            <a:pPr marL="0" indent="0">
               <a:lnSpc>
                 <a:spcPct val="115000"/>
               </a:lnSpc>
@@ -3549,7 +3875,7 @@
             <a:endParaRPr lang="en-US" sz="1350" dirty="0"/>
           </a:p>
           <a:p>
-            <a:pPr indent="0" marL="0">
+            <a:pPr marL="0" indent="0">
               <a:lnSpc>
                 <a:spcPct val="115000"/>
               </a:lnSpc>
@@ -3596,6 +3922,13 @@
             <a:prstDash val="solid"/>
           </a:ln>
         </p:spPr>
+        <p:txBody>
+          <a:bodyPr/>
+          <a:lstStyle/>
+          <a:p>
+            <a:endParaRPr lang="ja-JP" altLang="en-US"/>
+          </a:p>
+        </p:txBody>
       </p:sp>
       <p:sp>
         <p:nvSpPr>
@@ -3618,7 +3951,7 @@
           <a:bodyPr wrap="square" lIns="0" tIns="0" rIns="0" bIns="0" rtlCol="0" anchor="ctr"/>
           <a:lstStyle/>
           <a:p>
-            <a:pPr indent="0" marL="0">
+            <a:pPr marL="0" indent="0">
               <a:lnSpc>
                 <a:spcPct val="115000"/>
               </a:lnSpc>
@@ -3638,7 +3971,7 @@
             <a:endParaRPr lang="en-US" sz="1350" dirty="0"/>
           </a:p>
           <a:p>
-            <a:pPr indent="0" marL="0">
+            <a:pPr marL="0" indent="0">
               <a:lnSpc>
                 <a:spcPct val="115000"/>
               </a:lnSpc>
@@ -3685,6 +4018,13 @@
             <a:prstDash val="solid"/>
           </a:ln>
         </p:spPr>
+        <p:txBody>
+          <a:bodyPr/>
+          <a:lstStyle/>
+          <a:p>
+            <a:endParaRPr lang="ja-JP" altLang="en-US"/>
+          </a:p>
+        </p:txBody>
       </p:sp>
       <p:sp>
         <p:nvSpPr>
@@ -3707,11 +4047,11 @@
           <a:bodyPr wrap="square" lIns="0" tIns="0" rIns="0" bIns="0" rtlCol="0" anchor="ctr"/>
           <a:lstStyle/>
           <a:p>
-            <a:pPr indent="0" marL="0">
+            <a:pPr marL="0" indent="0">
               <a:buNone/>
             </a:pPr>
             <a:r>
-              <a:rPr lang="en-US" sz="1500" b="1" dirty="0">
+              <a:rPr lang="en-US" sz="1600" b="1" dirty="0">
                 <a:solidFill>
                   <a:srgbClr val="1A5276"/>
                 </a:solidFill>
@@ -3721,7 +4061,7 @@
               </a:rPr>
               <a:t>「競合」ではありません</a:t>
             </a:r>
-            <a:endParaRPr lang="en-US" sz="1500" dirty="0"/>
+            <a:endParaRPr lang="en-US" sz="1600" dirty="0"/>
           </a:p>
         </p:txBody>
       </p:sp>
@@ -3746,14 +4086,14 @@
           <a:bodyPr wrap="square" lIns="0" tIns="0" rIns="0" bIns="0" rtlCol="0" anchor="t"/>
           <a:lstStyle/>
           <a:p>
-            <a:pPr indent="0" marL="0">
+            <a:pPr marL="0" indent="0">
               <a:lnSpc>
                 <a:spcPct val="125000"/>
               </a:lnSpc>
               <a:buNone/>
             </a:pPr>
             <a:r>
-              <a:rPr lang="en-US" sz="1250" dirty="0">
+              <a:rPr lang="en-US" sz="1400" dirty="0">
                 <a:solidFill>
                   <a:srgbClr val="1C2833"/>
                 </a:solidFill>
@@ -3763,14 +4103,8 @@
               </a:rPr>
               <a:t>デイサービスに通えている間はデイでの入浴を。</a:t>
             </a:r>
-            <a:pPr indent="0" marL="0">
-              <a:lnSpc>
-                <a:spcPct val="125000"/>
-              </a:lnSpc>
-              <a:buNone/>
-            </a:pPr>
-            <a:r>
-              <a:rPr lang="en-US" sz="1250" b="1" dirty="0">
+            <a:r>
+              <a:rPr lang="en-US" sz="1400" b="1" dirty="0">
                 <a:solidFill>
                   <a:srgbClr val="1D9E75"/>
                 </a:solidFill>
@@ -3780,14 +4114,8 @@
               </a:rPr>
               <a:t>体調やADLの低下で通所が難しくなった時期</a:t>
             </a:r>
-            <a:pPr indent="0" marL="0">
-              <a:lnSpc>
-                <a:spcPct val="125000"/>
-              </a:lnSpc>
-              <a:buNone/>
-            </a:pPr>
-            <a:r>
-              <a:rPr lang="en-US" sz="1250" dirty="0">
+            <a:r>
+              <a:rPr lang="en-US" sz="1400" dirty="0">
                 <a:solidFill>
                   <a:srgbClr val="1C2833"/>
                 </a:solidFill>
@@ -3797,7 +4125,7 @@
               </a:rPr>
               <a:t>に訪問入浴が引き継ぐ、という補完関係です。</a:t>
             </a:r>
-            <a:endParaRPr lang="en-US" sz="1250" dirty="0"/>
+            <a:endParaRPr lang="en-US" sz="1400" dirty="0"/>
           </a:p>
         </p:txBody>
       </p:sp>
@@ -3827,6 +4155,13 @@
             <a:prstDash val="solid"/>
           </a:ln>
         </p:spPr>
+        <p:txBody>
+          <a:bodyPr/>
+          <a:lstStyle/>
+          <a:p>
+            <a:endParaRPr lang="ja-JP" altLang="en-US"/>
+          </a:p>
+        </p:txBody>
       </p:sp>
       <p:sp>
         <p:nvSpPr>
@@ -3849,11 +4184,11 @@
           <a:bodyPr wrap="square" lIns="0" tIns="0" rIns="0" bIns="0" rtlCol="0" anchor="ctr"/>
           <a:lstStyle/>
           <a:p>
-            <a:pPr indent="0" marL="0">
+            <a:pPr marL="0" indent="0">
               <a:buNone/>
             </a:pPr>
             <a:r>
-              <a:rPr lang="en-US" sz="1500" b="1" dirty="0">
+              <a:rPr lang="en-US" sz="1600" b="1" dirty="0">
                 <a:solidFill>
                   <a:srgbClr val="1D9E75"/>
                 </a:solidFill>
@@ -3863,7 +4198,7 @@
               </a:rPr>
               <a:t>併用が最も現実的</a:t>
             </a:r>
-            <a:endParaRPr lang="en-US" sz="1500" dirty="0"/>
+            <a:endParaRPr lang="en-US" sz="1600" dirty="0"/>
           </a:p>
         </p:txBody>
       </p:sp>
@@ -3888,14 +4223,14 @@
           <a:bodyPr wrap="square" lIns="0" tIns="0" rIns="0" bIns="0" rtlCol="0" anchor="t"/>
           <a:lstStyle/>
           <a:p>
-            <a:pPr indent="0" marL="0">
+            <a:pPr marL="0" indent="0">
               <a:lnSpc>
                 <a:spcPct val="125000"/>
               </a:lnSpc>
               <a:buNone/>
             </a:pPr>
             <a:r>
-              <a:rPr lang="en-US" sz="1250" dirty="0">
+              <a:rPr lang="en-US" sz="1400" dirty="0">
                 <a:solidFill>
                   <a:srgbClr val="1C2833"/>
                 </a:solidFill>
@@ -3905,14 +4240,8 @@
               </a:rPr>
               <a:t>「デイ入浴＋訪問入浴」「訪問入浴の観察＋訪問看護の処置」。</a:t>
             </a:r>
-            <a:pPr indent="0" marL="0">
-              <a:lnSpc>
-                <a:spcPct val="125000"/>
-              </a:lnSpc>
-              <a:buNone/>
-            </a:pPr>
-            <a:r>
-              <a:rPr lang="en-US" sz="1250" b="1" dirty="0">
+            <a:r>
+              <a:rPr lang="en-US" sz="1400" b="1" dirty="0">
                 <a:solidFill>
                   <a:srgbClr val="1D9E75"/>
                 </a:solidFill>
@@ -3922,7 +4251,7 @@
               </a:rPr>
               <a:t>役割を分け合うことで在宅の限界点が延びます。</a:t>
             </a:r>
-            <a:endParaRPr lang="en-US" sz="1250" dirty="0"/>
+            <a:endParaRPr lang="en-US" sz="1400" dirty="0"/>
           </a:p>
         </p:txBody>
       </p:sp>
@@ -3977,6 +4306,13 @@
             <a:prstDash val="solid"/>
           </a:ln>
         </p:spPr>
+        <p:txBody>
+          <a:bodyPr/>
+          <a:lstStyle/>
+          <a:p>
+            <a:endParaRPr lang="ja-JP" altLang="en-US"/>
+          </a:p>
+        </p:txBody>
       </p:sp>
       <p:sp>
         <p:nvSpPr>
@@ -3999,7 +4335,7 @@
           <a:bodyPr wrap="square" lIns="0" tIns="0" rIns="0" bIns="0" rtlCol="0" anchor="ctr"/>
           <a:lstStyle/>
           <a:p>
-            <a:pPr algn="ctr" indent="0" marL="0">
+            <a:pPr marL="0" indent="0" algn="ctr">
               <a:buNone/>
             </a:pPr>
             <a:r>
@@ -4038,7 +4374,7 @@
           <a:bodyPr wrap="square" lIns="0" tIns="0" rIns="0" bIns="0" rtlCol="0" anchor="ctr"/>
           <a:lstStyle/>
           <a:p>
-            <a:pPr indent="0" marL="0">
+            <a:pPr marL="0" indent="0">
               <a:buNone/>
             </a:pPr>
             <a:r>
@@ -4077,7 +4413,7 @@
           <a:bodyPr wrap="square" lIns="0" tIns="0" rIns="0" bIns="0" rtlCol="0" anchor="ctr"/>
           <a:lstStyle/>
           <a:p>
-            <a:pPr indent="0" marL="0">
+            <a:pPr marL="0" indent="0">
               <a:buNone/>
             </a:pPr>
             <a:r>
@@ -4104,30 +4440,42 @@
           <p:nvPr>
             <p:extLst>
               <p:ext uri="{D42A27DB-BD31-4B8C-83A1-F6EECF244321}">
-                <p14:modId xmlns:p14="http://schemas.microsoft.com/office/powerpoint/2010/main" val="1579011935"/>
+                <p14:modId xmlns:p14="http://schemas.microsoft.com/office/powerpoint/2010/main" val="848727249"/>
               </p:ext>
             </p:extLst>
           </p:nvPr>
         </p:nvGraphicFramePr>
         <p:xfrm>
           <a:off x="566928" y="1481328"/>
-          <a:ext cx="6309360" cy="914400"/>
+          <a:ext cx="6309360" cy="3060000"/>
         </p:xfrm>
         <a:graphic>
           <a:graphicData uri="http://schemas.openxmlformats.org/drawingml/2006/table">
             <a:tbl>
               <a:tblPr/>
               <a:tblGrid>
-                <a:gridCol w="4343400"/>
-                <a:gridCol w="1965960"/>
+                <a:gridCol w="4343400">
+                  <a:extLst>
+                    <a:ext uri="{9D8B030D-6E8A-4147-A177-3AD203B41FA5}">
+                      <a16:colId xmlns:a16="http://schemas.microsoft.com/office/drawing/2014/main" val="20000"/>
+                    </a:ext>
+                  </a:extLst>
+                </a:gridCol>
+                <a:gridCol w="1965960">
+                  <a:extLst>
+                    <a:ext uri="{9D8B030D-6E8A-4147-A177-3AD203B41FA5}">
+                      <a16:colId xmlns:a16="http://schemas.microsoft.com/office/drawing/2014/main" val="20001"/>
+                    </a:ext>
+                  </a:extLst>
+                </a:gridCol>
               </a:tblGrid>
-              <a:tr h="384048">
+              <a:tr h="340000">
                 <a:tc>
                   <a:txBody>
                     <a:bodyPr/>
                     <a:lstStyle/>
                     <a:p>
-                      <a:pPr indent="0" marL="0">
+                      <a:pPr marL="0" indent="0">
                         <a:buNone/>
                       </a:pPr>
                       <a:r>
@@ -4148,7 +4496,7 @@
                       </a:endParaRPr>
                     </a:p>
                   </a:txBody>
-                  <a:tcPr marL="91440" marR="91440" marT="45720" marB="45720" anchor="ctr">
+                  <a:tcPr anchor="ctr">
                     <a:lnL w="12700" cap="flat" cmpd="sng" algn="ctr">
                       <a:solidFill>
                         <a:srgbClr val="E5E9EC"/>
@@ -4195,7 +4543,7 @@
                     <a:bodyPr/>
                     <a:lstStyle/>
                     <a:p>
-                      <a:pPr algn="r" indent="0" marL="0">
+                      <a:pPr marL="0" indent="0" algn="r">
                         <a:buNone/>
                       </a:pPr>
                       <a:r>
@@ -4216,7 +4564,7 @@
                       </a:endParaRPr>
                     </a:p>
                   </a:txBody>
-                  <a:tcPr marL="91440" marR="91440" marT="45720" marB="45720" anchor="ctr">
+                  <a:tcPr anchor="ctr">
                     <a:lnL w="12700" cap="flat" cmpd="sng" algn="ctr">
                       <a:solidFill>
                         <a:srgbClr val="E5E9EC"/>
@@ -4258,14 +4606,19 @@
                     </a:solidFill>
                   </a:tcPr>
                 </a:tc>
+                <a:extLst>
+                  <a:ext uri="{0D108BD9-81ED-4DB2-BD59-A6C34878D82A}">
+                    <a16:rowId xmlns:a16="http://schemas.microsoft.com/office/drawing/2014/main" val="10000"/>
+                  </a:ext>
+                </a:extLst>
               </a:tr>
-              <a:tr h="384048">
+              <a:tr h="340000">
                 <a:tc>
                   <a:txBody>
                     <a:bodyPr/>
                     <a:lstStyle/>
                     <a:p>
-                      <a:pPr indent="0" marL="0">
+                      <a:pPr marL="0" indent="0">
                         <a:buNone/>
                       </a:pPr>
                       <a:r>
@@ -4277,11 +4630,8 @@
                           <a:ea typeface="Meiryo" pitchFamily="34" charset="-122"/>
                           <a:cs typeface="Meiryo" pitchFamily="34" charset="-120"/>
                         </a:rPr>
-                        <a:t>訪問入浴介護費</a:t>
+                        <a:t>訪問入浴介護費（1回）</a:t>
                       </a:r>
-                      <a:pPr indent="0" marL="0">
-                        <a:buNone/>
-                      </a:pPr>
                       <a:endParaRPr lang="en-US" sz="1200" dirty="0">
                         <a:latin typeface="Meiryo" charset="0"/>
                         <a:ea typeface="Meiryo" charset="0"/>
@@ -4289,7 +4639,7 @@
                       </a:endParaRPr>
                     </a:p>
                     <a:p>
-                      <a:pPr indent="0" marL="0">
+                      <a:pPr marL="0" indent="0">
                         <a:buNone/>
                       </a:pPr>
                       <a:r>
@@ -4310,7 +4660,7 @@
                       </a:endParaRPr>
                     </a:p>
                   </a:txBody>
-                  <a:tcPr marL="91440" marR="91440" marT="45720" marB="45720" anchor="ctr">
+                  <a:tcPr anchor="ctr">
                     <a:lnL w="12700" cap="flat" cmpd="sng" algn="ctr">
                       <a:solidFill>
                         <a:srgbClr val="E5E9EC"/>
@@ -4357,7 +4707,7 @@
                     <a:bodyPr/>
                     <a:lstStyle/>
                     <a:p>
-                      <a:pPr algn="r" indent="0" marL="0">
+                      <a:pPr marL="0" indent="0" algn="r">
                         <a:buNone/>
                       </a:pPr>
                       <a:r>
@@ -4371,9 +4721,6 @@
                         </a:rPr>
                         <a:t>1,266</a:t>
                       </a:r>
-                      <a:pPr algn="r" indent="0" marL="0">
-                        <a:buNone/>
-                      </a:pPr>
                       <a:r>
                         <a:rPr lang="en-US" sz="1000" dirty="0">
                           <a:solidFill>
@@ -4392,7 +4739,7 @@
                       </a:endParaRPr>
                     </a:p>
                   </a:txBody>
-                  <a:tcPr marL="91440" marR="91440" marT="45720" marB="45720" anchor="ctr">
+                  <a:tcPr anchor="ctr">
                     <a:lnL w="12700" cap="flat" cmpd="sng" algn="ctr">
                       <a:solidFill>
                         <a:srgbClr val="E5E9EC"/>
@@ -4434,14 +4781,19 @@
                     </a:solidFill>
                   </a:tcPr>
                 </a:tc>
+                <a:extLst>
+                  <a:ext uri="{0D108BD9-81ED-4DB2-BD59-A6C34878D82A}">
+                    <a16:rowId xmlns:a16="http://schemas.microsoft.com/office/drawing/2014/main" val="10001"/>
+                  </a:ext>
+                </a:extLst>
               </a:tr>
-              <a:tr h="384048">
+              <a:tr h="340000">
                 <a:tc>
                   <a:txBody>
                     <a:bodyPr/>
                     <a:lstStyle/>
                     <a:p>
-                      <a:pPr indent="0" marL="0">
+                      <a:pPr marL="0" indent="0">
                         <a:buNone/>
                       </a:pPr>
                       <a:r>
@@ -4453,7 +4805,7 @@
                           <a:ea typeface="Meiryo" pitchFamily="34" charset="-122"/>
                           <a:cs typeface="Meiryo" pitchFamily="34" charset="-120"/>
                         </a:rPr>
-                        <a:t>清拭（身体介護2・30〜60分）</a:t>
+                        <a:t>清拭・部分浴（1回）</a:t>
                       </a:r>
                       <a:endParaRPr lang="en-US" sz="1300" dirty="0">
                         <a:latin typeface="Meiryo" charset="0"/>
@@ -4462,7 +4814,7 @@
                       </a:endParaRPr>
                     </a:p>
                   </a:txBody>
-                  <a:tcPr marL="91440" marR="91440" marT="45720" marB="45720" anchor="ctr">
+                  <a:tcPr anchor="ctr">
                     <a:lnL w="12700" cap="flat" cmpd="sng" algn="ctr">
                       <a:solidFill>
                         <a:srgbClr val="E5E9EC"/>
@@ -4506,7 +4858,7 @@
                     <a:bodyPr/>
                     <a:lstStyle/>
                     <a:p>
-                      <a:pPr algn="r" indent="0" marL="0">
+                      <a:pPr marL="0" indent="0" algn="r">
                         <a:buNone/>
                       </a:pPr>
                       <a:r>
@@ -4518,11 +4870,8 @@
                           <a:ea typeface="Meiryo" pitchFamily="34" charset="-122"/>
                           <a:cs typeface="Meiryo" pitchFamily="34" charset="-120"/>
                         </a:rPr>
-                        <a:t>387</a:t>
+                        <a:t>1,139</a:t>
                       </a:r>
-                      <a:pPr algn="r" indent="0" marL="0">
-                        <a:buNone/>
-                      </a:pPr>
                       <a:r>
                         <a:rPr lang="en-US" sz="1000" dirty="0">
                           <a:solidFill>
@@ -4541,7 +4890,7 @@
                       </a:endParaRPr>
                     </a:p>
                   </a:txBody>
-                  <a:tcPr marL="91440" marR="91440" marT="45720" marB="45720" anchor="ctr">
+                  <a:tcPr anchor="ctr">
                     <a:lnL w="12700" cap="flat" cmpd="sng" algn="ctr">
                       <a:solidFill>
                         <a:srgbClr val="E5E9EC"/>
@@ -4580,160 +4929,19 @@
                     </a:lnB>
                   </a:tcPr>
                 </a:tc>
+                <a:extLst>
+                  <a:ext uri="{0D108BD9-81ED-4DB2-BD59-A6C34878D82A}">
+                    <a16:rowId xmlns:a16="http://schemas.microsoft.com/office/drawing/2014/main" val="10002"/>
+                  </a:ext>
+                </a:extLst>
               </a:tr>
-              <a:tr h="384048">
+              <a:tr h="340000">
                 <a:tc>
                   <a:txBody>
                     <a:bodyPr/>
                     <a:lstStyle/>
                     <a:p>
-                      <a:pPr indent="0" marL="0">
-                        <a:buNone/>
-                      </a:pPr>
-                      <a:r>
-                        <a:rPr lang="en-US" sz="1300" dirty="0">
-                          <a:solidFill>
-                            <a:srgbClr val="1C2833"/>
-                          </a:solidFill>
-                          <a:latin typeface="Meiryo" pitchFamily="34" charset="0"/>
-                          <a:ea typeface="Meiryo" pitchFamily="34" charset="-122"/>
-                          <a:cs typeface="Meiryo" pitchFamily="34" charset="-120"/>
-                        </a:rPr>
-                        <a:t>清拭（身体介護3・1時間以上）</a:t>
-                      </a:r>
-                      <a:endParaRPr lang="en-US" sz="1300" dirty="0">
-                        <a:latin typeface="Meiryo" charset="0"/>
-                        <a:ea typeface="Meiryo" charset="0"/>
-                        <a:cs typeface="Meiryo" charset="0"/>
-                      </a:endParaRPr>
-                    </a:p>
-                  </a:txBody>
-                  <a:tcPr marL="91440" marR="91440" marT="45720" marB="45720" anchor="ctr">
-                    <a:lnL w="12700" cap="flat" cmpd="sng" algn="ctr">
-                      <a:solidFill>
-                        <a:srgbClr val="E5E9EC"/>
-                      </a:solidFill>
-                      <a:prstDash val="solid"/>
-                      <a:round/>
-                      <a:headEnd type="none" w="med" len="med"/>
-                      <a:tailEnd type="none" w="med" len="med"/>
-                    </a:lnL>
-                    <a:lnR w="12700" cap="flat" cmpd="sng" algn="ctr">
-                      <a:solidFill>
-                        <a:srgbClr val="E5E9EC"/>
-                      </a:solidFill>
-                      <a:prstDash val="solid"/>
-                      <a:round/>
-                      <a:headEnd type="none" w="med" len="med"/>
-                      <a:tailEnd type="none" w="med" len="med"/>
-                    </a:lnR>
-                    <a:lnT w="12700" cap="flat" cmpd="sng" algn="ctr">
-                      <a:solidFill>
-                        <a:srgbClr val="E5E9EC"/>
-                      </a:solidFill>
-                      <a:prstDash val="solid"/>
-                      <a:round/>
-                      <a:headEnd type="none" w="med" len="med"/>
-                      <a:tailEnd type="none" w="med" len="med"/>
-                    </a:lnT>
-                    <a:lnB w="12700" cap="flat" cmpd="sng" algn="ctr">
-                      <a:solidFill>
-                        <a:srgbClr val="E5E9EC"/>
-                      </a:solidFill>
-                      <a:prstDash val="solid"/>
-                      <a:round/>
-                      <a:headEnd type="none" w="med" len="med"/>
-                      <a:tailEnd type="none" w="med" len="med"/>
-                    </a:lnB>
-                  </a:tcPr>
-                </a:tc>
-                <a:tc>
-                  <a:txBody>
-                    <a:bodyPr/>
-                    <a:lstStyle/>
-                    <a:p>
-                      <a:pPr algn="r" indent="0" marL="0">
-                        <a:buNone/>
-                      </a:pPr>
-                      <a:r>
-                        <a:rPr lang="en-US" sz="1600" b="1" dirty="0">
-                          <a:solidFill>
-                            <a:srgbClr val="1A5276"/>
-                          </a:solidFill>
-                          <a:latin typeface="Meiryo" pitchFamily="34" charset="0"/>
-                          <a:ea typeface="Meiryo" pitchFamily="34" charset="-122"/>
-                          <a:cs typeface="Meiryo" pitchFamily="34" charset="-120"/>
-                        </a:rPr>
-                        <a:t>567</a:t>
-                      </a:r>
-                      <a:pPr algn="r" indent="0" marL="0">
-                        <a:buNone/>
-                      </a:pPr>
-                      <a:r>
-                        <a:rPr lang="en-US" sz="1000" dirty="0">
-                          <a:solidFill>
-                            <a:srgbClr val="566573"/>
-                          </a:solidFill>
-                          <a:latin typeface="Meiryo" pitchFamily="34" charset="0"/>
-                          <a:ea typeface="Meiryo" pitchFamily="34" charset="-122"/>
-                          <a:cs typeface="Meiryo" pitchFamily="34" charset="-120"/>
-                        </a:rPr>
-                        <a:t> 単位/回</a:t>
-                      </a:r>
-                      <a:endParaRPr lang="en-US" sz="1200" dirty="0">
-                        <a:latin typeface="Meiryo" charset="0"/>
-                        <a:ea typeface="Meiryo" charset="0"/>
-                        <a:cs typeface="Meiryo" charset="0"/>
-                      </a:endParaRPr>
-                    </a:p>
-                  </a:txBody>
-                  <a:tcPr marL="91440" marR="91440" marT="45720" marB="45720" anchor="ctr">
-                    <a:lnL w="12700" cap="flat" cmpd="sng" algn="ctr">
-                      <a:solidFill>
-                        <a:srgbClr val="E5E9EC"/>
-                      </a:solidFill>
-                      <a:prstDash val="solid"/>
-                      <a:round/>
-                      <a:headEnd type="none" w="med" len="med"/>
-                      <a:tailEnd type="none" w="med" len="med"/>
-                    </a:lnL>
-                    <a:lnR w="12700" cap="flat" cmpd="sng" algn="ctr">
-                      <a:solidFill>
-                        <a:srgbClr val="E5E9EC"/>
-                      </a:solidFill>
-                      <a:prstDash val="solid"/>
-                      <a:round/>
-                      <a:headEnd type="none" w="med" len="med"/>
-                      <a:tailEnd type="none" w="med" len="med"/>
-                    </a:lnR>
-                    <a:lnT w="12700" cap="flat" cmpd="sng" algn="ctr">
-                      <a:solidFill>
-                        <a:srgbClr val="E5E9EC"/>
-                      </a:solidFill>
-                      <a:prstDash val="solid"/>
-                      <a:round/>
-                      <a:headEnd type="none" w="med" len="med"/>
-                      <a:tailEnd type="none" w="med" len="med"/>
-                    </a:lnT>
-                    <a:lnB w="12700" cap="flat" cmpd="sng" algn="ctr">
-                      <a:solidFill>
-                        <a:srgbClr val="E5E9EC"/>
-                      </a:solidFill>
-                      <a:prstDash val="solid"/>
-                      <a:round/>
-                      <a:headEnd type="none" w="med" len="med"/>
-                      <a:tailEnd type="none" w="med" len="med"/>
-                    </a:lnB>
-                  </a:tcPr>
-                </a:tc>
-              </a:tr>
-              <a:tr h="384048">
-                <a:tc>
-                  <a:txBody>
-                    <a:bodyPr/>
-                    <a:lstStyle/>
-                    <a:p>
-                      <a:pPr indent="0" marL="0">
+                      <a:pPr marL="0" indent="0">
                         <a:buNone/>
                       </a:pPr>
                       <a:r>
@@ -4754,7 +4962,7 @@
                       </a:endParaRPr>
                     </a:p>
                   </a:txBody>
-                  <a:tcPr marL="91440" marR="91440" marT="45720" marB="45720" anchor="ctr">
+                  <a:tcPr anchor="ctr">
                     <a:lnL w="12700" cap="flat" cmpd="sng" algn="ctr">
                       <a:solidFill>
                         <a:srgbClr val="E5E9EC"/>
@@ -4801,7 +5009,7 @@
                     <a:bodyPr/>
                     <a:lstStyle/>
                     <a:p>
-                      <a:pPr algn="r" indent="0" marL="0">
+                      <a:pPr marL="0" indent="0" algn="r">
                         <a:buNone/>
                       </a:pPr>
                       <a:r>
@@ -4822,7 +5030,7 @@
                       </a:endParaRPr>
                     </a:p>
                   </a:txBody>
-                  <a:tcPr marL="91440" marR="91440" marT="45720" marB="45720" anchor="ctr">
+                  <a:tcPr anchor="ctr">
                     <a:lnL w="12700" cap="flat" cmpd="sng" algn="ctr">
                       <a:solidFill>
                         <a:srgbClr val="E5E9EC"/>
@@ -4864,14 +5072,167 @@
                     </a:solidFill>
                   </a:tcPr>
                 </a:tc>
+                <a:extLst>
+                  <a:ext uri="{0D108BD9-81ED-4DB2-BD59-A6C34878D82A}">
+                    <a16:rowId xmlns:a16="http://schemas.microsoft.com/office/drawing/2014/main" val="10004"/>
+                  </a:ext>
+                </a:extLst>
               </a:tr>
-              <a:tr h="384048">
+              <a:tr h="340000">
                 <a:tc>
                   <a:txBody>
                     <a:bodyPr/>
                     <a:lstStyle/>
                     <a:p>
-                      <a:pPr indent="0" marL="0">
+                      <a:pPr marL="0" indent="0">
+                        <a:buNone/>
+                      </a:pPr>
+                      <a:r>
+                        <a:rPr lang="en-US" sz="1300" dirty="0">
+                          <a:solidFill>
+                            <a:srgbClr val="1C2833"/>
+                          </a:solidFill>
+                          <a:latin typeface="Meiryo" pitchFamily="34" charset="0"/>
+                          <a:ea typeface="Meiryo" pitchFamily="34" charset="-122"/>
+                          <a:cs typeface="Meiryo" pitchFamily="34" charset="-120"/>
+                        </a:rPr>
+                        <a:t>初回加算（月1回）</a:t>
+                      </a:r>
+                      <a:endParaRPr lang="en-US" sz="1300" dirty="0">
+                        <a:latin typeface="Meiryo" charset="0"/>
+                        <a:ea typeface="Meiryo" charset="0"/>
+                        <a:cs typeface="Meiryo" charset="0"/>
+                      </a:endParaRPr>
+                    </a:p>
+                  </a:txBody>
+                  <a:tcPr anchor="ctr">
+                    <a:lnL w="12700" cap="flat" cmpd="sng" algn="ctr">
+                      <a:solidFill>
+                        <a:srgbClr val="E5E9EC"/>
+                      </a:solidFill>
+                      <a:prstDash val="solid"/>
+                      <a:round/>
+                      <a:headEnd type="none" w="med" len="med"/>
+                      <a:tailEnd type="none" w="med" len="med"/>
+                    </a:lnL>
+                    <a:lnR w="12700" cap="flat" cmpd="sng" algn="ctr">
+                      <a:solidFill>
+                        <a:srgbClr val="E5E9EC"/>
+                      </a:solidFill>
+                      <a:prstDash val="solid"/>
+                      <a:round/>
+                      <a:headEnd type="none" w="med" len="med"/>
+                      <a:tailEnd type="none" w="med" len="med"/>
+                    </a:lnR>
+                    <a:lnT w="12700" cap="flat" cmpd="sng" algn="ctr">
+                      <a:solidFill>
+                        <a:srgbClr val="E5E9EC"/>
+                      </a:solidFill>
+                      <a:prstDash val="solid"/>
+                      <a:round/>
+                      <a:headEnd type="none" w="med" len="med"/>
+                      <a:tailEnd type="none" w="med" len="med"/>
+                    </a:lnT>
+                    <a:lnB w="12700" cap="flat" cmpd="sng" algn="ctr">
+                      <a:solidFill>
+                        <a:srgbClr val="E5E9EC"/>
+                      </a:solidFill>
+                      <a:prstDash val="solid"/>
+                      <a:round/>
+                      <a:headEnd type="none" w="med" len="med"/>
+                      <a:tailEnd type="none" w="med" len="med"/>
+                    </a:lnB>
+                  </a:tcPr>
+                </a:tc>
+                <a:tc>
+                  <a:txBody>
+                    <a:bodyPr/>
+                    <a:lstStyle/>
+                    <a:p>
+                      <a:pPr marL="0" indent="0" algn="r">
+                        <a:buNone/>
+                      </a:pPr>
+                      <a:r>
+                        <a:rPr lang="en-US" sz="1600" b="1" dirty="0">
+                          <a:solidFill>
+                            <a:srgbClr val="1A5276"/>
+                          </a:solidFill>
+                          <a:latin typeface="Meiryo" pitchFamily="34" charset="0"/>
+                          <a:ea typeface="Meiryo" pitchFamily="34" charset="-122"/>
+                          <a:cs typeface="Meiryo" pitchFamily="34" charset="-120"/>
+                        </a:rPr>
+                        <a:t>200</a:t>
+                      </a:r>
+                      <a:r>
+                        <a:rPr lang="en-US" sz="1000" dirty="0">
+                          <a:solidFill>
+                            <a:srgbClr val="566573"/>
+                          </a:solidFill>
+                          <a:latin typeface="Meiryo" pitchFamily="34" charset="0"/>
+                          <a:ea typeface="Meiryo" pitchFamily="34" charset="-122"/>
+                          <a:cs typeface="Meiryo" pitchFamily="34" charset="-120"/>
+                        </a:rPr>
+                        <a:t> 単位</a:t>
+                      </a:r>
+                      <a:endParaRPr lang="en-US" sz="1200" dirty="0">
+                        <a:latin typeface="Meiryo" charset="0"/>
+                        <a:ea typeface="Meiryo" charset="0"/>
+                        <a:cs typeface="Meiryo" charset="0"/>
+                      </a:endParaRPr>
+                    </a:p>
+                  </a:txBody>
+                  <a:tcPr anchor="ctr">
+                    <a:lnL w="12700" cap="flat" cmpd="sng" algn="ctr">
+                      <a:solidFill>
+                        <a:srgbClr val="E5E9EC"/>
+                      </a:solidFill>
+                      <a:prstDash val="solid"/>
+                      <a:round/>
+                      <a:headEnd type="none" w="med" len="med"/>
+                      <a:tailEnd type="none" w="med" len="med"/>
+                    </a:lnL>
+                    <a:lnR w="12700" cap="flat" cmpd="sng" algn="ctr">
+                      <a:solidFill>
+                        <a:srgbClr val="E5E9EC"/>
+                      </a:solidFill>
+                      <a:prstDash val="solid"/>
+                      <a:round/>
+                      <a:headEnd type="none" w="med" len="med"/>
+                      <a:tailEnd type="none" w="med" len="med"/>
+                    </a:lnR>
+                    <a:lnT w="12700" cap="flat" cmpd="sng" algn="ctr">
+                      <a:solidFill>
+                        <a:srgbClr val="E5E9EC"/>
+                      </a:solidFill>
+                      <a:prstDash val="solid"/>
+                      <a:round/>
+                      <a:headEnd type="none" w="med" len="med"/>
+                      <a:tailEnd type="none" w="med" len="med"/>
+                    </a:lnT>
+                    <a:lnB w="12700" cap="flat" cmpd="sng" algn="ctr">
+                      <a:solidFill>
+                        <a:srgbClr val="E5E9EC"/>
+                      </a:solidFill>
+                      <a:prstDash val="solid"/>
+                      <a:round/>
+                      <a:headEnd type="none" w="med" len="med"/>
+                      <a:tailEnd type="none" w="med" len="med"/>
+                    </a:lnB>
+                  </a:tcPr>
+                </a:tc>
+                <a:extLst>
+                  <a:ext uri="{0D108BD9-81ED-4DB2-BD59-A6C34878D82A}">
+                    <a16:rowId xmlns:a16="http://schemas.microsoft.com/office/drawing/2014/main" val="10005"/>
+                  </a:ext>
+                </a:extLst>
+              </a:tr>
+              <a:tr h="340000">
+                <a:tc>
+                  <a:txBody>
+                    <a:bodyPr/>
+                    <a:lstStyle/>
+                    <a:p>
+                      <a:pPr marL="0" indent="0">
                         <a:buNone/>
                       </a:pPr>
                       <a:r>
@@ -4892,7 +5253,7 @@
                       </a:endParaRPr>
                     </a:p>
                   </a:txBody>
-                  <a:tcPr marL="91440" marR="91440" marT="45720" marB="45720" anchor="ctr">
+                  <a:tcPr anchor="ctr">
                     <a:lnL w="12700" cap="flat" cmpd="sng" algn="ctr">
                       <a:solidFill>
                         <a:srgbClr val="E5E9EC"/>
@@ -4936,7 +5297,7 @@
                     <a:bodyPr/>
                     <a:lstStyle/>
                     <a:p>
-                      <a:pPr algn="r" indent="0" marL="0">
+                      <a:pPr marL="0" indent="0" algn="r">
                         <a:buNone/>
                       </a:pPr>
                       <a:r>
@@ -4950,9 +5311,6 @@
                         </a:rPr>
                         <a:t>64</a:t>
                       </a:r>
-                      <a:pPr algn="r" indent="0" marL="0">
-                        <a:buNone/>
-                      </a:pPr>
                       <a:r>
                         <a:rPr lang="en-US" sz="1000" dirty="0">
                           <a:solidFill>
@@ -4971,7 +5329,7 @@
                       </a:endParaRPr>
                     </a:p>
                   </a:txBody>
-                  <a:tcPr marL="91440" marR="91440" marT="45720" marB="45720" anchor="ctr">
+                  <a:tcPr anchor="ctr">
                     <a:lnL w="12700" cap="flat" cmpd="sng" algn="ctr">
                       <a:solidFill>
                         <a:srgbClr val="E5E9EC"/>
@@ -5010,14 +5368,19 @@
                     </a:lnB>
                   </a:tcPr>
                 </a:tc>
+                <a:extLst>
+                  <a:ext uri="{0D108BD9-81ED-4DB2-BD59-A6C34878D82A}">
+                    <a16:rowId xmlns:a16="http://schemas.microsoft.com/office/drawing/2014/main" val="10005"/>
+                  </a:ext>
+                </a:extLst>
               </a:tr>
-              <a:tr h="384048">
+              <a:tr h="340000">
                 <a:tc>
                   <a:txBody>
                     <a:bodyPr/>
                     <a:lstStyle/>
                     <a:p>
-                      <a:pPr indent="0" marL="0">
+                      <a:pPr marL="0" indent="0">
                         <a:buNone/>
                       </a:pPr>
                       <a:r>
@@ -5038,7 +5401,7 @@
                       </a:endParaRPr>
                     </a:p>
                   </a:txBody>
-                  <a:tcPr marL="91440" marR="91440" marT="45720" marB="45720" anchor="ctr">
+                  <a:tcPr anchor="ctr">
                     <a:lnL w="12700" cap="flat" cmpd="sng" algn="ctr">
                       <a:solidFill>
                         <a:srgbClr val="E5E9EC"/>
@@ -5082,7 +5445,7 @@
                     <a:bodyPr/>
                     <a:lstStyle/>
                     <a:p>
-                      <a:pPr algn="r" indent="0" marL="0">
+                      <a:pPr marL="0" indent="0" algn="r">
                         <a:buNone/>
                       </a:pPr>
                       <a:r>
@@ -5096,9 +5459,6 @@
                         </a:rPr>
                         <a:t>3</a:t>
                       </a:r>
-                      <a:pPr algn="r" indent="0" marL="0">
-                        <a:buNone/>
-                      </a:pPr>
                       <a:r>
                         <a:rPr lang="en-US" sz="1000" dirty="0">
                           <a:solidFill>
@@ -5117,7 +5477,7 @@
                       </a:endParaRPr>
                     </a:p>
                   </a:txBody>
-                  <a:tcPr marL="91440" marR="91440" marT="45720" marB="45720" anchor="ctr">
+                  <a:tcPr anchor="ctr">
                     <a:lnL w="12700" cap="flat" cmpd="sng" algn="ctr">
                       <a:solidFill>
                         <a:srgbClr val="E5E9EC"/>
@@ -5156,14 +5516,19 @@
                     </a:lnB>
                   </a:tcPr>
                 </a:tc>
+                <a:extLst>
+                  <a:ext uri="{0D108BD9-81ED-4DB2-BD59-A6C34878D82A}">
+                    <a16:rowId xmlns:a16="http://schemas.microsoft.com/office/drawing/2014/main" val="10006"/>
+                  </a:ext>
+                </a:extLst>
               </a:tr>
-              <a:tr h="384048">
+              <a:tr h="340000">
                 <a:tc>
                   <a:txBody>
                     <a:bodyPr/>
                     <a:lstStyle/>
                     <a:p>
-                      <a:pPr indent="0" marL="0">
+                      <a:pPr marL="0" indent="0">
                         <a:buNone/>
                       </a:pPr>
                       <a:r>
@@ -5184,7 +5549,7 @@
                       </a:endParaRPr>
                     </a:p>
                   </a:txBody>
-                  <a:tcPr marL="91440" marR="91440" marT="45720" marB="45720" anchor="ctr">
+                  <a:tcPr anchor="ctr">
                     <a:lnL w="12700" cap="flat" cmpd="sng" algn="ctr">
                       <a:solidFill>
                         <a:srgbClr val="E5E9EC"/>
@@ -5228,7 +5593,7 @@
                     <a:bodyPr/>
                     <a:lstStyle/>
                     <a:p>
-                      <a:pPr algn="r" indent="0" marL="0">
+                      <a:pPr marL="0" indent="0" algn="r">
                         <a:buNone/>
                       </a:pPr>
                       <a:r>
@@ -5242,9 +5607,6 @@
                         </a:rPr>
                         <a:t>4</a:t>
                       </a:r>
-                      <a:pPr algn="r" indent="0" marL="0">
-                        <a:buNone/>
-                      </a:pPr>
                       <a:r>
                         <a:rPr lang="en-US" sz="1000" dirty="0">
                           <a:solidFill>
@@ -5263,7 +5625,7 @@
                       </a:endParaRPr>
                     </a:p>
                   </a:txBody>
-                  <a:tcPr marL="91440" marR="91440" marT="45720" marB="45720" anchor="ctr">
+                  <a:tcPr anchor="ctr">
                     <a:lnL w="12700" cap="flat" cmpd="sng" algn="ctr">
                       <a:solidFill>
                         <a:srgbClr val="E5E9EC"/>
@@ -5302,6 +5664,159 @@
                     </a:lnB>
                   </a:tcPr>
                 </a:tc>
+                <a:extLst>
+                  <a:ext uri="{0D108BD9-81ED-4DB2-BD59-A6C34878D82A}">
+                    <a16:rowId xmlns:a16="http://schemas.microsoft.com/office/drawing/2014/main" val="10007"/>
+                  </a:ext>
+                </a:extLst>
+              </a:tr>
+              <a:tr h="340000">
+                <a:tc>
+                  <a:txBody>
+                    <a:bodyPr/>
+                    <a:lstStyle/>
+                    <a:p>
+                      <a:pPr marL="0" indent="0">
+                        <a:buNone/>
+                      </a:pPr>
+                      <a:r>
+                        <a:rPr lang="en-US" sz="1300" dirty="0">
+                          <a:solidFill>
+                            <a:srgbClr val="1C2833"/>
+                          </a:solidFill>
+                          <a:latin typeface="Meiryo" pitchFamily="34" charset="0"/>
+                          <a:ea typeface="Meiryo" pitchFamily="34" charset="-122"/>
+                          <a:cs typeface="Meiryo" pitchFamily="34" charset="-120"/>
+                        </a:rPr>
+                        <a:t>介護職員等処遇改善加算 加算Ⅱ（ロ）</a:t>
+                      </a:r>
+                      <a:endParaRPr lang="en-US" sz="1300" dirty="0">
+                        <a:latin typeface="Meiryo" charset="0"/>
+                        <a:ea typeface="Meiryo" charset="0"/>
+                        <a:cs typeface="Meiryo" charset="0"/>
+                      </a:endParaRPr>
+                    </a:p>
+                  </a:txBody>
+                  <a:tcPr anchor="ctr">
+                    <a:lnL w="12700" cap="flat" cmpd="sng" algn="ctr">
+                      <a:solidFill>
+                        <a:srgbClr val="E5E9EC"/>
+                      </a:solidFill>
+                      <a:prstDash val="solid"/>
+                      <a:round/>
+                      <a:headEnd type="none" w="med" len="med"/>
+                      <a:tailEnd type="none" w="med" len="med"/>
+                    </a:lnL>
+                    <a:lnR w="12700" cap="flat" cmpd="sng" algn="ctr">
+                      <a:solidFill>
+                        <a:srgbClr val="E5E9EC"/>
+                      </a:solidFill>
+                      <a:prstDash val="solid"/>
+                      <a:round/>
+                      <a:headEnd type="none" w="med" len="med"/>
+                      <a:tailEnd type="none" w="med" len="med"/>
+                    </a:lnR>
+                    <a:lnT w="12700" cap="flat" cmpd="sng" algn="ctr">
+                      <a:solidFill>
+                        <a:srgbClr val="E5E9EC"/>
+                      </a:solidFill>
+                      <a:prstDash val="solid"/>
+                      <a:round/>
+                      <a:headEnd type="none" w="med" len="med"/>
+                      <a:tailEnd type="none" w="med" len="med"/>
+                    </a:lnT>
+                    <a:lnB w="12700" cap="flat" cmpd="sng" algn="ctr">
+                      <a:solidFill>
+                        <a:srgbClr val="E5E9EC"/>
+                      </a:solidFill>
+                      <a:prstDash val="solid"/>
+                      <a:round/>
+                      <a:headEnd type="none" w="med" len="med"/>
+                      <a:tailEnd type="none" w="med" len="med"/>
+                    </a:lnB>
+                  </a:tcPr>
+                </a:tc>
+                <a:tc>
+                  <a:txBody>
+                    <a:bodyPr/>
+                    <a:lstStyle/>
+                    <a:p>
+                      <a:pPr marL="0" indent="0" algn="r">
+                        <a:buNone/>
+                      </a:pPr>
+                      <a:r>
+                        <a:rPr lang="en-US" sz="1600" b="1" dirty="0">
+                          <a:solidFill>
+                            <a:srgbClr val="1A5276"/>
+                          </a:solidFill>
+                          <a:latin typeface="Meiryo" pitchFamily="34" charset="0"/>
+                          <a:ea typeface="Meiryo" pitchFamily="34" charset="-122"/>
+                          <a:cs typeface="Meiryo" pitchFamily="34" charset="-120"/>
+                        </a:rPr>
+                        <a:t>12.7</a:t>
+                      </a:r>
+                      <a:r>
+                        <a:rPr lang="en-US" sz="1000" dirty="0">
+                          <a:solidFill>
+                            <a:srgbClr val="566573"/>
+                          </a:solidFill>
+                          <a:latin typeface="Meiryo" pitchFamily="34" charset="0"/>
+                          <a:ea typeface="Meiryo" pitchFamily="34" charset="-122"/>
+                          <a:cs typeface="Meiryo" pitchFamily="34" charset="-120"/>
+                        </a:rPr>
+                        <a:t>％</a:t>
+                      </a:r>
+                      <a:endParaRPr lang="en-US" sz="1200" dirty="0">
+                        <a:latin typeface="Meiryo" charset="0"/>
+                        <a:ea typeface="Meiryo" charset="0"/>
+                        <a:cs typeface="Meiryo" charset="0"/>
+                      </a:endParaRPr>
+                    </a:p>
+                  </a:txBody>
+                  <a:tcPr anchor="ctr">
+                    <a:lnL w="12700" cap="flat" cmpd="sng" algn="ctr">
+                      <a:solidFill>
+                        <a:srgbClr val="E5E9EC"/>
+                      </a:solidFill>
+                      <a:prstDash val="solid"/>
+                      <a:round/>
+                      <a:headEnd type="none" w="med" len="med"/>
+                      <a:tailEnd type="none" w="med" len="med"/>
+                    </a:lnL>
+                    <a:lnR w="12700" cap="flat" cmpd="sng" algn="ctr">
+                      <a:solidFill>
+                        <a:srgbClr val="E5E9EC"/>
+                      </a:solidFill>
+                      <a:prstDash val="solid"/>
+                      <a:round/>
+                      <a:headEnd type="none" w="med" len="med"/>
+                      <a:tailEnd type="none" w="med" len="med"/>
+                    </a:lnR>
+                    <a:lnT w="12700" cap="flat" cmpd="sng" algn="ctr">
+                      <a:solidFill>
+                        <a:srgbClr val="E5E9EC"/>
+                      </a:solidFill>
+                      <a:prstDash val="solid"/>
+                      <a:round/>
+                      <a:headEnd type="none" w="med" len="med"/>
+                      <a:tailEnd type="none" w="med" len="med"/>
+                    </a:lnT>
+                    <a:lnB w="12700" cap="flat" cmpd="sng" algn="ctr">
+                      <a:solidFill>
+                        <a:srgbClr val="E5E9EC"/>
+                      </a:solidFill>
+                      <a:prstDash val="solid"/>
+                      <a:round/>
+                      <a:headEnd type="none" w="med" len="med"/>
+                      <a:tailEnd type="none" w="med" len="med"/>
+                    </a:lnB>
+                  </a:tcPr>
+                </a:tc>
+                <a:extLst>
+                  <a:ext uri="{0D108BD9-81ED-4DB2-BD59-A6C34878D82A}">
+                    <a16:rowId xmlns:a16="http://schemas.microsoft.com/office/drawing/2014/main" val="10005"/>
+                  </a:ext>
+                </a:extLst>
               </a:tr>
             </a:tbl>
           </a:graphicData>
@@ -5328,7 +5843,7 @@
           <a:bodyPr wrap="square" lIns="0" tIns="0" rIns="0" bIns="0" rtlCol="0" anchor="ctr"/>
           <a:lstStyle/>
           <a:p>
-            <a:pPr indent="0" marL="0">
+            <a:pPr marL="0" indent="0">
               <a:buNone/>
             </a:pPr>
             <a:r>
@@ -5340,7 +5855,7 @@
                 <a:ea typeface="Meiryo" pitchFamily="34" charset="-122"/>
                 <a:cs typeface="Meiryo" pitchFamily="34" charset="-120"/>
               </a:rPr>
-              <a:t>※2024年4月改定後の単位数。単価は地域区分により異なります。</a:t>
+              <a:t>※2024年4月改定後の単位数。処遇改善加算は加算率。単価は地域区分により異なります。</a:t>
             </a:r>
             <a:endParaRPr lang="en-US" sz="1000" dirty="0"/>
           </a:p>
@@ -5372,6 +5887,13 @@
             <a:prstDash val="solid"/>
           </a:ln>
         </p:spPr>
+        <p:txBody>
+          <a:bodyPr/>
+          <a:lstStyle/>
+          <a:p>
+            <a:endParaRPr lang="ja-JP" altLang="en-US"/>
+          </a:p>
+        </p:txBody>
       </p:sp>
       <p:sp>
         <p:nvSpPr>
@@ -5394,7 +5916,7 @@
           <a:bodyPr wrap="square" lIns="0" tIns="0" rIns="0" bIns="0" rtlCol="0" anchor="ctr"/>
           <a:lstStyle/>
           <a:p>
-            <a:pPr indent="0" marL="0">
+            <a:pPr marL="0" indent="0">
               <a:buNone/>
             </a:pPr>
             <a:r>
@@ -5451,12 +5973,6 @@
               </a:rPr>
               <a:t>3名（うち看護職員1名）</a:t>
             </a:r>
-            <a:pPr indent="0" marL="0">
-              <a:spcAft>
-                <a:spcPts val="600"/>
-              </a:spcAft>
-              <a:buNone/>
-            </a:pPr>
             <a:r>
               <a:rPr lang="en-US" sz="1250" dirty="0">
                 <a:solidFill>
@@ -5489,12 +6005,6 @@
               </a:rPr>
               <a:t>専用浴槽・給湯設備の</a:t>
             </a:r>
-            <a:pPr indent="0" marL="0">
-              <a:spcAft>
-                <a:spcPts val="600"/>
-              </a:spcAft>
-              <a:buNone/>
-            </a:pPr>
             <a:r>
               <a:rPr lang="en-US" sz="1250" b="1" dirty="0">
                 <a:solidFill>
@@ -5527,12 +6037,6 @@
               </a:rPr>
               <a:t>清拭では届かない</a:t>
             </a:r>
-            <a:pPr indent="0" marL="0">
-              <a:spcAft>
-                <a:spcPts val="600"/>
-              </a:spcAft>
-              <a:buNone/>
-            </a:pPr>
             <a:r>
               <a:rPr lang="en-US" sz="1250" b="1" dirty="0">
                 <a:solidFill>
@@ -5565,12 +6069,6 @@
               </a:rPr>
               <a:t>毎回の</a:t>
             </a:r>
-            <a:pPr indent="0" marL="0">
-              <a:spcAft>
-                <a:spcPts val="600"/>
-              </a:spcAft>
-              <a:buNone/>
-            </a:pPr>
             <a:r>
               <a:rPr lang="en-US" sz="1250" b="1" dirty="0">
                 <a:solidFill>
@@ -5603,12 +6101,6 @@
               </a:rPr>
               <a:t>関係職種への</a:t>
             </a:r>
-            <a:pPr indent="0" marL="0">
-              <a:spcAft>
-                <a:spcPts val="600"/>
-              </a:spcAft>
-              <a:buNone/>
-            </a:pPr>
             <a:r>
               <a:rPr lang="en-US" sz="1250" b="1" dirty="0">
                 <a:solidFill>
@@ -5645,7 +6137,7 @@
           <a:bodyPr wrap="square" lIns="0" tIns="0" rIns="0" bIns="0" rtlCol="0" anchor="ctr"/>
           <a:lstStyle/>
           <a:p>
-            <a:pPr indent="0" marL="0">
+            <a:pPr marL="0" indent="0">
               <a:lnSpc>
                 <a:spcPct val="125000"/>
               </a:lnSpc>
@@ -5662,12 +6154,6 @@
               </a:rPr>
               <a:t>入浴のみの報酬ではなく、</a:t>
             </a:r>
-            <a:pPr indent="0" marL="0">
-              <a:lnSpc>
-                <a:spcPct val="125000"/>
-              </a:lnSpc>
-              <a:buNone/>
-            </a:pPr>
             <a:r>
               <a:rPr lang="en-US" sz="1250" b="1" dirty="0">
                 <a:solidFill>
@@ -5679,12 +6165,6 @@
               </a:rPr>
               <a:t>看護アセスメントを含んだ包括的なケアの対価</a:t>
             </a:r>
-            <a:pPr indent="0" marL="0">
-              <a:lnSpc>
-                <a:spcPct val="125000"/>
-              </a:lnSpc>
-              <a:buNone/>
-            </a:pPr>
             <a:r>
               <a:rPr lang="en-US" sz="1250" dirty="0">
                 <a:solidFill>
@@ -5751,6 +6231,13 @@
             <a:prstDash val="solid"/>
           </a:ln>
         </p:spPr>
+        <p:txBody>
+          <a:bodyPr/>
+          <a:lstStyle/>
+          <a:p>
+            <a:endParaRPr lang="ja-JP" altLang="en-US"/>
+          </a:p>
+        </p:txBody>
       </p:sp>
       <p:sp>
         <p:nvSpPr>
@@ -5773,7 +6260,7 @@
           <a:bodyPr wrap="square" lIns="0" tIns="0" rIns="0" bIns="0" rtlCol="0" anchor="ctr"/>
           <a:lstStyle/>
           <a:p>
-            <a:pPr algn="ctr" indent="0" marL="0">
+            <a:pPr marL="0" indent="0" algn="ctr">
               <a:buNone/>
             </a:pPr>
             <a:r>
@@ -5812,7 +6299,7 @@
           <a:bodyPr wrap="square" lIns="0" tIns="0" rIns="0" bIns="0" rtlCol="0" anchor="ctr"/>
           <a:lstStyle/>
           <a:p>
-            <a:pPr indent="0" marL="0">
+            <a:pPr marL="0" indent="0">
               <a:buNone/>
             </a:pPr>
             <a:r>
@@ -5851,7 +6338,7 @@
           <a:bodyPr wrap="square" lIns="0" tIns="0" rIns="0" bIns="0" rtlCol="0" anchor="ctr"/>
           <a:lstStyle/>
           <a:p>
-            <a:pPr indent="0" marL="0">
+            <a:pPr marL="0" indent="0">
               <a:buNone/>
             </a:pPr>
             <a:r>
@@ -5895,6 +6382,13 @@
             <a:prstDash val="solid"/>
           </a:ln>
         </p:spPr>
+        <p:txBody>
+          <a:bodyPr/>
+          <a:lstStyle/>
+          <a:p>
+            <a:endParaRPr lang="ja-JP" altLang="en-US"/>
+          </a:p>
+        </p:txBody>
       </p:sp>
       <p:sp>
         <p:nvSpPr>
@@ -5917,7 +6411,7 @@
           <a:bodyPr wrap="square" lIns="0" tIns="0" rIns="0" bIns="0" rtlCol="0" anchor="ctr"/>
           <a:lstStyle/>
           <a:p>
-            <a:pPr indent="0" marL="0">
+            <a:pPr marL="0" indent="0">
               <a:lnSpc>
                 <a:spcPct val="125000"/>
               </a:lnSpc>
@@ -5959,7 +6453,7 @@
           <a:bodyPr wrap="square" lIns="0" tIns="0" rIns="0" bIns="0" rtlCol="0" anchor="ctr"/>
           <a:lstStyle/>
           <a:p>
-            <a:pPr algn="r" indent="0" marL="0">
+            <a:pPr marL="0" indent="0" algn="r">
               <a:buNone/>
             </a:pPr>
             <a:r>
@@ -6003,6 +6497,13 @@
             <a:prstDash val="solid"/>
           </a:ln>
         </p:spPr>
+        <p:txBody>
+          <a:bodyPr/>
+          <a:lstStyle/>
+          <a:p>
+            <a:endParaRPr lang="ja-JP" altLang="en-US"/>
+          </a:p>
+        </p:txBody>
       </p:sp>
       <p:sp>
         <p:nvSpPr>
@@ -6025,7 +6526,7 @@
           <a:bodyPr wrap="square" lIns="0" tIns="0" rIns="0" bIns="0" rtlCol="0" anchor="ctr"/>
           <a:lstStyle/>
           <a:p>
-            <a:pPr indent="0" marL="0">
+            <a:pPr marL="0" indent="0">
               <a:lnSpc>
                 <a:spcPct val="125000"/>
               </a:lnSpc>
@@ -6067,7 +6568,7 @@
           <a:bodyPr wrap="square" lIns="0" tIns="0" rIns="0" bIns="0" rtlCol="0" anchor="ctr"/>
           <a:lstStyle/>
           <a:p>
-            <a:pPr algn="r" indent="0" marL="0">
+            <a:pPr marL="0" indent="0" algn="r">
               <a:buNone/>
             </a:pPr>
             <a:r>
@@ -6106,7 +6607,7 @@
           <a:bodyPr wrap="square" lIns="0" tIns="0" rIns="0" bIns="0" rtlCol="0" anchor="ctr"/>
           <a:lstStyle/>
           <a:p>
-            <a:pPr indent="0" marL="0">
+            <a:pPr marL="0" indent="0">
               <a:lnSpc>
                 <a:spcPct val="130000"/>
               </a:lnSpc>
@@ -6123,12 +6624,6 @@
               </a:rPr>
               <a:t>入浴の効果は清潔だけにとどまりません。</a:t>
             </a:r>
-            <a:pPr indent="0" marL="0">
-              <a:lnSpc>
-                <a:spcPct val="130000"/>
-              </a:lnSpc>
-              <a:buNone/>
-            </a:pPr>
             <a:r>
               <a:rPr lang="en-US" sz="1500" b="1" dirty="0">
                 <a:solidFill>
@@ -6140,12 +6635,6 @@
               </a:rPr>
               <a:t>ご本人の意欲と、介護するご家族の負担軽減</a:t>
             </a:r>
-            <a:pPr indent="0" marL="0">
-              <a:lnSpc>
-                <a:spcPct val="130000"/>
-              </a:lnSpc>
-              <a:buNone/>
-            </a:pPr>
             <a:r>
               <a:rPr lang="en-US" sz="1500" dirty="0">
                 <a:solidFill>
@@ -6212,6 +6701,13 @@
             <a:prstDash val="solid"/>
           </a:ln>
         </p:spPr>
+        <p:txBody>
+          <a:bodyPr/>
+          <a:lstStyle/>
+          <a:p>
+            <a:endParaRPr lang="ja-JP" altLang="en-US"/>
+          </a:p>
+        </p:txBody>
       </p:sp>
       <p:sp>
         <p:nvSpPr>
@@ -6234,7 +6730,7 @@
           <a:bodyPr wrap="square" lIns="0" tIns="0" rIns="0" bIns="0" rtlCol="0" anchor="ctr"/>
           <a:lstStyle/>
           <a:p>
-            <a:pPr algn="ctr" indent="0" marL="0">
+            <a:pPr marL="0" indent="0" algn="ctr">
               <a:buNone/>
             </a:pPr>
             <a:r>
@@ -6273,7 +6769,7 @@
           <a:bodyPr wrap="square" lIns="0" tIns="0" rIns="0" bIns="0" rtlCol="0" anchor="ctr"/>
           <a:lstStyle/>
           <a:p>
-            <a:pPr indent="0" marL="0">
+            <a:pPr marL="0" indent="0">
               <a:buNone/>
             </a:pPr>
             <a:r>
@@ -6312,7 +6808,7 @@
           <a:bodyPr wrap="square" lIns="0" tIns="0" rIns="0" bIns="0" rtlCol="0" anchor="ctr"/>
           <a:lstStyle/>
           <a:p>
-            <a:pPr indent="0" marL="0">
+            <a:pPr marL="0" indent="0">
               <a:buNone/>
             </a:pPr>
             <a:r>
@@ -6369,12 +6865,6 @@
               </a:rPr>
               <a:t>入浴困難の「空白地帯」を埋める</a:t>
             </a:r>
-            <a:pPr indent="0" marL="0">
-              <a:spcAft>
-                <a:spcPts val="1200"/>
-              </a:spcAft>
-              <a:buNone/>
-            </a:pPr>
             <a:r>
               <a:rPr lang="en-US" sz="1500" dirty="0">
                 <a:solidFill>
@@ -6407,12 +6897,6 @@
               </a:rPr>
               <a:t>「自宅で・全身浴を・看護師付きで・重度でも」の4条件を唯一満たす</a:t>
             </a:r>
-            <a:pPr indent="0" marL="0">
-              <a:spcAft>
-                <a:spcPts val="1200"/>
-              </a:spcAft>
-              <a:buNone/>
-            </a:pPr>
             <a:r>
               <a:rPr lang="en-US" sz="1500" dirty="0">
                 <a:solidFill>
@@ -6445,12 +6929,6 @@
               </a:rPr>
               <a:t>週1〜2回の全身アセスメントの場</a:t>
             </a:r>
-            <a:pPr indent="0" marL="0">
-              <a:spcAft>
-                <a:spcPts val="1200"/>
-              </a:spcAft>
-              <a:buNone/>
-            </a:pPr>
             <a:r>
               <a:rPr lang="en-US" sz="1500" dirty="0">
                 <a:solidFill>
@@ -6483,12 +6961,6 @@
               </a:rPr>
               <a:t>医療行為は行わず「見つけて、つなぐ」</a:t>
             </a:r>
-            <a:pPr indent="0" marL="0">
-              <a:spcAft>
-                <a:spcPts val="1200"/>
-              </a:spcAft>
-              <a:buNone/>
-            </a:pPr>
             <a:r>
               <a:rPr lang="en-US" sz="1500" dirty="0">
                 <a:solidFill>
@@ -6530,6 +7002,13 @@
             <a:prstDash val="solid"/>
           </a:ln>
         </p:spPr>
+        <p:txBody>
+          <a:bodyPr/>
+          <a:lstStyle/>
+          <a:p>
+            <a:endParaRPr lang="ja-JP" altLang="en-US"/>
+          </a:p>
+        </p:txBody>
       </p:sp>
       <p:sp>
         <p:nvSpPr>
@@ -6552,7 +7031,7 @@
           <a:bodyPr wrap="square" lIns="0" tIns="0" rIns="0" bIns="0" rtlCol="0" anchor="ctr"/>
           <a:lstStyle/>
           <a:p>
-            <a:pPr algn="ctr" indent="0" marL="0">
+            <a:pPr marL="0" indent="0" algn="ctr">
               <a:lnSpc>
                 <a:spcPct val="130000"/>
               </a:lnSpc>
@@ -6572,7 +7051,7 @@
             <a:endParaRPr lang="en-US" sz="1900" dirty="0"/>
           </a:p>
           <a:p>
-            <a:pPr algn="ctr" indent="0" marL="0">
+            <a:pPr marL="0" indent="0" algn="ctr">
               <a:lnSpc>
                 <a:spcPct val="130000"/>
               </a:lnSpc>
@@ -6614,7 +7093,7 @@
           <a:bodyPr wrap="square" lIns="0" tIns="0" rIns="0" bIns="0" rtlCol="0" anchor="ctr"/>
           <a:lstStyle/>
           <a:p>
-            <a:pPr indent="0" marL="0">
+            <a:pPr marL="0" indent="0">
               <a:buNone/>
             </a:pPr>
             <a:r>
@@ -6648,6 +7127,7 @@
         <a:solidFill>
           <a:srgbClr val="1A5276"/>
         </a:solidFill>
+        <a:effectLst/>
       </p:bgPr>
     </p:bg>
     <p:spTree>
@@ -6685,11 +7165,11 @@
           <a:bodyPr wrap="square" lIns="0" tIns="0" rIns="0" bIns="0" rtlCol="0" anchor="ctr"/>
           <a:lstStyle/>
           <a:p>
-            <a:pPr indent="0" marL="0">
+            <a:pPr marL="0" indent="0">
               <a:buNone/>
             </a:pPr>
             <a:r>
-              <a:rPr lang="en-US" sz="1300" b="1" spc="200" kern="0" dirty="0">
+              <a:rPr lang="en-US" sz="1300" b="1" kern="0" spc="200" dirty="0">
                 <a:solidFill>
                   <a:srgbClr val="7EE2BC"/>
                 </a:solidFill>
@@ -6724,7 +7204,7 @@
           <a:bodyPr wrap="square" lIns="0" tIns="0" rIns="0" bIns="0" rtlCol="0" anchor="ctr"/>
           <a:lstStyle/>
           <a:p>
-            <a:pPr indent="0" marL="0">
+            <a:pPr marL="0" indent="0">
               <a:buNone/>
             </a:pPr>
             <a:r>
@@ -6763,7 +7243,7 @@
           <a:bodyPr wrap="square" lIns="0" tIns="0" rIns="0" bIns="0" rtlCol="0" anchor="ctr"/>
           <a:lstStyle/>
           <a:p>
-            <a:pPr indent="0" marL="0">
+            <a:pPr marL="0" indent="0">
               <a:buNone/>
             </a:pPr>
             <a:r>
@@ -6802,7 +7282,7 @@
           <a:bodyPr wrap="square" lIns="0" tIns="0" rIns="0" bIns="0" rtlCol="0" anchor="ctr"/>
           <a:lstStyle/>
           <a:p>
-            <a:pPr indent="0" marL="0">
+            <a:pPr marL="0" indent="0">
               <a:buNone/>
             </a:pPr>
             <a:r>
@@ -6841,7 +7321,7 @@
           <a:bodyPr wrap="square" lIns="0" tIns="0" rIns="0" bIns="0" rtlCol="0" anchor="ctr"/>
           <a:lstStyle/>
           <a:p>
-            <a:pPr indent="0" marL="0">
+            <a:pPr marL="0" indent="0">
               <a:buNone/>
             </a:pPr>
             <a:r>
@@ -6880,7 +7360,7 @@
           <a:bodyPr wrap="square" lIns="0" tIns="0" rIns="0" bIns="0" rtlCol="0" anchor="ctr"/>
           <a:lstStyle/>
           <a:p>
-            <a:pPr indent="0" marL="0">
+            <a:pPr marL="0" indent="0">
               <a:buNone/>
             </a:pPr>
             <a:r>
@@ -6919,7 +7399,7 @@
           <a:bodyPr wrap="square" lIns="0" tIns="0" rIns="0" bIns="0" rtlCol="0" anchor="ctr"/>
           <a:lstStyle/>
           <a:p>
-            <a:pPr indent="0" marL="0">
+            <a:pPr marL="0" indent="0">
               <a:buNone/>
             </a:pPr>
             <a:r>
@@ -6958,7 +7438,7 @@
           <a:bodyPr wrap="square" lIns="0" tIns="0" rIns="0" bIns="0" rtlCol="0" anchor="ctr"/>
           <a:lstStyle/>
           <a:p>
-            <a:pPr indent="0" marL="0">
+            <a:pPr marL="0" indent="0">
               <a:buNone/>
             </a:pPr>
             <a:r>
@@ -6997,7 +7477,7 @@
           <a:bodyPr wrap="square" lIns="0" tIns="0" rIns="0" bIns="0" rtlCol="0" anchor="ctr"/>
           <a:lstStyle/>
           <a:p>
-            <a:pPr indent="0" marL="0">
+            <a:pPr marL="0" indent="0">
               <a:buNone/>
             </a:pPr>
             <a:r>
@@ -7041,6 +7521,13 @@
             <a:prstDash val="dash"/>
           </a:ln>
         </p:spPr>
+        <p:txBody>
+          <a:bodyPr/>
+          <a:lstStyle/>
+          <a:p>
+            <a:endParaRPr lang="ja-JP" altLang="en-US"/>
+          </a:p>
+        </p:txBody>
       </p:sp>
       <p:sp>
         <p:nvSpPr>
@@ -7063,7 +7550,7 @@
           <a:bodyPr wrap="square" lIns="0" tIns="0" rIns="0" bIns="0" rtlCol="0" anchor="ctr"/>
           <a:lstStyle/>
           <a:p>
-            <a:pPr algn="ctr" indent="0" marL="0">
+            <a:pPr marL="0" indent="0" algn="ctr">
               <a:buNone/>
             </a:pPr>
             <a:r>
@@ -7080,7 +7567,7 @@
             <a:endParaRPr lang="en-US" sz="1100" dirty="0"/>
           </a:p>
           <a:p>
-            <a:pPr algn="ctr" indent="0" marL="0">
+            <a:pPr marL="0" indent="0" algn="ctr">
               <a:buNone/>
             </a:pPr>
             <a:r>
@@ -7124,6 +7611,13 @@
             <a:prstDash val="solid"/>
           </a:ln>
         </p:spPr>
+        <p:txBody>
+          <a:bodyPr/>
+          <a:lstStyle/>
+          <a:p>
+            <a:endParaRPr lang="ja-JP" altLang="en-US"/>
+          </a:p>
+        </p:txBody>
       </p:sp>
       <p:sp>
         <p:nvSpPr>
@@ -7146,7 +7640,7 @@
           <a:bodyPr wrap="square" lIns="0" tIns="0" rIns="0" bIns="0" rtlCol="0" anchor="ctr"/>
           <a:lstStyle/>
           <a:p>
-            <a:pPr algn="ctr" indent="0" marL="0">
+            <a:pPr marL="0" indent="0" algn="ctr">
               <a:buNone/>
             </a:pPr>
             <a:r>
@@ -7185,7 +7679,7 @@
           <a:bodyPr wrap="square" lIns="0" tIns="0" rIns="0" bIns="0" rtlCol="0" anchor="ctr"/>
           <a:lstStyle/>
           <a:p>
-            <a:pPr algn="ctr" indent="0" marL="0">
+            <a:pPr marL="0" indent="0" algn="ctr">
               <a:buNone/>
             </a:pPr>
             <a:r>
@@ -7254,6 +7748,13 @@
             <a:prstDash val="solid"/>
           </a:ln>
         </p:spPr>
+        <p:txBody>
+          <a:bodyPr/>
+          <a:lstStyle/>
+          <a:p>
+            <a:endParaRPr lang="ja-JP" altLang="en-US"/>
+          </a:p>
+        </p:txBody>
       </p:sp>
       <p:sp>
         <p:nvSpPr>
@@ -7276,7 +7777,7 @@
           <a:bodyPr wrap="square" lIns="0" tIns="0" rIns="0" bIns="0" rtlCol="0" anchor="ctr"/>
           <a:lstStyle/>
           <a:p>
-            <a:pPr algn="ctr" indent="0" marL="0">
+            <a:pPr marL="0" indent="0" algn="ctr">
               <a:buNone/>
             </a:pPr>
             <a:r>
@@ -7315,7 +7816,7 @@
           <a:bodyPr wrap="square" lIns="0" tIns="0" rIns="0" bIns="0" rtlCol="0" anchor="ctr"/>
           <a:lstStyle/>
           <a:p>
-            <a:pPr indent="0" marL="0">
+            <a:pPr marL="0" indent="0">
               <a:buNone/>
             </a:pPr>
             <a:r>
@@ -7354,7 +7855,7 @@
           <a:bodyPr wrap="square" lIns="0" tIns="0" rIns="0" bIns="0" rtlCol="0" anchor="ctr"/>
           <a:lstStyle/>
           <a:p>
-            <a:pPr indent="0" marL="0">
+            <a:pPr marL="0" indent="0">
               <a:buNone/>
             </a:pPr>
             <a:r>
@@ -7398,6 +7899,13 @@
             <a:prstDash val="solid"/>
           </a:ln>
         </p:spPr>
+        <p:txBody>
+          <a:bodyPr/>
+          <a:lstStyle/>
+          <a:p>
+            <a:endParaRPr lang="ja-JP" altLang="en-US"/>
+          </a:p>
+        </p:txBody>
       </p:sp>
       <p:sp>
         <p:nvSpPr>
@@ -7420,11 +7928,11 @@
           <a:bodyPr wrap="square" lIns="0" tIns="0" rIns="0" bIns="0" rtlCol="0" anchor="ctr"/>
           <a:lstStyle/>
           <a:p>
-            <a:pPr indent="0" marL="0">
+            <a:pPr marL="0" indent="0">
               <a:buNone/>
             </a:pPr>
             <a:r>
-              <a:rPr lang="en-US" sz="1500" b="1" dirty="0">
+              <a:rPr lang="en-US" sz="2000" b="1" dirty="0">
                 <a:solidFill>
                   <a:srgbClr val="1A5276"/>
                 </a:solidFill>
@@ -7434,7 +7942,7 @@
               </a:rPr>
               <a:t>入浴を阻む壁</a:t>
             </a:r>
-            <a:endParaRPr lang="en-US" sz="1500" dirty="0"/>
+            <a:endParaRPr lang="en-US" sz="2000" dirty="0"/>
           </a:p>
         </p:txBody>
       </p:sp>
@@ -7467,7 +7975,7 @@
               <a:buChar char="●"/>
             </a:pPr>
             <a:r>
-              <a:rPr lang="en-US" sz="1250" dirty="0">
+              <a:rPr lang="en-US" dirty="0">
                 <a:solidFill>
                   <a:srgbClr val="1C2833"/>
                 </a:solidFill>
@@ -7477,7 +7985,7 @@
               </a:rPr>
               <a:t>浴槽をまたげない・立位が保てない</a:t>
             </a:r>
-            <a:endParaRPr lang="en-US" sz="1250" dirty="0"/>
+            <a:endParaRPr lang="en-US" dirty="0"/>
           </a:p>
           <a:p>
             <a:pPr marL="342900" indent="-342900">
@@ -7488,7 +7996,7 @@
               <a:buChar char="●"/>
             </a:pPr>
             <a:r>
-              <a:rPr lang="en-US" sz="1250" dirty="0">
+              <a:rPr lang="en-US" dirty="0">
                 <a:solidFill>
                   <a:srgbClr val="1C2833"/>
                 </a:solidFill>
@@ -7498,7 +8006,7 @@
               </a:rPr>
               <a:t>浴室が狭く介助スペースがない</a:t>
             </a:r>
-            <a:endParaRPr lang="en-US" sz="1250" dirty="0"/>
+            <a:endParaRPr lang="en-US" dirty="0"/>
           </a:p>
           <a:p>
             <a:pPr marL="342900" indent="-342900">
@@ -7509,7 +8017,7 @@
               <a:buChar char="●"/>
             </a:pPr>
             <a:r>
-              <a:rPr lang="en-US" sz="1250" dirty="0">
+              <a:rPr lang="en-US" dirty="0">
                 <a:solidFill>
                   <a:srgbClr val="1C2833"/>
                 </a:solidFill>
@@ -7519,7 +8027,7 @@
               </a:rPr>
               <a:t>ご家族だけでは支えきれない（転倒・腰痛）</a:t>
             </a:r>
-            <a:endParaRPr lang="en-US" sz="1250" dirty="0"/>
+            <a:endParaRPr lang="en-US" dirty="0"/>
           </a:p>
           <a:p>
             <a:pPr marL="342900" indent="-342900">
@@ -7530,7 +8038,7 @@
               <a:buChar char="●"/>
             </a:pPr>
             <a:r>
-              <a:rPr lang="en-US" sz="1250" dirty="0">
+              <a:rPr lang="en-US" dirty="0">
                 <a:solidFill>
                   <a:srgbClr val="1C2833"/>
                 </a:solidFill>
@@ -7540,7 +8048,7 @@
               </a:rPr>
               <a:t>医療的ケアがあり不安で踏み切れない</a:t>
             </a:r>
-            <a:endParaRPr lang="en-US" sz="1250" dirty="0"/>
+            <a:endParaRPr lang="en-US" dirty="0"/>
           </a:p>
           <a:p>
             <a:pPr marL="342900" indent="-342900">
@@ -7551,7 +8059,7 @@
               <a:buChar char="●"/>
             </a:pPr>
             <a:r>
-              <a:rPr lang="en-US" sz="1250" dirty="0">
+              <a:rPr lang="en-US" dirty="0">
                 <a:solidFill>
                   <a:srgbClr val="1C2833"/>
                 </a:solidFill>
@@ -7561,7 +8069,7 @@
               </a:rPr>
               <a:t>通所への外出そのものが負担</a:t>
             </a:r>
-            <a:endParaRPr lang="en-US" sz="1250" dirty="0"/>
+            <a:endParaRPr lang="en-US" dirty="0"/>
           </a:p>
         </p:txBody>
       </p:sp>
@@ -7591,6 +8099,13 @@
             <a:prstDash val="solid"/>
           </a:ln>
         </p:spPr>
+        <p:txBody>
+          <a:bodyPr/>
+          <a:lstStyle/>
+          <a:p>
+            <a:endParaRPr lang="ja-JP" altLang="en-US"/>
+          </a:p>
+        </p:txBody>
       </p:sp>
       <p:sp>
         <p:nvSpPr>
@@ -7613,11 +8128,11 @@
           <a:bodyPr wrap="square" lIns="0" tIns="0" rIns="0" bIns="0" rtlCol="0" anchor="ctr"/>
           <a:lstStyle/>
           <a:p>
-            <a:pPr indent="0" marL="0">
+            <a:pPr marL="0" indent="0">
               <a:buNone/>
             </a:pPr>
             <a:r>
-              <a:rPr lang="en-US" sz="1500" b="1" dirty="0">
+              <a:rPr lang="en-US" b="1" dirty="0">
                 <a:solidFill>
                   <a:srgbClr val="1D9E75"/>
                 </a:solidFill>
@@ -7660,7 +8175,7 @@
               <a:buChar char="●"/>
             </a:pPr>
             <a:r>
-              <a:rPr lang="en-US" sz="1250" b="1" dirty="0">
+              <a:rPr lang="en-US" b="1" dirty="0">
                 <a:solidFill>
                   <a:srgbClr val="1D9E75"/>
                 </a:solidFill>
@@ -7670,14 +8185,8 @@
               </a:rPr>
               <a:t>清潔保持</a:t>
             </a:r>
-            <a:pPr indent="0" marL="0">
-              <a:spcAft>
-                <a:spcPts val="600"/>
-              </a:spcAft>
-              <a:buNone/>
-            </a:pPr>
-            <a:r>
-              <a:rPr lang="en-US" sz="1250" dirty="0">
+            <a:r>
+              <a:rPr lang="en-US" dirty="0">
                 <a:solidFill>
                   <a:srgbClr val="1C2833"/>
                 </a:solidFill>
@@ -7687,7 +8196,7 @@
               </a:rPr>
               <a:t>　全身の洗浄・洗髪</a:t>
             </a:r>
-            <a:endParaRPr lang="en-US" sz="1250" dirty="0"/>
+            <a:endParaRPr lang="en-US" dirty="0"/>
           </a:p>
           <a:p>
             <a:pPr marL="342900" indent="-342900">
@@ -7698,7 +8207,7 @@
               <a:buChar char="●"/>
             </a:pPr>
             <a:r>
-              <a:rPr lang="en-US" sz="1250" b="1" dirty="0">
+              <a:rPr lang="en-US" b="1" dirty="0">
                 <a:solidFill>
                   <a:srgbClr val="1D9E75"/>
                 </a:solidFill>
@@ -7708,14 +8217,8 @@
               </a:rPr>
               <a:t>感染予防</a:t>
             </a:r>
-            <a:pPr indent="0" marL="0">
-              <a:spcAft>
-                <a:spcPts val="600"/>
-              </a:spcAft>
-              <a:buNone/>
-            </a:pPr>
-            <a:r>
-              <a:rPr lang="en-US" sz="1250" dirty="0">
+            <a:r>
+              <a:rPr lang="en-US" dirty="0">
                 <a:solidFill>
                   <a:srgbClr val="1C2833"/>
                 </a:solidFill>
@@ -7725,7 +8228,7 @@
               </a:rPr>
               <a:t>　尿路・呼吸器感染リスクの低減</a:t>
             </a:r>
-            <a:endParaRPr lang="en-US" sz="1250" dirty="0"/>
+            <a:endParaRPr lang="en-US" dirty="0"/>
           </a:p>
           <a:p>
             <a:pPr marL="342900" indent="-342900">
@@ -7736,7 +8239,7 @@
               <a:buChar char="●"/>
             </a:pPr>
             <a:r>
-              <a:rPr lang="en-US" sz="1250" b="1" dirty="0">
+              <a:rPr lang="en-US" b="1" dirty="0">
                 <a:solidFill>
                   <a:srgbClr val="1D9E75"/>
                 </a:solidFill>
@@ -7746,14 +8249,8 @@
               </a:rPr>
               <a:t>皮膚トラブル予防</a:t>
             </a:r>
-            <a:pPr indent="0" marL="0">
-              <a:spcAft>
-                <a:spcPts val="600"/>
-              </a:spcAft>
-              <a:buNone/>
-            </a:pPr>
-            <a:r>
-              <a:rPr lang="en-US" sz="1250" dirty="0">
+            <a:r>
+              <a:rPr lang="en-US" dirty="0">
                 <a:solidFill>
                   <a:srgbClr val="1C2833"/>
                 </a:solidFill>
@@ -7763,7 +8260,7 @@
               </a:rPr>
               <a:t>　褥瘡・浸軟の抑制</a:t>
             </a:r>
-            <a:endParaRPr lang="en-US" sz="1250" dirty="0"/>
+            <a:endParaRPr lang="en-US" dirty="0"/>
           </a:p>
           <a:p>
             <a:pPr marL="342900" indent="-342900">
@@ -7774,7 +8271,7 @@
               <a:buChar char="●"/>
             </a:pPr>
             <a:r>
-              <a:rPr lang="en-US" sz="1250" b="1" dirty="0">
+              <a:rPr lang="en-US" b="1" dirty="0">
                 <a:solidFill>
                   <a:srgbClr val="1D9E75"/>
                 </a:solidFill>
@@ -7784,14 +8281,8 @@
               </a:rPr>
               <a:t>QOL</a:t>
             </a:r>
-            <a:pPr indent="0" marL="0">
-              <a:spcAft>
-                <a:spcPts val="600"/>
-              </a:spcAft>
-              <a:buNone/>
-            </a:pPr>
-            <a:r>
-              <a:rPr lang="en-US" sz="1250" dirty="0">
+            <a:r>
+              <a:rPr lang="en-US" dirty="0">
                 <a:solidFill>
                   <a:srgbClr val="1C2833"/>
                 </a:solidFill>
@@ -7801,7 +8292,7 @@
               </a:rPr>
               <a:t>　温熱による安楽・睡眠の改善</a:t>
             </a:r>
-            <a:endParaRPr lang="en-US" sz="1250" dirty="0"/>
+            <a:endParaRPr lang="en-US" dirty="0"/>
           </a:p>
           <a:p>
             <a:pPr marL="342900" indent="-342900">
@@ -7812,7 +8303,7 @@
               <a:buChar char="●"/>
             </a:pPr>
             <a:r>
-              <a:rPr lang="en-US" sz="1250" b="1" dirty="0">
+              <a:rPr lang="en-US" b="1" dirty="0">
                 <a:solidFill>
                   <a:srgbClr val="1D9E75"/>
                 </a:solidFill>
@@ -7822,14 +8313,8 @@
               </a:rPr>
               <a:t>生きる意欲</a:t>
             </a:r>
-            <a:pPr indent="0" marL="0">
-              <a:spcAft>
-                <a:spcPts val="600"/>
-              </a:spcAft>
-              <a:buNone/>
-            </a:pPr>
-            <a:r>
-              <a:rPr lang="en-US" sz="1250" dirty="0">
+            <a:r>
+              <a:rPr lang="en-US" dirty="0">
                 <a:solidFill>
                   <a:srgbClr val="1C2833"/>
                 </a:solidFill>
@@ -7839,7 +8324,7 @@
               </a:rPr>
               <a:t>　「人として当たり前」の回復</a:t>
             </a:r>
-            <a:endParaRPr lang="en-US" sz="1250" dirty="0"/>
+            <a:endParaRPr lang="en-US" dirty="0"/>
           </a:p>
         </p:txBody>
       </p:sp>
@@ -7851,7 +8336,7 @@
         </p:nvSpPr>
         <p:spPr>
           <a:xfrm>
-            <a:off x="566928" y="4828032"/>
+            <a:off x="566929" y="4828032"/>
             <a:ext cx="11057839" cy="822960"/>
           </a:xfrm>
           <a:prstGeom prst="rect">
@@ -7864,7 +8349,7 @@
           <a:bodyPr wrap="square" lIns="0" tIns="0" rIns="0" bIns="0" rtlCol="0" anchor="ctr"/>
           <a:lstStyle/>
           <a:p>
-            <a:pPr indent="0" marL="0">
+            <a:pPr marL="0" indent="0">
               <a:lnSpc>
                 <a:spcPct val="130000"/>
               </a:lnSpc>
@@ -7879,16 +8364,51 @@
                 <a:ea typeface="Meiryo" pitchFamily="34" charset="-122"/>
                 <a:cs typeface="Meiryo" pitchFamily="34" charset="-120"/>
               </a:rPr>
-              <a:t>結果として「週1回の清拭のみ」「数か月入浴なし」という状態が生まれます。入浴は</a:t>
-            </a:r>
-            <a:pPr indent="0" marL="0">
+              <a:t>結果として「週1回の清拭のみ」「</a:t>
+            </a:r>
+            <a:r>
+              <a:rPr lang="en-US" sz="1500" dirty="0" err="1">
+                <a:solidFill>
+                  <a:srgbClr val="1C2833"/>
+                </a:solidFill>
+                <a:latin typeface="Meiryo" pitchFamily="34" charset="0"/>
+                <a:ea typeface="Meiryo" pitchFamily="34" charset="-122"/>
+                <a:cs typeface="Meiryo" pitchFamily="34" charset="-120"/>
+              </a:rPr>
+              <a:t>数か月入浴なし」という状態が生まれます</a:t>
+            </a:r>
+            <a:r>
+              <a:rPr lang="en-US" sz="1500" dirty="0">
+                <a:solidFill>
+                  <a:srgbClr val="1C2833"/>
+                </a:solidFill>
+                <a:latin typeface="Meiryo" pitchFamily="34" charset="0"/>
+                <a:ea typeface="Meiryo" pitchFamily="34" charset="-122"/>
+                <a:cs typeface="Meiryo" pitchFamily="34" charset="-120"/>
+              </a:rPr>
+              <a:t>。</a:t>
+            </a:r>
+          </a:p>
+          <a:p>
+            <a:pPr marL="0" indent="0">
               <a:lnSpc>
                 <a:spcPct val="130000"/>
               </a:lnSpc>
               <a:buNone/>
             </a:pPr>
             <a:r>
-              <a:rPr lang="en-US" sz="1500" b="1" dirty="0">
+              <a:rPr lang="en-US" sz="1500" dirty="0" err="1">
+                <a:solidFill>
+                  <a:srgbClr val="1C2833"/>
+                </a:solidFill>
+                <a:latin typeface="Meiryo" pitchFamily="34" charset="0"/>
+                <a:ea typeface="Meiryo" pitchFamily="34" charset="-122"/>
+                <a:cs typeface="Meiryo" pitchFamily="34" charset="-120"/>
+              </a:rPr>
+              <a:t>入浴は</a:t>
+            </a:r>
+            <a:r>
+              <a:rPr lang="en-US" sz="1500" b="1" dirty="0" err="1">
                 <a:solidFill>
                   <a:srgbClr val="1D9E75"/>
                 </a:solidFill>
@@ -7898,12 +8418,17 @@
               </a:rPr>
               <a:t>贅沢ではなく、在宅療養を支える医療的・生活的インフラ</a:t>
             </a:r>
-            <a:pPr indent="0" marL="0">
-              <a:lnSpc>
-                <a:spcPct val="130000"/>
-              </a:lnSpc>
-              <a:buNone/>
-            </a:pPr>
+            <a:r>
+              <a:rPr lang="en-US" sz="1500" dirty="0" err="1">
+                <a:solidFill>
+                  <a:srgbClr val="1C2833"/>
+                </a:solidFill>
+                <a:latin typeface="Meiryo" pitchFamily="34" charset="0"/>
+                <a:ea typeface="Meiryo" pitchFamily="34" charset="-122"/>
+                <a:cs typeface="Meiryo" pitchFamily="34" charset="-120"/>
+              </a:rPr>
+              <a:t>です</a:t>
+            </a:r>
             <a:r>
               <a:rPr lang="en-US" sz="1500" dirty="0">
                 <a:solidFill>
@@ -7913,7 +8438,7 @@
                 <a:ea typeface="Meiryo" pitchFamily="34" charset="-122"/>
                 <a:cs typeface="Meiryo" pitchFamily="34" charset="-120"/>
               </a:rPr>
-              <a:t>です。</a:t>
+              <a:t>。</a:t>
             </a:r>
             <a:endParaRPr lang="en-US" sz="1500" dirty="0"/>
           </a:p>
@@ -7970,6 +8495,13 @@
             <a:prstDash val="solid"/>
           </a:ln>
         </p:spPr>
+        <p:txBody>
+          <a:bodyPr/>
+          <a:lstStyle/>
+          <a:p>
+            <a:endParaRPr lang="ja-JP" altLang="en-US"/>
+          </a:p>
+        </p:txBody>
       </p:sp>
       <p:sp>
         <p:nvSpPr>
@@ -7992,7 +8524,7 @@
           <a:bodyPr wrap="square" lIns="0" tIns="0" rIns="0" bIns="0" rtlCol="0" anchor="ctr"/>
           <a:lstStyle/>
           <a:p>
-            <a:pPr algn="ctr" indent="0" marL="0">
+            <a:pPr marL="0" indent="0" algn="ctr">
               <a:buNone/>
             </a:pPr>
             <a:r>
@@ -8031,7 +8563,7 @@
           <a:bodyPr wrap="square" lIns="0" tIns="0" rIns="0" bIns="0" rtlCol="0" anchor="ctr"/>
           <a:lstStyle/>
           <a:p>
-            <a:pPr indent="0" marL="0">
+            <a:pPr marL="0" indent="0">
               <a:buNone/>
             </a:pPr>
             <a:r>
@@ -8070,7 +8602,7 @@
           <a:bodyPr wrap="square" lIns="0" tIns="0" rIns="0" bIns="0" rtlCol="0" anchor="ctr"/>
           <a:lstStyle/>
           <a:p>
-            <a:pPr indent="0" marL="0">
+            <a:pPr marL="0" indent="0">
               <a:buNone/>
             </a:pPr>
             <a:r>
@@ -8114,6 +8646,13 @@
             <a:prstDash val="solid"/>
           </a:ln>
         </p:spPr>
+        <p:txBody>
+          <a:bodyPr/>
+          <a:lstStyle/>
+          <a:p>
+            <a:endParaRPr lang="ja-JP" altLang="en-US"/>
+          </a:p>
+        </p:txBody>
       </p:sp>
       <p:sp>
         <p:nvSpPr>
@@ -8136,11 +8675,11 @@
           <a:bodyPr wrap="square" lIns="0" tIns="0" rIns="0" bIns="0" rtlCol="0" anchor="ctr"/>
           <a:lstStyle/>
           <a:p>
-            <a:pPr indent="0" marL="0">
+            <a:pPr marL="0" indent="0">
               <a:buNone/>
             </a:pPr>
             <a:r>
-              <a:rPr lang="en-US" sz="1500" b="1" dirty="0">
+              <a:rPr lang="en-US" sz="2000" b="1" dirty="0">
                 <a:solidFill>
                   <a:srgbClr val="1A5276"/>
                 </a:solidFill>
@@ -8150,7 +8689,7 @@
               </a:rPr>
               <a:t>① 訪問介護・訪問看護</a:t>
             </a:r>
-            <a:endParaRPr lang="en-US" sz="1500" dirty="0"/>
+            <a:endParaRPr lang="en-US" sz="2000" dirty="0"/>
           </a:p>
         </p:txBody>
       </p:sp>
@@ -8163,7 +8702,7 @@
         <p:spPr>
           <a:xfrm>
             <a:off x="786384" y="2103120"/>
-            <a:ext cx="3112922" cy="2103120"/>
+            <a:ext cx="3144654" cy="2103120"/>
           </a:xfrm>
           <a:prstGeom prst="rect">
             <a:avLst/>
@@ -8175,14 +8714,14 @@
           <a:bodyPr wrap="square" lIns="0" tIns="0" rIns="0" bIns="0" rtlCol="0" anchor="t"/>
           <a:lstStyle/>
           <a:p>
-            <a:pPr indent="0" marL="0">
+            <a:pPr marL="0" indent="0">
               <a:lnSpc>
                 <a:spcPct val="125000"/>
               </a:lnSpc>
               <a:buNone/>
             </a:pPr>
             <a:r>
-              <a:rPr lang="en-US" sz="1250" dirty="0">
+              <a:rPr lang="en-US" sz="1600" dirty="0" err="1">
                 <a:solidFill>
                   <a:srgbClr val="1C2833"/>
                 </a:solidFill>
@@ -8190,17 +8729,22 @@
                 <a:ea typeface="Meiryo" pitchFamily="34" charset="-122"/>
                 <a:cs typeface="Meiryo" pitchFamily="34" charset="-120"/>
               </a:rPr>
-              <a:t>自宅の浴室を使い、ヘルパーや看護師が介助。清拭・部分浴も含む。
+              <a:t>自宅の浴室を使い、ヘルパーや看護師が清拭・部分浴も含む</a:t>
+            </a:r>
+            <a:r>
+              <a:rPr lang="en-US" sz="1600" dirty="0">
+                <a:solidFill>
+                  <a:srgbClr val="1C2833"/>
+                </a:solidFill>
+                <a:latin typeface="Meiryo" pitchFamily="34" charset="0"/>
+                <a:ea typeface="Meiryo" pitchFamily="34" charset="-122"/>
+                <a:cs typeface="Meiryo" pitchFamily="34" charset="-120"/>
+              </a:rPr>
+              <a:t>。
 </a:t>
             </a:r>
-            <a:pPr indent="0" marL="0">
-              <a:lnSpc>
-                <a:spcPct val="125000"/>
-              </a:lnSpc>
-              <a:buNone/>
-            </a:pPr>
-            <a:r>
-              <a:rPr lang="en-US" sz="1250" b="1" dirty="0">
+            <a:r>
+              <a:rPr lang="en-US" sz="1600" b="1" dirty="0">
                 <a:solidFill>
                   <a:srgbClr val="1D9E75"/>
                 </a:solidFill>
@@ -8210,14 +8754,8 @@
               </a:rPr>
               <a:t>限界：</a:t>
             </a:r>
-            <a:pPr indent="0" marL="0">
-              <a:lnSpc>
-                <a:spcPct val="125000"/>
-              </a:lnSpc>
-              <a:buNone/>
-            </a:pPr>
-            <a:r>
-              <a:rPr lang="en-US" sz="1250" dirty="0">
+            <a:r>
+              <a:rPr lang="en-US" sz="1600" dirty="0">
                 <a:solidFill>
                   <a:srgbClr val="1C2833"/>
                 </a:solidFill>
@@ -8227,7 +8765,7 @@
               </a:rPr>
               <a:t>浴室環境に左右され原則1名対応。全介助や寝たきりの方は難しい。</a:t>
             </a:r>
-            <a:endParaRPr lang="en-US" sz="1250" dirty="0"/>
+            <a:endParaRPr lang="en-US" sz="1600" dirty="0"/>
           </a:p>
         </p:txBody>
       </p:sp>
@@ -8239,7 +8777,7 @@
         </p:nvSpPr>
         <p:spPr>
           <a:xfrm>
-            <a:off x="4319930" y="1517904"/>
+            <a:off x="4301643" y="1517904"/>
             <a:ext cx="3551834" cy="2834640"/>
           </a:xfrm>
           <a:prstGeom prst="roundRect">
@@ -8257,6 +8795,13 @@
             <a:prstDash val="solid"/>
           </a:ln>
         </p:spPr>
+        <p:txBody>
+          <a:bodyPr/>
+          <a:lstStyle/>
+          <a:p>
+            <a:endParaRPr lang="ja-JP" altLang="en-US"/>
+          </a:p>
+        </p:txBody>
       </p:sp>
       <p:sp>
         <p:nvSpPr>
@@ -8279,7 +8824,7 @@
           <a:bodyPr wrap="square" lIns="0" tIns="0" rIns="0" bIns="0" rtlCol="0" anchor="ctr"/>
           <a:lstStyle/>
           <a:p>
-            <a:pPr indent="0" marL="0">
+            <a:pPr marL="0" indent="0">
               <a:buNone/>
             </a:pPr>
             <a:r>
@@ -8291,7 +8836,18 @@
                 <a:ea typeface="Meiryo" pitchFamily="34" charset="-122"/>
                 <a:cs typeface="Meiryo" pitchFamily="34" charset="-120"/>
               </a:rPr>
-              <a:t>② デイサービス入浴</a:t>
+              <a:t>② </a:t>
+            </a:r>
+            <a:r>
+              <a:rPr lang="en-US" b="1" dirty="0">
+                <a:solidFill>
+                  <a:srgbClr val="1A5276"/>
+                </a:solidFill>
+                <a:latin typeface="Meiryo" pitchFamily="34" charset="0"/>
+                <a:ea typeface="Meiryo" pitchFamily="34" charset="-122"/>
+                <a:cs typeface="Meiryo" pitchFamily="34" charset="-120"/>
+              </a:rPr>
+              <a:t>デイサービス入浴</a:t>
             </a:r>
             <a:endParaRPr lang="en-US" sz="1500" dirty="0"/>
           </a:p>
@@ -8318,14 +8874,14 @@
           <a:bodyPr wrap="square" lIns="0" tIns="0" rIns="0" bIns="0" rtlCol="0" anchor="t"/>
           <a:lstStyle/>
           <a:p>
-            <a:pPr indent="0" marL="0">
+            <a:pPr marL="0" indent="0">
               <a:lnSpc>
                 <a:spcPct val="125000"/>
               </a:lnSpc>
               <a:buNone/>
             </a:pPr>
             <a:r>
-              <a:rPr lang="en-US" sz="1250" dirty="0">
+              <a:rPr lang="en-US" sz="1600" dirty="0">
                 <a:solidFill>
                   <a:srgbClr val="1C2833"/>
                 </a:solidFill>
@@ -8336,14 +8892,8 @@
               <a:t>週複数回、社会参加とあわせて実施できる。
 </a:t>
             </a:r>
-            <a:pPr indent="0" marL="0">
-              <a:lnSpc>
-                <a:spcPct val="125000"/>
-              </a:lnSpc>
-              <a:buNone/>
-            </a:pPr>
-            <a:r>
-              <a:rPr lang="en-US" sz="1250" b="1" dirty="0">
+            <a:r>
+              <a:rPr lang="en-US" sz="1600" b="1" dirty="0">
                 <a:solidFill>
                   <a:srgbClr val="1D9E75"/>
                 </a:solidFill>
@@ -8353,14 +8903,8 @@
               </a:rPr>
               <a:t>限界：</a:t>
             </a:r>
-            <a:pPr indent="0" marL="0">
-              <a:lnSpc>
-                <a:spcPct val="125000"/>
-              </a:lnSpc>
-              <a:buNone/>
-            </a:pPr>
-            <a:r>
-              <a:rPr lang="en-US" sz="1250" dirty="0">
+            <a:r>
+              <a:rPr lang="en-US" sz="1600" dirty="0">
                 <a:solidFill>
                   <a:srgbClr val="1C2833"/>
                 </a:solidFill>
@@ -8370,7 +8914,7 @@
               </a:rPr>
               <a:t>通所という外出が前提。寝たきり・全介助・医療的ケアがあると受け入れ困難。</a:t>
             </a:r>
-            <a:endParaRPr lang="en-US" sz="1250" dirty="0"/>
+            <a:endParaRPr lang="en-US" sz="1600" dirty="0"/>
           </a:p>
         </p:txBody>
       </p:sp>
@@ -8382,7 +8926,7 @@
         </p:nvSpPr>
         <p:spPr>
           <a:xfrm>
-            <a:off x="8072933" y="1517904"/>
+            <a:off x="8072933" y="1536192"/>
             <a:ext cx="3551834" cy="2834640"/>
           </a:xfrm>
           <a:prstGeom prst="roundRect">
@@ -8400,6 +8944,13 @@
             <a:prstDash val="solid"/>
           </a:ln>
         </p:spPr>
+        <p:txBody>
+          <a:bodyPr/>
+          <a:lstStyle/>
+          <a:p>
+            <a:endParaRPr lang="ja-JP" altLang="en-US"/>
+          </a:p>
+        </p:txBody>
       </p:sp>
       <p:sp>
         <p:nvSpPr>
@@ -8422,11 +8973,11 @@
           <a:bodyPr wrap="square" lIns="0" tIns="0" rIns="0" bIns="0" rtlCol="0" anchor="ctr"/>
           <a:lstStyle/>
           <a:p>
-            <a:pPr indent="0" marL="0">
+            <a:pPr marL="0" indent="0">
               <a:buNone/>
             </a:pPr>
             <a:r>
-              <a:rPr lang="en-US" sz="1500" b="1" dirty="0">
+              <a:rPr lang="en-US" sz="2000" b="1" dirty="0">
                 <a:solidFill>
                   <a:srgbClr val="1D9E75"/>
                 </a:solidFill>
@@ -8434,9 +8985,31 @@
                 <a:ea typeface="Meiryo" pitchFamily="34" charset="-122"/>
                 <a:cs typeface="Meiryo" pitchFamily="34" charset="-120"/>
               </a:rPr>
-              <a:t>③ 訪問入浴介護</a:t>
-            </a:r>
-            <a:endParaRPr lang="en-US" sz="1500" dirty="0"/>
+              <a:t>③</a:t>
+            </a:r>
+            <a:r>
+              <a:rPr lang="en-US" sz="1400" b="1" dirty="0">
+                <a:solidFill>
+                  <a:srgbClr val="1D9E75"/>
+                </a:solidFill>
+                <a:latin typeface="Meiryo" pitchFamily="34" charset="0"/>
+                <a:ea typeface="Meiryo" pitchFamily="34" charset="-122"/>
+                <a:cs typeface="Meiryo" pitchFamily="34" charset="-120"/>
+              </a:rPr>
+              <a:t> </a:t>
+            </a:r>
+            <a:r>
+              <a:rPr lang="en-US" sz="2000" b="1" dirty="0">
+                <a:solidFill>
+                  <a:srgbClr val="1D9E75"/>
+                </a:solidFill>
+                <a:latin typeface="Meiryo" pitchFamily="34" charset="0"/>
+                <a:ea typeface="Meiryo" pitchFamily="34" charset="-122"/>
+                <a:cs typeface="Meiryo" pitchFamily="34" charset="-120"/>
+              </a:rPr>
+              <a:t>訪問入浴介護</a:t>
+            </a:r>
+            <a:endParaRPr lang="en-US" sz="1400" dirty="0"/>
           </a:p>
         </p:txBody>
       </p:sp>
@@ -8461,14 +9034,14 @@
           <a:bodyPr wrap="square" lIns="0" tIns="0" rIns="0" bIns="0" rtlCol="0" anchor="t"/>
           <a:lstStyle/>
           <a:p>
-            <a:pPr indent="0" marL="0">
+            <a:pPr marL="0" indent="0">
               <a:lnSpc>
                 <a:spcPct val="125000"/>
               </a:lnSpc>
               <a:buNone/>
             </a:pPr>
             <a:r>
-              <a:rPr lang="en-US" sz="1250" dirty="0">
+              <a:rPr lang="en-US" dirty="0">
                 <a:solidFill>
                   <a:srgbClr val="1C2833"/>
                 </a:solidFill>
@@ -8479,14 +9052,8 @@
               <a:t>専用浴槽を持ち込み、自宅で全身浴を提供。
 </a:t>
             </a:r>
-            <a:pPr indent="0" marL="0">
-              <a:lnSpc>
-                <a:spcPct val="125000"/>
-              </a:lnSpc>
-              <a:buNone/>
-            </a:pPr>
-            <a:r>
-              <a:rPr lang="en-US" sz="1250" b="1" dirty="0">
+            <a:r>
+              <a:rPr lang="en-US" b="1" dirty="0">
                 <a:solidFill>
                   <a:srgbClr val="1D9E75"/>
                 </a:solidFill>
@@ -8496,14 +9063,8 @@
               </a:rPr>
               <a:t>特徴：</a:t>
             </a:r>
-            <a:pPr indent="0" marL="0">
-              <a:lnSpc>
-                <a:spcPct val="125000"/>
-              </a:lnSpc>
-              <a:buNone/>
-            </a:pPr>
-            <a:r>
-              <a:rPr lang="en-US" sz="1250" dirty="0">
+            <a:r>
+              <a:rPr lang="en-US" dirty="0">
                 <a:solidFill>
                   <a:srgbClr val="1C2833"/>
                 </a:solidFill>
@@ -8513,7 +9074,7 @@
               </a:rPr>
               <a:t>看護師同行で重度でも対応可。移動の負担がゼロ。</a:t>
             </a:r>
-            <a:endParaRPr lang="en-US" sz="1250" dirty="0"/>
+            <a:endParaRPr lang="en-US" dirty="0"/>
           </a:p>
         </p:txBody>
       </p:sp>
@@ -8543,6 +9104,13 @@
             <a:prstDash val="solid"/>
           </a:ln>
         </p:spPr>
+        <p:txBody>
+          <a:bodyPr/>
+          <a:lstStyle/>
+          <a:p>
+            <a:endParaRPr lang="ja-JP" altLang="en-US"/>
+          </a:p>
+        </p:txBody>
       </p:sp>
       <p:sp>
         <p:nvSpPr>
@@ -8565,11 +9133,11 @@
           <a:bodyPr wrap="square" lIns="0" tIns="0" rIns="0" bIns="0" rtlCol="0" anchor="ctr"/>
           <a:lstStyle/>
           <a:p>
-            <a:pPr indent="0" marL="0">
+            <a:pPr marL="0" indent="0">
               <a:buNone/>
             </a:pPr>
             <a:r>
-              <a:rPr lang="en-US" sz="1500" b="1" dirty="0">
+              <a:rPr lang="en-US" b="1" dirty="0">
                 <a:solidFill>
                   <a:srgbClr val="B9770E"/>
                 </a:solidFill>
@@ -8579,11 +9147,46 @@
               </a:rPr>
               <a:t>空白地帯：</a:t>
             </a:r>
-            <a:pPr indent="0" marL="0">
+            <a:r>
+              <a:rPr lang="en-US" dirty="0">
+                <a:solidFill>
+                  <a:srgbClr val="1C2833"/>
+                </a:solidFill>
+                <a:latin typeface="Meiryo" pitchFamily="34" charset="0"/>
+                <a:ea typeface="Meiryo" pitchFamily="34" charset="-122"/>
+                <a:cs typeface="Meiryo" pitchFamily="34" charset="-120"/>
+              </a:rPr>
+              <a:t>「</a:t>
+            </a:r>
+            <a:r>
+              <a:rPr lang="en-US" dirty="0" err="1">
+                <a:solidFill>
+                  <a:srgbClr val="1C2833"/>
+                </a:solidFill>
+                <a:latin typeface="Meiryo" pitchFamily="34" charset="0"/>
+                <a:ea typeface="Meiryo" pitchFamily="34" charset="-122"/>
+                <a:cs typeface="Meiryo" pitchFamily="34" charset="-120"/>
+              </a:rPr>
+              <a:t>デイには行けない、でも清拭では足りない</a:t>
+            </a:r>
+            <a:r>
+              <a:rPr lang="en-US" dirty="0">
+                <a:solidFill>
+                  <a:srgbClr val="1C2833"/>
+                </a:solidFill>
+                <a:latin typeface="Meiryo" pitchFamily="34" charset="0"/>
+                <a:ea typeface="Meiryo" pitchFamily="34" charset="-122"/>
+                <a:cs typeface="Meiryo" pitchFamily="34" charset="-120"/>
+              </a:rPr>
+              <a:t>」</a:t>
+            </a:r>
+          </a:p>
+          <a:p>
+            <a:pPr marL="0" indent="0">
               <a:buNone/>
             </a:pPr>
             <a:r>
-              <a:rPr lang="en-US" sz="1500" dirty="0">
+              <a:rPr lang="ja-JP" altLang="en-US" dirty="0">
                 <a:solidFill>
                   <a:srgbClr val="1C2833"/>
                 </a:solidFill>
@@ -8591,9 +9194,31 @@
                 <a:ea typeface="Meiryo" pitchFamily="34" charset="-122"/>
                 <a:cs typeface="Meiryo" pitchFamily="34" charset="-120"/>
               </a:rPr>
-              <a:t>「デイには行けない、でも清拭では足りない」——重度化した在宅療養者ほど、この谷間に落ちます。</a:t>
-            </a:r>
-            <a:endParaRPr lang="en-US" sz="1500" dirty="0"/>
+              <a:t>　　　　　</a:t>
+            </a:r>
+            <a:r>
+              <a:rPr lang="en-US" dirty="0" err="1">
+                <a:solidFill>
+                  <a:srgbClr val="1C2833"/>
+                </a:solidFill>
+                <a:latin typeface="Meiryo" pitchFamily="34" charset="0"/>
+                <a:ea typeface="Meiryo" pitchFamily="34" charset="-122"/>
+                <a:cs typeface="Meiryo" pitchFamily="34" charset="-120"/>
+              </a:rPr>
+              <a:t>重度化した在宅療養者ほど、この谷間に落ちます</a:t>
+            </a:r>
+            <a:r>
+              <a:rPr lang="en-US" dirty="0">
+                <a:solidFill>
+                  <a:srgbClr val="1C2833"/>
+                </a:solidFill>
+                <a:latin typeface="Meiryo" pitchFamily="34" charset="0"/>
+                <a:ea typeface="Meiryo" pitchFamily="34" charset="-122"/>
+                <a:cs typeface="Meiryo" pitchFamily="34" charset="-120"/>
+              </a:rPr>
+              <a:t>。</a:t>
+            </a:r>
+            <a:endParaRPr lang="en-US" dirty="0"/>
           </a:p>
         </p:txBody>
       </p:sp>
@@ -8648,6 +9273,13 @@
             <a:prstDash val="solid"/>
           </a:ln>
         </p:spPr>
+        <p:txBody>
+          <a:bodyPr/>
+          <a:lstStyle/>
+          <a:p>
+            <a:endParaRPr lang="ja-JP" altLang="en-US"/>
+          </a:p>
+        </p:txBody>
       </p:sp>
       <p:sp>
         <p:nvSpPr>
@@ -8670,7 +9302,7 @@
           <a:bodyPr wrap="square" lIns="0" tIns="0" rIns="0" bIns="0" rtlCol="0" anchor="ctr"/>
           <a:lstStyle/>
           <a:p>
-            <a:pPr algn="ctr" indent="0" marL="0">
+            <a:pPr marL="0" indent="0" algn="ctr">
               <a:buNone/>
             </a:pPr>
             <a:r>
@@ -8709,7 +9341,7 @@
           <a:bodyPr wrap="square" lIns="0" tIns="0" rIns="0" bIns="0" rtlCol="0" anchor="ctr"/>
           <a:lstStyle/>
           <a:p>
-            <a:pPr indent="0" marL="0">
+            <a:pPr marL="0" indent="0">
               <a:buNone/>
             </a:pPr>
             <a:r>
@@ -8748,7 +9380,7 @@
           <a:bodyPr wrap="square" lIns="0" tIns="0" rIns="0" bIns="0" rtlCol="0" anchor="ctr"/>
           <a:lstStyle/>
           <a:p>
-            <a:pPr indent="0" marL="0">
+            <a:pPr marL="0" indent="0">
               <a:buNone/>
             </a:pPr>
             <a:r>
@@ -8768,7 +9400,7 @@
       </p:sp>
       <p:graphicFrame>
         <p:nvGraphicFramePr>
-          <p:cNvPr id="5" name="Table 0"/>
+          <p:cNvPr id="6" name="Table 0"/>
           <p:cNvGraphicFramePr>
             <a:graphicFrameLocks noGrp="1"/>
           </p:cNvGraphicFramePr>
@@ -8782,19 +9414,55 @@
         </p:nvGraphicFramePr>
         <p:xfrm>
           <a:off x="566928" y="1444752"/>
-          <a:ext cx="11057839" cy="914400"/>
+          <a:ext cx="11045952" cy="2962656"/>
         </p:xfrm>
         <a:graphic>
           <a:graphicData uri="http://schemas.openxmlformats.org/drawingml/2006/table">
             <a:tbl>
               <a:tblPr/>
               <a:tblGrid>
-                <a:gridCol w="3017520"/>
-                <a:gridCol w="1664208"/>
-                <a:gridCol w="1600200"/>
-                <a:gridCol w="1600200"/>
-                <a:gridCol w="1600200"/>
-                <a:gridCol w="1563624"/>
+                <a:gridCol w="3017520">
+                  <a:extLst>
+                    <a:ext uri="{9D8B030D-6E8A-4147-A177-3AD203B41FA5}">
+                      <a16:colId xmlns:a16="http://schemas.microsoft.com/office/drawing/2014/main" val="20000"/>
+                    </a:ext>
+                  </a:extLst>
+                </a:gridCol>
+                <a:gridCol w="1664208">
+                  <a:extLst>
+                    <a:ext uri="{9D8B030D-6E8A-4147-A177-3AD203B41FA5}">
+                      <a16:colId xmlns:a16="http://schemas.microsoft.com/office/drawing/2014/main" val="20001"/>
+                    </a:ext>
+                  </a:extLst>
+                </a:gridCol>
+                <a:gridCol w="1600200">
+                  <a:extLst>
+                    <a:ext uri="{9D8B030D-6E8A-4147-A177-3AD203B41FA5}">
+                      <a16:colId xmlns:a16="http://schemas.microsoft.com/office/drawing/2014/main" val="20002"/>
+                    </a:ext>
+                  </a:extLst>
+                </a:gridCol>
+                <a:gridCol w="1600200">
+                  <a:extLst>
+                    <a:ext uri="{9D8B030D-6E8A-4147-A177-3AD203B41FA5}">
+                      <a16:colId xmlns:a16="http://schemas.microsoft.com/office/drawing/2014/main" val="20003"/>
+                    </a:ext>
+                  </a:extLst>
+                </a:gridCol>
+                <a:gridCol w="1600200">
+                  <a:extLst>
+                    <a:ext uri="{9D8B030D-6E8A-4147-A177-3AD203B41FA5}">
+                      <a16:colId xmlns:a16="http://schemas.microsoft.com/office/drawing/2014/main" val="20004"/>
+                    </a:ext>
+                  </a:extLst>
+                </a:gridCol>
+                <a:gridCol w="1563624">
+                  <a:extLst>
+                    <a:ext uri="{9D8B030D-6E8A-4147-A177-3AD203B41FA5}">
+                      <a16:colId xmlns:a16="http://schemas.microsoft.com/office/drawing/2014/main" val="20005"/>
+                    </a:ext>
+                  </a:extLst>
+                </a:gridCol>
               </a:tblGrid>
               <a:tr h="329184">
                 <a:tc>
@@ -8802,7 +9470,7 @@
                     <a:bodyPr/>
                     <a:lstStyle/>
                     <a:p>
-                      <a:pPr algn="ctr" indent="0" marL="0">
+                      <a:pPr marL="0" indent="0" algn="ctr">
                         <a:buNone/>
                       </a:pPr>
                       <a:r>
@@ -8823,7 +9491,7 @@
                       </a:endParaRPr>
                     </a:p>
                   </a:txBody>
-                  <a:tcPr marL="91440" marR="91440" marT="45720" marB="45720" anchor="ctr">
+                  <a:tcPr anchor="ctr">
                     <a:lnL w="12700" cap="flat" cmpd="sng" algn="ctr">
                       <a:solidFill>
                         <a:srgbClr val="E5E9EC"/>
@@ -8870,7 +9538,7 @@
                     <a:bodyPr/>
                     <a:lstStyle/>
                     <a:p>
-                      <a:pPr algn="ctr" indent="0" marL="0">
+                      <a:pPr marL="0" indent="0" algn="ctr">
                         <a:buNone/>
                       </a:pPr>
                       <a:r>
@@ -8891,7 +9559,7 @@
                       </a:endParaRPr>
                     </a:p>
                   </a:txBody>
-                  <a:tcPr marL="91440" marR="91440" marT="45720" marB="45720" anchor="ctr">
+                  <a:tcPr anchor="ctr">
                     <a:lnL w="12700" cap="flat" cmpd="sng" algn="ctr">
                       <a:solidFill>
                         <a:srgbClr val="E5E9EC"/>
@@ -8938,7 +9606,7 @@
                     <a:bodyPr/>
                     <a:lstStyle/>
                     <a:p>
-                      <a:pPr algn="ctr" indent="0" marL="0">
+                      <a:pPr marL="0" indent="0" algn="ctr">
                         <a:buNone/>
                       </a:pPr>
                       <a:r>
@@ -8959,7 +9627,7 @@
                       </a:endParaRPr>
                     </a:p>
                   </a:txBody>
-                  <a:tcPr marL="91440" marR="91440" marT="45720" marB="45720" anchor="ctr">
+                  <a:tcPr anchor="ctr">
                     <a:lnL w="12700" cap="flat" cmpd="sng" algn="ctr">
                       <a:solidFill>
                         <a:srgbClr val="E5E9EC"/>
@@ -9006,7 +9674,7 @@
                     <a:bodyPr/>
                     <a:lstStyle/>
                     <a:p>
-                      <a:pPr algn="ctr" indent="0" marL="0">
+                      <a:pPr marL="0" indent="0" algn="ctr">
                         <a:buNone/>
                       </a:pPr>
                       <a:r>
@@ -9027,7 +9695,7 @@
                       </a:endParaRPr>
                     </a:p>
                   </a:txBody>
-                  <a:tcPr marL="91440" marR="91440" marT="45720" marB="45720" anchor="ctr">
+                  <a:tcPr anchor="ctr">
                     <a:lnL w="12700" cap="flat" cmpd="sng" algn="ctr">
                       <a:solidFill>
                         <a:srgbClr val="E5E9EC"/>
@@ -9074,7 +9742,7 @@
                     <a:bodyPr/>
                     <a:lstStyle/>
                     <a:p>
-                      <a:pPr algn="ctr" indent="0" marL="0">
+                      <a:pPr marL="0" indent="0" algn="ctr">
                         <a:buNone/>
                       </a:pPr>
                       <a:r>
@@ -9095,7 +9763,7 @@
                       </a:endParaRPr>
                     </a:p>
                   </a:txBody>
-                  <a:tcPr marL="91440" marR="91440" marT="45720" marB="45720" anchor="ctr">
+                  <a:tcPr anchor="ctr">
                     <a:lnL w="12700" cap="flat" cmpd="sng" algn="ctr">
                       <a:solidFill>
                         <a:srgbClr val="E5E9EC"/>
@@ -9142,7 +9810,7 @@
                     <a:bodyPr/>
                     <a:lstStyle/>
                     <a:p>
-                      <a:pPr algn="ctr" indent="0" marL="0">
+                      <a:pPr marL="0" indent="0" algn="ctr">
                         <a:buNone/>
                       </a:pPr>
                       <a:r>
@@ -9163,7 +9831,7 @@
                       </a:endParaRPr>
                     </a:p>
                   </a:txBody>
-                  <a:tcPr marL="91440" marR="91440" marT="45720" marB="45720" anchor="ctr">
+                  <a:tcPr anchor="ctr">
                     <a:lnL w="12700" cap="flat" cmpd="sng" algn="ctr">
                       <a:solidFill>
                         <a:srgbClr val="E5E9EC"/>
@@ -9205,6 +9873,11 @@
                     </a:solidFill>
                   </a:tcPr>
                 </a:tc>
+                <a:extLst>
+                  <a:ext uri="{0D108BD9-81ED-4DB2-BD59-A6C34878D82A}">
+                    <a16:rowId xmlns:a16="http://schemas.microsoft.com/office/drawing/2014/main" val="10000"/>
+                  </a:ext>
+                </a:extLst>
               </a:tr>
               <a:tr h="329184">
                 <a:tc>
@@ -9212,7 +9885,7 @@
                     <a:bodyPr/>
                     <a:lstStyle/>
                     <a:p>
-                      <a:pPr algn="l" indent="0" marL="0">
+                      <a:pPr marL="0" indent="0" algn="l">
                         <a:buNone/>
                       </a:pPr>
                       <a:r>
@@ -9233,7 +9906,7 @@
                       </a:endParaRPr>
                     </a:p>
                   </a:txBody>
-                  <a:tcPr marL="91440" marR="91440" marT="45720" marB="45720" anchor="ctr">
+                  <a:tcPr anchor="ctr">
                     <a:lnL w="12700" cap="flat" cmpd="sng" algn="ctr">
                       <a:solidFill>
                         <a:srgbClr val="E5E9EC"/>
@@ -9280,7 +9953,7 @@
                     <a:bodyPr/>
                     <a:lstStyle/>
                     <a:p>
-                      <a:pPr algn="ctr" indent="0" marL="0">
+                      <a:pPr marL="0" indent="0" algn="ctr">
                         <a:buNone/>
                       </a:pPr>
                       <a:r>
@@ -9301,7 +9974,7 @@
                       </a:endParaRPr>
                     </a:p>
                   </a:txBody>
-                  <a:tcPr marL="91440" marR="91440" marT="45720" marB="45720" anchor="ctr">
+                  <a:tcPr anchor="ctr">
                     <a:lnL w="12700" cap="flat" cmpd="sng" algn="ctr">
                       <a:solidFill>
                         <a:srgbClr val="E5E9EC"/>
@@ -9348,7 +10021,7 @@
                     <a:bodyPr/>
                     <a:lstStyle/>
                     <a:p>
-                      <a:pPr algn="ctr" indent="0" marL="0">
+                      <a:pPr marL="0" indent="0" algn="ctr">
                         <a:buNone/>
                       </a:pPr>
                       <a:r>
@@ -9369,7 +10042,7 @@
                       </a:endParaRPr>
                     </a:p>
                   </a:txBody>
-                  <a:tcPr marL="91440" marR="91440" marT="45720" marB="45720" anchor="ctr">
+                  <a:tcPr anchor="ctr">
                     <a:lnL w="12700" cap="flat" cmpd="sng" algn="ctr">
                       <a:solidFill>
                         <a:srgbClr val="E5E9EC"/>
@@ -9413,7 +10086,7 @@
                     <a:bodyPr/>
                     <a:lstStyle/>
                     <a:p>
-                      <a:pPr algn="ctr" indent="0" marL="0">
+                      <a:pPr marL="0" indent="0" algn="ctr">
                         <a:buNone/>
                       </a:pPr>
                       <a:r>
@@ -9434,7 +10107,7 @@
                       </a:endParaRPr>
                     </a:p>
                   </a:txBody>
-                  <a:tcPr marL="91440" marR="91440" marT="45720" marB="45720" anchor="ctr">
+                  <a:tcPr anchor="ctr">
                     <a:lnL w="12700" cap="flat" cmpd="sng" algn="ctr">
                       <a:solidFill>
                         <a:srgbClr val="E5E9EC"/>
@@ -9478,7 +10151,7 @@
                     <a:bodyPr/>
                     <a:lstStyle/>
                     <a:p>
-                      <a:pPr algn="ctr" indent="0" marL="0">
+                      <a:pPr marL="0" indent="0" algn="ctr">
                         <a:buNone/>
                       </a:pPr>
                       <a:r>
@@ -9499,7 +10172,7 @@
                       </a:endParaRPr>
                     </a:p>
                   </a:txBody>
-                  <a:tcPr marL="91440" marR="91440" marT="45720" marB="45720" anchor="ctr">
+                  <a:tcPr anchor="ctr">
                     <a:lnL w="12700" cap="flat" cmpd="sng" algn="ctr">
                       <a:solidFill>
                         <a:srgbClr val="E5E9EC"/>
@@ -9543,7 +10216,7 @@
                     <a:bodyPr/>
                     <a:lstStyle/>
                     <a:p>
-                      <a:pPr algn="ctr" indent="0" marL="0">
+                      <a:pPr marL="0" indent="0" algn="ctr">
                         <a:buNone/>
                       </a:pPr>
                       <a:r>
@@ -9564,7 +10237,7 @@
                       </a:endParaRPr>
                     </a:p>
                   </a:txBody>
-                  <a:tcPr marL="91440" marR="91440" marT="45720" marB="45720" anchor="ctr">
+                  <a:tcPr anchor="ctr">
                     <a:lnL w="12700" cap="flat" cmpd="sng" algn="ctr">
                       <a:solidFill>
                         <a:srgbClr val="E5E9EC"/>
@@ -9603,6 +10276,11 @@
                     </a:lnB>
                   </a:tcPr>
                 </a:tc>
+                <a:extLst>
+                  <a:ext uri="{0D108BD9-81ED-4DB2-BD59-A6C34878D82A}">
+                    <a16:rowId xmlns:a16="http://schemas.microsoft.com/office/drawing/2014/main" val="10001"/>
+                  </a:ext>
+                </a:extLst>
               </a:tr>
               <a:tr h="329184">
                 <a:tc>
@@ -9610,7 +10288,7 @@
                     <a:bodyPr/>
                     <a:lstStyle/>
                     <a:p>
-                      <a:pPr algn="l" indent="0" marL="0">
+                      <a:pPr marL="0" indent="0" algn="l">
                         <a:buNone/>
                       </a:pPr>
                       <a:r>
@@ -9631,7 +10309,7 @@
                       </a:endParaRPr>
                     </a:p>
                   </a:txBody>
-                  <a:tcPr marL="91440" marR="91440" marT="45720" marB="45720" anchor="ctr">
+                  <a:tcPr anchor="ctr">
                     <a:lnL w="12700" cap="flat" cmpd="sng" algn="ctr">
                       <a:solidFill>
                         <a:srgbClr val="E5E9EC"/>
@@ -9678,7 +10356,7 @@
                     <a:bodyPr/>
                     <a:lstStyle/>
                     <a:p>
-                      <a:pPr algn="ctr" indent="0" marL="0">
+                      <a:pPr marL="0" indent="0" algn="ctr">
                         <a:buNone/>
                       </a:pPr>
                       <a:r>
@@ -9699,7 +10377,7 @@
                       </a:endParaRPr>
                     </a:p>
                   </a:txBody>
-                  <a:tcPr marL="91440" marR="91440" marT="45720" marB="45720" anchor="ctr">
+                  <a:tcPr anchor="ctr">
                     <a:lnL w="12700" cap="flat" cmpd="sng" algn="ctr">
                       <a:solidFill>
                         <a:srgbClr val="E5E9EC"/>
@@ -9746,7 +10424,7 @@
                     <a:bodyPr/>
                     <a:lstStyle/>
                     <a:p>
-                      <a:pPr algn="ctr" indent="0" marL="0">
+                      <a:pPr marL="0" indent="0" algn="ctr">
                         <a:buNone/>
                       </a:pPr>
                       <a:r>
@@ -9767,7 +10445,7 @@
                       </a:endParaRPr>
                     </a:p>
                   </a:txBody>
-                  <a:tcPr marL="91440" marR="91440" marT="45720" marB="45720" anchor="ctr">
+                  <a:tcPr anchor="ctr">
                     <a:lnL w="12700" cap="flat" cmpd="sng" algn="ctr">
                       <a:solidFill>
                         <a:srgbClr val="E5E9EC"/>
@@ -9811,7 +10489,7 @@
                     <a:bodyPr/>
                     <a:lstStyle/>
                     <a:p>
-                      <a:pPr algn="ctr" indent="0" marL="0">
+                      <a:pPr marL="0" indent="0" algn="ctr">
                         <a:buNone/>
                       </a:pPr>
                       <a:r>
@@ -9832,7 +10510,7 @@
                       </a:endParaRPr>
                     </a:p>
                   </a:txBody>
-                  <a:tcPr marL="91440" marR="91440" marT="45720" marB="45720" anchor="ctr">
+                  <a:tcPr anchor="ctr">
                     <a:lnL w="12700" cap="flat" cmpd="sng" algn="ctr">
                       <a:solidFill>
                         <a:srgbClr val="E5E9EC"/>
@@ -9876,7 +10554,7 @@
                     <a:bodyPr/>
                     <a:lstStyle/>
                     <a:p>
-                      <a:pPr algn="ctr" indent="0" marL="0">
+                      <a:pPr marL="0" indent="0" algn="ctr">
                         <a:buNone/>
                       </a:pPr>
                       <a:r>
@@ -9897,7 +10575,7 @@
                       </a:endParaRPr>
                     </a:p>
                   </a:txBody>
-                  <a:tcPr marL="91440" marR="91440" marT="45720" marB="45720" anchor="ctr">
+                  <a:tcPr anchor="ctr">
                     <a:lnL w="12700" cap="flat" cmpd="sng" algn="ctr">
                       <a:solidFill>
                         <a:srgbClr val="E5E9EC"/>
@@ -9941,7 +10619,7 @@
                     <a:bodyPr/>
                     <a:lstStyle/>
                     <a:p>
-                      <a:pPr algn="ctr" indent="0" marL="0">
+                      <a:pPr marL="0" indent="0" algn="ctr">
                         <a:buNone/>
                       </a:pPr>
                       <a:r>
@@ -9962,7 +10640,7 @@
                       </a:endParaRPr>
                     </a:p>
                   </a:txBody>
-                  <a:tcPr marL="91440" marR="91440" marT="45720" marB="45720" anchor="ctr">
+                  <a:tcPr anchor="ctr">
                     <a:lnL w="12700" cap="flat" cmpd="sng" algn="ctr">
                       <a:solidFill>
                         <a:srgbClr val="E5E9EC"/>
@@ -10001,6 +10679,11 @@
                     </a:lnB>
                   </a:tcPr>
                 </a:tc>
+                <a:extLst>
+                  <a:ext uri="{0D108BD9-81ED-4DB2-BD59-A6C34878D82A}">
+                    <a16:rowId xmlns:a16="http://schemas.microsoft.com/office/drawing/2014/main" val="10002"/>
+                  </a:ext>
+                </a:extLst>
               </a:tr>
               <a:tr h="329184">
                 <a:tc>
@@ -10008,7 +10691,7 @@
                     <a:bodyPr/>
                     <a:lstStyle/>
                     <a:p>
-                      <a:pPr algn="l" indent="0" marL="0">
+                      <a:pPr marL="0" indent="0" algn="l">
                         <a:buNone/>
                       </a:pPr>
                       <a:r>
@@ -10029,7 +10712,7 @@
                       </a:endParaRPr>
                     </a:p>
                   </a:txBody>
-                  <a:tcPr marL="91440" marR="91440" marT="45720" marB="45720" anchor="ctr">
+                  <a:tcPr anchor="ctr">
                     <a:lnL w="12700" cap="flat" cmpd="sng" algn="ctr">
                       <a:solidFill>
                         <a:srgbClr val="E5E9EC"/>
@@ -10076,7 +10759,7 @@
                     <a:bodyPr/>
                     <a:lstStyle/>
                     <a:p>
-                      <a:pPr algn="ctr" indent="0" marL="0">
+                      <a:pPr marL="0" indent="0" algn="ctr">
                         <a:buNone/>
                       </a:pPr>
                       <a:r>
@@ -10097,7 +10780,7 @@
                       </a:endParaRPr>
                     </a:p>
                   </a:txBody>
-                  <a:tcPr marL="91440" marR="91440" marT="45720" marB="45720" anchor="ctr">
+                  <a:tcPr anchor="ctr">
                     <a:lnL w="12700" cap="flat" cmpd="sng" algn="ctr">
                       <a:solidFill>
                         <a:srgbClr val="E5E9EC"/>
@@ -10144,7 +10827,7 @@
                     <a:bodyPr/>
                     <a:lstStyle/>
                     <a:p>
-                      <a:pPr algn="ctr" indent="0" marL="0">
+                      <a:pPr marL="0" indent="0" algn="ctr">
                         <a:buNone/>
                       </a:pPr>
                       <a:r>
@@ -10165,7 +10848,7 @@
                       </a:endParaRPr>
                     </a:p>
                   </a:txBody>
-                  <a:tcPr marL="91440" marR="91440" marT="45720" marB="45720" anchor="ctr">
+                  <a:tcPr anchor="ctr">
                     <a:lnL w="12700" cap="flat" cmpd="sng" algn="ctr">
                       <a:solidFill>
                         <a:srgbClr val="E5E9EC"/>
@@ -10209,7 +10892,7 @@
                     <a:bodyPr/>
                     <a:lstStyle/>
                     <a:p>
-                      <a:pPr algn="ctr" indent="0" marL="0">
+                      <a:pPr marL="0" indent="0" algn="ctr">
                         <a:buNone/>
                       </a:pPr>
                       <a:r>
@@ -10230,7 +10913,7 @@
                       </a:endParaRPr>
                     </a:p>
                   </a:txBody>
-                  <a:tcPr marL="91440" marR="91440" marT="45720" marB="45720" anchor="ctr">
+                  <a:tcPr anchor="ctr">
                     <a:lnL w="12700" cap="flat" cmpd="sng" algn="ctr">
                       <a:solidFill>
                         <a:srgbClr val="E5E9EC"/>
@@ -10274,7 +10957,7 @@
                     <a:bodyPr/>
                     <a:lstStyle/>
                     <a:p>
-                      <a:pPr algn="ctr" indent="0" marL="0">
+                      <a:pPr marL="0" indent="0" algn="ctr">
                         <a:buNone/>
                       </a:pPr>
                       <a:r>
@@ -10295,7 +10978,7 @@
                       </a:endParaRPr>
                     </a:p>
                   </a:txBody>
-                  <a:tcPr marL="91440" marR="91440" marT="45720" marB="45720" anchor="ctr">
+                  <a:tcPr anchor="ctr">
                     <a:lnL w="12700" cap="flat" cmpd="sng" algn="ctr">
                       <a:solidFill>
                         <a:srgbClr val="E5E9EC"/>
@@ -10339,7 +11022,7 @@
                     <a:bodyPr/>
                     <a:lstStyle/>
                     <a:p>
-                      <a:pPr algn="ctr" indent="0" marL="0">
+                      <a:pPr marL="0" indent="0" algn="ctr">
                         <a:buNone/>
                       </a:pPr>
                       <a:r>
@@ -10360,7 +11043,7 @@
                       </a:endParaRPr>
                     </a:p>
                   </a:txBody>
-                  <a:tcPr marL="91440" marR="91440" marT="45720" marB="45720" anchor="ctr">
+                  <a:tcPr anchor="ctr">
                     <a:lnL w="12700" cap="flat" cmpd="sng" algn="ctr">
                       <a:solidFill>
                         <a:srgbClr val="E5E9EC"/>
@@ -10399,6 +11082,11 @@
                     </a:lnB>
                   </a:tcPr>
                 </a:tc>
+                <a:extLst>
+                  <a:ext uri="{0D108BD9-81ED-4DB2-BD59-A6C34878D82A}">
+                    <a16:rowId xmlns:a16="http://schemas.microsoft.com/office/drawing/2014/main" val="10003"/>
+                  </a:ext>
+                </a:extLst>
               </a:tr>
               <a:tr h="329184">
                 <a:tc>
@@ -10406,7 +11094,7 @@
                     <a:bodyPr/>
                     <a:lstStyle/>
                     <a:p>
-                      <a:pPr algn="l" indent="0" marL="0">
+                      <a:pPr marL="0" indent="0" algn="l">
                         <a:buNone/>
                       </a:pPr>
                       <a:r>
@@ -10427,7 +11115,7 @@
                       </a:endParaRPr>
                     </a:p>
                   </a:txBody>
-                  <a:tcPr marL="91440" marR="91440" marT="45720" marB="45720" anchor="ctr">
+                  <a:tcPr anchor="ctr">
                     <a:lnL w="12700" cap="flat" cmpd="sng" algn="ctr">
                       <a:solidFill>
                         <a:srgbClr val="E5E9EC"/>
@@ -10474,7 +11162,7 @@
                     <a:bodyPr/>
                     <a:lstStyle/>
                     <a:p>
-                      <a:pPr algn="ctr" indent="0" marL="0">
+                      <a:pPr marL="0" indent="0" algn="ctr">
                         <a:buNone/>
                       </a:pPr>
                       <a:r>
@@ -10495,7 +11183,7 @@
                       </a:endParaRPr>
                     </a:p>
                   </a:txBody>
-                  <a:tcPr marL="91440" marR="91440" marT="45720" marB="45720" anchor="ctr">
+                  <a:tcPr anchor="ctr">
                     <a:lnL w="12700" cap="flat" cmpd="sng" algn="ctr">
                       <a:solidFill>
                         <a:srgbClr val="E5E9EC"/>
@@ -10542,7 +11230,7 @@
                     <a:bodyPr/>
                     <a:lstStyle/>
                     <a:p>
-                      <a:pPr algn="ctr" indent="0" marL="0">
+                      <a:pPr marL="0" indent="0" algn="ctr">
                         <a:buNone/>
                       </a:pPr>
                       <a:r>
@@ -10563,7 +11251,7 @@
                       </a:endParaRPr>
                     </a:p>
                   </a:txBody>
-                  <a:tcPr marL="91440" marR="91440" marT="45720" marB="45720" anchor="ctr">
+                  <a:tcPr anchor="ctr">
                     <a:lnL w="12700" cap="flat" cmpd="sng" algn="ctr">
                       <a:solidFill>
                         <a:srgbClr val="E5E9EC"/>
@@ -10607,7 +11295,7 @@
                     <a:bodyPr/>
                     <a:lstStyle/>
                     <a:p>
-                      <a:pPr algn="ctr" indent="0" marL="0">
+                      <a:pPr marL="0" indent="0" algn="ctr">
                         <a:buNone/>
                       </a:pPr>
                       <a:r>
@@ -10628,7 +11316,7 @@
                       </a:endParaRPr>
                     </a:p>
                   </a:txBody>
-                  <a:tcPr marL="91440" marR="91440" marT="45720" marB="45720" anchor="ctr">
+                  <a:tcPr anchor="ctr">
                     <a:lnL w="12700" cap="flat" cmpd="sng" algn="ctr">
                       <a:solidFill>
                         <a:srgbClr val="E5E9EC"/>
@@ -10672,7 +11360,7 @@
                     <a:bodyPr/>
                     <a:lstStyle/>
                     <a:p>
-                      <a:pPr algn="ctr" indent="0" marL="0">
+                      <a:pPr marL="0" indent="0" algn="ctr">
                         <a:buNone/>
                       </a:pPr>
                       <a:r>
@@ -10693,7 +11381,7 @@
                       </a:endParaRPr>
                     </a:p>
                   </a:txBody>
-                  <a:tcPr marL="91440" marR="91440" marT="45720" marB="45720" anchor="ctr">
+                  <a:tcPr anchor="ctr">
                     <a:lnL w="12700" cap="flat" cmpd="sng" algn="ctr">
                       <a:solidFill>
                         <a:srgbClr val="E5E9EC"/>
@@ -10737,7 +11425,7 @@
                     <a:bodyPr/>
                     <a:lstStyle/>
                     <a:p>
-                      <a:pPr algn="ctr" indent="0" marL="0">
+                      <a:pPr marL="0" indent="0" algn="ctr">
                         <a:buNone/>
                       </a:pPr>
                       <a:r>
@@ -10758,7 +11446,7 @@
                       </a:endParaRPr>
                     </a:p>
                   </a:txBody>
-                  <a:tcPr marL="91440" marR="91440" marT="45720" marB="45720" anchor="ctr">
+                  <a:tcPr anchor="ctr">
                     <a:lnL w="12700" cap="flat" cmpd="sng" algn="ctr">
                       <a:solidFill>
                         <a:srgbClr val="E5E9EC"/>
@@ -10797,6 +11485,11 @@
                     </a:lnB>
                   </a:tcPr>
                 </a:tc>
+                <a:extLst>
+                  <a:ext uri="{0D108BD9-81ED-4DB2-BD59-A6C34878D82A}">
+                    <a16:rowId xmlns:a16="http://schemas.microsoft.com/office/drawing/2014/main" val="10004"/>
+                  </a:ext>
+                </a:extLst>
               </a:tr>
               <a:tr h="329184">
                 <a:tc>
@@ -10804,7 +11497,7 @@
                     <a:bodyPr/>
                     <a:lstStyle/>
                     <a:p>
-                      <a:pPr algn="l" indent="0" marL="0">
+                      <a:pPr marL="0" indent="0" algn="l">
                         <a:buNone/>
                       </a:pPr>
                       <a:r>
@@ -10825,7 +11518,7 @@
                       </a:endParaRPr>
                     </a:p>
                   </a:txBody>
-                  <a:tcPr marL="91440" marR="91440" marT="45720" marB="45720" anchor="ctr">
+                  <a:tcPr anchor="ctr">
                     <a:lnL w="12700" cap="flat" cmpd="sng" algn="ctr">
                       <a:solidFill>
                         <a:srgbClr val="E5E9EC"/>
@@ -10872,7 +11565,7 @@
                     <a:bodyPr/>
                     <a:lstStyle/>
                     <a:p>
-                      <a:pPr algn="ctr" indent="0" marL="0">
+                      <a:pPr marL="0" indent="0" algn="ctr">
                         <a:buNone/>
                       </a:pPr>
                       <a:r>
@@ -10893,7 +11586,7 @@
                       </a:endParaRPr>
                     </a:p>
                   </a:txBody>
-                  <a:tcPr marL="91440" marR="91440" marT="45720" marB="45720" anchor="ctr">
+                  <a:tcPr anchor="ctr">
                     <a:lnL w="12700" cap="flat" cmpd="sng" algn="ctr">
                       <a:solidFill>
                         <a:srgbClr val="E5E9EC"/>
@@ -10940,7 +11633,7 @@
                     <a:bodyPr/>
                     <a:lstStyle/>
                     <a:p>
-                      <a:pPr algn="ctr" indent="0" marL="0">
+                      <a:pPr marL="0" indent="0" algn="ctr">
                         <a:buNone/>
                       </a:pPr>
                       <a:r>
@@ -10961,7 +11654,7 @@
                       </a:endParaRPr>
                     </a:p>
                   </a:txBody>
-                  <a:tcPr marL="91440" marR="91440" marT="45720" marB="45720" anchor="ctr">
+                  <a:tcPr anchor="ctr">
                     <a:lnL w="12700" cap="flat" cmpd="sng" algn="ctr">
                       <a:solidFill>
                         <a:srgbClr val="E5E9EC"/>
@@ -11005,7 +11698,7 @@
                     <a:bodyPr/>
                     <a:lstStyle/>
                     <a:p>
-                      <a:pPr algn="ctr" indent="0" marL="0">
+                      <a:pPr marL="0" indent="0" algn="ctr">
                         <a:buNone/>
                       </a:pPr>
                       <a:r>
@@ -11026,7 +11719,7 @@
                       </a:endParaRPr>
                     </a:p>
                   </a:txBody>
-                  <a:tcPr marL="91440" marR="91440" marT="45720" marB="45720" anchor="ctr">
+                  <a:tcPr anchor="ctr">
                     <a:lnL w="12700" cap="flat" cmpd="sng" algn="ctr">
                       <a:solidFill>
                         <a:srgbClr val="E5E9EC"/>
@@ -11070,7 +11763,7 @@
                     <a:bodyPr/>
                     <a:lstStyle/>
                     <a:p>
-                      <a:pPr algn="ctr" indent="0" marL="0">
+                      <a:pPr marL="0" indent="0" algn="ctr">
                         <a:buNone/>
                       </a:pPr>
                       <a:r>
@@ -11091,7 +11784,7 @@
                       </a:endParaRPr>
                     </a:p>
                   </a:txBody>
-                  <a:tcPr marL="91440" marR="91440" marT="45720" marB="45720" anchor="ctr">
+                  <a:tcPr anchor="ctr">
                     <a:lnL w="12700" cap="flat" cmpd="sng" algn="ctr">
                       <a:solidFill>
                         <a:srgbClr val="E5E9EC"/>
@@ -11135,7 +11828,7 @@
                     <a:bodyPr/>
                     <a:lstStyle/>
                     <a:p>
-                      <a:pPr algn="ctr" indent="0" marL="0">
+                      <a:pPr marL="0" indent="0" algn="ctr">
                         <a:buNone/>
                       </a:pPr>
                       <a:r>
@@ -11156,7 +11849,7 @@
                       </a:endParaRPr>
                     </a:p>
                   </a:txBody>
-                  <a:tcPr marL="91440" marR="91440" marT="45720" marB="45720" anchor="ctr">
+                  <a:tcPr anchor="ctr">
                     <a:lnL w="12700" cap="flat" cmpd="sng" algn="ctr">
                       <a:solidFill>
                         <a:srgbClr val="E5E9EC"/>
@@ -11195,6 +11888,11 @@
                     </a:lnB>
                   </a:tcPr>
                 </a:tc>
+                <a:extLst>
+                  <a:ext uri="{0D108BD9-81ED-4DB2-BD59-A6C34878D82A}">
+                    <a16:rowId xmlns:a16="http://schemas.microsoft.com/office/drawing/2014/main" val="10005"/>
+                  </a:ext>
+                </a:extLst>
               </a:tr>
               <a:tr h="329184">
                 <a:tc>
@@ -11202,7 +11900,7 @@
                     <a:bodyPr/>
                     <a:lstStyle/>
                     <a:p>
-                      <a:pPr algn="l" indent="0" marL="0">
+                      <a:pPr marL="0" indent="0" algn="l">
                         <a:buNone/>
                       </a:pPr>
                       <a:r>
@@ -11223,7 +11921,7 @@
                       </a:endParaRPr>
                     </a:p>
                   </a:txBody>
-                  <a:tcPr marL="91440" marR="91440" marT="45720" marB="45720" anchor="ctr">
+                  <a:tcPr anchor="ctr">
                     <a:lnL w="12700" cap="flat" cmpd="sng" algn="ctr">
                       <a:solidFill>
                         <a:srgbClr val="E5E9EC"/>
@@ -11270,7 +11968,7 @@
                     <a:bodyPr/>
                     <a:lstStyle/>
                     <a:p>
-                      <a:pPr algn="ctr" indent="0" marL="0">
+                      <a:pPr marL="0" indent="0" algn="ctr">
                         <a:buNone/>
                       </a:pPr>
                       <a:r>
@@ -11291,7 +11989,7 @@
                       </a:endParaRPr>
                     </a:p>
                   </a:txBody>
-                  <a:tcPr marL="91440" marR="91440" marT="45720" marB="45720" anchor="ctr">
+                  <a:tcPr anchor="ctr">
                     <a:lnL w="12700" cap="flat" cmpd="sng" algn="ctr">
                       <a:solidFill>
                         <a:srgbClr val="E5E9EC"/>
@@ -11338,7 +12036,7 @@
                     <a:bodyPr/>
                     <a:lstStyle/>
                     <a:p>
-                      <a:pPr algn="ctr" indent="0" marL="0">
+                      <a:pPr marL="0" indent="0" algn="ctr">
                         <a:buNone/>
                       </a:pPr>
                       <a:r>
@@ -11359,7 +12057,7 @@
                       </a:endParaRPr>
                     </a:p>
                   </a:txBody>
-                  <a:tcPr marL="91440" marR="91440" marT="45720" marB="45720" anchor="ctr">
+                  <a:tcPr anchor="ctr">
                     <a:lnL w="12700" cap="flat" cmpd="sng" algn="ctr">
                       <a:solidFill>
                         <a:srgbClr val="E5E9EC"/>
@@ -11403,7 +12101,7 @@
                     <a:bodyPr/>
                     <a:lstStyle/>
                     <a:p>
-                      <a:pPr algn="ctr" indent="0" marL="0">
+                      <a:pPr marL="0" indent="0" algn="ctr">
                         <a:buNone/>
                       </a:pPr>
                       <a:r>
@@ -11424,7 +12122,7 @@
                       </a:endParaRPr>
                     </a:p>
                   </a:txBody>
-                  <a:tcPr marL="91440" marR="91440" marT="45720" marB="45720" anchor="ctr">
+                  <a:tcPr anchor="ctr">
                     <a:lnL w="12700" cap="flat" cmpd="sng" algn="ctr">
                       <a:solidFill>
                         <a:srgbClr val="E5E9EC"/>
@@ -11468,7 +12166,7 @@
                     <a:bodyPr/>
                     <a:lstStyle/>
                     <a:p>
-                      <a:pPr algn="ctr" indent="0" marL="0">
+                      <a:pPr marL="0" indent="0" algn="ctr">
                         <a:buNone/>
                       </a:pPr>
                       <a:r>
@@ -11489,7 +12187,7 @@
                       </a:endParaRPr>
                     </a:p>
                   </a:txBody>
-                  <a:tcPr marL="91440" marR="91440" marT="45720" marB="45720" anchor="ctr">
+                  <a:tcPr anchor="ctr">
                     <a:lnL w="12700" cap="flat" cmpd="sng" algn="ctr">
                       <a:solidFill>
                         <a:srgbClr val="E5E9EC"/>
@@ -11533,7 +12231,7 @@
                     <a:bodyPr/>
                     <a:lstStyle/>
                     <a:p>
-                      <a:pPr algn="ctr" indent="0" marL="0">
+                      <a:pPr marL="0" indent="0" algn="ctr">
                         <a:buNone/>
                       </a:pPr>
                       <a:r>
@@ -11554,7 +12252,7 @@
                       </a:endParaRPr>
                     </a:p>
                   </a:txBody>
-                  <a:tcPr marL="91440" marR="91440" marT="45720" marB="45720" anchor="ctr">
+                  <a:tcPr anchor="ctr">
                     <a:lnL w="12700" cap="flat" cmpd="sng" algn="ctr">
                       <a:solidFill>
                         <a:srgbClr val="E5E9EC"/>
@@ -11593,6 +12291,11 @@
                     </a:lnB>
                   </a:tcPr>
                 </a:tc>
+                <a:extLst>
+                  <a:ext uri="{0D108BD9-81ED-4DB2-BD59-A6C34878D82A}">
+                    <a16:rowId xmlns:a16="http://schemas.microsoft.com/office/drawing/2014/main" val="10006"/>
+                  </a:ext>
+                </a:extLst>
               </a:tr>
               <a:tr h="329184">
                 <a:tc>
@@ -11600,7 +12303,7 @@
                     <a:bodyPr/>
                     <a:lstStyle/>
                     <a:p>
-                      <a:pPr algn="l" indent="0" marL="0">
+                      <a:pPr marL="0" indent="0" algn="l">
                         <a:buNone/>
                       </a:pPr>
                       <a:r>
@@ -11621,7 +12324,7 @@
                       </a:endParaRPr>
                     </a:p>
                   </a:txBody>
-                  <a:tcPr marL="91440" marR="91440" marT="45720" marB="45720" anchor="ctr">
+                  <a:tcPr anchor="ctr">
                     <a:lnL w="12700" cap="flat" cmpd="sng" algn="ctr">
                       <a:solidFill>
                         <a:srgbClr val="E5E9EC"/>
@@ -11668,7 +12371,7 @@
                     <a:bodyPr/>
                     <a:lstStyle/>
                     <a:p>
-                      <a:pPr algn="ctr" indent="0" marL="0">
+                      <a:pPr marL="0" indent="0" algn="ctr">
                         <a:buNone/>
                       </a:pPr>
                       <a:r>
@@ -11689,7 +12392,7 @@
                       </a:endParaRPr>
                     </a:p>
                   </a:txBody>
-                  <a:tcPr marL="91440" marR="91440" marT="45720" marB="45720" anchor="ctr">
+                  <a:tcPr anchor="ctr">
                     <a:lnL w="12700" cap="flat" cmpd="sng" algn="ctr">
                       <a:solidFill>
                         <a:srgbClr val="E5E9EC"/>
@@ -11736,7 +12439,7 @@
                     <a:bodyPr/>
                     <a:lstStyle/>
                     <a:p>
-                      <a:pPr algn="ctr" indent="0" marL="0">
+                      <a:pPr marL="0" indent="0" algn="ctr">
                         <a:buNone/>
                       </a:pPr>
                       <a:r>
@@ -11757,7 +12460,7 @@
                       </a:endParaRPr>
                     </a:p>
                   </a:txBody>
-                  <a:tcPr marL="91440" marR="91440" marT="45720" marB="45720" anchor="ctr">
+                  <a:tcPr anchor="ctr">
                     <a:lnL w="12700" cap="flat" cmpd="sng" algn="ctr">
                       <a:solidFill>
                         <a:srgbClr val="E5E9EC"/>
@@ -11801,7 +12504,7 @@
                     <a:bodyPr/>
                     <a:lstStyle/>
                     <a:p>
-                      <a:pPr algn="ctr" indent="0" marL="0">
+                      <a:pPr marL="0" indent="0" algn="ctr">
                         <a:buNone/>
                       </a:pPr>
                       <a:r>
@@ -11822,7 +12525,7 @@
                       </a:endParaRPr>
                     </a:p>
                   </a:txBody>
-                  <a:tcPr marL="91440" marR="91440" marT="45720" marB="45720" anchor="ctr">
+                  <a:tcPr anchor="ctr">
                     <a:lnL w="12700" cap="flat" cmpd="sng" algn="ctr">
                       <a:solidFill>
                         <a:srgbClr val="E5E9EC"/>
@@ -11866,7 +12569,7 @@
                     <a:bodyPr/>
                     <a:lstStyle/>
                     <a:p>
-                      <a:pPr algn="ctr" indent="0" marL="0">
+                      <a:pPr marL="0" indent="0" algn="ctr">
                         <a:buNone/>
                       </a:pPr>
                       <a:r>
@@ -11887,7 +12590,7 @@
                       </a:endParaRPr>
                     </a:p>
                   </a:txBody>
-                  <a:tcPr marL="91440" marR="91440" marT="45720" marB="45720" anchor="ctr">
+                  <a:tcPr anchor="ctr">
                     <a:lnL w="12700" cap="flat" cmpd="sng" algn="ctr">
                       <a:solidFill>
                         <a:srgbClr val="E5E9EC"/>
@@ -11931,7 +12634,7 @@
                     <a:bodyPr/>
                     <a:lstStyle/>
                     <a:p>
-                      <a:pPr algn="ctr" indent="0" marL="0">
+                      <a:pPr marL="0" indent="0" algn="ctr">
                         <a:buNone/>
                       </a:pPr>
                       <a:r>
@@ -11952,7 +12655,7 @@
                       </a:endParaRPr>
                     </a:p>
                   </a:txBody>
-                  <a:tcPr marL="91440" marR="91440" marT="45720" marB="45720" anchor="ctr">
+                  <a:tcPr anchor="ctr">
                     <a:lnL w="12700" cap="flat" cmpd="sng" algn="ctr">
                       <a:solidFill>
                         <a:srgbClr val="E5E9EC"/>
@@ -11991,6 +12694,11 @@
                     </a:lnB>
                   </a:tcPr>
                 </a:tc>
+                <a:extLst>
+                  <a:ext uri="{0D108BD9-81ED-4DB2-BD59-A6C34878D82A}">
+                    <a16:rowId xmlns:a16="http://schemas.microsoft.com/office/drawing/2014/main" val="10007"/>
+                  </a:ext>
+                </a:extLst>
               </a:tr>
               <a:tr h="329184">
                 <a:tc>
@@ -11998,7 +12706,7 @@
                     <a:bodyPr/>
                     <a:lstStyle/>
                     <a:p>
-                      <a:pPr algn="l" indent="0" marL="0">
+                      <a:pPr marL="0" indent="0" algn="l">
                         <a:buNone/>
                       </a:pPr>
                       <a:r>
@@ -12019,7 +12727,7 @@
                       </a:endParaRPr>
                     </a:p>
                   </a:txBody>
-                  <a:tcPr marL="91440" marR="91440" marT="45720" marB="45720" anchor="ctr">
+                  <a:tcPr anchor="ctr">
                     <a:lnL w="12700" cap="flat" cmpd="sng" algn="ctr">
                       <a:solidFill>
                         <a:srgbClr val="E5E9EC"/>
@@ -12066,7 +12774,7 @@
                     <a:bodyPr/>
                     <a:lstStyle/>
                     <a:p>
-                      <a:pPr algn="ctr" indent="0" marL="0">
+                      <a:pPr marL="0" indent="0" algn="ctr">
                         <a:buNone/>
                       </a:pPr>
                       <a:r>
@@ -12087,7 +12795,7 @@
                       </a:endParaRPr>
                     </a:p>
                   </a:txBody>
-                  <a:tcPr marL="91440" marR="91440" marT="45720" marB="45720" anchor="ctr">
+                  <a:tcPr anchor="ctr">
                     <a:lnL w="12700" cap="flat" cmpd="sng" algn="ctr">
                       <a:solidFill>
                         <a:srgbClr val="E5E9EC"/>
@@ -12134,7 +12842,7 @@
                     <a:bodyPr/>
                     <a:lstStyle/>
                     <a:p>
-                      <a:pPr algn="ctr" indent="0" marL="0">
+                      <a:pPr marL="0" indent="0" algn="ctr">
                         <a:buNone/>
                       </a:pPr>
                       <a:r>
@@ -12155,7 +12863,7 @@
                       </a:endParaRPr>
                     </a:p>
                   </a:txBody>
-                  <a:tcPr marL="91440" marR="91440" marT="45720" marB="45720" anchor="ctr">
+                  <a:tcPr anchor="ctr">
                     <a:lnL w="12700" cap="flat" cmpd="sng" algn="ctr">
                       <a:solidFill>
                         <a:srgbClr val="E5E9EC"/>
@@ -12199,7 +12907,7 @@
                     <a:bodyPr/>
                     <a:lstStyle/>
                     <a:p>
-                      <a:pPr algn="ctr" indent="0" marL="0">
+                      <a:pPr marL="0" indent="0" algn="ctr">
                         <a:buNone/>
                       </a:pPr>
                       <a:r>
@@ -12220,7 +12928,7 @@
                       </a:endParaRPr>
                     </a:p>
                   </a:txBody>
-                  <a:tcPr marL="91440" marR="91440" marT="45720" marB="45720" anchor="ctr">
+                  <a:tcPr anchor="ctr">
                     <a:lnL w="12700" cap="flat" cmpd="sng" algn="ctr">
                       <a:solidFill>
                         <a:srgbClr val="E5E9EC"/>
@@ -12264,7 +12972,7 @@
                     <a:bodyPr/>
                     <a:lstStyle/>
                     <a:p>
-                      <a:pPr algn="ctr" indent="0" marL="0">
+                      <a:pPr marL="0" indent="0" algn="ctr">
                         <a:buNone/>
                       </a:pPr>
                       <a:r>
@@ -12285,7 +12993,7 @@
                       </a:endParaRPr>
                     </a:p>
                   </a:txBody>
-                  <a:tcPr marL="91440" marR="91440" marT="45720" marB="45720" anchor="ctr">
+                  <a:tcPr anchor="ctr">
                     <a:lnL w="12700" cap="flat" cmpd="sng" algn="ctr">
                       <a:solidFill>
                         <a:srgbClr val="E5E9EC"/>
@@ -12329,7 +13037,7 @@
                     <a:bodyPr/>
                     <a:lstStyle/>
                     <a:p>
-                      <a:pPr algn="ctr" indent="0" marL="0">
+                      <a:pPr marL="0" indent="0" algn="ctr">
                         <a:buNone/>
                       </a:pPr>
                       <a:r>
@@ -12350,7 +13058,7 @@
                       </a:endParaRPr>
                     </a:p>
                   </a:txBody>
-                  <a:tcPr marL="91440" marR="91440" marT="45720" marB="45720" anchor="ctr">
+                  <a:tcPr anchor="ctr">
                     <a:lnL w="12700" cap="flat" cmpd="sng" algn="ctr">
                       <a:solidFill>
                         <a:srgbClr val="E5E9EC"/>
@@ -12389,6 +13097,11 @@
                     </a:lnB>
                   </a:tcPr>
                 </a:tc>
+                <a:extLst>
+                  <a:ext uri="{0D108BD9-81ED-4DB2-BD59-A6C34878D82A}">
+                    <a16:rowId xmlns:a16="http://schemas.microsoft.com/office/drawing/2014/main" val="10008"/>
+                  </a:ext>
+                </a:extLst>
               </a:tr>
             </a:tbl>
           </a:graphicData>
@@ -12415,7 +13128,7 @@
           <a:bodyPr wrap="square" lIns="0" tIns="0" rIns="0" bIns="0" rtlCol="0" anchor="ctr"/>
           <a:lstStyle/>
           <a:p>
-            <a:pPr indent="0" marL="0">
+            <a:pPr marL="0" indent="0">
               <a:lnSpc>
                 <a:spcPct val="140000"/>
               </a:lnSpc>
@@ -12432,12 +13145,6 @@
               </a:rPr>
               <a:t>✓ 対応できる</a:t>
             </a:r>
-            <a:pPr indent="0" marL="0">
-              <a:lnSpc>
-                <a:spcPct val="140000"/>
-              </a:lnSpc>
-              <a:buNone/>
-            </a:pPr>
             <a:r>
               <a:rPr lang="en-US" sz="1050" dirty="0">
                 <a:solidFill>
@@ -12449,12 +13156,6 @@
               </a:rPr>
               <a:t>　　△ 事業所・状態により異なる</a:t>
             </a:r>
-            <a:pPr indent="0" marL="0">
-              <a:lnSpc>
-                <a:spcPct val="140000"/>
-              </a:lnSpc>
-              <a:buNone/>
-            </a:pPr>
             <a:r>
               <a:rPr lang="en-US" sz="1050" dirty="0">
                 <a:solidFill>
@@ -12469,7 +13170,7 @@
             <a:endParaRPr lang="en-US" sz="1050" dirty="0"/>
           </a:p>
           <a:p>
-            <a:pPr indent="0" marL="0">
+            <a:pPr marL="0" indent="0">
               <a:lnSpc>
                 <a:spcPct val="140000"/>
               </a:lnSpc>
@@ -12516,6 +13217,13 @@
             <a:prstDash val="solid"/>
           </a:ln>
         </p:spPr>
+        <p:txBody>
+          <a:bodyPr/>
+          <a:lstStyle/>
+          <a:p>
+            <a:endParaRPr lang="ja-JP" altLang="en-US"/>
+          </a:p>
+        </p:txBody>
       </p:sp>
       <p:sp>
         <p:nvSpPr>
@@ -12538,7 +13246,7 @@
           <a:bodyPr wrap="square" lIns="0" tIns="0" rIns="0" bIns="0" rtlCol="0" anchor="ctr"/>
           <a:lstStyle/>
           <a:p>
-            <a:pPr indent="0" marL="0">
+            <a:pPr marL="0" indent="0">
               <a:buNone/>
             </a:pPr>
             <a:r>
@@ -12552,9 +13260,6 @@
               </a:rPr>
               <a:t>訪問入浴の利用者は</a:t>
             </a:r>
-            <a:pPr indent="0" marL="0">
-              <a:buNone/>
-            </a:pPr>
             <a:r>
               <a:rPr lang="en-US" sz="1400" b="1" dirty="0">
                 <a:solidFill>
@@ -12566,9 +13271,6 @@
               </a:rPr>
               <a:t>要介護5が48.2%、要介護4が25.1%</a:t>
             </a:r>
-            <a:pPr indent="0" marL="0">
-              <a:buNone/>
-            </a:pPr>
             <a:r>
               <a:rPr lang="en-US" sz="1400" b="1" dirty="0">
                 <a:solidFill>
@@ -12578,11 +13280,8 @@
                 <a:ea typeface="Meiryo" pitchFamily="34" charset="-122"/>
                 <a:cs typeface="Meiryo" pitchFamily="34" charset="-120"/>
               </a:rPr>
-              <a:t>——約4分の3が要介護4〜5の重度の方です。</a:t>
-            </a:r>
-            <a:pPr indent="0" marL="0">
-              <a:buNone/>
-            </a:pPr>
+              <a:t>—約4分の3が要介護4〜5の重度の方です。</a:t>
+            </a:r>
             <a:r>
               <a:rPr lang="en-US" sz="1100" dirty="0">
                 <a:solidFill>
@@ -12649,6 +13348,13 @@
             <a:prstDash val="solid"/>
           </a:ln>
         </p:spPr>
+        <p:txBody>
+          <a:bodyPr/>
+          <a:lstStyle/>
+          <a:p>
+            <a:endParaRPr lang="ja-JP" altLang="en-US"/>
+          </a:p>
+        </p:txBody>
       </p:sp>
       <p:sp>
         <p:nvSpPr>
@@ -12671,7 +13377,7 @@
           <a:bodyPr wrap="square" lIns="0" tIns="0" rIns="0" bIns="0" rtlCol="0" anchor="ctr"/>
           <a:lstStyle/>
           <a:p>
-            <a:pPr algn="ctr" indent="0" marL="0">
+            <a:pPr marL="0" indent="0" algn="ctr">
               <a:buNone/>
             </a:pPr>
             <a:r>
@@ -12710,7 +13416,7 @@
           <a:bodyPr wrap="square" lIns="0" tIns="0" rIns="0" bIns="0" rtlCol="0" anchor="ctr"/>
           <a:lstStyle/>
           <a:p>
-            <a:pPr indent="0" marL="0">
+            <a:pPr marL="0" indent="0">
               <a:buNone/>
             </a:pPr>
             <a:r>
@@ -12749,7 +13455,7 @@
           <a:bodyPr wrap="square" lIns="0" tIns="0" rIns="0" bIns="0" rtlCol="0" anchor="ctr"/>
           <a:lstStyle/>
           <a:p>
-            <a:pPr indent="0" marL="0">
+            <a:pPr marL="0" indent="0">
               <a:buNone/>
             </a:pPr>
             <a:r>
@@ -12793,6 +13499,13 @@
             <a:prstDash val="solid"/>
           </a:ln>
         </p:spPr>
+        <p:txBody>
+          <a:bodyPr/>
+          <a:lstStyle/>
+          <a:p>
+            <a:endParaRPr lang="ja-JP" altLang="en-US"/>
+          </a:p>
+        </p:txBody>
       </p:sp>
       <p:sp>
         <p:nvSpPr>
@@ -12818,6 +13531,13 @@
             <a:prstDash val="solid"/>
           </a:ln>
         </p:spPr>
+        <p:txBody>
+          <a:bodyPr/>
+          <a:lstStyle/>
+          <a:p>
+            <a:endParaRPr lang="ja-JP" altLang="en-US"/>
+          </a:p>
+        </p:txBody>
       </p:sp>
       <p:sp>
         <p:nvSpPr>
@@ -12840,7 +13560,7 @@
           <a:bodyPr wrap="square" lIns="0" tIns="0" rIns="0" bIns="0" rtlCol="0" anchor="ctr"/>
           <a:lstStyle/>
           <a:p>
-            <a:pPr algn="ctr" indent="0" marL="0">
+            <a:pPr marL="0" indent="0" algn="ctr">
               <a:buNone/>
             </a:pPr>
             <a:r>
@@ -12879,7 +13599,7 @@
           <a:bodyPr wrap="square" lIns="0" tIns="0" rIns="0" bIns="0" rtlCol="0" anchor="ctr"/>
           <a:lstStyle/>
           <a:p>
-            <a:pPr algn="ctr" indent="0" marL="0">
+            <a:pPr marL="0" indent="0" algn="ctr">
               <a:buNone/>
             </a:pPr>
             <a:r>
@@ -12905,8 +13625,8 @@
         </p:nvSpPr>
         <p:spPr>
           <a:xfrm>
-            <a:off x="621792" y="2706624"/>
-            <a:ext cx="2503856" cy="475488"/>
+            <a:off x="658368" y="2724912"/>
+            <a:ext cx="2430704" cy="365760"/>
           </a:xfrm>
           <a:prstGeom prst="rect">
             <a:avLst/>
@@ -12918,7 +13638,7 @@
           <a:bodyPr wrap="square" lIns="0" tIns="0" rIns="0" bIns="0" rtlCol="0" anchor="t"/>
           <a:lstStyle/>
           <a:p>
-            <a:pPr algn="ctr" indent="0" marL="0">
+            <a:pPr marL="0" indent="0" algn="ctr">
               <a:buNone/>
             </a:pPr>
             <a:r>
@@ -12962,6 +13682,13 @@
             <a:prstDash val="solid"/>
           </a:ln>
         </p:spPr>
+        <p:txBody>
+          <a:bodyPr/>
+          <a:lstStyle/>
+          <a:p>
+            <a:endParaRPr lang="ja-JP" altLang="en-US"/>
+          </a:p>
+        </p:txBody>
       </p:sp>
       <p:sp>
         <p:nvSpPr>
@@ -12987,6 +13714,13 @@
             <a:prstDash val="solid"/>
           </a:ln>
         </p:spPr>
+        <p:txBody>
+          <a:bodyPr/>
+          <a:lstStyle/>
+          <a:p>
+            <a:endParaRPr lang="ja-JP" altLang="en-US"/>
+          </a:p>
+        </p:txBody>
       </p:sp>
       <p:sp>
         <p:nvSpPr>
@@ -13009,7 +13743,7 @@
           <a:bodyPr wrap="square" lIns="0" tIns="0" rIns="0" bIns="0" rtlCol="0" anchor="ctr"/>
           <a:lstStyle/>
           <a:p>
-            <a:pPr algn="ctr" indent="0" marL="0">
+            <a:pPr marL="0" indent="0" algn="ctr">
               <a:buNone/>
             </a:pPr>
             <a:r>
@@ -13048,7 +13782,7 @@
           <a:bodyPr wrap="square" lIns="0" tIns="0" rIns="0" bIns="0" rtlCol="0" anchor="ctr"/>
           <a:lstStyle/>
           <a:p>
-            <a:pPr algn="ctr" indent="0" marL="0">
+            <a:pPr marL="0" indent="0" algn="ctr">
               <a:buNone/>
             </a:pPr>
             <a:r>
@@ -13074,8 +13808,8 @@
         </p:nvSpPr>
         <p:spPr>
           <a:xfrm>
-            <a:off x="3436544" y="2706624"/>
-            <a:ext cx="2503856" cy="475488"/>
+            <a:off x="3473120" y="2724912"/>
+            <a:ext cx="2430704" cy="365760"/>
           </a:xfrm>
           <a:prstGeom prst="rect">
             <a:avLst/>
@@ -13087,7 +13821,7 @@
           <a:bodyPr wrap="square" lIns="0" tIns="0" rIns="0" bIns="0" rtlCol="0" anchor="t"/>
           <a:lstStyle/>
           <a:p>
-            <a:pPr algn="ctr" indent="0" marL="0">
+            <a:pPr marL="0" indent="0" algn="ctr">
               <a:buNone/>
             </a:pPr>
             <a:r>
@@ -13131,6 +13865,13 @@
             <a:prstDash val="solid"/>
           </a:ln>
         </p:spPr>
+        <p:txBody>
+          <a:bodyPr/>
+          <a:lstStyle/>
+          <a:p>
+            <a:endParaRPr lang="ja-JP" altLang="en-US"/>
+          </a:p>
+        </p:txBody>
       </p:sp>
       <p:sp>
         <p:nvSpPr>
@@ -13156,6 +13897,13 @@
             <a:prstDash val="solid"/>
           </a:ln>
         </p:spPr>
+        <p:txBody>
+          <a:bodyPr/>
+          <a:lstStyle/>
+          <a:p>
+            <a:endParaRPr lang="ja-JP" altLang="en-US"/>
+          </a:p>
+        </p:txBody>
       </p:sp>
       <p:sp>
         <p:nvSpPr>
@@ -13178,7 +13926,7 @@
           <a:bodyPr wrap="square" lIns="0" tIns="0" rIns="0" bIns="0" rtlCol="0" anchor="ctr"/>
           <a:lstStyle/>
           <a:p>
-            <a:pPr algn="ctr" indent="0" marL="0">
+            <a:pPr marL="0" indent="0" algn="ctr">
               <a:buNone/>
             </a:pPr>
             <a:r>
@@ -13217,7 +13965,7 @@
           <a:bodyPr wrap="square" lIns="0" tIns="0" rIns="0" bIns="0" rtlCol="0" anchor="ctr"/>
           <a:lstStyle/>
           <a:p>
-            <a:pPr algn="ctr" indent="0" marL="0">
+            <a:pPr marL="0" indent="0" algn="ctr">
               <a:buNone/>
             </a:pPr>
             <a:r>
@@ -13243,8 +13991,8 @@
         </p:nvSpPr>
         <p:spPr>
           <a:xfrm>
-            <a:off x="6251296" y="2706624"/>
-            <a:ext cx="2503856" cy="475488"/>
+            <a:off x="6287872" y="2724912"/>
+            <a:ext cx="2430704" cy="365760"/>
           </a:xfrm>
           <a:prstGeom prst="rect">
             <a:avLst/>
@@ -13256,7 +14004,7 @@
           <a:bodyPr wrap="square" lIns="0" tIns="0" rIns="0" bIns="0" rtlCol="0" anchor="t"/>
           <a:lstStyle/>
           <a:p>
-            <a:pPr algn="ctr" indent="0" marL="0">
+            <a:pPr marL="0" indent="0" algn="ctr">
               <a:buNone/>
             </a:pPr>
             <a:r>
@@ -13300,6 +14048,13 @@
             <a:prstDash val="solid"/>
           </a:ln>
         </p:spPr>
+        <p:txBody>
+          <a:bodyPr/>
+          <a:lstStyle/>
+          <a:p>
+            <a:endParaRPr lang="ja-JP" altLang="en-US"/>
+          </a:p>
+        </p:txBody>
       </p:sp>
       <p:sp>
         <p:nvSpPr>
@@ -13325,6 +14080,13 @@
             <a:prstDash val="solid"/>
           </a:ln>
         </p:spPr>
+        <p:txBody>
+          <a:bodyPr/>
+          <a:lstStyle/>
+          <a:p>
+            <a:endParaRPr lang="ja-JP" altLang="en-US"/>
+          </a:p>
+        </p:txBody>
       </p:sp>
       <p:sp>
         <p:nvSpPr>
@@ -13347,7 +14109,7 @@
           <a:bodyPr wrap="square" lIns="0" tIns="0" rIns="0" bIns="0" rtlCol="0" anchor="ctr"/>
           <a:lstStyle/>
           <a:p>
-            <a:pPr algn="ctr" indent="0" marL="0">
+            <a:pPr marL="0" indent="0" algn="ctr">
               <a:buNone/>
             </a:pPr>
             <a:r>
@@ -13386,7 +14148,7 @@
           <a:bodyPr wrap="square" lIns="0" tIns="0" rIns="0" bIns="0" rtlCol="0" anchor="ctr"/>
           <a:lstStyle/>
           <a:p>
-            <a:pPr algn="ctr" indent="0" marL="0">
+            <a:pPr marL="0" indent="0" algn="ctr">
               <a:buNone/>
             </a:pPr>
             <a:r>
@@ -13412,8 +14174,8 @@
         </p:nvSpPr>
         <p:spPr>
           <a:xfrm>
-            <a:off x="9066047" y="2706624"/>
-            <a:ext cx="2503856" cy="475488"/>
+            <a:off x="9102623" y="2724912"/>
+            <a:ext cx="2430704" cy="365760"/>
           </a:xfrm>
           <a:prstGeom prst="rect">
             <a:avLst/>
@@ -13425,11 +14187,11 @@
           <a:bodyPr wrap="square" lIns="0" tIns="0" rIns="0" bIns="0" rtlCol="0" anchor="t"/>
           <a:lstStyle/>
           <a:p>
-            <a:pPr algn="ctr" indent="0" marL="0">
+            <a:pPr marL="0" indent="0" algn="ctr">
               <a:buNone/>
             </a:pPr>
             <a:r>
-              <a:rPr lang="en-US" sz="1100" dirty="0">
+              <a:rPr lang="en-US" sz="1100" dirty="0" err="1">
                 <a:solidFill>
                   <a:srgbClr val="566573"/>
                 </a:solidFill>
@@ -13437,7 +14199,18 @@
                 <a:ea typeface="Meiryo" pitchFamily="34" charset="-122"/>
                 <a:cs typeface="Meiryo" pitchFamily="34" charset="-120"/>
               </a:rPr>
-              <a:t>寝たきり・全介助でも</a:t>
+              <a:t>寝たきり</a:t>
+            </a:r>
+            <a:r>
+              <a:rPr lang="ja-JP" altLang="en-US" sz="1100" dirty="0">
+                <a:solidFill>
+                  <a:srgbClr val="566573"/>
+                </a:solidFill>
+                <a:latin typeface="Meiryo" pitchFamily="34" charset="0"/>
+                <a:ea typeface="Meiryo" pitchFamily="34" charset="-122"/>
+                <a:cs typeface="Meiryo" pitchFamily="34" charset="-120"/>
+              </a:rPr>
+              <a:t>・全介助でも</a:t>
             </a:r>
             <a:endParaRPr lang="en-US" sz="1100" dirty="0"/>
           </a:p>
@@ -13469,6 +14242,13 @@
             <a:prstDash val="solid"/>
           </a:ln>
         </p:spPr>
+        <p:txBody>
+          <a:bodyPr/>
+          <a:lstStyle/>
+          <a:p>
+            <a:endParaRPr lang="ja-JP" altLang="en-US"/>
+          </a:p>
+        </p:txBody>
       </p:sp>
       <p:sp>
         <p:nvSpPr>
@@ -13491,14 +14271,14 @@
           <a:bodyPr wrap="square" lIns="0" tIns="0" rIns="0" bIns="0" rtlCol="0" anchor="ctr"/>
           <a:lstStyle/>
           <a:p>
-            <a:pPr algn="ctr" indent="0" marL="0">
+            <a:pPr marL="0" indent="0" algn="ctr">
               <a:lnSpc>
                 <a:spcPct val="125000"/>
               </a:lnSpc>
               <a:buNone/>
             </a:pPr>
             <a:r>
-              <a:rPr lang="en-US" sz="2200" b="1" dirty="0">
+              <a:rPr lang="en-US" sz="2000" b="1" dirty="0">
                 <a:solidFill>
                   <a:srgbClr val="FFFFFF"/>
                 </a:solidFill>
@@ -13508,14 +14288,8 @@
               </a:rPr>
               <a:t>この</a:t>
             </a:r>
-            <a:pPr algn="ctr" indent="0" marL="0">
-              <a:lnSpc>
-                <a:spcPct val="125000"/>
-              </a:lnSpc>
-              <a:buNone/>
-            </a:pPr>
-            <a:r>
-              <a:rPr lang="en-US" sz="2200" b="1" dirty="0">
+            <a:r>
+              <a:rPr lang="en-US" sz="2000" b="1" dirty="0">
                 <a:solidFill>
                   <a:srgbClr val="7EE2BC"/>
                 </a:solidFill>
@@ -13525,14 +14299,8 @@
               </a:rPr>
               <a:t>4つの条件</a:t>
             </a:r>
-            <a:pPr algn="ctr" indent="0" marL="0">
-              <a:lnSpc>
-                <a:spcPct val="125000"/>
-              </a:lnSpc>
-              <a:buNone/>
-            </a:pPr>
-            <a:r>
-              <a:rPr lang="en-US" sz="2200" b="1" dirty="0">
+            <a:r>
+              <a:rPr lang="en-US" sz="2000" b="1" dirty="0">
                 <a:solidFill>
                   <a:srgbClr val="FFFFFF"/>
                 </a:solidFill>
@@ -13542,14 +14310,8 @@
               </a:rPr>
               <a:t>を同時に満たせるのは、在宅サービスの中で</a:t>
             </a:r>
-            <a:pPr algn="ctr" indent="0" marL="0">
-              <a:lnSpc>
-                <a:spcPct val="125000"/>
-              </a:lnSpc>
-              <a:buNone/>
-            </a:pPr>
-            <a:r>
-              <a:rPr lang="en-US" sz="2200" b="1" dirty="0">
+            <a:r>
+              <a:rPr lang="en-US" sz="2000" b="1" dirty="0">
                 <a:solidFill>
                   <a:srgbClr val="7EE2BC"/>
                 </a:solidFill>
@@ -13559,14 +14321,8 @@
               </a:rPr>
               <a:t>訪問入浴介護だけ</a:t>
             </a:r>
-            <a:pPr algn="ctr" indent="0" marL="0">
-              <a:lnSpc>
-                <a:spcPct val="125000"/>
-              </a:lnSpc>
-              <a:buNone/>
-            </a:pPr>
-            <a:r>
-              <a:rPr lang="en-US" sz="2200" b="1" dirty="0">
+            <a:r>
+              <a:rPr lang="en-US" sz="2000" b="1" dirty="0">
                 <a:solidFill>
                   <a:srgbClr val="FFFFFF"/>
                 </a:solidFill>
@@ -13576,7 +14332,7 @@
               </a:rPr>
               <a:t>です。</a:t>
             </a:r>
-            <a:endParaRPr lang="en-US" sz="2200" dirty="0"/>
+            <a:endParaRPr lang="en-US" sz="2000" dirty="0"/>
           </a:p>
         </p:txBody>
       </p:sp>
@@ -13601,7 +14357,7 @@
           <a:bodyPr wrap="square" lIns="0" tIns="0" rIns="0" bIns="0" rtlCol="0" anchor="ctr"/>
           <a:lstStyle/>
           <a:p>
-            <a:pPr indent="0" marL="0">
+            <a:pPr marL="0" indent="0">
               <a:lnSpc>
                 <a:spcPct val="130000"/>
               </a:lnSpc>
@@ -13616,7 +14372,37 @@
                 <a:ea typeface="Meiryo" pitchFamily="34" charset="-122"/>
                 <a:cs typeface="Meiryo" pitchFamily="34" charset="-120"/>
               </a:rPr>
-              <a:t>どれか1つなら他のサービスでも代替できます。しかし「重度化しても、自宅のまま、湯船に浸かり続ける」ことを保証できるのは訪問入浴だけ——ここが在宅療養の継続を左右します。</a:t>
+              <a:t>どれか1つなら他のサービスでも代替できます。しかし「重度化しても、自宅のまま、湯船に浸かり続ける」ことを保証できるのは訪問入浴だけ</a:t>
+            </a:r>
+          </a:p>
+          <a:p>
+            <a:pPr marL="0" indent="0">
+              <a:lnSpc>
+                <a:spcPct val="130000"/>
+              </a:lnSpc>
+              <a:buNone/>
+            </a:pPr>
+            <a:r>
+              <a:rPr lang="en-US" sz="1300" dirty="0" err="1">
+                <a:solidFill>
+                  <a:srgbClr val="566573"/>
+                </a:solidFill>
+                <a:latin typeface="Meiryo" pitchFamily="34" charset="0"/>
+                <a:ea typeface="Meiryo" pitchFamily="34" charset="-122"/>
+                <a:cs typeface="Meiryo" pitchFamily="34" charset="-120"/>
+              </a:rPr>
+              <a:t>ここが在宅療養の継続を左右します</a:t>
+            </a:r>
+            <a:r>
+              <a:rPr lang="en-US" sz="1300" dirty="0">
+                <a:solidFill>
+                  <a:srgbClr val="566573"/>
+                </a:solidFill>
+                <a:latin typeface="Meiryo" pitchFamily="34" charset="0"/>
+                <a:ea typeface="Meiryo" pitchFamily="34" charset="-122"/>
+                <a:cs typeface="Meiryo" pitchFamily="34" charset="-120"/>
+              </a:rPr>
+              <a:t>。</a:t>
             </a:r>
             <a:endParaRPr lang="en-US" sz="1300" dirty="0"/>
           </a:p>
@@ -13673,6 +14459,13 @@
             <a:prstDash val="solid"/>
           </a:ln>
         </p:spPr>
+        <p:txBody>
+          <a:bodyPr/>
+          <a:lstStyle/>
+          <a:p>
+            <a:endParaRPr lang="ja-JP" altLang="en-US"/>
+          </a:p>
+        </p:txBody>
       </p:sp>
       <p:sp>
         <p:nvSpPr>
@@ -13695,7 +14488,7 @@
           <a:bodyPr wrap="square" lIns="0" tIns="0" rIns="0" bIns="0" rtlCol="0" anchor="ctr"/>
           <a:lstStyle/>
           <a:p>
-            <a:pPr algn="ctr" indent="0" marL="0">
+            <a:pPr marL="0" indent="0" algn="ctr">
               <a:buNone/>
             </a:pPr>
             <a:r>
@@ -13734,7 +14527,7 @@
           <a:bodyPr wrap="square" lIns="0" tIns="0" rIns="0" bIns="0" rtlCol="0" anchor="ctr"/>
           <a:lstStyle/>
           <a:p>
-            <a:pPr indent="0" marL="0">
+            <a:pPr marL="0" indent="0">
               <a:buNone/>
             </a:pPr>
             <a:r>
@@ -13773,7 +14566,7 @@
           <a:bodyPr wrap="square" lIns="0" tIns="0" rIns="0" bIns="0" rtlCol="0" anchor="ctr"/>
           <a:lstStyle/>
           <a:p>
-            <a:pPr indent="0" marL="0">
+            <a:pPr marL="0" indent="0">
               <a:buNone/>
             </a:pPr>
             <a:r>
@@ -13817,6 +14610,13 @@
             <a:prstDash val="solid"/>
           </a:ln>
         </p:spPr>
+        <p:txBody>
+          <a:bodyPr/>
+          <a:lstStyle/>
+          <a:p>
+            <a:endParaRPr lang="ja-JP" altLang="en-US"/>
+          </a:p>
+        </p:txBody>
       </p:sp>
       <p:sp>
         <p:nvSpPr>
@@ -13844,6 +14644,13 @@
             <a:prstDash val="solid"/>
           </a:ln>
         </p:spPr>
+        <p:txBody>
+          <a:bodyPr/>
+          <a:lstStyle/>
+          <a:p>
+            <a:endParaRPr lang="ja-JP" altLang="en-US"/>
+          </a:p>
+        </p:txBody>
       </p:sp>
       <p:sp>
         <p:nvSpPr>
@@ -13866,7 +14673,7 @@
           <a:bodyPr wrap="square" lIns="0" tIns="0" rIns="0" bIns="0" rtlCol="0" anchor="ctr"/>
           <a:lstStyle/>
           <a:p>
-            <a:pPr algn="ctr" indent="0" marL="0">
+            <a:pPr marL="0" indent="0" algn="ctr">
               <a:buNone/>
             </a:pPr>
             <a:r>
@@ -13905,7 +14712,7 @@
           <a:bodyPr wrap="square" lIns="0" tIns="0" rIns="0" bIns="0" rtlCol="0" anchor="ctr"/>
           <a:lstStyle/>
           <a:p>
-            <a:pPr algn="ctr" indent="0" marL="0">
+            <a:pPr marL="0" indent="0" algn="ctr">
               <a:buNone/>
             </a:pPr>
             <a:r>
@@ -13944,7 +14751,7 @@
           <a:bodyPr wrap="square" lIns="0" tIns="0" rIns="0" bIns="0" rtlCol="0" anchor="t"/>
           <a:lstStyle/>
           <a:p>
-            <a:pPr algn="ctr" indent="0" marL="0">
+            <a:pPr marL="0" indent="0" algn="ctr">
               <a:lnSpc>
                 <a:spcPct val="135000"/>
               </a:lnSpc>
@@ -13964,7 +14771,7 @@
             <a:endParaRPr lang="en-US" sz="1250" dirty="0"/>
           </a:p>
           <a:p>
-            <a:pPr algn="ctr" indent="0" marL="0">
+            <a:pPr marL="0" indent="0" algn="ctr">
               <a:lnSpc>
                 <a:spcPct val="135000"/>
               </a:lnSpc>
@@ -13984,7 +14791,7 @@
             <a:endParaRPr lang="en-US" sz="1250" dirty="0"/>
           </a:p>
           <a:p>
-            <a:pPr algn="ctr" indent="0" marL="0">
+            <a:pPr marL="0" indent="0" algn="ctr">
               <a:lnSpc>
                 <a:spcPct val="135000"/>
               </a:lnSpc>
@@ -14026,7 +14833,7 @@
           <a:bodyPr wrap="square" lIns="0" tIns="0" rIns="0" bIns="0" rtlCol="0" anchor="ctr"/>
           <a:lstStyle/>
           <a:p>
-            <a:pPr algn="ctr" indent="0" marL="0">
+            <a:pPr marL="0" indent="0" algn="ctr">
               <a:buNone/>
             </a:pPr>
             <a:r>
@@ -14070,6 +14877,13 @@
             <a:prstDash val="solid"/>
           </a:ln>
         </p:spPr>
+        <p:txBody>
+          <a:bodyPr/>
+          <a:lstStyle/>
+          <a:p>
+            <a:endParaRPr lang="ja-JP" altLang="en-US"/>
+          </a:p>
+        </p:txBody>
       </p:sp>
       <p:sp>
         <p:nvSpPr>
@@ -14097,6 +14911,13 @@
             <a:prstDash val="solid"/>
           </a:ln>
         </p:spPr>
+        <p:txBody>
+          <a:bodyPr/>
+          <a:lstStyle/>
+          <a:p>
+            <a:endParaRPr lang="ja-JP" altLang="en-US"/>
+          </a:p>
+        </p:txBody>
       </p:sp>
       <p:sp>
         <p:nvSpPr>
@@ -14119,7 +14940,7 @@
           <a:bodyPr wrap="square" lIns="0" tIns="0" rIns="0" bIns="0" rtlCol="0" anchor="ctr"/>
           <a:lstStyle/>
           <a:p>
-            <a:pPr algn="ctr" indent="0" marL="0">
+            <a:pPr marL="0" indent="0" algn="ctr">
               <a:buNone/>
             </a:pPr>
             <a:r>
@@ -14158,7 +14979,7 @@
           <a:bodyPr wrap="square" lIns="0" tIns="0" rIns="0" bIns="0" rtlCol="0" anchor="ctr"/>
           <a:lstStyle/>
           <a:p>
-            <a:pPr algn="ctr" indent="0" marL="0">
+            <a:pPr marL="0" indent="0" algn="ctr">
               <a:buNone/>
             </a:pPr>
             <a:r>
@@ -14197,7 +15018,7 @@
           <a:bodyPr wrap="square" lIns="0" tIns="0" rIns="0" bIns="0" rtlCol="0" anchor="t"/>
           <a:lstStyle/>
           <a:p>
-            <a:pPr algn="ctr" indent="0" marL="0">
+            <a:pPr marL="0" indent="0" algn="ctr">
               <a:lnSpc>
                 <a:spcPct val="135000"/>
               </a:lnSpc>
@@ -14217,7 +15038,7 @@
             <a:endParaRPr lang="en-US" sz="1250" dirty="0"/>
           </a:p>
           <a:p>
-            <a:pPr algn="ctr" indent="0" marL="0">
+            <a:pPr marL="0" indent="0" algn="ctr">
               <a:lnSpc>
                 <a:spcPct val="135000"/>
               </a:lnSpc>
@@ -14237,7 +15058,7 @@
             <a:endParaRPr lang="en-US" sz="1250" dirty="0"/>
           </a:p>
           <a:p>
-            <a:pPr algn="ctr" indent="0" marL="0">
+            <a:pPr marL="0" indent="0" algn="ctr">
               <a:lnSpc>
                 <a:spcPct val="135000"/>
               </a:lnSpc>
@@ -14279,7 +15100,7 @@
           <a:bodyPr wrap="square" lIns="0" tIns="0" rIns="0" bIns="0" rtlCol="0" anchor="ctr"/>
           <a:lstStyle/>
           <a:p>
-            <a:pPr algn="ctr" indent="0" marL="0">
+            <a:pPr marL="0" indent="0" algn="ctr">
               <a:buNone/>
             </a:pPr>
             <a:r>
@@ -14323,6 +15144,13 @@
             <a:prstDash val="solid"/>
           </a:ln>
         </p:spPr>
+        <p:txBody>
+          <a:bodyPr/>
+          <a:lstStyle/>
+          <a:p>
+            <a:endParaRPr lang="ja-JP" altLang="en-US"/>
+          </a:p>
+        </p:txBody>
       </p:sp>
       <p:sp>
         <p:nvSpPr>
@@ -14350,6 +15178,13 @@
             <a:prstDash val="solid"/>
           </a:ln>
         </p:spPr>
+        <p:txBody>
+          <a:bodyPr/>
+          <a:lstStyle/>
+          <a:p>
+            <a:endParaRPr lang="ja-JP" altLang="en-US"/>
+          </a:p>
+        </p:txBody>
       </p:sp>
       <p:sp>
         <p:nvSpPr>
@@ -14372,7 +15207,7 @@
           <a:bodyPr wrap="square" lIns="0" tIns="0" rIns="0" bIns="0" rtlCol="0" anchor="ctr"/>
           <a:lstStyle/>
           <a:p>
-            <a:pPr algn="ctr" indent="0" marL="0">
+            <a:pPr marL="0" indent="0" algn="ctr">
               <a:buNone/>
             </a:pPr>
             <a:r>
@@ -14411,7 +15246,7 @@
           <a:bodyPr wrap="square" lIns="0" tIns="0" rIns="0" bIns="0" rtlCol="0" anchor="ctr"/>
           <a:lstStyle/>
           <a:p>
-            <a:pPr algn="ctr" indent="0" marL="0">
+            <a:pPr marL="0" indent="0" algn="ctr">
               <a:buNone/>
             </a:pPr>
             <a:r>
@@ -14450,7 +15285,7 @@
           <a:bodyPr wrap="square" lIns="0" tIns="0" rIns="0" bIns="0" rtlCol="0" anchor="t"/>
           <a:lstStyle/>
           <a:p>
-            <a:pPr algn="ctr" indent="0" marL="0">
+            <a:pPr marL="0" indent="0" algn="ctr">
               <a:lnSpc>
                 <a:spcPct val="135000"/>
               </a:lnSpc>
@@ -14470,7 +15305,7 @@
             <a:endParaRPr lang="en-US" sz="1250" dirty="0"/>
           </a:p>
           <a:p>
-            <a:pPr algn="ctr" indent="0" marL="0">
+            <a:pPr marL="0" indent="0" algn="ctr">
               <a:lnSpc>
                 <a:spcPct val="135000"/>
               </a:lnSpc>
@@ -14490,7 +15325,7 @@
             <a:endParaRPr lang="en-US" sz="1250" dirty="0"/>
           </a:p>
           <a:p>
-            <a:pPr algn="ctr" indent="0" marL="0">
+            <a:pPr marL="0" indent="0" algn="ctr">
               <a:lnSpc>
                 <a:spcPct val="135000"/>
               </a:lnSpc>
@@ -14537,6 +15372,13 @@
             <a:prstDash val="solid"/>
           </a:ln>
         </p:spPr>
+        <p:txBody>
+          <a:bodyPr/>
+          <a:lstStyle/>
+          <a:p>
+            <a:endParaRPr lang="ja-JP" altLang="en-US"/>
+          </a:p>
+        </p:txBody>
       </p:sp>
       <p:sp>
         <p:nvSpPr>
@@ -14559,7 +15401,7 @@
           <a:bodyPr wrap="square" lIns="0" tIns="0" rIns="0" bIns="0" rtlCol="0" anchor="ctr"/>
           <a:lstStyle/>
           <a:p>
-            <a:pPr indent="0" marL="0">
+            <a:pPr marL="0" indent="0">
               <a:buNone/>
             </a:pPr>
             <a:r>
@@ -14598,7 +15440,7 @@
           <a:bodyPr wrap="square" lIns="0" tIns="0" rIns="0" bIns="0" rtlCol="0" anchor="t"/>
           <a:lstStyle/>
           <a:p>
-            <a:pPr indent="0" marL="0">
+            <a:pPr marL="0" indent="0">
               <a:lnSpc>
                 <a:spcPct val="125000"/>
               </a:lnSpc>
@@ -14615,12 +15457,6 @@
               </a:rPr>
               <a:t>発熱・血圧変動・全身状態の悪化時は、看護師の判断で</a:t>
             </a:r>
-            <a:pPr indent="0" marL="0">
-              <a:lnSpc>
-                <a:spcPct val="125000"/>
-              </a:lnSpc>
-              <a:buNone/>
-            </a:pPr>
             <a:r>
               <a:rPr lang="en-US" sz="1250" b="1" dirty="0">
                 <a:solidFill>
@@ -14632,12 +15468,6 @@
               </a:rPr>
               <a:t>清拭や部分浴に切り替え</a:t>
             </a:r>
-            <a:pPr indent="0" marL="0">
-              <a:lnSpc>
-                <a:spcPct val="125000"/>
-              </a:lnSpc>
-              <a:buNone/>
-            </a:pPr>
             <a:r>
               <a:rPr lang="en-US" sz="1250" dirty="0">
                 <a:solidFill>
@@ -14679,6 +15509,13 @@
             <a:prstDash val="solid"/>
           </a:ln>
         </p:spPr>
+        <p:txBody>
+          <a:bodyPr/>
+          <a:lstStyle/>
+          <a:p>
+            <a:endParaRPr lang="ja-JP" altLang="en-US"/>
+          </a:p>
+        </p:txBody>
       </p:sp>
       <p:sp>
         <p:nvSpPr>
@@ -14701,7 +15538,7 @@
           <a:bodyPr wrap="square" lIns="0" tIns="0" rIns="0" bIns="0" rtlCol="0" anchor="ctr"/>
           <a:lstStyle/>
           <a:p>
-            <a:pPr indent="0" marL="0">
+            <a:pPr marL="0" indent="0">
               <a:buNone/>
             </a:pPr>
             <a:r>
@@ -14740,13 +15577,57 @@
           <a:bodyPr wrap="square" lIns="0" tIns="0" rIns="0" bIns="0" rtlCol="0" anchor="t"/>
           <a:lstStyle/>
           <a:p>
-            <a:pPr indent="0" marL="0">
+            <a:pPr marL="0" indent="0">
               <a:lnSpc>
                 <a:spcPct val="125000"/>
               </a:lnSpc>
               <a:buNone/>
             </a:pPr>
             <a:r>
+              <a:rPr lang="en-US" sz="1250" dirty="0" err="1">
+                <a:solidFill>
+                  <a:srgbClr val="1C2833"/>
+                </a:solidFill>
+                <a:latin typeface="Meiryo" pitchFamily="34" charset="0"/>
+                <a:ea typeface="Meiryo" pitchFamily="34" charset="-122"/>
+                <a:cs typeface="Meiryo" pitchFamily="34" charset="-120"/>
+              </a:rPr>
+              <a:t>給湯は</a:t>
+            </a:r>
+            <a:r>
+              <a:rPr lang="en-US" sz="1250" b="1" dirty="0" err="1">
+                <a:solidFill>
+                  <a:srgbClr val="1D9E75"/>
+                </a:solidFill>
+                <a:latin typeface="Meiryo" pitchFamily="34" charset="0"/>
+                <a:ea typeface="Meiryo" pitchFamily="34" charset="-122"/>
+                <a:cs typeface="Meiryo" pitchFamily="34" charset="-120"/>
+              </a:rPr>
+              <a:t>車両または</a:t>
+            </a:r>
+            <a:r>
+              <a:rPr lang="ja-JP" altLang="en-US" sz="1250" b="1" dirty="0">
+                <a:solidFill>
+                  <a:srgbClr val="1D9E75"/>
+                </a:solidFill>
+                <a:latin typeface="Meiryo" pitchFamily="34" charset="0"/>
+                <a:ea typeface="Meiryo" pitchFamily="34" charset="-122"/>
+                <a:cs typeface="Meiryo" pitchFamily="34" charset="-120"/>
+              </a:rPr>
+              <a:t>ご自宅</a:t>
+            </a:r>
+            <a:r>
+              <a:rPr lang="en-US" sz="1250" b="1" dirty="0">
+                <a:solidFill>
+                  <a:srgbClr val="1D9E75"/>
+                </a:solidFill>
+                <a:latin typeface="Meiryo" pitchFamily="34" charset="0"/>
+                <a:ea typeface="Meiryo" pitchFamily="34" charset="-122"/>
+                <a:cs typeface="Meiryo" pitchFamily="34" charset="-120"/>
+              </a:rPr>
+              <a:t>の給湯設備</a:t>
+            </a:r>
+            <a:r>
               <a:rPr lang="en-US" sz="1250" dirty="0">
                 <a:solidFill>
                   <a:srgbClr val="1C2833"/>
@@ -14755,31 +15636,30 @@
                 <a:ea typeface="Meiryo" pitchFamily="34" charset="-122"/>
                 <a:cs typeface="Meiryo" pitchFamily="34" charset="-120"/>
               </a:rPr>
-              <a:t>給湯は</a:t>
-            </a:r>
-            <a:pPr indent="0" marL="0">
-              <a:lnSpc>
-                <a:spcPct val="125000"/>
-              </a:lnSpc>
-              <a:buNone/>
-            </a:pPr>
-            <a:r>
-              <a:rPr lang="en-US" sz="1250" b="1" dirty="0">
-                <a:solidFill>
-                  <a:srgbClr val="1D9E75"/>
-                </a:solidFill>
-                <a:latin typeface="Meiryo" pitchFamily="34" charset="0"/>
-                <a:ea typeface="Meiryo" pitchFamily="34" charset="-122"/>
-                <a:cs typeface="Meiryo" pitchFamily="34" charset="-120"/>
-              </a:rPr>
-              <a:t>車両または屋内の給湯設備</a:t>
-            </a:r>
-            <a:pPr indent="0" marL="0">
-              <a:lnSpc>
-                <a:spcPct val="125000"/>
-              </a:lnSpc>
-              <a:buNone/>
-            </a:pPr>
+              <a:t>から。ベッドサイドに約2畳</a:t>
+            </a:r>
+            <a:r>
+              <a:rPr lang="ja-JP" altLang="en-US" sz="1250" dirty="0">
+                <a:solidFill>
+                  <a:srgbClr val="1C2833"/>
+                </a:solidFill>
+                <a:latin typeface="Meiryo" pitchFamily="34" charset="0"/>
+                <a:ea typeface="Meiryo" pitchFamily="34" charset="-122"/>
+                <a:cs typeface="Meiryo" pitchFamily="34" charset="-120"/>
+              </a:rPr>
+              <a:t>程</a:t>
+            </a:r>
+            <a:r>
+              <a:rPr lang="en-US" sz="1250" dirty="0" err="1">
+                <a:solidFill>
+                  <a:srgbClr val="1C2833"/>
+                </a:solidFill>
+                <a:latin typeface="Meiryo" pitchFamily="34" charset="0"/>
+                <a:ea typeface="Meiryo" pitchFamily="34" charset="-122"/>
+                <a:cs typeface="Meiryo" pitchFamily="34" charset="-120"/>
+              </a:rPr>
+              <a:t>のスペースがあれば設置可能。床・寝具の養生も行います</a:t>
+            </a:r>
             <a:r>
               <a:rPr lang="en-US" sz="1250" dirty="0">
                 <a:solidFill>
@@ -14789,7 +15669,7 @@
                 <a:ea typeface="Meiryo" pitchFamily="34" charset="-122"/>
                 <a:cs typeface="Meiryo" pitchFamily="34" charset="-120"/>
               </a:rPr>
-              <a:t>から。ベッドサイドに約2畳のスペースがあれば設置可能。床・寝具の養生も行います。</a:t>
+              <a:t>。</a:t>
             </a:r>
             <a:endParaRPr lang="en-US" sz="1250" dirty="0"/>
           </a:p>
@@ -14846,6 +15726,13 @@
             <a:prstDash val="solid"/>
           </a:ln>
         </p:spPr>
+        <p:txBody>
+          <a:bodyPr/>
+          <a:lstStyle/>
+          <a:p>
+            <a:endParaRPr lang="ja-JP" altLang="en-US"/>
+          </a:p>
+        </p:txBody>
       </p:sp>
       <p:sp>
         <p:nvSpPr>
@@ -14868,7 +15755,7 @@
           <a:bodyPr wrap="square" lIns="0" tIns="0" rIns="0" bIns="0" rtlCol="0" anchor="ctr"/>
           <a:lstStyle/>
           <a:p>
-            <a:pPr algn="ctr" indent="0" marL="0">
+            <a:pPr marL="0" indent="0" algn="ctr">
               <a:buNone/>
             </a:pPr>
             <a:r>
@@ -14907,7 +15794,7 @@
           <a:bodyPr wrap="square" lIns="0" tIns="0" rIns="0" bIns="0" rtlCol="0" anchor="ctr"/>
           <a:lstStyle/>
           <a:p>
-            <a:pPr indent="0" marL="0">
+            <a:pPr marL="0" indent="0">
               <a:buNone/>
             </a:pPr>
             <a:r>
@@ -14946,7 +15833,7 @@
           <a:bodyPr wrap="square" lIns="0" tIns="0" rIns="0" bIns="0" rtlCol="0" anchor="ctr"/>
           <a:lstStyle/>
           <a:p>
-            <a:pPr indent="0" marL="0">
+            <a:pPr marL="0" indent="0">
               <a:buNone/>
             </a:pPr>
             <a:r>
@@ -14990,6 +15877,13 @@
             <a:prstDash val="solid"/>
           </a:ln>
         </p:spPr>
+        <p:txBody>
+          <a:bodyPr/>
+          <a:lstStyle/>
+          <a:p>
+            <a:endParaRPr lang="ja-JP" altLang="en-US"/>
+          </a:p>
+        </p:txBody>
       </p:sp>
       <p:sp>
         <p:nvSpPr>
@@ -15017,6 +15911,13 @@
             <a:prstDash val="solid"/>
           </a:ln>
         </p:spPr>
+        <p:txBody>
+          <a:bodyPr/>
+          <a:lstStyle/>
+          <a:p>
+            <a:endParaRPr lang="ja-JP" altLang="en-US"/>
+          </a:p>
+        </p:txBody>
       </p:sp>
       <p:sp>
         <p:nvSpPr>
@@ -15026,7 +15927,7 @@
         </p:nvSpPr>
         <p:spPr>
           <a:xfrm>
-            <a:off x="786384" y="1700784"/>
+            <a:off x="747381" y="1723644"/>
             <a:ext cx="786384" cy="292608"/>
           </a:xfrm>
           <a:prstGeom prst="rect">
@@ -15039,11 +15940,11 @@
           <a:bodyPr wrap="square" lIns="0" tIns="0" rIns="0" bIns="0" rtlCol="0" anchor="ctr"/>
           <a:lstStyle/>
           <a:p>
-            <a:pPr algn="ctr" indent="0" marL="0">
+            <a:pPr marL="0" indent="0" algn="ctr">
               <a:buNone/>
             </a:pPr>
             <a:r>
-              <a:rPr lang="en-US" sz="1100" b="1" dirty="0">
+              <a:rPr lang="en-US" sz="1600" b="1" dirty="0">
                 <a:solidFill>
                   <a:srgbClr val="FFFFFF"/>
                 </a:solidFill>
@@ -15053,7 +15954,7 @@
               </a:rPr>
               <a:t>1名</a:t>
             </a:r>
-            <a:endParaRPr lang="en-US" sz="1100" dirty="0"/>
+            <a:endParaRPr lang="en-US" sz="1600" dirty="0"/>
           </a:p>
         </p:txBody>
       </p:sp>
@@ -15078,11 +15979,11 @@
           <a:bodyPr wrap="square" lIns="0" tIns="0" rIns="0" bIns="0" rtlCol="0" anchor="ctr"/>
           <a:lstStyle/>
           <a:p>
-            <a:pPr indent="0" marL="0">
+            <a:pPr marL="0" indent="0">
               <a:buNone/>
             </a:pPr>
             <a:r>
-              <a:rPr lang="en-US" sz="1600" b="1" dirty="0">
+              <a:rPr lang="en-US" sz="2000" b="1" dirty="0">
                 <a:solidFill>
                   <a:srgbClr val="1D9E75"/>
                 </a:solidFill>
@@ -15092,7 +15993,7 @@
               </a:rPr>
               <a:t>看護師</a:t>
             </a:r>
-            <a:endParaRPr lang="en-US" sz="1600" dirty="0"/>
+            <a:endParaRPr lang="en-US" sz="2000" dirty="0"/>
           </a:p>
         </p:txBody>
       </p:sp>
@@ -15125,7 +16026,7 @@
               <a:buChar char="●"/>
             </a:pPr>
             <a:r>
-              <a:rPr lang="en-US" sz="1250" dirty="0">
+              <a:rPr lang="en-US" sz="1600" dirty="0">
                 <a:solidFill>
                   <a:srgbClr val="1C2833"/>
                 </a:solidFill>
@@ -15135,14 +16036,8 @@
               </a:rPr>
               <a:t>入浴前後の</a:t>
             </a:r>
-            <a:pPr indent="0" marL="0">
-              <a:spcAft>
-                <a:spcPts val="600"/>
-              </a:spcAft>
-              <a:buNone/>
-            </a:pPr>
-            <a:r>
-              <a:rPr lang="en-US" sz="1250" b="1" dirty="0">
+            <a:r>
+              <a:rPr lang="en-US" sz="1600" b="1" dirty="0">
                 <a:solidFill>
                   <a:srgbClr val="1D9E75"/>
                 </a:solidFill>
@@ -15152,14 +16047,8 @@
               </a:rPr>
               <a:t>アセスメント</a:t>
             </a:r>
-            <a:pPr indent="0" marL="0">
-              <a:spcAft>
-                <a:spcPts val="600"/>
-              </a:spcAft>
-              <a:buNone/>
-            </a:pPr>
-            <a:r>
-              <a:rPr lang="en-US" sz="1250" dirty="0">
+            <a:r>
+              <a:rPr lang="en-US" sz="1600" dirty="0">
                 <a:solidFill>
                   <a:srgbClr val="1C2833"/>
                 </a:solidFill>
@@ -15169,7 +16058,7 @@
               </a:rPr>
               <a:t>（バイタル・全身状態）</a:t>
             </a:r>
-            <a:endParaRPr lang="en-US" sz="1250" dirty="0"/>
+            <a:endParaRPr lang="en-US" sz="1600" dirty="0"/>
           </a:p>
           <a:p>
             <a:pPr marL="342900" indent="-342900">
@@ -15180,7 +16069,7 @@
               <a:buChar char="●"/>
             </a:pPr>
             <a:r>
-              <a:rPr lang="en-US" sz="1250" dirty="0">
+              <a:rPr lang="en-US" sz="1600" dirty="0">
                 <a:solidFill>
                   <a:srgbClr val="1C2833"/>
                 </a:solidFill>
@@ -15190,14 +16079,8 @@
               </a:rPr>
               <a:t>入浴可否の</a:t>
             </a:r>
-            <a:pPr indent="0" marL="0">
-              <a:spcAft>
-                <a:spcPts val="600"/>
-              </a:spcAft>
-              <a:buNone/>
-            </a:pPr>
-            <a:r>
-              <a:rPr lang="en-US" sz="1250" b="1" dirty="0">
+            <a:r>
+              <a:rPr lang="en-US" sz="1600" b="1" dirty="0">
                 <a:solidFill>
                   <a:srgbClr val="1D9E75"/>
                 </a:solidFill>
@@ -15207,7 +16090,7 @@
               </a:rPr>
               <a:t>その場での判断</a:t>
             </a:r>
-            <a:endParaRPr lang="en-US" sz="1250" dirty="0"/>
+            <a:endParaRPr lang="en-US" sz="1600" dirty="0"/>
           </a:p>
           <a:p>
             <a:pPr marL="342900" indent="-342900">
@@ -15218,7 +16101,7 @@
               <a:buChar char="●"/>
             </a:pPr>
             <a:r>
-              <a:rPr lang="en-US" sz="1250" dirty="0">
+              <a:rPr lang="en-US" sz="1600" dirty="0">
                 <a:solidFill>
                   <a:srgbClr val="1C2833"/>
                 </a:solidFill>
@@ -15228,14 +16111,8 @@
               </a:rPr>
               <a:t>褥瘡・創傷の</a:t>
             </a:r>
-            <a:pPr indent="0" marL="0">
-              <a:spcAft>
-                <a:spcPts val="600"/>
-              </a:spcAft>
-              <a:buNone/>
-            </a:pPr>
-            <a:r>
-              <a:rPr lang="en-US" sz="1250" b="1" dirty="0">
+            <a:r>
+              <a:rPr lang="en-US" sz="1600" b="1" dirty="0">
                 <a:solidFill>
                   <a:srgbClr val="1D9E75"/>
                 </a:solidFill>
@@ -15245,14 +16122,8 @@
               </a:rPr>
               <a:t>観察と記録</a:t>
             </a:r>
-            <a:pPr indent="0" marL="0">
-              <a:spcAft>
-                <a:spcPts val="600"/>
-              </a:spcAft>
-              <a:buNone/>
-            </a:pPr>
-            <a:r>
-              <a:rPr lang="en-US" sz="1250" dirty="0">
+            <a:r>
+              <a:rPr lang="en-US" sz="1600" dirty="0">
                 <a:solidFill>
                   <a:srgbClr val="1C2833"/>
                 </a:solidFill>
@@ -15262,7 +16133,7 @@
               </a:rPr>
               <a:t>（処置は訪問看護へ）</a:t>
             </a:r>
-            <a:endParaRPr lang="en-US" sz="1250" dirty="0"/>
+            <a:endParaRPr lang="en-US" sz="1600" dirty="0"/>
           </a:p>
           <a:p>
             <a:pPr marL="342900" indent="-342900">
@@ -15273,7 +16144,7 @@
               <a:buChar char="●"/>
             </a:pPr>
             <a:r>
-              <a:rPr lang="en-US" sz="1250" dirty="0">
+              <a:rPr lang="en-US" sz="1600" dirty="0">
                 <a:solidFill>
                   <a:srgbClr val="1C2833"/>
                 </a:solidFill>
@@ -15283,14 +16154,8 @@
               </a:rPr>
               <a:t>急変時の</a:t>
             </a:r>
-            <a:pPr indent="0" marL="0">
-              <a:spcAft>
-                <a:spcPts val="600"/>
-              </a:spcAft>
-              <a:buNone/>
-            </a:pPr>
-            <a:r>
-              <a:rPr lang="en-US" sz="1250" b="1" dirty="0">
+            <a:r>
+              <a:rPr lang="en-US" sz="1600" b="1" dirty="0">
                 <a:solidFill>
                   <a:srgbClr val="1D9E75"/>
                 </a:solidFill>
@@ -15300,7 +16165,7 @@
               </a:rPr>
               <a:t>初期判断と主治医・訪問看護師への連絡</a:t>
             </a:r>
-            <a:endParaRPr lang="en-US" sz="1250" dirty="0"/>
+            <a:endParaRPr lang="en-US" sz="1600" dirty="0"/>
           </a:p>
           <a:p>
             <a:pPr marL="342900" indent="-342900">
@@ -15311,7 +16176,7 @@
               <a:buChar char="●"/>
             </a:pPr>
             <a:r>
-              <a:rPr lang="en-US" sz="1250" dirty="0">
+              <a:rPr lang="en-US" sz="1600" dirty="0">
                 <a:solidFill>
                   <a:srgbClr val="1C2833"/>
                 </a:solidFill>
@@ -15321,14 +16186,8 @@
               </a:rPr>
               <a:t>関係職種への</a:t>
             </a:r>
-            <a:pPr indent="0" marL="0">
-              <a:spcAft>
-                <a:spcPts val="600"/>
-              </a:spcAft>
-              <a:buNone/>
-            </a:pPr>
-            <a:r>
-              <a:rPr lang="en-US" sz="1250" b="1" dirty="0">
+            <a:r>
+              <a:rPr lang="en-US" sz="1600" b="1" dirty="0">
                 <a:solidFill>
                   <a:srgbClr val="1D9E75"/>
                 </a:solidFill>
@@ -15338,7 +16197,7 @@
               </a:rPr>
               <a:t>情報提供</a:t>
             </a:r>
-            <a:endParaRPr lang="en-US" sz="1250" dirty="0"/>
+            <a:endParaRPr lang="en-US" sz="1600" dirty="0"/>
           </a:p>
         </p:txBody>
       </p:sp>
@@ -15368,6 +16227,13 @@
             <a:prstDash val="solid"/>
           </a:ln>
         </p:spPr>
+        <p:txBody>
+          <a:bodyPr/>
+          <a:lstStyle/>
+          <a:p>
+            <a:endParaRPr lang="ja-JP" altLang="en-US"/>
+          </a:p>
+        </p:txBody>
       </p:sp>
       <p:sp>
         <p:nvSpPr>
@@ -15395,6 +16261,13 @@
             <a:prstDash val="solid"/>
           </a:ln>
         </p:spPr>
+        <p:txBody>
+          <a:bodyPr/>
+          <a:lstStyle/>
+          <a:p>
+            <a:endParaRPr lang="ja-JP" altLang="en-US"/>
+          </a:p>
+        </p:txBody>
       </p:sp>
       <p:sp>
         <p:nvSpPr>
@@ -15417,11 +16290,11 @@
           <a:bodyPr wrap="square" lIns="0" tIns="0" rIns="0" bIns="0" rtlCol="0" anchor="ctr"/>
           <a:lstStyle/>
           <a:p>
-            <a:pPr algn="ctr" indent="0" marL="0">
+            <a:pPr marL="0" indent="0" algn="ctr">
               <a:buNone/>
             </a:pPr>
             <a:r>
-              <a:rPr lang="en-US" sz="1100" b="1" dirty="0">
+              <a:rPr lang="en-US" sz="1600" b="1" dirty="0">
                 <a:solidFill>
                   <a:srgbClr val="FFFFFF"/>
                 </a:solidFill>
@@ -15431,7 +16304,7 @@
               </a:rPr>
               <a:t>2名</a:t>
             </a:r>
-            <a:endParaRPr lang="en-US" sz="1100" dirty="0"/>
+            <a:endParaRPr lang="en-US" sz="1600" dirty="0"/>
           </a:p>
         </p:txBody>
       </p:sp>
@@ -15456,11 +16329,11 @@
           <a:bodyPr wrap="square" lIns="0" tIns="0" rIns="0" bIns="0" rtlCol="0" anchor="ctr"/>
           <a:lstStyle/>
           <a:p>
-            <a:pPr indent="0" marL="0">
+            <a:pPr marL="0" indent="0">
               <a:buNone/>
             </a:pPr>
             <a:r>
-              <a:rPr lang="en-US" sz="1600" b="1" dirty="0">
+              <a:rPr lang="en-US" sz="2000" b="1" dirty="0">
                 <a:solidFill>
                   <a:srgbClr val="1A5276"/>
                 </a:solidFill>
@@ -15470,7 +16343,7 @@
               </a:rPr>
               <a:t>介護スタッフ</a:t>
             </a:r>
-            <a:endParaRPr lang="en-US" sz="1600" dirty="0"/>
+            <a:endParaRPr lang="en-US" sz="2000" dirty="0"/>
           </a:p>
         </p:txBody>
       </p:sp>
@@ -15503,7 +16376,7 @@
               <a:buChar char="●"/>
             </a:pPr>
             <a:r>
-              <a:rPr lang="en-US" sz="1250" dirty="0">
+              <a:rPr lang="en-US" sz="1600" dirty="0">
                 <a:solidFill>
                   <a:srgbClr val="1C2833"/>
                 </a:solidFill>
@@ -15513,7 +16386,7 @@
               </a:rPr>
               <a:t>浴槽の搬入・設置・撤去</a:t>
             </a:r>
-            <a:endParaRPr lang="en-US" sz="1250" dirty="0"/>
+            <a:endParaRPr lang="en-US" sz="1600" dirty="0"/>
           </a:p>
           <a:p>
             <a:pPr marL="342900" indent="-342900">
@@ -15524,7 +16397,7 @@
               <a:buChar char="●"/>
             </a:pPr>
             <a:r>
-              <a:rPr lang="en-US" sz="1250" dirty="0">
+              <a:rPr lang="en-US" sz="1600" dirty="0">
                 <a:solidFill>
                   <a:srgbClr val="1C2833"/>
                 </a:solidFill>
@@ -15534,7 +16407,7 @@
               </a:rPr>
               <a:t>移乗介助（2名で安全に）</a:t>
             </a:r>
-            <a:endParaRPr lang="en-US" sz="1250" dirty="0"/>
+            <a:endParaRPr lang="en-US" sz="1600" dirty="0"/>
           </a:p>
           <a:p>
             <a:pPr marL="342900" indent="-342900">
@@ -15545,7 +16418,7 @@
               <a:buChar char="●"/>
             </a:pPr>
             <a:r>
-              <a:rPr lang="en-US" sz="1250" dirty="0">
+              <a:rPr lang="en-US" sz="1600" dirty="0">
                 <a:solidFill>
                   <a:srgbClr val="1C2833"/>
                 </a:solidFill>
@@ -15555,7 +16428,7 @@
               </a:rPr>
               <a:t>洗身・洗髪、更衣</a:t>
             </a:r>
-            <a:endParaRPr lang="en-US" sz="1250" dirty="0"/>
+            <a:endParaRPr lang="en-US" sz="1600" dirty="0"/>
           </a:p>
           <a:p>
             <a:pPr marL="342900" indent="-342900">
@@ -15566,7 +16439,7 @@
               <a:buChar char="●"/>
             </a:pPr>
             <a:r>
-              <a:rPr lang="en-US" sz="1250" dirty="0">
+              <a:rPr lang="en-US" sz="1600" dirty="0">
                 <a:solidFill>
                   <a:srgbClr val="1C2833"/>
                 </a:solidFill>
@@ -15576,7 +16449,7 @@
               </a:rPr>
               <a:t>居室の養生と原状復帰</a:t>
             </a:r>
-            <a:endParaRPr lang="en-US" sz="1250" dirty="0"/>
+            <a:endParaRPr lang="en-US" sz="1600" dirty="0"/>
           </a:p>
         </p:txBody>
       </p:sp>
@@ -15606,6 +16479,13 @@
             <a:prstDash val="solid"/>
           </a:ln>
         </p:spPr>
+        <p:txBody>
+          <a:bodyPr/>
+          <a:lstStyle/>
+          <a:p>
+            <a:endParaRPr lang="ja-JP" altLang="en-US"/>
+          </a:p>
+        </p:txBody>
       </p:sp>
       <p:sp>
         <p:nvSpPr>
@@ -15615,7 +16495,7 @@
         </p:nvSpPr>
         <p:spPr>
           <a:xfrm>
-            <a:off x="822960" y="4553712"/>
+            <a:off x="822960" y="4631718"/>
             <a:ext cx="10545775" cy="960120"/>
           </a:xfrm>
           <a:prstGeom prst="rect">
@@ -15628,14 +16508,14 @@
           <a:bodyPr wrap="square" lIns="0" tIns="0" rIns="0" bIns="0" rtlCol="0" anchor="ctr"/>
           <a:lstStyle/>
           <a:p>
-            <a:pPr indent="0" marL="0">
+            <a:pPr marL="0" indent="0">
               <a:lnSpc>
                 <a:spcPct val="130000"/>
               </a:lnSpc>
               <a:buNone/>
             </a:pPr>
             <a:r>
-              <a:rPr lang="en-US" sz="1400" b="1" dirty="0">
+              <a:rPr lang="en-US" sz="1600" b="1" dirty="0">
                 <a:solidFill>
                   <a:srgbClr val="1A5276"/>
                 </a:solidFill>
@@ -15645,14 +16525,8 @@
               </a:rPr>
               <a:t>3名体制は省令上の要件です — </a:t>
             </a:r>
-            <a:pPr indent="0" marL="0">
-              <a:lnSpc>
-                <a:spcPct val="130000"/>
-              </a:lnSpc>
-              <a:buNone/>
-            </a:pPr>
-            <a:r>
-              <a:rPr lang="en-US" sz="1400" dirty="0">
+            <a:r>
+              <a:rPr lang="en-US" sz="1600" dirty="0">
                 <a:solidFill>
                   <a:srgbClr val="1C2833"/>
                 </a:solidFill>
@@ -15662,14 +16536,8 @@
               </a:rPr>
               <a:t>1回の訪問に看護職員1名＋介護職員2名の計3名と厚生労働省令で定められています。移乗を2名で担うため</a:t>
             </a:r>
-            <a:pPr indent="0" marL="0">
-              <a:lnSpc>
-                <a:spcPct val="130000"/>
-              </a:lnSpc>
-              <a:buNone/>
-            </a:pPr>
-            <a:r>
-              <a:rPr lang="en-US" sz="1400" b="1" dirty="0">
+            <a:r>
+              <a:rPr lang="en-US" sz="1600" b="1" dirty="0">
                 <a:solidFill>
                   <a:srgbClr val="1D9E75"/>
                 </a:solidFill>
@@ -15679,14 +16547,8 @@
               </a:rPr>
               <a:t>転倒・皮膚剥離のリスクを抑え</a:t>
             </a:r>
-            <a:pPr indent="0" marL="0">
-              <a:lnSpc>
-                <a:spcPct val="130000"/>
-              </a:lnSpc>
-              <a:buNone/>
-            </a:pPr>
-            <a:r>
-              <a:rPr lang="en-US" sz="1400" dirty="0">
+            <a:r>
+              <a:rPr lang="en-US" sz="1600" dirty="0">
                 <a:solidFill>
                   <a:srgbClr val="1C2833"/>
                 </a:solidFill>
@@ -15696,14 +16558,8 @@
               </a:rPr>
               <a:t>、看護師は</a:t>
             </a:r>
-            <a:pPr indent="0" marL="0">
-              <a:lnSpc>
-                <a:spcPct val="130000"/>
-              </a:lnSpc>
-              <a:buNone/>
-            </a:pPr>
-            <a:r>
-              <a:rPr lang="en-US" sz="1400" b="1" dirty="0">
+            <a:r>
+              <a:rPr lang="en-US" sz="1600" b="1" dirty="0">
                 <a:solidFill>
                   <a:srgbClr val="1D9E75"/>
                 </a:solidFill>
@@ -15713,14 +16569,8 @@
               </a:rPr>
               <a:t>観察と判断に専念</a:t>
             </a:r>
-            <a:pPr indent="0" marL="0">
-              <a:lnSpc>
-                <a:spcPct val="130000"/>
-              </a:lnSpc>
-              <a:buNone/>
-            </a:pPr>
-            <a:r>
-              <a:rPr lang="en-US" sz="1400" dirty="0">
+            <a:r>
+              <a:rPr lang="en-US" sz="1600" dirty="0">
                 <a:solidFill>
                   <a:srgbClr val="1C2833"/>
                 </a:solidFill>
@@ -15730,7 +16580,7 @@
               </a:rPr>
               <a:t>できます。</a:t>
             </a:r>
-            <a:endParaRPr lang="en-US" sz="1400" dirty="0"/>
+            <a:endParaRPr lang="en-US" sz="1600" dirty="0"/>
           </a:p>
         </p:txBody>
       </p:sp>
@@ -15785,6 +16635,13 @@
             <a:prstDash val="solid"/>
           </a:ln>
         </p:spPr>
+        <p:txBody>
+          <a:bodyPr/>
+          <a:lstStyle/>
+          <a:p>
+            <a:endParaRPr lang="ja-JP" altLang="en-US"/>
+          </a:p>
+        </p:txBody>
       </p:sp>
       <p:sp>
         <p:nvSpPr>
@@ -15807,7 +16664,7 @@
           <a:bodyPr wrap="square" lIns="0" tIns="0" rIns="0" bIns="0" rtlCol="0" anchor="ctr"/>
           <a:lstStyle/>
           <a:p>
-            <a:pPr algn="ctr" indent="0" marL="0">
+            <a:pPr marL="0" indent="0" algn="ctr">
               <a:buNone/>
             </a:pPr>
             <a:r>
@@ -15846,7 +16703,7 @@
           <a:bodyPr wrap="square" lIns="0" tIns="0" rIns="0" bIns="0" rtlCol="0" anchor="ctr"/>
           <a:lstStyle/>
           <a:p>
-            <a:pPr indent="0" marL="0">
+            <a:pPr marL="0" indent="0">
               <a:buNone/>
             </a:pPr>
             <a:r>
@@ -15885,7 +16742,7 @@
           <a:bodyPr wrap="square" lIns="0" tIns="0" rIns="0" bIns="0" rtlCol="0" anchor="ctr"/>
           <a:lstStyle/>
           <a:p>
-            <a:pPr indent="0" marL="0">
+            <a:pPr marL="0" indent="0">
               <a:buNone/>
             </a:pPr>
             <a:r>
@@ -15924,7 +16781,7 @@
           <a:bodyPr wrap="square" lIns="0" tIns="0" rIns="0" bIns="0" rtlCol="0" anchor="ctr"/>
           <a:lstStyle/>
           <a:p>
-            <a:pPr indent="0" marL="0">
+            <a:pPr marL="0" indent="0">
               <a:buNone/>
             </a:pPr>
             <a:r>
@@ -15968,6 +16825,13 @@
             <a:prstDash val="solid"/>
           </a:ln>
         </p:spPr>
+        <p:txBody>
+          <a:bodyPr/>
+          <a:lstStyle/>
+          <a:p>
+            <a:endParaRPr lang="ja-JP" altLang="en-US"/>
+          </a:p>
+        </p:txBody>
       </p:sp>
       <p:sp>
         <p:nvSpPr>
@@ -15990,11 +16854,11 @@
           <a:bodyPr wrap="square" lIns="0" tIns="0" rIns="0" bIns="0" rtlCol="0" anchor="ctr"/>
           <a:lstStyle/>
           <a:p>
-            <a:pPr indent="0" marL="0">
+            <a:pPr marL="0" indent="0">
               <a:buNone/>
             </a:pPr>
             <a:r>
-              <a:rPr lang="en-US" sz="1500" b="1" dirty="0">
+              <a:rPr lang="en-US" sz="2000" b="1" dirty="0">
                 <a:solidFill>
                   <a:srgbClr val="1A5276"/>
                 </a:solidFill>
@@ -16037,7 +16901,7 @@
               <a:buChar char="●"/>
             </a:pPr>
             <a:r>
-              <a:rPr lang="en-US" sz="1200" dirty="0">
+              <a:rPr lang="en-US" sz="1400" dirty="0">
                 <a:solidFill>
                   <a:srgbClr val="1C2833"/>
                 </a:solidFill>
@@ -16047,14 +16911,8 @@
               </a:rPr>
               <a:t>仙骨部・踵部の</a:t>
             </a:r>
-            <a:pPr indent="0" marL="0">
-              <a:spcAft>
-                <a:spcPts val="600"/>
-              </a:spcAft>
-              <a:buNone/>
-            </a:pPr>
-            <a:r>
-              <a:rPr lang="en-US" sz="1200" b="1" dirty="0">
+            <a:r>
+              <a:rPr lang="en-US" sz="1400" b="1" dirty="0">
                 <a:solidFill>
                   <a:srgbClr val="1D9E75"/>
                 </a:solidFill>
@@ -16064,7 +16922,7 @@
               </a:rPr>
               <a:t>褥瘡の発赤</a:t>
             </a:r>
-            <a:endParaRPr lang="en-US" sz="1200" dirty="0"/>
+            <a:endParaRPr lang="en-US" sz="1400" dirty="0"/>
           </a:p>
           <a:p>
             <a:pPr marL="342900" indent="-342900">
@@ -16075,7 +16933,7 @@
               <a:buChar char="●"/>
             </a:pPr>
             <a:r>
-              <a:rPr lang="en-US" sz="1200" dirty="0">
+              <a:rPr lang="en-US" sz="1400" dirty="0">
                 <a:solidFill>
                   <a:srgbClr val="1C2833"/>
                 </a:solidFill>
@@ -16085,14 +16943,8 @@
               </a:rPr>
               <a:t>下腿・足背の</a:t>
             </a:r>
-            <a:pPr indent="0" marL="0">
-              <a:spcAft>
-                <a:spcPts val="600"/>
-              </a:spcAft>
-              <a:buNone/>
-            </a:pPr>
-            <a:r>
-              <a:rPr lang="en-US" sz="1200" b="1" dirty="0">
+            <a:r>
+              <a:rPr lang="en-US" sz="1400" b="1" dirty="0">
                 <a:solidFill>
                   <a:srgbClr val="1D9E75"/>
                 </a:solidFill>
@@ -16102,7 +16954,7 @@
               </a:rPr>
               <a:t>浮腫の増悪</a:t>
             </a:r>
-            <a:endParaRPr lang="en-US" sz="1200" dirty="0"/>
+            <a:endParaRPr lang="en-US" sz="1400" dirty="0"/>
           </a:p>
           <a:p>
             <a:pPr marL="342900" indent="-342900">
@@ -16113,7 +16965,7 @@
               <a:buChar char="●"/>
             </a:pPr>
             <a:r>
-              <a:rPr lang="en-US" sz="1200" dirty="0">
+              <a:rPr lang="en-US" sz="1400" dirty="0">
                 <a:solidFill>
                   <a:srgbClr val="1C2833"/>
                 </a:solidFill>
@@ -16123,7 +16975,7 @@
               </a:rPr>
               <a:t>白癬・湿疹・スキンテア</a:t>
             </a:r>
-            <a:endParaRPr lang="en-US" sz="1200" dirty="0"/>
+            <a:endParaRPr lang="en-US" sz="1400" dirty="0"/>
           </a:p>
           <a:p>
             <a:pPr marL="342900" indent="-342900">
@@ -16134,7 +16986,7 @@
               <a:buChar char="●"/>
             </a:pPr>
             <a:r>
-              <a:rPr lang="en-US" sz="1200" dirty="0">
+              <a:rPr lang="en-US" sz="1400" dirty="0">
                 <a:solidFill>
                   <a:srgbClr val="1C2833"/>
                 </a:solidFill>
@@ -16144,7 +16996,7 @@
               </a:rPr>
               <a:t>内出血・打撲痕（転倒の兆候）</a:t>
             </a:r>
-            <a:endParaRPr lang="en-US" sz="1200" dirty="0"/>
+            <a:endParaRPr lang="en-US" sz="1400" dirty="0"/>
           </a:p>
         </p:txBody>
       </p:sp>
@@ -16174,6 +17026,13 @@
             <a:prstDash val="solid"/>
           </a:ln>
         </p:spPr>
+        <p:txBody>
+          <a:bodyPr/>
+          <a:lstStyle/>
+          <a:p>
+            <a:endParaRPr lang="ja-JP" altLang="en-US"/>
+          </a:p>
+        </p:txBody>
       </p:sp>
       <p:sp>
         <p:nvSpPr>
@@ -16196,11 +17055,11 @@
           <a:bodyPr wrap="square" lIns="0" tIns="0" rIns="0" bIns="0" rtlCol="0" anchor="ctr"/>
           <a:lstStyle/>
           <a:p>
-            <a:pPr indent="0" marL="0">
+            <a:pPr marL="0" indent="0">
               <a:buNone/>
             </a:pPr>
             <a:r>
-              <a:rPr lang="en-US" sz="1500" b="1" dirty="0">
+              <a:rPr lang="en-US" b="1" dirty="0">
                 <a:solidFill>
                   <a:srgbClr val="1A5276"/>
                 </a:solidFill>
@@ -16210,7 +17069,7 @@
               </a:rPr>
               <a:t>体格・栄養の把握</a:t>
             </a:r>
-            <a:endParaRPr lang="en-US" sz="1500" dirty="0"/>
+            <a:endParaRPr lang="en-US" dirty="0"/>
           </a:p>
         </p:txBody>
       </p:sp>
@@ -16243,7 +17102,7 @@
               <a:buChar char="●"/>
             </a:pPr>
             <a:r>
-              <a:rPr lang="en-US" sz="1200" dirty="0">
+              <a:rPr lang="en-US" sz="1400" dirty="0">
                 <a:solidFill>
                   <a:srgbClr val="1C2833"/>
                 </a:solidFill>
@@ -16253,14 +17112,8 @@
               </a:rPr>
               <a:t>脱衣時の</a:t>
             </a:r>
-            <a:pPr indent="0" marL="0">
-              <a:spcAft>
-                <a:spcPts val="600"/>
-              </a:spcAft>
-              <a:buNone/>
-            </a:pPr>
-            <a:r>
-              <a:rPr lang="en-US" sz="1200" b="1" dirty="0">
+            <a:r>
+              <a:rPr lang="en-US" sz="1400" b="1" dirty="0">
                 <a:solidFill>
                   <a:srgbClr val="1D9E75"/>
                 </a:solidFill>
@@ -16270,7 +17123,7 @@
               </a:rPr>
               <a:t>体型変化・筋肉量の減少</a:t>
             </a:r>
-            <a:endParaRPr lang="en-US" sz="1200" dirty="0"/>
+            <a:endParaRPr lang="en-US" sz="1400" dirty="0"/>
           </a:p>
           <a:p>
             <a:pPr marL="342900" indent="-342900">
@@ -16281,7 +17134,7 @@
               <a:buChar char="●"/>
             </a:pPr>
             <a:r>
-              <a:rPr lang="en-US" sz="1200" dirty="0">
+              <a:rPr lang="en-US" sz="1400" dirty="0">
                 <a:solidFill>
                   <a:srgbClr val="1C2833"/>
                 </a:solidFill>
@@ -16291,7 +17144,7 @@
               </a:rPr>
               <a:t>骨突出の進行（褥瘡リスク上昇）</a:t>
             </a:r>
-            <a:endParaRPr lang="en-US" sz="1200" dirty="0"/>
+            <a:endParaRPr lang="en-US" sz="1400" dirty="0"/>
           </a:p>
           <a:p>
             <a:pPr marL="342900" indent="-342900">
@@ -16302,7 +17155,7 @@
               <a:buChar char="●"/>
             </a:pPr>
             <a:r>
-              <a:rPr lang="en-US" sz="1200" dirty="0">
+              <a:rPr lang="en-US" sz="1400" dirty="0">
                 <a:solidFill>
                   <a:srgbClr val="1C2833"/>
                 </a:solidFill>
@@ -16312,7 +17165,7 @@
               </a:rPr>
               <a:t>皮膚の乾燥・ツルゴール低下</a:t>
             </a:r>
-            <a:endParaRPr lang="en-US" sz="1200" dirty="0"/>
+            <a:endParaRPr lang="en-US" sz="1400" dirty="0"/>
           </a:p>
         </p:txBody>
       </p:sp>
@@ -16342,6 +17195,13 @@
             <a:prstDash val="solid"/>
           </a:ln>
         </p:spPr>
+        <p:txBody>
+          <a:bodyPr/>
+          <a:lstStyle/>
+          <a:p>
+            <a:endParaRPr lang="ja-JP" altLang="en-US"/>
+          </a:p>
+        </p:txBody>
       </p:sp>
       <p:sp>
         <p:nvSpPr>
@@ -16364,11 +17224,11 @@
           <a:bodyPr wrap="square" lIns="0" tIns="0" rIns="0" bIns="0" rtlCol="0" anchor="ctr"/>
           <a:lstStyle/>
           <a:p>
-            <a:pPr indent="0" marL="0">
+            <a:pPr marL="0" indent="0">
               <a:buNone/>
             </a:pPr>
             <a:r>
-              <a:rPr lang="en-US" sz="1500" b="1" dirty="0">
+              <a:rPr lang="en-US" b="1" dirty="0">
                 <a:solidFill>
                   <a:srgbClr val="1D9E75"/>
                 </a:solidFill>
@@ -16378,7 +17238,7 @@
               </a:rPr>
               <a:t>その日のうちに共有</a:t>
             </a:r>
-            <a:endParaRPr lang="en-US" sz="1500" dirty="0"/>
+            <a:endParaRPr lang="en-US" dirty="0"/>
           </a:p>
         </p:txBody>
       </p:sp>
@@ -16411,7 +17271,7 @@
               <a:buChar char="●"/>
             </a:pPr>
             <a:r>
-              <a:rPr lang="en-US" sz="1200" dirty="0">
+              <a:rPr lang="en-US" sz="1400" dirty="0">
                 <a:solidFill>
                   <a:srgbClr val="1C2833"/>
                 </a:solidFill>
@@ -16421,14 +17281,8 @@
               </a:rPr>
               <a:t>主治医へ</a:t>
             </a:r>
-            <a:pPr indent="0" marL="0">
-              <a:spcAft>
-                <a:spcPts val="600"/>
-              </a:spcAft>
-              <a:buNone/>
-            </a:pPr>
-            <a:r>
-              <a:rPr lang="en-US" sz="1200" b="1" dirty="0">
+            <a:r>
+              <a:rPr lang="en-US" sz="1400" b="1" dirty="0">
                 <a:solidFill>
                   <a:srgbClr val="1D9E75"/>
                 </a:solidFill>
@@ -16438,7 +17292,7 @@
               </a:rPr>
               <a:t>創部の状態を報告</a:t>
             </a:r>
-            <a:endParaRPr lang="en-US" sz="1200" dirty="0"/>
+            <a:endParaRPr lang="en-US" sz="1400" dirty="0"/>
           </a:p>
           <a:p>
             <a:pPr marL="342900" indent="-342900">
@@ -16449,7 +17303,7 @@
               <a:buChar char="●"/>
             </a:pPr>
             <a:r>
-              <a:rPr lang="en-US" sz="1200" dirty="0">
+              <a:rPr lang="en-US" sz="1400" dirty="0">
                 <a:solidFill>
                   <a:srgbClr val="1C2833"/>
                 </a:solidFill>
@@ -16459,14 +17313,8 @@
               </a:rPr>
               <a:t>訪問看護師へ</a:t>
             </a:r>
-            <a:pPr indent="0" marL="0">
-              <a:spcAft>
-                <a:spcPts val="600"/>
-              </a:spcAft>
-              <a:buNone/>
-            </a:pPr>
-            <a:r>
-              <a:rPr lang="en-US" sz="1200" b="1" dirty="0">
+            <a:r>
+              <a:rPr lang="en-US" sz="1400" b="1" dirty="0">
                 <a:solidFill>
                   <a:srgbClr val="1D9E75"/>
                 </a:solidFill>
@@ -16476,7 +17324,7 @@
               </a:rPr>
               <a:t>観察所見の申し送り</a:t>
             </a:r>
-            <a:endParaRPr lang="en-US" sz="1200" dirty="0"/>
+            <a:endParaRPr lang="en-US" sz="1400" dirty="0"/>
           </a:p>
           <a:p>
             <a:pPr marL="342900" indent="-342900">
@@ -16487,7 +17335,7 @@
               <a:buChar char="●"/>
             </a:pPr>
             <a:r>
-              <a:rPr lang="en-US" sz="1200" dirty="0">
+              <a:rPr lang="en-US" sz="1400" dirty="0">
                 <a:solidFill>
                   <a:srgbClr val="1C2833"/>
                 </a:solidFill>
@@ -16497,14 +17345,8 @@
               </a:rPr>
               <a:t>ケアマネジャーへ</a:t>
             </a:r>
-            <a:pPr indent="0" marL="0">
-              <a:spcAft>
-                <a:spcPts val="600"/>
-              </a:spcAft>
-              <a:buNone/>
-            </a:pPr>
-            <a:r>
-              <a:rPr lang="en-US" sz="1200" b="1" dirty="0">
+            <a:r>
+              <a:rPr lang="en-US" sz="1400" b="1" dirty="0">
                 <a:solidFill>
                   <a:srgbClr val="1D9E75"/>
                 </a:solidFill>
@@ -16514,7 +17356,7 @@
               </a:rPr>
               <a:t>状態変化の連絡</a:t>
             </a:r>
-            <a:endParaRPr lang="en-US" sz="1200" dirty="0"/>
+            <a:endParaRPr lang="en-US" sz="1400" dirty="0"/>
           </a:p>
           <a:p>
             <a:pPr marL="342900" indent="-342900">
@@ -16525,7 +17367,7 @@
               <a:buChar char="●"/>
             </a:pPr>
             <a:r>
-              <a:rPr lang="en-US" sz="1200" dirty="0">
+              <a:rPr lang="en-US" sz="1400" dirty="0">
                 <a:solidFill>
                   <a:srgbClr val="1C2833"/>
                 </a:solidFill>
@@ -16535,14 +17377,8 @@
               </a:rPr>
               <a:t>必要時は</a:t>
             </a:r>
-            <a:pPr indent="0" marL="0">
-              <a:spcAft>
-                <a:spcPts val="600"/>
-              </a:spcAft>
-              <a:buNone/>
-            </a:pPr>
-            <a:r>
-              <a:rPr lang="en-US" sz="1200" b="1" dirty="0">
+            <a:r>
+              <a:rPr lang="en-US" sz="1400" b="1" dirty="0">
                 <a:solidFill>
                   <a:srgbClr val="1D9E75"/>
                 </a:solidFill>
@@ -16552,14 +17388,8 @@
               </a:rPr>
               <a:t>写真記録</a:t>
             </a:r>
-            <a:pPr indent="0" marL="0">
-              <a:spcAft>
-                <a:spcPts val="600"/>
-              </a:spcAft>
-              <a:buNone/>
-            </a:pPr>
-            <a:r>
-              <a:rPr lang="en-US" sz="1200" dirty="0">
+            <a:r>
+              <a:rPr lang="en-US" sz="1400" dirty="0">
                 <a:solidFill>
                   <a:srgbClr val="1C2833"/>
                 </a:solidFill>
@@ -16569,7 +17399,7 @@
               </a:rPr>
               <a:t>を添えて</a:t>
             </a:r>
-            <a:endParaRPr lang="en-US" sz="1200" dirty="0"/>
+            <a:endParaRPr lang="en-US" sz="1400" dirty="0"/>
           </a:p>
         </p:txBody>
       </p:sp>
@@ -16599,6 +17429,13 @@
             <a:prstDash val="solid"/>
           </a:ln>
         </p:spPr>
+        <p:txBody>
+          <a:bodyPr/>
+          <a:lstStyle/>
+          <a:p>
+            <a:endParaRPr lang="ja-JP" altLang="en-US"/>
+          </a:p>
+        </p:txBody>
       </p:sp>
       <p:sp>
         <p:nvSpPr>
@@ -16621,11 +17458,11 @@
           <a:bodyPr wrap="square" lIns="0" tIns="0" rIns="0" bIns="0" rtlCol="0" anchor="ctr"/>
           <a:lstStyle/>
           <a:p>
-            <a:pPr indent="0" marL="0">
+            <a:pPr marL="0" indent="0">
               <a:buNone/>
             </a:pPr>
             <a:r>
-              <a:rPr lang="en-US" sz="1600" b="1" dirty="0">
+              <a:rPr lang="en-US" sz="2000" b="1" dirty="0">
                 <a:solidFill>
                   <a:srgbClr val="1A5276"/>
                 </a:solidFill>
@@ -16635,7 +17472,7 @@
               </a:rPr>
               <a:t>週1〜2回の入浴は、週1〜2回の全身アセスメントでもあります。</a:t>
             </a:r>
-            <a:endParaRPr lang="en-US" sz="1600" dirty="0"/>
+            <a:endParaRPr lang="en-US" sz="2000" dirty="0"/>
           </a:p>
         </p:txBody>
       </p:sp>
@@ -16690,6 +17527,13 @@
             <a:prstDash val="solid"/>
           </a:ln>
         </p:spPr>
+        <p:txBody>
+          <a:bodyPr/>
+          <a:lstStyle/>
+          <a:p>
+            <a:endParaRPr lang="ja-JP" altLang="en-US"/>
+          </a:p>
+        </p:txBody>
       </p:sp>
       <p:sp>
         <p:nvSpPr>
@@ -16712,7 +17556,7 @@
           <a:bodyPr wrap="square" lIns="0" tIns="0" rIns="0" bIns="0" rtlCol="0" anchor="ctr"/>
           <a:lstStyle/>
           <a:p>
-            <a:pPr algn="ctr" indent="0" marL="0">
+            <a:pPr marL="0" indent="0" algn="ctr">
               <a:buNone/>
             </a:pPr>
             <a:r>
@@ -16751,7 +17595,7 @@
           <a:bodyPr wrap="square" lIns="0" tIns="0" rIns="0" bIns="0" rtlCol="0" anchor="ctr"/>
           <a:lstStyle/>
           <a:p>
-            <a:pPr indent="0" marL="0">
+            <a:pPr marL="0" indent="0">
               <a:buNone/>
             </a:pPr>
             <a:r>
@@ -16790,7 +17634,7 @@
           <a:bodyPr wrap="square" lIns="0" tIns="0" rIns="0" bIns="0" rtlCol="0" anchor="ctr"/>
           <a:lstStyle/>
           <a:p>
-            <a:pPr indent="0" marL="0">
+            <a:pPr marL="0" indent="0">
               <a:buNone/>
             </a:pPr>
             <a:r>
@@ -16829,7 +17673,7 @@
           <a:bodyPr wrap="square" lIns="0" tIns="0" rIns="0" bIns="0" rtlCol="0" anchor="ctr"/>
           <a:lstStyle/>
           <a:p>
-            <a:pPr indent="0" marL="0">
+            <a:pPr marL="0" indent="0">
               <a:buNone/>
             </a:pPr>
             <a:r>
@@ -16843,9 +17687,6 @@
               </a:rPr>
               <a:t>訪問入浴は介護保険サービスであり、</a:t>
             </a:r>
-            <a:pPr indent="0" marL="0">
-              <a:buNone/>
-            </a:pPr>
             <a:r>
               <a:rPr lang="en-US" sz="1500" b="1" dirty="0">
                 <a:solidFill>
@@ -16857,9 +17698,6 @@
               </a:rPr>
               <a:t>医療行為は行えません</a:t>
             </a:r>
-            <a:pPr indent="0" marL="0">
-              <a:buNone/>
-            </a:pPr>
             <a:r>
               <a:rPr lang="en-US" sz="1500" dirty="0">
                 <a:solidFill>
@@ -16901,6 +17739,13 @@
             <a:prstDash val="solid"/>
           </a:ln>
         </p:spPr>
+        <p:txBody>
+          <a:bodyPr/>
+          <a:lstStyle/>
+          <a:p>
+            <a:endParaRPr lang="ja-JP" altLang="en-US"/>
+          </a:p>
+        </p:txBody>
       </p:sp>
       <p:sp>
         <p:nvSpPr>
@@ -16923,11 +17768,11 @@
           <a:bodyPr wrap="square" lIns="0" tIns="0" rIns="0" bIns="0" rtlCol="0" anchor="ctr"/>
           <a:lstStyle/>
           <a:p>
-            <a:pPr indent="0" marL="0">
+            <a:pPr marL="0" indent="0">
               <a:buNone/>
             </a:pPr>
             <a:r>
-              <a:rPr lang="en-US" sz="1500" b="1" dirty="0">
+              <a:rPr lang="en-US" b="1" dirty="0">
                 <a:solidFill>
                   <a:srgbClr val="1D9E75"/>
                 </a:solidFill>
@@ -16937,7 +17782,7 @@
               </a:rPr>
               <a:t>訪問入浴が担うこと</a:t>
             </a:r>
-            <a:endParaRPr lang="en-US" sz="1500" dirty="0"/>
+            <a:endParaRPr lang="en-US" dirty="0"/>
           </a:p>
         </p:txBody>
       </p:sp>
@@ -16970,7 +17815,7 @@
               <a:buChar char="●"/>
             </a:pPr>
             <a:r>
-              <a:rPr lang="en-US" sz="1250" dirty="0">
+              <a:rPr lang="en-US" dirty="0">
                 <a:solidFill>
                   <a:srgbClr val="1C2833"/>
                 </a:solidFill>
@@ -16980,14 +17825,8 @@
               </a:rPr>
               <a:t>バイタル測定と</a:t>
             </a:r>
-            <a:pPr indent="0" marL="0">
-              <a:spcAft>
-                <a:spcPts val="600"/>
-              </a:spcAft>
-              <a:buNone/>
-            </a:pPr>
-            <a:r>
-              <a:rPr lang="en-US" sz="1250" b="1" dirty="0">
+            <a:r>
+              <a:rPr lang="en-US" b="1" dirty="0">
                 <a:solidFill>
                   <a:srgbClr val="1D9E75"/>
                 </a:solidFill>
@@ -16997,7 +17836,7 @@
               </a:rPr>
               <a:t>入浴可否の判断</a:t>
             </a:r>
-            <a:endParaRPr lang="en-US" sz="1250" dirty="0"/>
+            <a:endParaRPr lang="en-US" dirty="0"/>
           </a:p>
           <a:p>
             <a:pPr marL="342900" indent="-342900">
@@ -17008,7 +17847,7 @@
               <a:buChar char="●"/>
             </a:pPr>
             <a:r>
-              <a:rPr lang="en-US" sz="1250" dirty="0">
+              <a:rPr lang="en-US" dirty="0">
                 <a:solidFill>
                   <a:srgbClr val="1C2833"/>
                 </a:solidFill>
@@ -17018,14 +17857,8 @@
               </a:rPr>
               <a:t>入浴時の</a:t>
             </a:r>
-            <a:pPr indent="0" marL="0">
-              <a:spcAft>
-                <a:spcPts val="600"/>
-              </a:spcAft>
-              <a:buNone/>
-            </a:pPr>
-            <a:r>
-              <a:rPr lang="en-US" sz="1250" b="1" dirty="0">
+            <a:r>
+              <a:rPr lang="en-US" b="1" dirty="0">
                 <a:solidFill>
                   <a:srgbClr val="1D9E75"/>
                 </a:solidFill>
@@ -17035,14 +17868,8 @@
               </a:rPr>
               <a:t>全身観察</a:t>
             </a:r>
-            <a:pPr indent="0" marL="0">
-              <a:spcAft>
-                <a:spcPts val="600"/>
-              </a:spcAft>
-              <a:buNone/>
-            </a:pPr>
-            <a:r>
-              <a:rPr lang="en-US" sz="1250" dirty="0">
+            <a:r>
+              <a:rPr lang="en-US" dirty="0">
                 <a:solidFill>
                   <a:srgbClr val="1C2833"/>
                 </a:solidFill>
@@ -17052,7 +17879,7 @@
               </a:rPr>
               <a:t>（褥瘡・浮腫・皮膚）</a:t>
             </a:r>
-            <a:endParaRPr lang="en-US" sz="1250" dirty="0"/>
+            <a:endParaRPr lang="en-US" dirty="0"/>
           </a:p>
           <a:p>
             <a:pPr marL="342900" indent="-342900">
@@ -17063,7 +17890,7 @@
               <a:buChar char="●"/>
             </a:pPr>
             <a:r>
-              <a:rPr lang="en-US" sz="1250" dirty="0">
+              <a:rPr lang="en-US" dirty="0">
                 <a:solidFill>
                   <a:srgbClr val="1C2833"/>
                 </a:solidFill>
@@ -17073,14 +17900,8 @@
               </a:rPr>
               <a:t>洗身・洗髪と</a:t>
             </a:r>
-            <a:pPr indent="0" marL="0">
-              <a:spcAft>
-                <a:spcPts val="600"/>
-              </a:spcAft>
-              <a:buNone/>
-            </a:pPr>
-            <a:r>
-              <a:rPr lang="en-US" sz="1250" b="1" dirty="0">
+            <a:r>
+              <a:rPr lang="en-US" b="1" dirty="0">
                 <a:solidFill>
                   <a:srgbClr val="1D9E75"/>
                 </a:solidFill>
@@ -17090,7 +17911,7 @@
               </a:rPr>
               <a:t>日常的な保湿ケア</a:t>
             </a:r>
-            <a:endParaRPr lang="en-US" sz="1250" dirty="0"/>
+            <a:endParaRPr lang="en-US" dirty="0"/>
           </a:p>
           <a:p>
             <a:pPr marL="342900" indent="-342900">
@@ -17101,7 +17922,7 @@
               <a:buChar char="●"/>
             </a:pPr>
             <a:r>
-              <a:rPr lang="en-US" sz="1250" dirty="0">
+              <a:rPr lang="en-US" dirty="0">
                 <a:solidFill>
                   <a:srgbClr val="1C2833"/>
                 </a:solidFill>
@@ -17111,14 +17932,8 @@
               </a:rPr>
               <a:t>観察所見の</a:t>
             </a:r>
-            <a:pPr indent="0" marL="0">
-              <a:spcAft>
-                <a:spcPts val="600"/>
-              </a:spcAft>
-              <a:buNone/>
-            </a:pPr>
-            <a:r>
-              <a:rPr lang="en-US" sz="1250" b="1" dirty="0">
+            <a:r>
+              <a:rPr lang="en-US" b="1" dirty="0">
                 <a:solidFill>
                   <a:srgbClr val="1D9E75"/>
                 </a:solidFill>
@@ -17128,7 +17943,7 @@
               </a:rPr>
               <a:t>記録と当日中の報告</a:t>
             </a:r>
-            <a:endParaRPr lang="en-US" sz="1250" dirty="0"/>
+            <a:endParaRPr lang="en-US" dirty="0"/>
           </a:p>
         </p:txBody>
       </p:sp>
@@ -17158,6 +17973,13 @@
             <a:prstDash val="solid"/>
           </a:ln>
         </p:spPr>
+        <p:txBody>
+          <a:bodyPr/>
+          <a:lstStyle/>
+          <a:p>
+            <a:endParaRPr lang="ja-JP" altLang="en-US"/>
+          </a:p>
+        </p:txBody>
       </p:sp>
       <p:sp>
         <p:nvSpPr>
@@ -17180,11 +18002,11 @@
           <a:bodyPr wrap="square" lIns="0" tIns="0" rIns="0" bIns="0" rtlCol="0" anchor="ctr"/>
           <a:lstStyle/>
           <a:p>
-            <a:pPr indent="0" marL="0">
+            <a:pPr marL="0" indent="0">
               <a:buNone/>
             </a:pPr>
             <a:r>
-              <a:rPr lang="en-US" sz="1500" b="1" dirty="0">
+              <a:rPr lang="en-US" b="1" dirty="0">
                 <a:solidFill>
                   <a:srgbClr val="1A5276"/>
                 </a:solidFill>
@@ -17227,7 +18049,7 @@
               <a:buChar char="●"/>
             </a:pPr>
             <a:r>
-              <a:rPr lang="en-US" sz="1250" dirty="0">
+              <a:rPr lang="en-US" sz="1600" dirty="0">
                 <a:solidFill>
                   <a:srgbClr val="1C2833"/>
                 </a:solidFill>
@@ -17237,14 +18059,8 @@
               </a:rPr>
               <a:t>褥瘡・創傷の</a:t>
             </a:r>
-            <a:pPr indent="0" marL="0">
-              <a:spcAft>
-                <a:spcPts val="600"/>
-              </a:spcAft>
-              <a:buNone/>
-            </a:pPr>
-            <a:r>
-              <a:rPr lang="en-US" sz="1250" b="1" dirty="0">
+            <a:r>
+              <a:rPr lang="en-US" sz="1600" b="1" dirty="0">
                 <a:solidFill>
                   <a:srgbClr val="1D9E75"/>
                 </a:solidFill>
@@ -17254,14 +18070,8 @@
               </a:rPr>
               <a:t>処置</a:t>
             </a:r>
-            <a:pPr indent="0" marL="0">
-              <a:spcAft>
-                <a:spcPts val="600"/>
-              </a:spcAft>
-              <a:buNone/>
-            </a:pPr>
-            <a:r>
-              <a:rPr lang="en-US" sz="1250" dirty="0">
+            <a:r>
+              <a:rPr lang="en-US" sz="1600" dirty="0">
                 <a:solidFill>
                   <a:srgbClr val="1C2833"/>
                 </a:solidFill>
@@ -17271,7 +18081,7 @@
               </a:rPr>
               <a:t>、薬剤の塗布</a:t>
             </a:r>
-            <a:endParaRPr lang="en-US" sz="1250" dirty="0"/>
+            <a:endParaRPr lang="en-US" sz="1600" dirty="0"/>
           </a:p>
           <a:p>
             <a:pPr marL="342900" indent="-342900">
@@ -17282,7 +18092,7 @@
               <a:buChar char="●"/>
             </a:pPr>
             <a:r>
-              <a:rPr lang="en-US" sz="1250" dirty="0">
+              <a:rPr lang="en-US" sz="1600" dirty="0">
                 <a:solidFill>
                   <a:srgbClr val="1C2833"/>
                 </a:solidFill>
@@ -17292,7 +18102,7 @@
               </a:rPr>
               <a:t>点滴・注射・採血</a:t>
             </a:r>
-            <a:endParaRPr lang="en-US" sz="1250" dirty="0"/>
+            <a:endParaRPr lang="en-US" sz="1600" dirty="0"/>
           </a:p>
           <a:p>
             <a:pPr marL="342900" indent="-342900">
@@ -17303,7 +18113,7 @@
               <a:buChar char="●"/>
             </a:pPr>
             <a:r>
-              <a:rPr lang="en-US" sz="1250" dirty="0">
+              <a:rPr lang="en-US" sz="1600" dirty="0">
                 <a:solidFill>
                   <a:srgbClr val="1C2833"/>
                 </a:solidFill>
@@ -17313,7 +18123,7 @@
               </a:rPr>
               <a:t>カテーテル・ストーマの管理</a:t>
             </a:r>
-            <a:endParaRPr lang="en-US" sz="1250" dirty="0"/>
+            <a:endParaRPr lang="en-US" sz="1600" dirty="0"/>
           </a:p>
           <a:p>
             <a:pPr marL="342900" indent="-342900">
@@ -17324,7 +18134,7 @@
               <a:buChar char="●"/>
             </a:pPr>
             <a:r>
-              <a:rPr lang="en-US" sz="1250" dirty="0">
+              <a:rPr lang="en-US" sz="1600" dirty="0">
                 <a:solidFill>
                   <a:srgbClr val="1C2833"/>
                 </a:solidFill>
@@ -17334,7 +18144,7 @@
               </a:rPr>
               <a:t>喀痰吸引・経管栄養の管理</a:t>
             </a:r>
-            <a:endParaRPr lang="en-US" sz="1250" dirty="0"/>
+            <a:endParaRPr lang="en-US" sz="1600" dirty="0"/>
           </a:p>
           <a:p>
             <a:pPr marL="342900" indent="-342900">
@@ -17345,7 +18155,7 @@
               <a:buChar char="●"/>
             </a:pPr>
             <a:r>
-              <a:rPr lang="en-US" sz="1250" dirty="0">
+              <a:rPr lang="en-US" sz="1600" dirty="0">
                 <a:solidFill>
                   <a:srgbClr val="1C2833"/>
                 </a:solidFill>
@@ -17355,14 +18165,8 @@
               </a:rPr>
               <a:t>医師の指示に基づく</a:t>
             </a:r>
-            <a:pPr indent="0" marL="0">
-              <a:spcAft>
-                <a:spcPts val="600"/>
-              </a:spcAft>
-              <a:buNone/>
-            </a:pPr>
-            <a:r>
-              <a:rPr lang="en-US" sz="1250" b="1" dirty="0">
+            <a:r>
+              <a:rPr lang="en-US" sz="1600" b="1" dirty="0">
                 <a:solidFill>
                   <a:srgbClr val="1D9E75"/>
                 </a:solidFill>
@@ -17372,7 +18176,7 @@
               </a:rPr>
               <a:t>医療的ケア全般</a:t>
             </a:r>
-            <a:endParaRPr lang="en-US" sz="1250" dirty="0"/>
+            <a:endParaRPr lang="en-US" sz="1600" dirty="0"/>
           </a:p>
         </p:txBody>
       </p:sp>
@@ -17402,6 +18206,13 @@
             <a:prstDash val="solid"/>
           </a:ln>
         </p:spPr>
+        <p:txBody>
+          <a:bodyPr/>
+          <a:lstStyle/>
+          <a:p>
+            <a:endParaRPr lang="ja-JP" altLang="en-US"/>
+          </a:p>
+        </p:txBody>
       </p:sp>
       <p:sp>
         <p:nvSpPr>
@@ -17424,14 +18235,14 @@
           <a:bodyPr wrap="square" lIns="0" tIns="0" rIns="0" bIns="0" rtlCol="0" anchor="ctr"/>
           <a:lstStyle/>
           <a:p>
-            <a:pPr indent="0" marL="0">
+            <a:pPr marL="0" indent="0">
               <a:lnSpc>
                 <a:spcPct val="130000"/>
               </a:lnSpc>
               <a:buNone/>
             </a:pPr>
             <a:r>
-              <a:rPr lang="en-US" sz="1500" dirty="0">
+              <a:rPr lang="en-US" dirty="0" err="1">
                 <a:solidFill>
                   <a:srgbClr val="1C2833"/>
                 </a:solidFill>
@@ -17441,31 +18252,46 @@
               </a:rPr>
               <a:t>私たちの役割は</a:t>
             </a:r>
-            <a:pPr indent="0" marL="0">
+            <a:r>
+              <a:rPr lang="en-US" b="1" dirty="0" err="1">
+                <a:solidFill>
+                  <a:srgbClr val="1D9E75"/>
+                </a:solidFill>
+                <a:latin typeface="Meiryo" pitchFamily="34" charset="0"/>
+                <a:ea typeface="Meiryo" pitchFamily="34" charset="-122"/>
+                <a:cs typeface="Meiryo" pitchFamily="34" charset="-120"/>
+              </a:rPr>
+              <a:t>「見つけて、つなぐ」</a:t>
+            </a:r>
+            <a:r>
+              <a:rPr lang="en-US" dirty="0" err="1">
+                <a:solidFill>
+                  <a:srgbClr val="1C2833"/>
+                </a:solidFill>
+                <a:latin typeface="Meiryo" pitchFamily="34" charset="0"/>
+                <a:ea typeface="Meiryo" pitchFamily="34" charset="-122"/>
+                <a:cs typeface="Meiryo" pitchFamily="34" charset="-120"/>
+              </a:rPr>
+              <a:t>こと。処置は訪問看護へ</a:t>
+            </a:r>
+            <a:endParaRPr lang="en-US" dirty="0">
+              <a:solidFill>
+                <a:srgbClr val="1C2833"/>
+              </a:solidFill>
+              <a:latin typeface="Meiryo" pitchFamily="34" charset="0"/>
+              <a:ea typeface="Meiryo" pitchFamily="34" charset="-122"/>
+              <a:cs typeface="Meiryo" pitchFamily="34" charset="-120"/>
+            </a:endParaRPr>
+          </a:p>
+          <a:p>
+            <a:pPr marL="0" indent="0">
               <a:lnSpc>
                 <a:spcPct val="130000"/>
               </a:lnSpc>
               <a:buNone/>
             </a:pPr>
             <a:r>
-              <a:rPr lang="en-US" sz="1500" b="1" dirty="0">
-                <a:solidFill>
-                  <a:srgbClr val="1D9E75"/>
-                </a:solidFill>
-                <a:latin typeface="Meiryo" pitchFamily="34" charset="0"/>
-                <a:ea typeface="Meiryo" pitchFamily="34" charset="-122"/>
-                <a:cs typeface="Meiryo" pitchFamily="34" charset="-120"/>
-              </a:rPr>
-              <a:t>「見つけて、つなぐ」</a:t>
-            </a:r>
-            <a:pPr indent="0" marL="0">
-              <a:lnSpc>
-                <a:spcPct val="130000"/>
-              </a:lnSpc>
-              <a:buNone/>
-            </a:pPr>
-            <a:r>
-              <a:rPr lang="en-US" sz="1500" dirty="0">
+              <a:rPr lang="en-US" dirty="0" err="1">
                 <a:solidFill>
                   <a:srgbClr val="1C2833"/>
                 </a:solidFill>
@@ -17473,9 +18299,20 @@
                 <a:ea typeface="Meiryo" pitchFamily="34" charset="-122"/>
                 <a:cs typeface="Meiryo" pitchFamily="34" charset="-120"/>
               </a:rPr>
-              <a:t>こと。処置は訪問看護へ——この線引きを明確にすることが、安全な在宅ケアにつながります。</a:t>
-            </a:r>
-            <a:endParaRPr lang="en-US" sz="1500" dirty="0"/>
+              <a:t>この線引きを明確にすることが、安全な在宅ケアにつながります</a:t>
+            </a:r>
+            <a:r>
+              <a:rPr lang="en-US" dirty="0">
+                <a:solidFill>
+                  <a:srgbClr val="1C2833"/>
+                </a:solidFill>
+                <a:latin typeface="Meiryo" pitchFamily="34" charset="0"/>
+                <a:ea typeface="Meiryo" pitchFamily="34" charset="-122"/>
+                <a:cs typeface="Meiryo" pitchFamily="34" charset="-120"/>
+              </a:rPr>
+              <a:t>。</a:t>
+            </a:r>
+            <a:endParaRPr lang="en-US" dirty="0"/>
           </a:p>
         </p:txBody>
       </p:sp>
@@ -17780,4 +18617,319 @@
     </a:ext>
   </a:extLst>
 </a:theme>
+</file>
+
+<file path=ppt/theme/theme2.xml><?xml version="1.0" encoding="utf-8"?>
+<a:theme xmlns:a="http://schemas.openxmlformats.org/drawingml/2006/main" name="Office テーマ">
+  <a:themeElements>
+    <a:clrScheme name="Office">
+      <a:dk1>
+        <a:sysClr val="windowText" lastClr="000000"/>
+      </a:dk1>
+      <a:lt1>
+        <a:sysClr val="window" lastClr="FFFFFF"/>
+      </a:lt1>
+      <a:dk2>
+        <a:srgbClr val="0E2841"/>
+      </a:dk2>
+      <a:lt2>
+        <a:srgbClr val="E8E8E8"/>
+      </a:lt2>
+      <a:accent1>
+        <a:srgbClr val="156082"/>
+      </a:accent1>
+      <a:accent2>
+        <a:srgbClr val="E97132"/>
+      </a:accent2>
+      <a:accent3>
+        <a:srgbClr val="196B24"/>
+      </a:accent3>
+      <a:accent4>
+        <a:srgbClr val="0F9ED5"/>
+      </a:accent4>
+      <a:accent5>
+        <a:srgbClr val="A02B93"/>
+      </a:accent5>
+      <a:accent6>
+        <a:srgbClr val="4EA72E"/>
+      </a:accent6>
+      <a:hlink>
+        <a:srgbClr val="467886"/>
+      </a:hlink>
+      <a:folHlink>
+        <a:srgbClr val="96607D"/>
+      </a:folHlink>
+    </a:clrScheme>
+    <a:fontScheme name="Office">
+      <a:majorFont>
+        <a:latin typeface="游ゴシック Light" panose="02110004020202020204"/>
+        <a:ea typeface=""/>
+        <a:cs typeface=""/>
+        <a:font script="Jpan" typeface="游ゴシック Light"/>
+        <a:font script="Hang" typeface="맑은 고딕"/>
+        <a:font script="Hans" typeface="等线 Light"/>
+        <a:font script="Hant" typeface="新細明體"/>
+        <a:font script="Arab" typeface="Times New Roman"/>
+        <a:font script="Hebr" typeface="Times New Roman"/>
+        <a:font script="Thai" typeface="Angsana New"/>
+        <a:font script="Ethi" typeface="Nyala"/>
+        <a:font script="Beng" typeface="Vrinda"/>
+        <a:font script="Gujr" typeface="Shruti"/>
+        <a:font script="Khmr" typeface="MoolBoran"/>
+        <a:font script="Knda" typeface="Tunga"/>
+        <a:font script="Guru" typeface="Raavi"/>
+        <a:font script="Cans" typeface="Euphemia"/>
+        <a:font script="Cher" typeface="Plantagenet Cherokee"/>
+        <a:font script="Yiii" typeface="Microsoft Yi Baiti"/>
+        <a:font script="Tibt" typeface="Microsoft Himalaya"/>
+        <a:font script="Thaa" typeface="MV Boli"/>
+        <a:font script="Deva" typeface="Mangal"/>
+        <a:font script="Telu" typeface="Gautami"/>
+        <a:font script="Taml" typeface="Latha"/>
+        <a:font script="Syrc" typeface="Estrangelo Edessa"/>
+        <a:font script="Orya" typeface="Kalinga"/>
+        <a:font script="Mlym" typeface="Kartika"/>
+        <a:font script="Laoo" typeface="DokChampa"/>
+        <a:font script="Sinh" typeface="Iskoola Pota"/>
+        <a:font script="Mong" typeface="Mongolian Baiti"/>
+        <a:font script="Viet" typeface="Times New Roman"/>
+        <a:font script="Uigh" typeface="Microsoft Uighur"/>
+        <a:font script="Geor" typeface="Sylfaen"/>
+        <a:font script="Armn" typeface="Arial"/>
+        <a:font script="Bugi" typeface="Leelawadee UI"/>
+        <a:font script="Bopo" typeface="Microsoft JhengHei"/>
+        <a:font script="Java" typeface="Javanese Text"/>
+        <a:font script="Lisu" typeface="Segoe UI"/>
+        <a:font script="Mymr" typeface="Myanmar Text"/>
+        <a:font script="Nkoo" typeface="Ebrima"/>
+        <a:font script="Olck" typeface="Nirmala UI"/>
+        <a:font script="Osma" typeface="Ebrima"/>
+        <a:font script="Phag" typeface="Phagspa"/>
+        <a:font script="Syrn" typeface="Estrangelo Edessa"/>
+        <a:font script="Syrj" typeface="Estrangelo Edessa"/>
+        <a:font script="Syre" typeface="Estrangelo Edessa"/>
+        <a:font script="Sora" typeface="Nirmala UI"/>
+        <a:font script="Tale" typeface="Microsoft Tai Le"/>
+        <a:font script="Talu" typeface="Microsoft New Tai Lue"/>
+        <a:font script="Tfng" typeface="Ebrima"/>
+      </a:majorFont>
+      <a:minorFont>
+        <a:latin typeface="游ゴシック" panose="02110004020202020204"/>
+        <a:ea typeface=""/>
+        <a:cs typeface=""/>
+        <a:font script="Jpan" typeface="游ゴシック"/>
+        <a:font script="Hang" typeface="맑은 고딕"/>
+        <a:font script="Hans" typeface="等线"/>
+        <a:font script="Hant" typeface="新細明體"/>
+        <a:font script="Arab" typeface="Arial"/>
+        <a:font script="Hebr" typeface="Arial"/>
+        <a:font script="Thai" typeface="Cordia New"/>
+        <a:font script="Ethi" typeface="Nyala"/>
+        <a:font script="Beng" typeface="Vrinda"/>
+        <a:font script="Gujr" typeface="Shruti"/>
+        <a:font script="Khmr" typeface="DaunPenh"/>
+        <a:font script="Knda" typeface="Tunga"/>
+        <a:font script="Guru" typeface="Raavi"/>
+        <a:font script="Cans" typeface="Euphemia"/>
+        <a:font script="Cher" typeface="Plantagenet Cherokee"/>
+        <a:font script="Yiii" typeface="Microsoft Yi Baiti"/>
+        <a:font script="Tibt" typeface="Microsoft Himalaya"/>
+        <a:font script="Thaa" typeface="MV Boli"/>
+        <a:font script="Deva" typeface="Mangal"/>
+        <a:font script="Telu" typeface="Gautami"/>
+        <a:font script="Taml" typeface="Latha"/>
+        <a:font script="Syrc" typeface="Estrangelo Edessa"/>
+        <a:font script="Orya" typeface="Kalinga"/>
+        <a:font script="Mlym" typeface="Kartika"/>
+        <a:font script="Laoo" typeface="DokChampa"/>
+        <a:font script="Sinh" typeface="Iskoola Pota"/>
+        <a:font script="Mong" typeface="Mongolian Baiti"/>
+        <a:font script="Viet" typeface="Arial"/>
+        <a:font script="Uigh" typeface="Microsoft Uighur"/>
+        <a:font script="Geor" typeface="Sylfaen"/>
+        <a:font script="Armn" typeface="Arial"/>
+        <a:font script="Bugi" typeface="Leelawadee UI"/>
+        <a:font script="Bopo" typeface="Microsoft JhengHei"/>
+        <a:font script="Java" typeface="Javanese Text"/>
+        <a:font script="Lisu" typeface="Segoe UI"/>
+        <a:font script="Mymr" typeface="Myanmar Text"/>
+        <a:font script="Nkoo" typeface="Ebrima"/>
+        <a:font script="Olck" typeface="Nirmala UI"/>
+        <a:font script="Osma" typeface="Ebrima"/>
+        <a:font script="Phag" typeface="Phagspa"/>
+        <a:font script="Syrn" typeface="Estrangelo Edessa"/>
+        <a:font script="Syrj" typeface="Estrangelo Edessa"/>
+        <a:font script="Syre" typeface="Estrangelo Edessa"/>
+        <a:font script="Sora" typeface="Nirmala UI"/>
+        <a:font script="Tale" typeface="Microsoft Tai Le"/>
+        <a:font script="Talu" typeface="Microsoft New Tai Lue"/>
+        <a:font script="Tfng" typeface="Ebrima"/>
+      </a:minorFont>
+    </a:fontScheme>
+    <a:fmtScheme name="Office">
+      <a:fillStyleLst>
+        <a:solidFill>
+          <a:schemeClr val="phClr"/>
+        </a:solidFill>
+        <a:gradFill rotWithShape="1">
+          <a:gsLst>
+            <a:gs pos="0">
+              <a:schemeClr val="phClr">
+                <a:lumMod val="110000"/>
+                <a:satMod val="105000"/>
+                <a:tint val="67000"/>
+              </a:schemeClr>
+            </a:gs>
+            <a:gs pos="50000">
+              <a:schemeClr val="phClr">
+                <a:lumMod val="105000"/>
+                <a:satMod val="103000"/>
+                <a:tint val="73000"/>
+              </a:schemeClr>
+            </a:gs>
+            <a:gs pos="100000">
+              <a:schemeClr val="phClr">
+                <a:lumMod val="105000"/>
+                <a:satMod val="109000"/>
+                <a:tint val="81000"/>
+              </a:schemeClr>
+            </a:gs>
+          </a:gsLst>
+          <a:lin ang="5400000" scaled="0"/>
+        </a:gradFill>
+        <a:gradFill rotWithShape="1">
+          <a:gsLst>
+            <a:gs pos="0">
+              <a:schemeClr val="phClr">
+                <a:satMod val="103000"/>
+                <a:lumMod val="102000"/>
+                <a:tint val="94000"/>
+              </a:schemeClr>
+            </a:gs>
+            <a:gs pos="50000">
+              <a:schemeClr val="phClr">
+                <a:satMod val="110000"/>
+                <a:lumMod val="100000"/>
+                <a:shade val="100000"/>
+              </a:schemeClr>
+            </a:gs>
+            <a:gs pos="100000">
+              <a:schemeClr val="phClr">
+                <a:lumMod val="99000"/>
+                <a:satMod val="120000"/>
+                <a:shade val="78000"/>
+              </a:schemeClr>
+            </a:gs>
+          </a:gsLst>
+          <a:lin ang="5400000" scaled="0"/>
+        </a:gradFill>
+      </a:fillStyleLst>
+      <a:lnStyleLst>
+        <a:ln w="12700" cap="flat" cmpd="sng" algn="ctr">
+          <a:solidFill>
+            <a:schemeClr val="phClr"/>
+          </a:solidFill>
+          <a:prstDash val="solid"/>
+          <a:miter lim="800000"/>
+        </a:ln>
+        <a:ln w="19050" cap="flat" cmpd="sng" algn="ctr">
+          <a:solidFill>
+            <a:schemeClr val="phClr"/>
+          </a:solidFill>
+          <a:prstDash val="solid"/>
+          <a:miter lim="800000"/>
+        </a:ln>
+        <a:ln w="25400" cap="flat" cmpd="sng" algn="ctr">
+          <a:solidFill>
+            <a:schemeClr val="phClr"/>
+          </a:solidFill>
+          <a:prstDash val="solid"/>
+          <a:miter lim="800000"/>
+        </a:ln>
+      </a:lnStyleLst>
+      <a:effectStyleLst>
+        <a:effectStyle>
+          <a:effectLst/>
+        </a:effectStyle>
+        <a:effectStyle>
+          <a:effectLst/>
+        </a:effectStyle>
+        <a:effectStyle>
+          <a:effectLst>
+            <a:outerShdw blurRad="57150" dist="19050" dir="5400000" algn="ctr" rotWithShape="0">
+              <a:srgbClr val="000000">
+                <a:alpha val="63000"/>
+              </a:srgbClr>
+            </a:outerShdw>
+          </a:effectLst>
+        </a:effectStyle>
+      </a:effectStyleLst>
+      <a:bgFillStyleLst>
+        <a:solidFill>
+          <a:schemeClr val="phClr"/>
+        </a:solidFill>
+        <a:solidFill>
+          <a:schemeClr val="phClr">
+            <a:tint val="95000"/>
+            <a:satMod val="170000"/>
+          </a:schemeClr>
+        </a:solidFill>
+        <a:gradFill rotWithShape="1">
+          <a:gsLst>
+            <a:gs pos="0">
+              <a:schemeClr val="phClr">
+                <a:tint val="93000"/>
+                <a:satMod val="150000"/>
+                <a:shade val="98000"/>
+                <a:lumMod val="102000"/>
+              </a:schemeClr>
+            </a:gs>
+            <a:gs pos="50000">
+              <a:schemeClr val="phClr">
+                <a:tint val="98000"/>
+                <a:satMod val="130000"/>
+                <a:shade val="90000"/>
+                <a:lumMod val="103000"/>
+              </a:schemeClr>
+            </a:gs>
+            <a:gs pos="100000">
+              <a:schemeClr val="phClr">
+                <a:shade val="63000"/>
+                <a:satMod val="120000"/>
+              </a:schemeClr>
+            </a:gs>
+          </a:gsLst>
+          <a:lin ang="5400000" scaled="0"/>
+        </a:gradFill>
+      </a:bgFillStyleLst>
+    </a:fmtScheme>
+  </a:themeElements>
+  <a:objectDefaults>
+    <a:lnDef>
+      <a:spPr/>
+      <a:bodyPr/>
+      <a:lstStyle/>
+      <a:style>
+        <a:lnRef idx="2">
+          <a:schemeClr val="accent1"/>
+        </a:lnRef>
+        <a:fillRef idx="0">
+          <a:schemeClr val="accent1"/>
+        </a:fillRef>
+        <a:effectRef idx="1">
+          <a:schemeClr val="accent1"/>
+        </a:effectRef>
+        <a:fontRef idx="minor">
+          <a:schemeClr val="tx1"/>
+        </a:fontRef>
+      </a:style>
+    </a:lnDef>
+  </a:objectDefaults>
+  <a:extraClrSchemeLst/>
+  <a:extLst>
+    <a:ext uri="{05A4C25C-085E-4340-85A3-A5531E510DB2}">
+      <thm15:themeFamily xmlns:thm15="http://schemas.microsoft.com/office/thememl/2012/main" name="Office Theme" id="{2E142A2C-CD16-42D6-873A-C26D2A0506FA}" vid="{1BDDFF52-6CD6-40A5-AB3C-68EB2F1E4D0A}"/>
+    </a:ext>
+  </a:extLst>
+</a:theme>
 </file>
--- a/houmon-nyuyoku-slides.pptx
+++ b/houmon-nyuyoku-slides.pptx
@@ -126,17 +126,25 @@
 </p:presentation>
 </file>
 
+<file path=ppt/revisionInfo.xml><?xml version="1.0" encoding="utf-8"?>
+<p1510:revInfo xmlns:a="http://schemas.openxmlformats.org/drawingml/2006/main" xmlns:r="http://schemas.openxmlformats.org/officeDocument/2006/relationships" xmlns:p1510="http://schemas.microsoft.com/office/powerpoint/2015/10/main">
+  <p1510:revLst>
+    <p1510:client id="{E92402FB-5286-4B0D-8160-BDC8FC6EA286}" v="11" dt="2026-09-11T00:18:04.401"/>
+  </p1510:revLst>
+</p1510:revInfo>
+</file>
+
 <file path=ppt/changesInfos/changesInfo1.xml><?xml version="1.0" encoding="utf-8"?>
 <pc:chgInfo xmlns:a="http://schemas.openxmlformats.org/drawingml/2006/main" xmlns:r="http://schemas.openxmlformats.org/officeDocument/2006/relationships" xmlns:ac="http://schemas.microsoft.com/office/drawing/2013/main/command" xmlns:pc="http://schemas.microsoft.com/office/powerpoint/2013/main/command">
   <pc:docChgLst>
     <pc:chgData name="一心 冨永" userId="cee5b40153102c76" providerId="LiveId" clId="{BF059334-9725-4C41-8FAA-8D4F19B9D571}"/>
     <pc:docChg chg="undo redo custSel modSld">
-      <pc:chgData name="一心 冨永" userId="cee5b40153102c76" providerId="LiveId" clId="{BF059334-9725-4C41-8FAA-8D4F19B9D571}" dt="2026-09-09T12:44:12.810" v="240" actId="20577"/>
+      <pc:chgData name="一心 冨永" userId="cee5b40153102c76" providerId="LiveId" clId="{BF059334-9725-4C41-8FAA-8D4F19B9D571}" dt="2026-09-11T00:19:53.798" v="271" actId="21"/>
       <pc:docMkLst>
         <pc:docMk/>
       </pc:docMkLst>
       <pc:sldChg chg="modSp mod">
-        <pc:chgData name="一心 冨永" userId="cee5b40153102c76" providerId="LiveId" clId="{BF059334-9725-4C41-8FAA-8D4F19B9D571}" dt="2026-09-09T12:14:40.262" v="21" actId="1076"/>
+        <pc:chgData name="一心 冨永" userId="cee5b40153102c76" providerId="LiveId" clId="{BF059334-9725-4C41-8FAA-8D4F19B9D571}" dt="2026-09-11T00:16:11.074" v="246" actId="20577"/>
         <pc:sldMkLst>
           <pc:docMk/>
           <pc:sldMk cId="0" sldId="257"/>
@@ -174,7 +182,7 @@
           </ac:spMkLst>
         </pc:spChg>
         <pc:spChg chg="mod">
-          <ac:chgData name="一心 冨永" userId="cee5b40153102c76" providerId="LiveId" clId="{BF059334-9725-4C41-8FAA-8D4F19B9D571}" dt="2026-09-09T12:14:40.262" v="21" actId="1076"/>
+          <ac:chgData name="一心 冨永" userId="cee5b40153102c76" providerId="LiveId" clId="{BF059334-9725-4C41-8FAA-8D4F19B9D571}" dt="2026-09-11T00:16:11.074" v="246" actId="20577"/>
           <ac:spMkLst>
             <pc:docMk/>
             <pc:sldMk cId="0" sldId="257"/>
@@ -183,7 +191,7 @@
         </pc:spChg>
       </pc:sldChg>
       <pc:sldChg chg="modSp mod">
-        <pc:chgData name="一心 冨永" userId="cee5b40153102c76" providerId="LiveId" clId="{BF059334-9725-4C41-8FAA-8D4F19B9D571}" dt="2026-09-09T12:17:20.432" v="73" actId="20577"/>
+        <pc:chgData name="一心 冨永" userId="cee5b40153102c76" providerId="LiveId" clId="{BF059334-9725-4C41-8FAA-8D4F19B9D571}" dt="2026-09-11T00:16:36.642" v="251"/>
         <pc:sldMkLst>
           <pc:docMk/>
           <pc:sldMk cId="0" sldId="258"/>
@@ -197,7 +205,7 @@
           </ac:spMkLst>
         </pc:spChg>
         <pc:spChg chg="mod">
-          <ac:chgData name="一心 冨永" userId="cee5b40153102c76" providerId="LiveId" clId="{BF059334-9725-4C41-8FAA-8D4F19B9D571}" dt="2026-09-09T12:17:20.432" v="73" actId="20577"/>
+          <ac:chgData name="一心 冨永" userId="cee5b40153102c76" providerId="LiveId" clId="{BF059334-9725-4C41-8FAA-8D4F19B9D571}" dt="2026-09-11T00:16:36.642" v="251"/>
           <ac:spMkLst>
             <pc:docMk/>
             <pc:sldMk cId="0" sldId="258"/>
@@ -262,7 +270,7 @@
         </pc:spChg>
       </pc:sldChg>
       <pc:sldChg chg="modSp mod">
-        <pc:chgData name="一心 冨永" userId="cee5b40153102c76" providerId="LiveId" clId="{BF059334-9725-4C41-8FAA-8D4F19B9D571}" dt="2026-09-09T12:09:26.767" v="0" actId="20577"/>
+        <pc:chgData name="一心 冨永" userId="cee5b40153102c76" providerId="LiveId" clId="{BF059334-9725-4C41-8FAA-8D4F19B9D571}" dt="2026-09-11T00:18:04.401" v="261"/>
         <pc:sldMkLst>
           <pc:docMk/>
           <pc:sldMk cId="0" sldId="259"/>
@@ -275,6 +283,14 @@
             <ac:spMk id="9" creationId="{00000000-0000-0000-0000-000000000000}"/>
           </ac:spMkLst>
         </pc:spChg>
+        <pc:graphicFrameChg chg="mod">
+          <ac:chgData name="一心 冨永" userId="cee5b40153102c76" providerId="LiveId" clId="{BF059334-9725-4C41-8FAA-8D4F19B9D571}" dt="2026-09-11T00:18:04.401" v="261"/>
+          <ac:graphicFrameMkLst>
+            <pc:docMk/>
+            <pc:sldMk cId="0" sldId="259"/>
+            <ac:graphicFrameMk id="6" creationId="{00000000-0000-0000-0000-000000000000}"/>
+          </ac:graphicFrameMkLst>
+        </pc:graphicFrameChg>
       </pc:sldChg>
       <pc:sldChg chg="modSp mod">
         <pc:chgData name="一心 冨永" userId="cee5b40153102c76" providerId="LiveId" clId="{BF059334-9725-4C41-8FAA-8D4F19B9D571}" dt="2026-09-09T12:34:43.851" v="119" actId="20577"/>
@@ -612,6 +628,52 @@
           </ac:graphicFrameMkLst>
         </pc:graphicFrameChg>
       </pc:sldChg>
+      <pc:sldChg chg="modSp mod">
+        <pc:chgData name="一心 冨永" userId="cee5b40153102c76" providerId="LiveId" clId="{BF059334-9725-4C41-8FAA-8D4F19B9D571}" dt="2026-09-11T00:19:11.751" v="267" actId="20577"/>
+        <pc:sldMkLst>
+          <pc:docMk/>
+          <pc:sldMk cId="0" sldId="268"/>
+        </pc:sldMkLst>
+        <pc:spChg chg="mod">
+          <ac:chgData name="一心 冨永" userId="cee5b40153102c76" providerId="LiveId" clId="{BF059334-9725-4C41-8FAA-8D4F19B9D571}" dt="2026-09-11T00:18:45.538" v="264" actId="20577"/>
+          <ac:spMkLst>
+            <pc:docMk/>
+            <pc:sldMk cId="0" sldId="268"/>
+            <ac:spMk id="8" creationId="{00000000-0000-0000-0000-000000000000}"/>
+          </ac:spMkLst>
+        </pc:spChg>
+        <pc:spChg chg="mod">
+          <ac:chgData name="一心 冨永" userId="cee5b40153102c76" providerId="LiveId" clId="{BF059334-9725-4C41-8FAA-8D4F19B9D571}" dt="2026-09-11T00:19:11.751" v="267" actId="20577"/>
+          <ac:spMkLst>
+            <pc:docMk/>
+            <pc:sldMk cId="0" sldId="268"/>
+            <ac:spMk id="11" creationId="{00000000-0000-0000-0000-000000000000}"/>
+          </ac:spMkLst>
+        </pc:spChg>
+      </pc:sldChg>
+      <pc:sldChg chg="delSp modSp mod">
+        <pc:chgData name="一心 冨永" userId="cee5b40153102c76" providerId="LiveId" clId="{BF059334-9725-4C41-8FAA-8D4F19B9D571}" dt="2026-09-11T00:19:53.798" v="271" actId="21"/>
+        <pc:sldMkLst>
+          <pc:docMk/>
+          <pc:sldMk cId="0" sldId="270"/>
+        </pc:sldMkLst>
+        <pc:spChg chg="del">
+          <ac:chgData name="一心 冨永" userId="cee5b40153102c76" providerId="LiveId" clId="{BF059334-9725-4C41-8FAA-8D4F19B9D571}" dt="2026-09-11T00:19:49.757" v="270" actId="21"/>
+          <ac:spMkLst>
+            <pc:docMk/>
+            <pc:sldMk cId="0" sldId="270"/>
+            <ac:spMk id="11" creationId="{00000000-0000-0000-0000-000000000000}"/>
+          </ac:spMkLst>
+        </pc:spChg>
+        <pc:spChg chg="del mod">
+          <ac:chgData name="一心 冨永" userId="cee5b40153102c76" providerId="LiveId" clId="{BF059334-9725-4C41-8FAA-8D4F19B9D571}" dt="2026-09-11T00:19:53.798" v="271" actId="21"/>
+          <ac:spMkLst>
+            <pc:docMk/>
+            <pc:sldMk cId="0" sldId="270"/>
+            <ac:spMk id="12" creationId="{00000000-0000-0000-0000-000000000000}"/>
+          </ac:spMkLst>
+        </pc:spChg>
+      </pc:sldChg>
     </pc:docChg>
   </pc:docChgLst>
 </pc:chgInfo>
@@ -770,6 +832,13 @@
           </p:nvPr>
         </p:nvSpPr>
         <p:spPr/>
+        <p:txBody>
+          <a:bodyPr/>
+          <a:lstStyle/>
+          <a:p>
+            <a:endParaRPr lang="ja-JP" altLang="en-US"/>
+          </a:p>
+        </p:txBody>
       </p:sp>
       <p:sp>
         <p:nvSpPr>
@@ -857,6 +926,13 @@
           </p:nvPr>
         </p:nvSpPr>
         <p:spPr/>
+        <p:txBody>
+          <a:bodyPr/>
+          <a:lstStyle/>
+          <a:p>
+            <a:endParaRPr lang="ja-JP" altLang="en-US"/>
+          </a:p>
+        </p:txBody>
       </p:sp>
       <p:sp>
         <p:nvSpPr>
@@ -944,6 +1020,13 @@
           </p:nvPr>
         </p:nvSpPr>
         <p:spPr/>
+        <p:txBody>
+          <a:bodyPr/>
+          <a:lstStyle/>
+          <a:p>
+            <a:endParaRPr lang="ja-JP" altLang="en-US"/>
+          </a:p>
+        </p:txBody>
       </p:sp>
       <p:sp>
         <p:nvSpPr>
@@ -1031,6 +1114,13 @@
           </p:nvPr>
         </p:nvSpPr>
         <p:spPr/>
+        <p:txBody>
+          <a:bodyPr/>
+          <a:lstStyle/>
+          <a:p>
+            <a:endParaRPr lang="ja-JP" altLang="en-US"/>
+          </a:p>
+        </p:txBody>
       </p:sp>
       <p:sp>
         <p:nvSpPr>
@@ -1118,6 +1208,13 @@
           </p:nvPr>
         </p:nvSpPr>
         <p:spPr/>
+        <p:txBody>
+          <a:bodyPr/>
+          <a:lstStyle/>
+          <a:p>
+            <a:endParaRPr lang="ja-JP" altLang="en-US"/>
+          </a:p>
+        </p:txBody>
       </p:sp>
       <p:sp>
         <p:nvSpPr>
@@ -1205,6 +1302,13 @@
           </p:nvPr>
         </p:nvSpPr>
         <p:spPr/>
+        <p:txBody>
+          <a:bodyPr/>
+          <a:lstStyle/>
+          <a:p>
+            <a:endParaRPr lang="ja-JP" altLang="en-US"/>
+          </a:p>
+        </p:txBody>
       </p:sp>
       <p:sp>
         <p:nvSpPr>
@@ -1292,6 +1396,13 @@
           </p:nvPr>
         </p:nvSpPr>
         <p:spPr/>
+        <p:txBody>
+          <a:bodyPr/>
+          <a:lstStyle/>
+          <a:p>
+            <a:endParaRPr lang="ja-JP" altLang="en-US"/>
+          </a:p>
+        </p:txBody>
       </p:sp>
       <p:sp>
         <p:nvSpPr>
@@ -1379,6 +1490,13 @@
           </p:nvPr>
         </p:nvSpPr>
         <p:spPr/>
+        <p:txBody>
+          <a:bodyPr/>
+          <a:lstStyle/>
+          <a:p>
+            <a:endParaRPr lang="ja-JP" altLang="en-US"/>
+          </a:p>
+        </p:txBody>
       </p:sp>
       <p:sp>
         <p:nvSpPr>
@@ -1466,6 +1584,13 @@
           </p:nvPr>
         </p:nvSpPr>
         <p:spPr/>
+        <p:txBody>
+          <a:bodyPr/>
+          <a:lstStyle/>
+          <a:p>
+            <a:endParaRPr lang="ja-JP" altLang="en-US"/>
+          </a:p>
+        </p:txBody>
       </p:sp>
       <p:sp>
         <p:nvSpPr>
@@ -1553,6 +1678,13 @@
           </p:nvPr>
         </p:nvSpPr>
         <p:spPr/>
+        <p:txBody>
+          <a:bodyPr/>
+          <a:lstStyle/>
+          <a:p>
+            <a:endParaRPr lang="ja-JP" altLang="en-US"/>
+          </a:p>
+        </p:txBody>
       </p:sp>
       <p:sp>
         <p:nvSpPr>
@@ -1640,6 +1772,13 @@
           </p:nvPr>
         </p:nvSpPr>
         <p:spPr/>
+        <p:txBody>
+          <a:bodyPr/>
+          <a:lstStyle/>
+          <a:p>
+            <a:endParaRPr lang="ja-JP" altLang="en-US"/>
+          </a:p>
+        </p:txBody>
       </p:sp>
       <p:sp>
         <p:nvSpPr>
@@ -1727,6 +1866,13 @@
           </p:nvPr>
         </p:nvSpPr>
         <p:spPr/>
+        <p:txBody>
+          <a:bodyPr/>
+          <a:lstStyle/>
+          <a:p>
+            <a:endParaRPr lang="ja-JP" altLang="en-US"/>
+          </a:p>
+        </p:txBody>
       </p:sp>
       <p:sp>
         <p:nvSpPr>
@@ -1814,6 +1960,13 @@
           </p:nvPr>
         </p:nvSpPr>
         <p:spPr/>
+        <p:txBody>
+          <a:bodyPr/>
+          <a:lstStyle/>
+          <a:p>
+            <a:endParaRPr lang="ja-JP" altLang="en-US"/>
+          </a:p>
+        </p:txBody>
       </p:sp>
       <p:sp>
         <p:nvSpPr>
@@ -1901,6 +2054,13 @@
           </p:nvPr>
         </p:nvSpPr>
         <p:spPr/>
+        <p:txBody>
+          <a:bodyPr/>
+          <a:lstStyle/>
+          <a:p>
+            <a:endParaRPr lang="ja-JP" altLang="en-US"/>
+          </a:p>
+        </p:txBody>
       </p:sp>
       <p:sp>
         <p:nvSpPr>
@@ -1988,6 +2148,13 @@
           </p:nvPr>
         </p:nvSpPr>
         <p:spPr/>
+        <p:txBody>
+          <a:bodyPr/>
+          <a:lstStyle/>
+          <a:p>
+            <a:endParaRPr lang="ja-JP" altLang="en-US"/>
+          </a:p>
+        </p:txBody>
       </p:sp>
       <p:sp>
         <p:nvSpPr>
@@ -4447,7 +4614,7 @@
         </p:nvGraphicFramePr>
         <p:xfrm>
           <a:off x="566928" y="1481328"/>
-          <a:ext cx="6309360" cy="3060000"/>
+          <a:ext cx="6309360" cy="3169580"/>
         </p:xfrm>
         <a:graphic>
           <a:graphicData uri="http://schemas.openxmlformats.org/drawingml/2006/table">
@@ -5370,7 +5537,7 @@
                 </a:tc>
                 <a:extLst>
                   <a:ext uri="{0D108BD9-81ED-4DB2-BD59-A6C34878D82A}">
-                    <a16:rowId xmlns:a16="http://schemas.microsoft.com/office/drawing/2014/main" val="10005"/>
+                    <a16:rowId xmlns:a16="http://schemas.microsoft.com/office/drawing/2014/main" val="1899158739"/>
                   </a:ext>
                 </a:extLst>
               </a:tr>
@@ -5814,7 +5981,7 @@
                 </a:tc>
                 <a:extLst>
                   <a:ext uri="{0D108BD9-81ED-4DB2-BD59-A6C34878D82A}">
-                    <a16:rowId xmlns:a16="http://schemas.microsoft.com/office/drawing/2014/main" val="10005"/>
+                    <a16:rowId xmlns:a16="http://schemas.microsoft.com/office/drawing/2014/main" val="3567349195"/>
                   </a:ext>
                 </a:extLst>
               </a:tr>
@@ -6465,7 +6632,29 @@
                 <a:ea typeface="Meiryo" pitchFamily="34" charset="-122"/>
                 <a:cs typeface="Meiryo" pitchFamily="34" charset="-120"/>
               </a:rPr>
-              <a:t>80代・要介護4・ご本人</a:t>
+              <a:t>80代・要介護</a:t>
+            </a:r>
+            <a:r>
+              <a:rPr lang="ja-JP" altLang="en-US" sz="1200" dirty="0">
+                <a:solidFill>
+                  <a:srgbClr val="566573"/>
+                </a:solidFill>
+                <a:latin typeface="Meiryo" pitchFamily="34" charset="0"/>
+                <a:ea typeface="Meiryo" pitchFamily="34" charset="-122"/>
+                <a:cs typeface="Meiryo" pitchFamily="34" charset="-120"/>
+              </a:rPr>
+              <a:t>５</a:t>
+            </a:r>
+            <a:r>
+              <a:rPr lang="en-US" sz="1200" dirty="0">
+                <a:solidFill>
+                  <a:srgbClr val="566573"/>
+                </a:solidFill>
+                <a:latin typeface="Meiryo" pitchFamily="34" charset="0"/>
+                <a:ea typeface="Meiryo" pitchFamily="34" charset="-122"/>
+                <a:cs typeface="Meiryo" pitchFamily="34" charset="-120"/>
+              </a:rPr>
+              <a:t>・ご本人</a:t>
             </a:r>
             <a:endParaRPr lang="en-US" sz="1200" dirty="0"/>
           </a:p>
@@ -6572,6 +6761,17 @@
               <a:buNone/>
             </a:pPr>
             <a:r>
+              <a:rPr lang="ja-JP" altLang="en-US" sz="1200" dirty="0">
+                <a:solidFill>
+                  <a:srgbClr val="566573"/>
+                </a:solidFill>
+                <a:latin typeface="Meiryo" pitchFamily="34" charset="0"/>
+                <a:ea typeface="Meiryo" pitchFamily="34" charset="-122"/>
+                <a:cs typeface="Meiryo" pitchFamily="34" charset="-120"/>
+              </a:rPr>
+              <a:t>７</a:t>
+            </a:r>
+            <a:r>
               <a:rPr lang="en-US" sz="1200" dirty="0">
                 <a:solidFill>
                   <a:srgbClr val="566573"/>
@@ -6580,7 +6780,7 @@
                 <a:ea typeface="Meiryo" pitchFamily="34" charset="-122"/>
                 <a:cs typeface="Meiryo" pitchFamily="34" charset="-120"/>
               </a:rPr>
-              <a:t>60代・ご家族（介護者）</a:t>
+              <a:t>0代・ご家族（介護者）</a:t>
             </a:r>
             <a:endParaRPr lang="en-US" sz="1200" dirty="0"/>
           </a:p>
@@ -7497,96 +7697,6 @@
       </p:sp>
       <p:sp>
         <p:nvSpPr>
-          <p:cNvPr id="11" name="Shape 9"/>
-          <p:cNvSpPr/>
-          <p:nvPr/>
-        </p:nvSpPr>
-        <p:spPr>
-          <a:xfrm>
-            <a:off x="9521647" y="1746504"/>
-            <a:ext cx="2103120" cy="2103120"/>
-          </a:xfrm>
-          <a:prstGeom prst="roundRect">
-            <a:avLst>
-              <a:gd name="adj" fmla="val 2609"/>
-            </a:avLst>
-          </a:prstGeom>
-          <a:solidFill>
-            <a:srgbClr val="1A5276"/>
-          </a:solidFill>
-          <a:ln w="19050">
-            <a:solidFill>
-              <a:srgbClr val="BDC3C7"/>
-            </a:solidFill>
-            <a:prstDash val="dash"/>
-          </a:ln>
-        </p:spPr>
-        <p:txBody>
-          <a:bodyPr/>
-          <a:lstStyle/>
-          <a:p>
-            <a:endParaRPr lang="ja-JP" altLang="en-US"/>
-          </a:p>
-        </p:txBody>
-      </p:sp>
-      <p:sp>
-        <p:nvSpPr>
-          <p:cNvPr id="12" name="Text 10"/>
-          <p:cNvSpPr txBox="1"/>
-          <p:nvPr/>
-        </p:nvSpPr>
-        <p:spPr>
-          <a:xfrm>
-            <a:off x="9521647" y="1746504"/>
-            <a:ext cx="2103120" cy="2103120"/>
-          </a:xfrm>
-          <a:prstGeom prst="rect">
-            <a:avLst/>
-          </a:prstGeom>
-          <a:noFill/>
-          <a:ln/>
-        </p:spPr>
-        <p:txBody>
-          <a:bodyPr wrap="square" lIns="0" tIns="0" rIns="0" bIns="0" rtlCol="0" anchor="ctr"/>
-          <a:lstStyle/>
-          <a:p>
-            <a:pPr marL="0" indent="0" algn="ctr">
-              <a:buNone/>
-            </a:pPr>
-            <a:r>
-              <a:rPr lang="en-US" sz="1100" dirty="0">
-                <a:solidFill>
-                  <a:srgbClr val="BDC3C7"/>
-                </a:solidFill>
-                <a:latin typeface="Meiryo" pitchFamily="34" charset="0"/>
-                <a:ea typeface="Meiryo" pitchFamily="34" charset="-122"/>
-                <a:cs typeface="Meiryo" pitchFamily="34" charset="-120"/>
-              </a:rPr>
-              <a:t>QRコード</a:t>
-            </a:r>
-            <a:endParaRPr lang="en-US" sz="1100" dirty="0"/>
-          </a:p>
-          <a:p>
-            <a:pPr marL="0" indent="0" algn="ctr">
-              <a:buNone/>
-            </a:pPr>
-            <a:r>
-              <a:rPr lang="en-US" sz="1100" dirty="0">
-                <a:solidFill>
-                  <a:srgbClr val="BDC3C7"/>
-                </a:solidFill>
-                <a:latin typeface="Meiryo" pitchFamily="34" charset="0"/>
-                <a:ea typeface="Meiryo" pitchFamily="34" charset="-122"/>
-                <a:cs typeface="Meiryo" pitchFamily="34" charset="-120"/>
-              </a:rPr>
-              <a:t>（お問い合わせ用）</a:t>
-            </a:r>
-            <a:endParaRPr lang="en-US" sz="1100" dirty="0"/>
-          </a:p>
-        </p:txBody>
-      </p:sp>
-      <p:sp>
-        <p:nvSpPr>
           <p:cNvPr id="13" name="Shape 11"/>
           <p:cNvSpPr/>
           <p:nvPr/>
@@ -8367,7 +8477,7 @@
               <a:t>結果として「週1回の清拭のみ」「</a:t>
             </a:r>
             <a:r>
-              <a:rPr lang="en-US" sz="1500" dirty="0" err="1">
+              <a:rPr lang="ja-JP" altLang="en-US" sz="1500" dirty="0">
                 <a:solidFill>
                   <a:srgbClr val="1C2833"/>
                 </a:solidFill>
@@ -8375,19 +8485,16 @@
                 <a:ea typeface="Meiryo" pitchFamily="34" charset="-122"/>
                 <a:cs typeface="Meiryo" pitchFamily="34" charset="-120"/>
               </a:rPr>
-              <a:t>数か月入浴なし」という状態が生まれます</a:t>
-            </a:r>
-            <a:r>
-              <a:rPr lang="en-US" sz="1500" dirty="0">
-                <a:solidFill>
-                  <a:srgbClr val="1C2833"/>
-                </a:solidFill>
-                <a:latin typeface="Meiryo" pitchFamily="34" charset="0"/>
-                <a:ea typeface="Meiryo" pitchFamily="34" charset="-122"/>
-                <a:cs typeface="Meiryo" pitchFamily="34" charset="-120"/>
-              </a:rPr>
-              <a:t>。</a:t>
-            </a:r>
+              <a:t>数か月入浴なし」という状態が生まれます。</a:t>
+            </a:r>
+            <a:endParaRPr lang="en-US" sz="1500" dirty="0">
+              <a:solidFill>
+                <a:srgbClr val="1C2833"/>
+              </a:solidFill>
+              <a:latin typeface="Meiryo" pitchFamily="34" charset="0"/>
+              <a:ea typeface="Meiryo" pitchFamily="34" charset="-122"/>
+              <a:cs typeface="Meiryo" pitchFamily="34" charset="-120"/>
+            </a:endParaRPr>
           </a:p>
           <a:p>
             <a:pPr marL="0" indent="0">
@@ -8397,7 +8504,7 @@
               <a:buNone/>
             </a:pPr>
             <a:r>
-              <a:rPr lang="en-US" sz="1500" dirty="0" err="1">
+              <a:rPr lang="ja-JP" altLang="en-US" sz="1500" dirty="0">
                 <a:solidFill>
                   <a:srgbClr val="1C2833"/>
                 </a:solidFill>
@@ -8405,41 +8512,16 @@
                 <a:ea typeface="Meiryo" pitchFamily="34" charset="-122"/>
                 <a:cs typeface="Meiryo" pitchFamily="34" charset="-120"/>
               </a:rPr>
-              <a:t>入浴は</a:t>
-            </a:r>
-            <a:r>
-              <a:rPr lang="en-US" sz="1500" b="1" dirty="0" err="1">
-                <a:solidFill>
-                  <a:srgbClr val="1D9E75"/>
-                </a:solidFill>
-                <a:latin typeface="Meiryo" pitchFamily="34" charset="0"/>
-                <a:ea typeface="Meiryo" pitchFamily="34" charset="-122"/>
-                <a:cs typeface="Meiryo" pitchFamily="34" charset="-120"/>
-              </a:rPr>
-              <a:t>贅沢ではなく、在宅療養を支える医療的・生活的インフラ</a:t>
-            </a:r>
-            <a:r>
-              <a:rPr lang="en-US" sz="1500" dirty="0" err="1">
-                <a:solidFill>
-                  <a:srgbClr val="1C2833"/>
-                </a:solidFill>
-                <a:latin typeface="Meiryo" pitchFamily="34" charset="0"/>
-                <a:ea typeface="Meiryo" pitchFamily="34" charset="-122"/>
-                <a:cs typeface="Meiryo" pitchFamily="34" charset="-120"/>
-              </a:rPr>
-              <a:t>です</a:t>
-            </a:r>
-            <a:r>
-              <a:rPr lang="en-US" sz="1500" dirty="0">
-                <a:solidFill>
-                  <a:srgbClr val="1C2833"/>
-                </a:solidFill>
-                <a:latin typeface="Meiryo" pitchFamily="34" charset="0"/>
-                <a:ea typeface="Meiryo" pitchFamily="34" charset="-122"/>
-                <a:cs typeface="Meiryo" pitchFamily="34" charset="-120"/>
-              </a:rPr>
-              <a:t>。</a:t>
-            </a:r>
+              <a:t>入浴は贅沢ではなく、在宅療養を支える医療的・生活的インフラです。</a:t>
+            </a:r>
+          </a:p>
+          <a:p>
+            <a:pPr marL="0" indent="0">
+              <a:lnSpc>
+                <a:spcPct val="130000"/>
+              </a:lnSpc>
+              <a:buNone/>
+            </a:pPr>
             <a:endParaRPr lang="en-US" sz="1500" dirty="0"/>
           </a:p>
         </p:txBody>
@@ -8721,7 +8803,7 @@
               <a:buNone/>
             </a:pPr>
             <a:r>
-              <a:rPr lang="en-US" sz="1600" dirty="0" err="1">
+              <a:rPr lang="en-US" sz="1600" dirty="0">
                 <a:solidFill>
                   <a:srgbClr val="1C2833"/>
                 </a:solidFill>
@@ -8729,18 +8811,7 @@
                 <a:ea typeface="Meiryo" pitchFamily="34" charset="-122"/>
                 <a:cs typeface="Meiryo" pitchFamily="34" charset="-120"/>
               </a:rPr>
-              <a:t>自宅の浴室を使い、ヘルパーや看護師が清拭・部分浴も含む</a:t>
-            </a:r>
-            <a:r>
-              <a:rPr lang="en-US" sz="1600" dirty="0">
-                <a:solidFill>
-                  <a:srgbClr val="1C2833"/>
-                </a:solidFill>
-                <a:latin typeface="Meiryo" pitchFamily="34" charset="0"/>
-                <a:ea typeface="Meiryo" pitchFamily="34" charset="-122"/>
-                <a:cs typeface="Meiryo" pitchFamily="34" charset="-120"/>
-              </a:rPr>
-              <a:t>。
+              <a:t>自宅の浴室を使い、ヘルパーや看護師が清拭・部分浴も含む。
 </a:t>
             </a:r>
             <a:r>
@@ -9407,7 +9478,7 @@
           <p:nvPr>
             <p:extLst>
               <p:ext uri="{D42A27DB-BD31-4B8C-83A1-F6EECF244321}">
-                <p14:modId xmlns:p14="http://schemas.microsoft.com/office/powerpoint/2010/main" val="1579011935"/>
+                <p14:modId xmlns:p14="http://schemas.microsoft.com/office/powerpoint/2010/main" val="2498659500"/>
               </p:ext>
             </p:extLst>
           </p:nvPr>
@@ -11429,17 +11500,17 @@
                         <a:buNone/>
                       </a:pPr>
                       <a:r>
-                        <a:rPr lang="en-US" sz="1500" b="1" dirty="0">
+                        <a:rPr lang="en-US" altLang="ja-JP" sz="1500" b="1" dirty="0">
                           <a:solidFill>
-                            <a:srgbClr val="BDC3C7"/>
+                            <a:srgbClr val="F39C12"/>
                           </a:solidFill>
                           <a:latin typeface="Meiryo" pitchFamily="34" charset="0"/>
                           <a:ea typeface="Meiryo" pitchFamily="34" charset="-122"/>
                           <a:cs typeface="Meiryo" pitchFamily="34" charset="-120"/>
                         </a:rPr>
-                        <a:t>✕</a:t>
+                        <a:t>△</a:t>
                       </a:r>
-                      <a:endParaRPr lang="en-US" sz="1500" dirty="0">
+                      <a:endParaRPr lang="en-US" altLang="ja-JP" sz="1500" dirty="0">
                         <a:latin typeface="Meiryo" charset="0"/>
                         <a:ea typeface="Meiryo" charset="0"/>
                         <a:cs typeface="Meiryo" charset="0"/>
@@ -11637,17 +11708,17 @@
                         <a:buNone/>
                       </a:pPr>
                       <a:r>
-                        <a:rPr lang="en-US" sz="1500" b="1" dirty="0">
+                        <a:rPr lang="en-US" altLang="ja-JP" sz="1500" b="1" dirty="0">
                           <a:solidFill>
-                            <a:srgbClr val="BDC3C7"/>
+                            <a:srgbClr val="F39C12"/>
                           </a:solidFill>
                           <a:latin typeface="Meiryo" pitchFamily="34" charset="0"/>
                           <a:ea typeface="Meiryo" pitchFamily="34" charset="-122"/>
                           <a:cs typeface="Meiryo" pitchFamily="34" charset="-120"/>
                         </a:rPr>
-                        <a:t>✕</a:t>
+                        <a:t>△</a:t>
                       </a:r>
-                      <a:endParaRPr lang="en-US" sz="1500" dirty="0">
+                      <a:endParaRPr lang="en-US" altLang="ja-JP" sz="1500" dirty="0">
                         <a:latin typeface="Meiryo" charset="0"/>
                         <a:ea typeface="Meiryo" charset="0"/>
                         <a:cs typeface="Meiryo" charset="0"/>
@@ -11702,17 +11773,17 @@
                         <a:buNone/>
                       </a:pPr>
                       <a:r>
-                        <a:rPr lang="en-US" sz="1500" b="1" dirty="0">
+                        <a:rPr lang="en-US" altLang="ja-JP" sz="1500" b="1" dirty="0">
                           <a:solidFill>
-                            <a:srgbClr val="BDC3C7"/>
+                            <a:srgbClr val="F39C12"/>
                           </a:solidFill>
                           <a:latin typeface="Meiryo" pitchFamily="34" charset="0"/>
                           <a:ea typeface="Meiryo" pitchFamily="34" charset="-122"/>
                           <a:cs typeface="Meiryo" pitchFamily="34" charset="-120"/>
                         </a:rPr>
-                        <a:t>✕</a:t>
+                        <a:t>△</a:t>
                       </a:r>
-                      <a:endParaRPr lang="en-US" sz="1500" dirty="0">
+                      <a:endParaRPr lang="en-US" altLang="ja-JP" sz="1500" dirty="0">
                         <a:latin typeface="Meiryo" charset="0"/>
                         <a:ea typeface="Meiryo" charset="0"/>
                         <a:cs typeface="Meiryo" charset="0"/>
@@ -11832,17 +11903,17 @@
                         <a:buNone/>
                       </a:pPr>
                       <a:r>
-                        <a:rPr lang="en-US" sz="1500" b="1" dirty="0">
+                        <a:rPr lang="en-US" altLang="ja-JP" sz="1500" b="1" dirty="0">
                           <a:solidFill>
-                            <a:srgbClr val="BDC3C7"/>
+                            <a:srgbClr val="F39C12"/>
                           </a:solidFill>
                           <a:latin typeface="Meiryo" pitchFamily="34" charset="0"/>
                           <a:ea typeface="Meiryo" pitchFamily="34" charset="-122"/>
                           <a:cs typeface="Meiryo" pitchFamily="34" charset="-120"/>
                         </a:rPr>
-                        <a:t>✕</a:t>
+                        <a:t>△</a:t>
                       </a:r>
-                      <a:endParaRPr lang="en-US" sz="1500" dirty="0">
+                      <a:endParaRPr lang="en-US" altLang="ja-JP" sz="1500" dirty="0">
                         <a:latin typeface="Meiryo" charset="0"/>
                         <a:ea typeface="Meiryo" charset="0"/>
                         <a:cs typeface="Meiryo" charset="0"/>
@@ -12105,17 +12176,17 @@
                         <a:buNone/>
                       </a:pPr>
                       <a:r>
-                        <a:rPr lang="en-US" sz="1500" b="1" dirty="0">
+                        <a:rPr lang="en-US" altLang="ja-JP" sz="1500" b="1" dirty="0">
                           <a:solidFill>
-                            <a:srgbClr val="BDC3C7"/>
+                            <a:srgbClr val="F39C12"/>
                           </a:solidFill>
                           <a:latin typeface="Meiryo" pitchFamily="34" charset="0"/>
                           <a:ea typeface="Meiryo" pitchFamily="34" charset="-122"/>
                           <a:cs typeface="Meiryo" pitchFamily="34" charset="-120"/>
                         </a:rPr>
-                        <a:t>✕</a:t>
+                        <a:t>△</a:t>
                       </a:r>
-                      <a:endParaRPr lang="en-US" sz="1500" dirty="0">
+                      <a:endParaRPr lang="en-US" altLang="ja-JP" sz="1500" dirty="0">
                         <a:latin typeface="Meiryo" charset="0"/>
                         <a:ea typeface="Meiryo" charset="0"/>
                         <a:cs typeface="Meiryo" charset="0"/>
@@ -12170,17 +12241,17 @@
                         <a:buNone/>
                       </a:pPr>
                       <a:r>
-                        <a:rPr lang="en-US" sz="1500" b="1" dirty="0">
+                        <a:rPr lang="en-US" altLang="ja-JP" sz="1500" b="1" dirty="0">
                           <a:solidFill>
-                            <a:srgbClr val="BDC3C7"/>
+                            <a:srgbClr val="F39C12"/>
                           </a:solidFill>
                           <a:latin typeface="Meiryo" pitchFamily="34" charset="0"/>
                           <a:ea typeface="Meiryo" pitchFamily="34" charset="-122"/>
                           <a:cs typeface="Meiryo" pitchFamily="34" charset="-120"/>
                         </a:rPr>
-                        <a:t>✕</a:t>
+                        <a:t>△</a:t>
                       </a:r>
-                      <a:endParaRPr lang="en-US" sz="1500" dirty="0">
+                      <a:endParaRPr lang="en-US" altLang="ja-JP" sz="1500" dirty="0">
                         <a:latin typeface="Meiryo" charset="0"/>
                         <a:ea typeface="Meiryo" charset="0"/>
                         <a:cs typeface="Meiryo" charset="0"/>
@@ -12911,17 +12982,17 @@
                         <a:buNone/>
                       </a:pPr>
                       <a:r>
-                        <a:rPr lang="en-US" sz="1500" b="1" dirty="0">
+                        <a:rPr lang="en-US" altLang="ja-JP" sz="1500" b="1" dirty="0">
                           <a:solidFill>
-                            <a:srgbClr val="F39C12"/>
+                            <a:srgbClr val="1D9E75"/>
                           </a:solidFill>
                           <a:latin typeface="Meiryo" pitchFamily="34" charset="0"/>
                           <a:ea typeface="Meiryo" pitchFamily="34" charset="-122"/>
                           <a:cs typeface="Meiryo" pitchFamily="34" charset="-120"/>
                         </a:rPr>
-                        <a:t>△</a:t>
+                        <a:t>✓</a:t>
                       </a:r>
-                      <a:endParaRPr lang="en-US" sz="1500" dirty="0">
+                      <a:endParaRPr lang="en-US" altLang="ja-JP" sz="1500" dirty="0">
                         <a:latin typeface="Meiryo" charset="0"/>
                         <a:ea typeface="Meiryo" charset="0"/>
                         <a:cs typeface="Meiryo" charset="0"/>
@@ -12976,17 +13047,17 @@
                         <a:buNone/>
                       </a:pPr>
                       <a:r>
-                        <a:rPr lang="en-US" sz="1500" b="1" dirty="0">
+                        <a:rPr lang="en-US" altLang="ja-JP" sz="1500" b="1" dirty="0">
                           <a:solidFill>
-                            <a:srgbClr val="BDC3C7"/>
+                            <a:srgbClr val="1D9E75"/>
                           </a:solidFill>
                           <a:latin typeface="Meiryo" pitchFamily="34" charset="0"/>
                           <a:ea typeface="Meiryo" pitchFamily="34" charset="-122"/>
                           <a:cs typeface="Meiryo" pitchFamily="34" charset="-120"/>
                         </a:rPr>
-                        <a:t>✕</a:t>
+                        <a:t>✓</a:t>
                       </a:r>
-                      <a:endParaRPr lang="en-US" sz="1500" dirty="0">
+                      <a:endParaRPr lang="en-US" altLang="ja-JP" sz="1500" dirty="0">
                         <a:latin typeface="Meiryo" charset="0"/>
                         <a:ea typeface="Meiryo" charset="0"/>
                         <a:cs typeface="Meiryo" charset="0"/>
@@ -13041,17 +13112,17 @@
                         <a:buNone/>
                       </a:pPr>
                       <a:r>
-                        <a:rPr lang="en-US" sz="1500" b="1" dirty="0">
+                        <a:rPr lang="en-US" altLang="ja-JP" sz="1500" b="1" dirty="0">
                           <a:solidFill>
-                            <a:srgbClr val="BDC3C7"/>
+                            <a:srgbClr val="1D9E75"/>
                           </a:solidFill>
                           <a:latin typeface="Meiryo" pitchFamily="34" charset="0"/>
                           <a:ea typeface="Meiryo" pitchFamily="34" charset="-122"/>
                           <a:cs typeface="Meiryo" pitchFamily="34" charset="-120"/>
                         </a:rPr>
-                        <a:t>✕</a:t>
+                        <a:t>✓</a:t>
                       </a:r>
-                      <a:endParaRPr lang="en-US" sz="1500" dirty="0">
+                      <a:endParaRPr lang="en-US" altLang="ja-JP" sz="1500" dirty="0">
                         <a:latin typeface="Meiryo" charset="0"/>
                         <a:ea typeface="Meiryo" charset="0"/>
                         <a:cs typeface="Meiryo" charset="0"/>
